--- a/documents/slide bao cao.pptx
+++ b/documents/slide bao cao.pptx
@@ -5,7 +5,7 @@
     <p:sldMasterId id="2147483648" r:id="rId1"/>
   </p:sldMasterIdLst>
   <p:notesMasterIdLst>
-    <p:notesMasterId r:id="rId22"/>
+    <p:notesMasterId r:id="rId25"/>
   </p:notesMasterIdLst>
   <p:sldIdLst>
     <p:sldId id="256" r:id="rId2"/>
@@ -20,14 +20,17 @@
     <p:sldId id="276" r:id="rId11"/>
     <p:sldId id="264" r:id="rId12"/>
     <p:sldId id="265" r:id="rId13"/>
-    <p:sldId id="266" r:id="rId14"/>
-    <p:sldId id="260" r:id="rId15"/>
-    <p:sldId id="268" r:id="rId16"/>
-    <p:sldId id="269" r:id="rId17"/>
-    <p:sldId id="270" r:id="rId18"/>
-    <p:sldId id="271" r:id="rId19"/>
-    <p:sldId id="272" r:id="rId20"/>
-    <p:sldId id="273" r:id="rId21"/>
+    <p:sldId id="277" r:id="rId14"/>
+    <p:sldId id="279" r:id="rId15"/>
+    <p:sldId id="278" r:id="rId16"/>
+    <p:sldId id="266" r:id="rId17"/>
+    <p:sldId id="260" r:id="rId18"/>
+    <p:sldId id="268" r:id="rId19"/>
+    <p:sldId id="269" r:id="rId20"/>
+    <p:sldId id="270" r:id="rId21"/>
+    <p:sldId id="271" r:id="rId22"/>
+    <p:sldId id="272" r:id="rId23"/>
+    <p:sldId id="273" r:id="rId24"/>
   </p:sldIdLst>
   <p:sldSz cx="12192000" cy="6858000"/>
   <p:notesSz cx="6858000" cy="9144000"/>
@@ -216,7 +219,7 @@
           <a:p>
             <a:fld id="{AEB1C5C1-54CE-4892-A53C-9115FF4B63AE}" type="datetimeFigureOut">
               <a:rPr lang="en-US" smtClean="0"/>
-              <a:t>6/9/2025</a:t>
+              <a:t>6/10/2025</a:t>
             </a:fld>
             <a:endParaRPr lang="en-US"/>
           </a:p>
@@ -614,9 +617,63 @@
           <a:bodyPr/>
           <a:lstStyle/>
           <a:p>
-            <a:r>
-              <a:rPr lang="en-US"/>
-              <a:t>LLM</a:t>
+            <a:pPr marL="285750" indent="-285750">
+              <a:buFontTx/>
+              <a:buChar char="-"/>
+            </a:pPr>
+            <a:r>
+              <a:rPr lang="en-US"/>
+              <a:t>LLM là gì?</a:t>
+            </a:r>
+          </a:p>
+          <a:p>
+            <a:pPr marL="285750" indent="-285750">
+              <a:buFontTx/>
+              <a:buChar char="-"/>
+            </a:pPr>
+            <a:r>
+              <a:rPr lang="en-US"/>
+              <a:t>Tại sao lại gọi là LLM</a:t>
+            </a:r>
+          </a:p>
+          <a:p>
+            <a:pPr marL="285750" indent="-285750">
+              <a:buFontTx/>
+              <a:buChar char="-"/>
+            </a:pPr>
+            <a:r>
+              <a:rPr lang="en-US"/>
+              <a:t>Dựa trên nguyên lý? (xây dựng dựa trên transformer làm mô hình cơ sở, tuy nhiên thì có chút biến đổi)</a:t>
+            </a:r>
+          </a:p>
+          <a:p>
+            <a:pPr marL="285750" indent="-285750">
+              <a:buFontTx/>
+              <a:buChar char="-"/>
+            </a:pPr>
+            <a:r>
+              <a:rPr lang="en-US"/>
+              <a:t>Nó có thể làm gì? (sinh văn bản, xử lý âm thanh, video…)</a:t>
+            </a:r>
+          </a:p>
+          <a:p>
+            <a:pPr marL="285750" indent="-285750">
+              <a:buFontTx/>
+              <a:buChar char="-"/>
+            </a:pPr>
+            <a:r>
+              <a:rPr lang="en-US"/>
+              <a:t>Kể ra một vài thông số (LLM có thể lên tới hang tỉ tham số, chi phí huấn luyện khổng lồ, kiến trúc phức tạp)</a:t>
+            </a:r>
+          </a:p>
+          <a:p>
+            <a:pPr marL="285750" indent="-285750">
+              <a:buFontTx/>
+              <a:buChar char="-"/>
+            </a:pPr>
+            <a:r>
+              <a:rPr lang="en-US"/>
+              <a:t>chèn hình LLM</a:t>
             </a:r>
           </a:p>
         </p:txBody>
@@ -701,10 +758,57 @@
           <a:bodyPr/>
           <a:lstStyle/>
           <a:p>
-            <a:r>
-              <a:rPr lang="en-US"/>
-              <a:t>Word embedding</a:t>
-            </a:r>
+            <a:pPr marL="285750" indent="-285750">
+              <a:buFontTx/>
+              <a:buChar char="-"/>
+            </a:pPr>
+            <a:r>
+              <a:rPr lang="en-US"/>
+              <a:t>Hệ thống RAG là gì?</a:t>
+            </a:r>
+          </a:p>
+          <a:p>
+            <a:pPr marL="285750" indent="-285750">
+              <a:buFontTx/>
+              <a:buChar char="-"/>
+            </a:pPr>
+            <a:r>
+              <a:rPr lang="en-US"/>
+              <a:t>Tác dụng?</a:t>
+            </a:r>
+          </a:p>
+          <a:p>
+            <a:pPr marL="285750" indent="-285750">
+              <a:buFontTx/>
+              <a:buChar char="-"/>
+            </a:pPr>
+            <a:r>
+              <a:rPr lang="en-US"/>
+              <a:t>LLM được sử dụng trong hệ thống rag như thế nào?</a:t>
+            </a:r>
+          </a:p>
+          <a:p>
+            <a:pPr marL="285750" indent="-285750">
+              <a:buFontTx/>
+              <a:buChar char="-"/>
+            </a:pPr>
+            <a:r>
+              <a:rPr lang="en-US"/>
+              <a:t>Sử dụng LLM và hệ thống rag để xây dựng chatbot hõ trợ học lịch sử việt nam</a:t>
+            </a:r>
+          </a:p>
+          <a:p>
+            <a:pPr marL="285750" indent="-285750">
+              <a:buFontTx/>
+              <a:buChar char="-"/>
+            </a:pPr>
+            <a:r>
+              <a:rPr lang="en-US"/>
+              <a:t> (tại sao 2 cái đó lại có thể sử dụng để xây dung chatbot? Lợi tích so với các phương pháp truyền thống)</a:t>
+            </a:r>
+          </a:p>
+          <a:p>
+            <a:endParaRPr lang="en-US"/>
           </a:p>
         </p:txBody>
       </p:sp>
@@ -725,7 +829,410 @@
           <a:p>
             <a:fld id="{864AE1F8-3712-49A6-BC7C-273E12ADCFAB}" type="slidenum">
               <a:rPr lang="en-US" smtClean="0"/>
-              <a:t>14</a:t>
+              <a:t>5</a:t>
+            </a:fld>
+            <a:endParaRPr lang="en-US"/>
+          </a:p>
+        </p:txBody>
+      </p:sp>
+    </p:spTree>
+    <p:extLst>
+      <p:ext uri="{BB962C8B-B14F-4D97-AF65-F5344CB8AC3E}">
+        <p14:creationId xmlns:p14="http://schemas.microsoft.com/office/powerpoint/2010/main" val="1236781221"/>
+      </p:ext>
+    </p:extLst>
+  </p:cSld>
+  <p:clrMapOvr>
+    <a:masterClrMapping/>
+  </p:clrMapOvr>
+</p:notes>
+</file>
+
+<file path=ppt/notesSlides/notesSlide4.xml><?xml version="1.0" encoding="utf-8"?>
+<p:notes xmlns:a="http://schemas.openxmlformats.org/drawingml/2006/main" xmlns:r="http://schemas.openxmlformats.org/officeDocument/2006/relationships" xmlns:p="http://schemas.openxmlformats.org/presentationml/2006/main">
+  <p:cSld>
+    <p:spTree>
+      <p:nvGrpSpPr>
+        <p:cNvPr id="1" name=""/>
+        <p:cNvGrpSpPr/>
+        <p:nvPr/>
+      </p:nvGrpSpPr>
+      <p:grpSpPr>
+        <a:xfrm>
+          <a:off x="0" y="0"/>
+          <a:ext cx="0" cy="0"/>
+          <a:chOff x="0" y="0"/>
+          <a:chExt cx="0" cy="0"/>
+        </a:xfrm>
+      </p:grpSpPr>
+      <p:sp>
+        <p:nvSpPr>
+          <p:cNvPr id="2" name="Slide Image Placeholder 1"/>
+          <p:cNvSpPr>
+            <a:spLocks noGrp="1" noRot="1" noChangeAspect="1"/>
+          </p:cNvSpPr>
+          <p:nvPr>
+            <p:ph type="sldImg"/>
+          </p:nvPr>
+        </p:nvSpPr>
+        <p:spPr/>
+      </p:sp>
+      <p:sp>
+        <p:nvSpPr>
+          <p:cNvPr id="3" name="Notes Placeholder 2"/>
+          <p:cNvSpPr>
+            <a:spLocks noGrp="1"/>
+          </p:cNvSpPr>
+          <p:nvPr>
+            <p:ph type="body" idx="1"/>
+          </p:nvPr>
+        </p:nvSpPr>
+        <p:spPr/>
+        <p:txBody>
+          <a:bodyPr/>
+          <a:lstStyle/>
+          <a:p>
+            <a:pPr marL="285750" indent="-285750">
+              <a:buFontTx/>
+              <a:buChar char="-"/>
+            </a:pPr>
+            <a:r>
+              <a:rPr lang="en-US"/>
+              <a:t>Phương pháp đề xuất</a:t>
+            </a:r>
+          </a:p>
+          <a:p>
+            <a:pPr marL="285750" indent="-285750">
+              <a:buFontTx/>
+              <a:buChar char="-"/>
+            </a:pPr>
+            <a:r>
+              <a:rPr lang="en-US"/>
+              <a:t>Chèn hình, miêu tả chi tiết phương pháp đề xuất</a:t>
+            </a:r>
+          </a:p>
+          <a:p>
+            <a:pPr marL="0" indent="0">
+              <a:buFontTx/>
+              <a:buNone/>
+            </a:pPr>
+            <a:endParaRPr lang="en-US"/>
+          </a:p>
+        </p:txBody>
+      </p:sp>
+      <p:sp>
+        <p:nvSpPr>
+          <p:cNvPr id="4" name="Slide Number Placeholder 3"/>
+          <p:cNvSpPr>
+            <a:spLocks noGrp="1"/>
+          </p:cNvSpPr>
+          <p:nvPr>
+            <p:ph type="sldNum" sz="quarter" idx="5"/>
+          </p:nvPr>
+        </p:nvSpPr>
+        <p:spPr/>
+        <p:txBody>
+          <a:bodyPr/>
+          <a:lstStyle/>
+          <a:p>
+            <a:fld id="{864AE1F8-3712-49A6-BC7C-273E12ADCFAB}" type="slidenum">
+              <a:rPr lang="en-US" smtClean="0"/>
+              <a:t>8</a:t>
+            </a:fld>
+            <a:endParaRPr lang="en-US"/>
+          </a:p>
+        </p:txBody>
+      </p:sp>
+    </p:spTree>
+    <p:extLst>
+      <p:ext uri="{BB962C8B-B14F-4D97-AF65-F5344CB8AC3E}">
+        <p14:creationId xmlns:p14="http://schemas.microsoft.com/office/powerpoint/2010/main" val="2168959669"/>
+      </p:ext>
+    </p:extLst>
+  </p:cSld>
+  <p:clrMapOvr>
+    <a:masterClrMapping/>
+  </p:clrMapOvr>
+</p:notes>
+</file>
+
+<file path=ppt/notesSlides/notesSlide5.xml><?xml version="1.0" encoding="utf-8"?>
+<p:notes xmlns:a="http://schemas.openxmlformats.org/drawingml/2006/main" xmlns:r="http://schemas.openxmlformats.org/officeDocument/2006/relationships" xmlns:p="http://schemas.openxmlformats.org/presentationml/2006/main">
+  <p:cSld>
+    <p:spTree>
+      <p:nvGrpSpPr>
+        <p:cNvPr id="1" name=""/>
+        <p:cNvGrpSpPr/>
+        <p:nvPr/>
+      </p:nvGrpSpPr>
+      <p:grpSpPr>
+        <a:xfrm>
+          <a:off x="0" y="0"/>
+          <a:ext cx="0" cy="0"/>
+          <a:chOff x="0" y="0"/>
+          <a:chExt cx="0" cy="0"/>
+        </a:xfrm>
+      </p:grpSpPr>
+      <p:sp>
+        <p:nvSpPr>
+          <p:cNvPr id="2" name="Slide Image Placeholder 1"/>
+          <p:cNvSpPr>
+            <a:spLocks noGrp="1" noRot="1" noChangeAspect="1"/>
+          </p:cNvSpPr>
+          <p:nvPr>
+            <p:ph type="sldImg"/>
+          </p:nvPr>
+        </p:nvSpPr>
+        <p:spPr/>
+      </p:sp>
+      <p:sp>
+        <p:nvSpPr>
+          <p:cNvPr id="3" name="Notes Placeholder 2"/>
+          <p:cNvSpPr>
+            <a:spLocks noGrp="1"/>
+          </p:cNvSpPr>
+          <p:nvPr>
+            <p:ph type="body" idx="1"/>
+          </p:nvPr>
+        </p:nvSpPr>
+        <p:spPr/>
+        <p:txBody>
+          <a:bodyPr/>
+          <a:lstStyle/>
+          <a:p>
+            <a:pPr marL="0" marR="0" lvl="0" indent="0" algn="l" defTabSz="914400" rtl="0" eaLnBrk="1" fontAlgn="auto" latinLnBrk="0" hangingPunct="1">
+              <a:lnSpc>
+                <a:spcPct val="100000"/>
+              </a:lnSpc>
+              <a:spcBef>
+                <a:spcPts val="0"/>
+              </a:spcBef>
+              <a:spcAft>
+                <a:spcPts val="0"/>
+              </a:spcAft>
+              <a:buClrTx/>
+              <a:buSzTx/>
+              <a:buFontTx/>
+              <a:buNone/>
+              <a:tabLst/>
+              <a:defRPr/>
+            </a:pPr>
+            <a:r>
+              <a:rPr lang="en-US"/>
+              <a:t>Hệ thống rag đề xuất</a:t>
+            </a:r>
+          </a:p>
+          <a:p>
+            <a:endParaRPr lang="en-US"/>
+          </a:p>
+        </p:txBody>
+      </p:sp>
+      <p:sp>
+        <p:nvSpPr>
+          <p:cNvPr id="4" name="Slide Number Placeholder 3"/>
+          <p:cNvSpPr>
+            <a:spLocks noGrp="1"/>
+          </p:cNvSpPr>
+          <p:nvPr>
+            <p:ph type="sldNum" sz="quarter" idx="5"/>
+          </p:nvPr>
+        </p:nvSpPr>
+        <p:spPr/>
+        <p:txBody>
+          <a:bodyPr/>
+          <a:lstStyle/>
+          <a:p>
+            <a:fld id="{864AE1F8-3712-49A6-BC7C-273E12ADCFAB}" type="slidenum">
+              <a:rPr lang="en-US" smtClean="0"/>
+              <a:t>9</a:t>
+            </a:fld>
+            <a:endParaRPr lang="en-US"/>
+          </a:p>
+        </p:txBody>
+      </p:sp>
+    </p:spTree>
+    <p:extLst>
+      <p:ext uri="{BB962C8B-B14F-4D97-AF65-F5344CB8AC3E}">
+        <p14:creationId xmlns:p14="http://schemas.microsoft.com/office/powerpoint/2010/main" val="2689238879"/>
+      </p:ext>
+    </p:extLst>
+  </p:cSld>
+  <p:clrMapOvr>
+    <a:masterClrMapping/>
+  </p:clrMapOvr>
+</p:notes>
+</file>
+
+<file path=ppt/notesSlides/notesSlide6.xml><?xml version="1.0" encoding="utf-8"?>
+<p:notes xmlns:a="http://schemas.openxmlformats.org/drawingml/2006/main" xmlns:r="http://schemas.openxmlformats.org/officeDocument/2006/relationships" xmlns:p="http://schemas.openxmlformats.org/presentationml/2006/main">
+  <p:cSld>
+    <p:spTree>
+      <p:nvGrpSpPr>
+        <p:cNvPr id="1" name=""/>
+        <p:cNvGrpSpPr/>
+        <p:nvPr/>
+      </p:nvGrpSpPr>
+      <p:grpSpPr>
+        <a:xfrm>
+          <a:off x="0" y="0"/>
+          <a:ext cx="0" cy="0"/>
+          <a:chOff x="0" y="0"/>
+          <a:chExt cx="0" cy="0"/>
+        </a:xfrm>
+      </p:grpSpPr>
+      <p:sp>
+        <p:nvSpPr>
+          <p:cNvPr id="2" name="Slide Image Placeholder 1"/>
+          <p:cNvSpPr>
+            <a:spLocks noGrp="1" noRot="1" noChangeAspect="1"/>
+          </p:cNvSpPr>
+          <p:nvPr>
+            <p:ph type="sldImg"/>
+          </p:nvPr>
+        </p:nvSpPr>
+        <p:spPr/>
+      </p:sp>
+      <p:sp>
+        <p:nvSpPr>
+          <p:cNvPr id="3" name="Notes Placeholder 2"/>
+          <p:cNvSpPr>
+            <a:spLocks noGrp="1"/>
+          </p:cNvSpPr>
+          <p:nvPr>
+            <p:ph type="body" idx="1"/>
+          </p:nvPr>
+        </p:nvSpPr>
+        <p:spPr/>
+        <p:txBody>
+          <a:bodyPr/>
+          <a:lstStyle/>
+          <a:p>
+            <a:pPr marL="285750" indent="-285750">
+              <a:buFontTx/>
+              <a:buChar char="-"/>
+            </a:pPr>
+            <a:r>
+              <a:rPr lang="en-US"/>
+              <a:t>Thu thập và tiền xử lý data</a:t>
+            </a:r>
+          </a:p>
+          <a:p>
+            <a:pPr marL="285750" indent="-285750">
+              <a:buFontTx/>
+              <a:buChar char="-"/>
+            </a:pPr>
+            <a:endParaRPr lang="en-US"/>
+          </a:p>
+          <a:p>
+            <a:endParaRPr lang="en-US"/>
+          </a:p>
+        </p:txBody>
+      </p:sp>
+      <p:sp>
+        <p:nvSpPr>
+          <p:cNvPr id="4" name="Slide Number Placeholder 3"/>
+          <p:cNvSpPr>
+            <a:spLocks noGrp="1"/>
+          </p:cNvSpPr>
+          <p:nvPr>
+            <p:ph type="sldNum" sz="quarter" idx="5"/>
+          </p:nvPr>
+        </p:nvSpPr>
+        <p:spPr/>
+        <p:txBody>
+          <a:bodyPr/>
+          <a:lstStyle/>
+          <a:p>
+            <a:fld id="{864AE1F8-3712-49A6-BC7C-273E12ADCFAB}" type="slidenum">
+              <a:rPr lang="en-US" smtClean="0"/>
+              <a:t>11</a:t>
+            </a:fld>
+            <a:endParaRPr lang="en-US"/>
+          </a:p>
+        </p:txBody>
+      </p:sp>
+    </p:spTree>
+    <p:extLst>
+      <p:ext uri="{BB962C8B-B14F-4D97-AF65-F5344CB8AC3E}">
+        <p14:creationId xmlns:p14="http://schemas.microsoft.com/office/powerpoint/2010/main" val="4011839683"/>
+      </p:ext>
+    </p:extLst>
+  </p:cSld>
+  <p:clrMapOvr>
+    <a:masterClrMapping/>
+  </p:clrMapOvr>
+</p:notes>
+</file>
+
+<file path=ppt/notesSlides/notesSlide7.xml><?xml version="1.0" encoding="utf-8"?>
+<p:notes xmlns:a="http://schemas.openxmlformats.org/drawingml/2006/main" xmlns:r="http://schemas.openxmlformats.org/officeDocument/2006/relationships" xmlns:p="http://schemas.openxmlformats.org/presentationml/2006/main">
+  <p:cSld>
+    <p:spTree>
+      <p:nvGrpSpPr>
+        <p:cNvPr id="1" name=""/>
+        <p:cNvGrpSpPr/>
+        <p:nvPr/>
+      </p:nvGrpSpPr>
+      <p:grpSpPr>
+        <a:xfrm>
+          <a:off x="0" y="0"/>
+          <a:ext cx="0" cy="0"/>
+          <a:chOff x="0" y="0"/>
+          <a:chExt cx="0" cy="0"/>
+        </a:xfrm>
+      </p:grpSpPr>
+      <p:sp>
+        <p:nvSpPr>
+          <p:cNvPr id="2" name="Slide Image Placeholder 1"/>
+          <p:cNvSpPr>
+            <a:spLocks noGrp="1" noRot="1" noChangeAspect="1"/>
+          </p:cNvSpPr>
+          <p:nvPr>
+            <p:ph type="sldImg"/>
+          </p:nvPr>
+        </p:nvSpPr>
+        <p:spPr/>
+      </p:sp>
+      <p:sp>
+        <p:nvSpPr>
+          <p:cNvPr id="3" name="Notes Placeholder 2"/>
+          <p:cNvSpPr>
+            <a:spLocks noGrp="1"/>
+          </p:cNvSpPr>
+          <p:nvPr>
+            <p:ph type="body" idx="1"/>
+          </p:nvPr>
+        </p:nvSpPr>
+        <p:spPr/>
+        <p:txBody>
+          <a:bodyPr/>
+          <a:lstStyle/>
+          <a:p>
+            <a:r>
+              <a:rPr lang="en-US"/>
+              <a:t>Word embedding</a:t>
+            </a:r>
+          </a:p>
+        </p:txBody>
+      </p:sp>
+      <p:sp>
+        <p:nvSpPr>
+          <p:cNvPr id="4" name="Slide Number Placeholder 3"/>
+          <p:cNvSpPr>
+            <a:spLocks noGrp="1"/>
+          </p:cNvSpPr>
+          <p:nvPr>
+            <p:ph type="sldNum" sz="quarter" idx="5"/>
+          </p:nvPr>
+        </p:nvSpPr>
+        <p:spPr/>
+        <p:txBody>
+          <a:bodyPr/>
+          <a:lstStyle/>
+          <a:p>
+            <a:fld id="{864AE1F8-3712-49A6-BC7C-273E12ADCFAB}" type="slidenum">
+              <a:rPr lang="en-US" smtClean="0"/>
+              <a:t>17</a:t>
             </a:fld>
             <a:endParaRPr lang="en-US"/>
           </a:p>
@@ -891,7 +1398,7 @@
           <a:p>
             <a:fld id="{AC66C343-037B-4BB6-A079-7472CF8881D5}" type="datetimeFigureOut">
               <a:rPr lang="en-US" smtClean="0"/>
-              <a:t>6/9/2025</a:t>
+              <a:t>6/10/2025</a:t>
             </a:fld>
             <a:endParaRPr lang="en-US"/>
           </a:p>
@@ -1089,7 +1596,7 @@
           <a:p>
             <a:fld id="{AC66C343-037B-4BB6-A079-7472CF8881D5}" type="datetimeFigureOut">
               <a:rPr lang="en-US" smtClean="0"/>
-              <a:t>6/9/2025</a:t>
+              <a:t>6/10/2025</a:t>
             </a:fld>
             <a:endParaRPr lang="en-US"/>
           </a:p>
@@ -1297,7 +1804,7 @@
           <a:p>
             <a:fld id="{AC66C343-037B-4BB6-A079-7472CF8881D5}" type="datetimeFigureOut">
               <a:rPr lang="en-US" smtClean="0"/>
-              <a:t>6/9/2025</a:t>
+              <a:t>6/10/2025</a:t>
             </a:fld>
             <a:endParaRPr lang="en-US"/>
           </a:p>
@@ -1495,7 +2002,7 @@
           <a:p>
             <a:fld id="{AC66C343-037B-4BB6-A079-7472CF8881D5}" type="datetimeFigureOut">
               <a:rPr lang="en-US" smtClean="0"/>
-              <a:t>6/9/2025</a:t>
+              <a:t>6/10/2025</a:t>
             </a:fld>
             <a:endParaRPr lang="en-US"/>
           </a:p>
@@ -1770,7 +2277,7 @@
           <a:p>
             <a:fld id="{AC66C343-037B-4BB6-A079-7472CF8881D5}" type="datetimeFigureOut">
               <a:rPr lang="en-US" smtClean="0"/>
-              <a:t>6/9/2025</a:t>
+              <a:t>6/10/2025</a:t>
             </a:fld>
             <a:endParaRPr lang="en-US"/>
           </a:p>
@@ -2035,7 +2542,7 @@
           <a:p>
             <a:fld id="{AC66C343-037B-4BB6-A079-7472CF8881D5}" type="datetimeFigureOut">
               <a:rPr lang="en-US" smtClean="0"/>
-              <a:t>6/9/2025</a:t>
+              <a:t>6/10/2025</a:t>
             </a:fld>
             <a:endParaRPr lang="en-US"/>
           </a:p>
@@ -2447,7 +2954,7 @@
           <a:p>
             <a:fld id="{AC66C343-037B-4BB6-A079-7472CF8881D5}" type="datetimeFigureOut">
               <a:rPr lang="en-US" smtClean="0"/>
-              <a:t>6/9/2025</a:t>
+              <a:t>6/10/2025</a:t>
             </a:fld>
             <a:endParaRPr lang="en-US"/>
           </a:p>
@@ -2588,7 +3095,7 @@
           <a:p>
             <a:fld id="{AC66C343-037B-4BB6-A079-7472CF8881D5}" type="datetimeFigureOut">
               <a:rPr lang="en-US" smtClean="0"/>
-              <a:t>6/9/2025</a:t>
+              <a:t>6/10/2025</a:t>
             </a:fld>
             <a:endParaRPr lang="en-US"/>
           </a:p>
@@ -2701,7 +3208,7 @@
           <a:p>
             <a:fld id="{AC66C343-037B-4BB6-A079-7472CF8881D5}" type="datetimeFigureOut">
               <a:rPr lang="en-US" smtClean="0"/>
-              <a:t>6/9/2025</a:t>
+              <a:t>6/10/2025</a:t>
             </a:fld>
             <a:endParaRPr lang="en-US"/>
           </a:p>
@@ -3012,7 +3519,7 @@
           <a:p>
             <a:fld id="{AC66C343-037B-4BB6-A079-7472CF8881D5}" type="datetimeFigureOut">
               <a:rPr lang="en-US" smtClean="0"/>
-              <a:t>6/9/2025</a:t>
+              <a:t>6/10/2025</a:t>
             </a:fld>
             <a:endParaRPr lang="en-US"/>
           </a:p>
@@ -3300,7 +3807,7 @@
           <a:p>
             <a:fld id="{AC66C343-037B-4BB6-A079-7472CF8881D5}" type="datetimeFigureOut">
               <a:rPr lang="en-US" smtClean="0"/>
-              <a:t>6/9/2025</a:t>
+              <a:t>6/10/2025</a:t>
             </a:fld>
             <a:endParaRPr lang="en-US"/>
           </a:p>
@@ -3541,7 +4048,7 @@
           <a:p>
             <a:fld id="{AC66C343-037B-4BB6-A079-7472CF8881D5}" type="datetimeFigureOut">
               <a:rPr lang="en-US" smtClean="0"/>
-              <a:t>6/9/2025</a:t>
+              <a:t>6/10/2025</a:t>
             </a:fld>
             <a:endParaRPr lang="en-US"/>
           </a:p>
@@ -4133,52 +4640,42 @@
           <a:chExt cx="0" cy="0"/>
         </a:xfrm>
       </p:grpSpPr>
-      <p:sp>
-        <p:nvSpPr>
-          <p:cNvPr id="2" name="TextBox 1">
-            <a:extLst>
-              <a:ext uri="{FF2B5EF4-FFF2-40B4-BE49-F238E27FC236}">
-                <a16:creationId xmlns:a16="http://schemas.microsoft.com/office/drawing/2014/main" id="{269FD35E-AD92-3EF5-13C8-5B290E78C311}"/>
-              </a:ext>
-            </a:extLst>
-          </p:cNvPr>
-          <p:cNvSpPr txBox="1"/>
+      <p:pic>
+        <p:nvPicPr>
+          <p:cNvPr id="4" name="Picture 3" descr="A black background with red lines&#10;&#10;AI-generated content may be incorrect.">
+            <a:extLst>
+              <a:ext uri="{FF2B5EF4-FFF2-40B4-BE49-F238E27FC236}">
+                <a16:creationId xmlns:a16="http://schemas.microsoft.com/office/drawing/2014/main" id="{3633D7FF-B793-8A53-A482-E4D42B1F0408}"/>
+              </a:ext>
+            </a:extLst>
+          </p:cNvPr>
+          <p:cNvPicPr>
+            <a:picLocks noChangeAspect="1"/>
+          </p:cNvPicPr>
           <p:nvPr/>
-        </p:nvSpPr>
+        </p:nvPicPr>
+        <p:blipFill>
+          <a:blip r:embed="rId3">
+            <a:extLst>
+              <a:ext uri="{28A0092B-C50C-407E-A947-70E740481C1C}">
+                <a14:useLocalDpi xmlns:a14="http://schemas.microsoft.com/office/drawing/2010/main" val="0"/>
+              </a:ext>
+            </a:extLst>
+          </a:blip>
+          <a:stretch>
+            <a:fillRect/>
+          </a:stretch>
+        </p:blipFill>
         <p:spPr>
           <a:xfrm>
-            <a:off x="2571750" y="2667000"/>
-            <a:ext cx="3031856" cy="646331"/>
+            <a:off x="0" y="165538"/>
+            <a:ext cx="8248773" cy="3263462"/>
           </a:xfrm>
           <a:prstGeom prst="rect">
             <a:avLst/>
           </a:prstGeom>
-          <a:noFill/>
         </p:spPr>
-        <p:txBody>
-          <a:bodyPr wrap="none" rtlCol="0">
-            <a:spAutoFit/>
-          </a:bodyPr>
-          <a:lstStyle/>
-          <a:p>
-            <a:pPr marL="285750" indent="-285750">
-              <a:buFontTx/>
-              <a:buChar char="-"/>
-            </a:pPr>
-            <a:r>
-              <a:rPr lang="en-US"/>
-              <a:t>Thu thập và tiền xử lý data</a:t>
-            </a:r>
-          </a:p>
-          <a:p>
-            <a:pPr marL="285750" indent="-285750">
-              <a:buFontTx/>
-              <a:buChar char="-"/>
-            </a:pPr>
-            <a:endParaRPr lang="en-US"/>
-          </a:p>
-        </p:txBody>
-      </p:sp>
+      </p:pic>
     </p:spTree>
     <p:extLst>
       <p:ext uri="{BB962C8B-B14F-4D97-AF65-F5344CB8AC3E}">
@@ -4331,13 +4828,7 @@
   <p:cSld>
     <p:spTree>
       <p:nvGrpSpPr>
-        <p:cNvPr id="1" name="">
-          <a:extLst>
-            <a:ext uri="{FF2B5EF4-FFF2-40B4-BE49-F238E27FC236}">
-              <a16:creationId xmlns:a16="http://schemas.microsoft.com/office/drawing/2014/main" id="{3C3204C1-5F08-5680-957D-395D6D1D7918}"/>
-            </a:ext>
-          </a:extLst>
-        </p:cNvPr>
+        <p:cNvPr id="1" name=""/>
         <p:cNvGrpSpPr/>
         <p:nvPr/>
       </p:nvGrpSpPr>
@@ -4349,108 +4840,10 @@
           <a:chExt cx="0" cy="0"/>
         </a:xfrm>
       </p:grpSpPr>
-      <p:sp>
-        <p:nvSpPr>
-          <p:cNvPr id="2" name="TextBox 1">
-            <a:extLst>
-              <a:ext uri="{FF2B5EF4-FFF2-40B4-BE49-F238E27FC236}">
-                <a16:creationId xmlns:a16="http://schemas.microsoft.com/office/drawing/2014/main" id="{764BCB41-73FC-CD7C-9D26-CEE00D05CB5B}"/>
-              </a:ext>
-            </a:extLst>
-          </p:cNvPr>
-          <p:cNvSpPr txBox="1"/>
-          <p:nvPr/>
-        </p:nvSpPr>
-        <p:spPr>
-          <a:xfrm>
-            <a:off x="2571750" y="2667000"/>
-            <a:ext cx="5783699" cy="2308324"/>
-          </a:xfrm>
-          <a:prstGeom prst="rect">
-            <a:avLst/>
-          </a:prstGeom>
-          <a:noFill/>
-        </p:spPr>
-        <p:txBody>
-          <a:bodyPr wrap="none" rtlCol="0">
-            <a:spAutoFit/>
-          </a:bodyPr>
-          <a:lstStyle/>
-          <a:p>
-            <a:r>
-              <a:rPr lang="en-US"/>
-              <a:t>embedding data:</a:t>
-            </a:r>
-          </a:p>
-          <a:p>
-            <a:pPr marL="285750" indent="-285750">
-              <a:buFontTx/>
-              <a:buChar char="-"/>
-            </a:pPr>
-            <a:r>
-              <a:rPr lang="en-US"/>
-              <a:t>giới thiệu word embedding là gì?</a:t>
-            </a:r>
-          </a:p>
-          <a:p>
-            <a:pPr marL="285750" indent="-285750">
-              <a:buFontTx/>
-              <a:buChar char="-"/>
-            </a:pPr>
-            <a:r>
-              <a:rPr lang="en-US"/>
-              <a:t>Tại sao, Lợi tích</a:t>
-            </a:r>
-          </a:p>
-          <a:p>
-            <a:pPr marL="285750" indent="-285750">
-              <a:buFontTx/>
-              <a:buChar char="-"/>
-            </a:pPr>
-            <a:endParaRPr lang="en-US"/>
-          </a:p>
-          <a:p>
-            <a:r>
-              <a:rPr lang="en-US"/>
-              <a:t>các mô hình embedding đề xuất:</a:t>
-            </a:r>
-          </a:p>
-          <a:p>
-            <a:pPr marL="285750" indent="-285750">
-              <a:buFontTx/>
-              <a:buChar char="-"/>
-            </a:pPr>
-            <a:r>
-              <a:rPr lang="en-US"/>
-              <a:t>liệt kê các mô hình + kèm thông số</a:t>
-            </a:r>
-          </a:p>
-          <a:p>
-            <a:pPr marL="285750" indent="-285750">
-              <a:buFontTx/>
-              <a:buChar char="-"/>
-            </a:pPr>
-            <a:r>
-              <a:rPr lang="en-US"/>
-              <a:t>Đánh giá hiệu quả tokenization của model embedding</a:t>
-            </a:r>
-          </a:p>
-          <a:p>
-            <a:pPr marL="285750" indent="-285750">
-              <a:buFontTx/>
-              <a:buChar char="-"/>
-            </a:pPr>
-            <a:r>
-              <a:rPr lang="en-US"/>
-              <a:t>Đánh giá hiệu quả embedding data</a:t>
-            </a:r>
-          </a:p>
-        </p:txBody>
-      </p:sp>
     </p:spTree>
     <p:extLst>
       <p:ext uri="{BB962C8B-B14F-4D97-AF65-F5344CB8AC3E}">
-        <p14:creationId xmlns:p14="http://schemas.microsoft.com/office/powerpoint/2010/main" val="661741629"/>
+        <p14:creationId xmlns:p14="http://schemas.microsoft.com/office/powerpoint/2010/main" val="970251462"/>
       </p:ext>
     </p:extLst>
   </p:cSld>
@@ -4477,6 +4870,200 @@
           <a:chExt cx="0" cy="0"/>
         </a:xfrm>
       </p:grpSpPr>
+    </p:spTree>
+    <p:extLst>
+      <p:ext uri="{BB962C8B-B14F-4D97-AF65-F5344CB8AC3E}">
+        <p14:creationId xmlns:p14="http://schemas.microsoft.com/office/powerpoint/2010/main" val="196680871"/>
+      </p:ext>
+    </p:extLst>
+  </p:cSld>
+  <p:clrMapOvr>
+    <a:masterClrMapping/>
+  </p:clrMapOvr>
+</p:sld>
+</file>
+
+<file path=ppt/slides/slide15.xml><?xml version="1.0" encoding="utf-8"?>
+<p:sld xmlns:a="http://schemas.openxmlformats.org/drawingml/2006/main" xmlns:r="http://schemas.openxmlformats.org/officeDocument/2006/relationships" xmlns:p="http://schemas.openxmlformats.org/presentationml/2006/main">
+  <p:cSld>
+    <p:spTree>
+      <p:nvGrpSpPr>
+        <p:cNvPr id="1" name=""/>
+        <p:cNvGrpSpPr/>
+        <p:nvPr/>
+      </p:nvGrpSpPr>
+      <p:grpSpPr>
+        <a:xfrm>
+          <a:off x="0" y="0"/>
+          <a:ext cx="0" cy="0"/>
+          <a:chOff x="0" y="0"/>
+          <a:chExt cx="0" cy="0"/>
+        </a:xfrm>
+      </p:grpSpPr>
+    </p:spTree>
+    <p:extLst>
+      <p:ext uri="{BB962C8B-B14F-4D97-AF65-F5344CB8AC3E}">
+        <p14:creationId xmlns:p14="http://schemas.microsoft.com/office/powerpoint/2010/main" val="3943545070"/>
+      </p:ext>
+    </p:extLst>
+  </p:cSld>
+  <p:clrMapOvr>
+    <a:masterClrMapping/>
+  </p:clrMapOvr>
+</p:sld>
+</file>
+
+<file path=ppt/slides/slide16.xml><?xml version="1.0" encoding="utf-8"?>
+<p:sld xmlns:a="http://schemas.openxmlformats.org/drawingml/2006/main" xmlns:r="http://schemas.openxmlformats.org/officeDocument/2006/relationships" xmlns:p="http://schemas.openxmlformats.org/presentationml/2006/main">
+  <p:cSld>
+    <p:spTree>
+      <p:nvGrpSpPr>
+        <p:cNvPr id="1" name="">
+          <a:extLst>
+            <a:ext uri="{FF2B5EF4-FFF2-40B4-BE49-F238E27FC236}">
+              <a16:creationId xmlns:a16="http://schemas.microsoft.com/office/drawing/2014/main" id="{3C3204C1-5F08-5680-957D-395D6D1D7918}"/>
+            </a:ext>
+          </a:extLst>
+        </p:cNvPr>
+        <p:cNvGrpSpPr/>
+        <p:nvPr/>
+      </p:nvGrpSpPr>
+      <p:grpSpPr>
+        <a:xfrm>
+          <a:off x="0" y="0"/>
+          <a:ext cx="0" cy="0"/>
+          <a:chOff x="0" y="0"/>
+          <a:chExt cx="0" cy="0"/>
+        </a:xfrm>
+      </p:grpSpPr>
+      <p:sp>
+        <p:nvSpPr>
+          <p:cNvPr id="2" name="TextBox 1">
+            <a:extLst>
+              <a:ext uri="{FF2B5EF4-FFF2-40B4-BE49-F238E27FC236}">
+                <a16:creationId xmlns:a16="http://schemas.microsoft.com/office/drawing/2014/main" id="{764BCB41-73FC-CD7C-9D26-CEE00D05CB5B}"/>
+              </a:ext>
+            </a:extLst>
+          </p:cNvPr>
+          <p:cNvSpPr txBox="1"/>
+          <p:nvPr/>
+        </p:nvSpPr>
+        <p:spPr>
+          <a:xfrm>
+            <a:off x="2571750" y="2667000"/>
+            <a:ext cx="5783699" cy="2308324"/>
+          </a:xfrm>
+          <a:prstGeom prst="rect">
+            <a:avLst/>
+          </a:prstGeom>
+          <a:noFill/>
+        </p:spPr>
+        <p:txBody>
+          <a:bodyPr wrap="none" rtlCol="0">
+            <a:spAutoFit/>
+          </a:bodyPr>
+          <a:lstStyle/>
+          <a:p>
+            <a:r>
+              <a:rPr lang="en-US"/>
+              <a:t>embedding data:</a:t>
+            </a:r>
+          </a:p>
+          <a:p>
+            <a:pPr marL="285750" indent="-285750">
+              <a:buFontTx/>
+              <a:buChar char="-"/>
+            </a:pPr>
+            <a:r>
+              <a:rPr lang="en-US"/>
+              <a:t>giới thiệu word embedding là gì?</a:t>
+            </a:r>
+          </a:p>
+          <a:p>
+            <a:pPr marL="285750" indent="-285750">
+              <a:buFontTx/>
+              <a:buChar char="-"/>
+            </a:pPr>
+            <a:r>
+              <a:rPr lang="en-US"/>
+              <a:t>Tại sao, Lợi tích</a:t>
+            </a:r>
+          </a:p>
+          <a:p>
+            <a:pPr marL="285750" indent="-285750">
+              <a:buFontTx/>
+              <a:buChar char="-"/>
+            </a:pPr>
+            <a:endParaRPr lang="en-US"/>
+          </a:p>
+          <a:p>
+            <a:r>
+              <a:rPr lang="en-US"/>
+              <a:t>các mô hình embedding đề xuất:</a:t>
+            </a:r>
+          </a:p>
+          <a:p>
+            <a:pPr marL="285750" indent="-285750">
+              <a:buFontTx/>
+              <a:buChar char="-"/>
+            </a:pPr>
+            <a:r>
+              <a:rPr lang="en-US"/>
+              <a:t>liệt kê các mô hình + kèm thông số</a:t>
+            </a:r>
+          </a:p>
+          <a:p>
+            <a:pPr marL="285750" indent="-285750">
+              <a:buFontTx/>
+              <a:buChar char="-"/>
+            </a:pPr>
+            <a:r>
+              <a:rPr lang="en-US"/>
+              <a:t>Đánh giá hiệu quả tokenization của model embedding</a:t>
+            </a:r>
+          </a:p>
+          <a:p>
+            <a:pPr marL="285750" indent="-285750">
+              <a:buFontTx/>
+              <a:buChar char="-"/>
+            </a:pPr>
+            <a:r>
+              <a:rPr lang="en-US"/>
+              <a:t>Đánh giá hiệu quả embedding data</a:t>
+            </a:r>
+          </a:p>
+        </p:txBody>
+      </p:sp>
+    </p:spTree>
+    <p:extLst>
+      <p:ext uri="{BB962C8B-B14F-4D97-AF65-F5344CB8AC3E}">
+        <p14:creationId xmlns:p14="http://schemas.microsoft.com/office/powerpoint/2010/main" val="661741629"/>
+      </p:ext>
+    </p:extLst>
+  </p:cSld>
+  <p:clrMapOvr>
+    <a:masterClrMapping/>
+  </p:clrMapOvr>
+</p:sld>
+</file>
+
+<file path=ppt/slides/slide17.xml><?xml version="1.0" encoding="utf-8"?>
+<p:sld xmlns:a="http://schemas.openxmlformats.org/drawingml/2006/main" xmlns:r="http://schemas.openxmlformats.org/officeDocument/2006/relationships" xmlns:p="http://schemas.openxmlformats.org/presentationml/2006/main">
+  <p:cSld>
+    <p:spTree>
+      <p:nvGrpSpPr>
+        <p:cNvPr id="1" name=""/>
+        <p:cNvGrpSpPr/>
+        <p:nvPr/>
+      </p:nvGrpSpPr>
+      <p:grpSpPr>
+        <a:xfrm>
+          <a:off x="0" y="0"/>
+          <a:ext cx="0" cy="0"/>
+          <a:chOff x="0" y="0"/>
+          <a:chExt cx="0" cy="0"/>
+        </a:xfrm>
+      </p:grpSpPr>
       <p:pic>
         <p:nvPicPr>
           <p:cNvPr id="3" name="Picture 2" descr="A diagram of words and numbers&#10;&#10;AI-generated content may be incorrect.">
@@ -4580,7 +5167,7 @@
 </p:sld>
 </file>
 
-<file path=ppt/slides/slide15.xml><?xml version="1.0" encoding="utf-8"?>
+<file path=ppt/slides/slide18.xml><?xml version="1.0" encoding="utf-8"?>
 <p:sld xmlns:a="http://schemas.openxmlformats.org/drawingml/2006/main" xmlns:r="http://schemas.openxmlformats.org/officeDocument/2006/relationships" xmlns:p="http://schemas.openxmlformats.org/presentationml/2006/main">
   <p:cSld>
     <p:spTree>
@@ -4678,7 +5265,7 @@
 </p:sld>
 </file>
 
-<file path=ppt/slides/slide16.xml><?xml version="1.0" encoding="utf-8"?>
+<file path=ppt/slides/slide19.xml><?xml version="1.0" encoding="utf-8"?>
 <p:sld xmlns:a="http://schemas.openxmlformats.org/drawingml/2006/main" xmlns:r="http://schemas.openxmlformats.org/officeDocument/2006/relationships" xmlns:p="http://schemas.openxmlformats.org/presentationml/2006/main">
   <p:cSld>
     <p:spTree>
@@ -4746,277 +5333,6 @@
     <p:extLst>
       <p:ext uri="{BB962C8B-B14F-4D97-AF65-F5344CB8AC3E}">
         <p14:creationId xmlns:p14="http://schemas.microsoft.com/office/powerpoint/2010/main" val="1391973288"/>
-      </p:ext>
-    </p:extLst>
-  </p:cSld>
-  <p:clrMapOvr>
-    <a:masterClrMapping/>
-  </p:clrMapOvr>
-</p:sld>
-</file>
-
-<file path=ppt/slides/slide17.xml><?xml version="1.0" encoding="utf-8"?>
-<p:sld xmlns:a="http://schemas.openxmlformats.org/drawingml/2006/main" xmlns:r="http://schemas.openxmlformats.org/officeDocument/2006/relationships" xmlns:p="http://schemas.openxmlformats.org/presentationml/2006/main">
-  <p:cSld>
-    <p:spTree>
-      <p:nvGrpSpPr>
-        <p:cNvPr id="1" name="">
-          <a:extLst>
-            <a:ext uri="{FF2B5EF4-FFF2-40B4-BE49-F238E27FC236}">
-              <a16:creationId xmlns:a16="http://schemas.microsoft.com/office/drawing/2014/main" id="{CE9B43E1-6279-1E12-7C4D-079661226798}"/>
-            </a:ext>
-          </a:extLst>
-        </p:cNvPr>
-        <p:cNvGrpSpPr/>
-        <p:nvPr/>
-      </p:nvGrpSpPr>
-      <p:grpSpPr>
-        <a:xfrm>
-          <a:off x="0" y="0"/>
-          <a:ext cx="0" cy="0"/>
-          <a:chOff x="0" y="0"/>
-          <a:chExt cx="0" cy="0"/>
-        </a:xfrm>
-      </p:grpSpPr>
-      <p:sp>
-        <p:nvSpPr>
-          <p:cNvPr id="2" name="TextBox 1">
-            <a:extLst>
-              <a:ext uri="{FF2B5EF4-FFF2-40B4-BE49-F238E27FC236}">
-                <a16:creationId xmlns:a16="http://schemas.microsoft.com/office/drawing/2014/main" id="{AA4A9EF1-8662-93B5-1E75-CA2964560939}"/>
-              </a:ext>
-            </a:extLst>
-          </p:cNvPr>
-          <p:cNvSpPr txBox="1"/>
-          <p:nvPr/>
-        </p:nvSpPr>
-        <p:spPr>
-          <a:xfrm>
-            <a:off x="2571750" y="2667000"/>
-            <a:ext cx="2916568" cy="369332"/>
-          </a:xfrm>
-          <a:prstGeom prst="rect">
-            <a:avLst/>
-          </a:prstGeom>
-          <a:noFill/>
-        </p:spPr>
-        <p:txBody>
-          <a:bodyPr wrap="none" rtlCol="0">
-            <a:spAutoFit/>
-          </a:bodyPr>
-          <a:lstStyle/>
-          <a:p>
-            <a:r>
-              <a:rPr lang="en-US"/>
-              <a:t>Chức năng chatbot văn bản</a:t>
-            </a:r>
-          </a:p>
-        </p:txBody>
-      </p:sp>
-    </p:spTree>
-    <p:extLst>
-      <p:ext uri="{BB962C8B-B14F-4D97-AF65-F5344CB8AC3E}">
-        <p14:creationId xmlns:p14="http://schemas.microsoft.com/office/powerpoint/2010/main" val="540094921"/>
-      </p:ext>
-    </p:extLst>
-  </p:cSld>
-  <p:clrMapOvr>
-    <a:masterClrMapping/>
-  </p:clrMapOvr>
-</p:sld>
-</file>
-
-<file path=ppt/slides/slide18.xml><?xml version="1.0" encoding="utf-8"?>
-<p:sld xmlns:a="http://schemas.openxmlformats.org/drawingml/2006/main" xmlns:r="http://schemas.openxmlformats.org/officeDocument/2006/relationships" xmlns:p="http://schemas.openxmlformats.org/presentationml/2006/main">
-  <p:cSld>
-    <p:spTree>
-      <p:nvGrpSpPr>
-        <p:cNvPr id="1" name="">
-          <a:extLst>
-            <a:ext uri="{FF2B5EF4-FFF2-40B4-BE49-F238E27FC236}">
-              <a16:creationId xmlns:a16="http://schemas.microsoft.com/office/drawing/2014/main" id="{D730F8F1-2303-4AC4-E099-3DF21445E9D9}"/>
-            </a:ext>
-          </a:extLst>
-        </p:cNvPr>
-        <p:cNvGrpSpPr/>
-        <p:nvPr/>
-      </p:nvGrpSpPr>
-      <p:grpSpPr>
-        <a:xfrm>
-          <a:off x="0" y="0"/>
-          <a:ext cx="0" cy="0"/>
-          <a:chOff x="0" y="0"/>
-          <a:chExt cx="0" cy="0"/>
-        </a:xfrm>
-      </p:grpSpPr>
-      <p:sp>
-        <p:nvSpPr>
-          <p:cNvPr id="2" name="TextBox 1">
-            <a:extLst>
-              <a:ext uri="{FF2B5EF4-FFF2-40B4-BE49-F238E27FC236}">
-                <a16:creationId xmlns:a16="http://schemas.microsoft.com/office/drawing/2014/main" id="{DC579DB5-FB17-6D49-7A4D-2B764E003DC2}"/>
-              </a:ext>
-            </a:extLst>
-          </p:cNvPr>
-          <p:cNvSpPr txBox="1"/>
-          <p:nvPr/>
-        </p:nvSpPr>
-        <p:spPr>
-          <a:xfrm>
-            <a:off x="457200" y="1657350"/>
-            <a:ext cx="10203242" cy="2031325"/>
-          </a:xfrm>
-          <a:prstGeom prst="rect">
-            <a:avLst/>
-          </a:prstGeom>
-          <a:noFill/>
-        </p:spPr>
-        <p:txBody>
-          <a:bodyPr wrap="none" rtlCol="0">
-            <a:spAutoFit/>
-          </a:bodyPr>
-          <a:lstStyle/>
-          <a:p>
-            <a:r>
-              <a:rPr lang="en-US"/>
-              <a:t>Chức năng trò chuyện thời gian thực</a:t>
-            </a:r>
-          </a:p>
-          <a:p>
-            <a:r>
-              <a:rPr lang="en-US"/>
-              <a:t>Giới thiệu về công nghệ TTS-STT</a:t>
-            </a:r>
-          </a:p>
-          <a:p>
-            <a:pPr marL="285750" indent="-285750">
-              <a:buFontTx/>
-              <a:buChar char="-"/>
-            </a:pPr>
-            <a:r>
-              <a:rPr lang="en-US"/>
-              <a:t>giới thiệu</a:t>
-            </a:r>
-          </a:p>
-          <a:p>
-            <a:pPr marL="285750" indent="-285750">
-              <a:buFontTx/>
-              <a:buChar char="-"/>
-            </a:pPr>
-            <a:r>
-              <a:rPr lang="en-US"/>
-              <a:t>Lợi tích</a:t>
-            </a:r>
-          </a:p>
-          <a:p>
-            <a:pPr marL="285750" indent="-285750">
-              <a:buFontTx/>
-              <a:buChar char="-"/>
-            </a:pPr>
-            <a:r>
-              <a:rPr lang="en-US"/>
-              <a:t>Lợi tích khi Ứng dụng công nghệ này vào hệ thống chatbot</a:t>
-            </a:r>
-          </a:p>
-          <a:p>
-            <a:pPr marL="285750" indent="-285750">
-              <a:buFontTx/>
-              <a:buChar char="-"/>
-            </a:pPr>
-            <a:r>
-              <a:rPr lang="en-US"/>
-              <a:t>Phương pháp triển khai hệ thống (miêu tả hệ thống  hoạt động như thế nào? Cách mà văn bản được</a:t>
-            </a:r>
-          </a:p>
-          <a:p>
-            <a:r>
-              <a:rPr lang="en-US"/>
-              <a:t>Chuyển thành âm thanh và ngược lại. (chi tiết các phần và luồng hoạt động để sau)</a:t>
-            </a:r>
-          </a:p>
-        </p:txBody>
-      </p:sp>
-    </p:spTree>
-    <p:extLst>
-      <p:ext uri="{BB962C8B-B14F-4D97-AF65-F5344CB8AC3E}">
-        <p14:creationId xmlns:p14="http://schemas.microsoft.com/office/powerpoint/2010/main" val="3712810268"/>
-      </p:ext>
-    </p:extLst>
-  </p:cSld>
-  <p:clrMapOvr>
-    <a:masterClrMapping/>
-  </p:clrMapOvr>
-</p:sld>
-</file>
-
-<file path=ppt/slides/slide19.xml><?xml version="1.0" encoding="utf-8"?>
-<p:sld xmlns:a="http://schemas.openxmlformats.org/drawingml/2006/main" xmlns:r="http://schemas.openxmlformats.org/officeDocument/2006/relationships" xmlns:p="http://schemas.openxmlformats.org/presentationml/2006/main">
-  <p:cSld>
-    <p:spTree>
-      <p:nvGrpSpPr>
-        <p:cNvPr id="1" name="">
-          <a:extLst>
-            <a:ext uri="{FF2B5EF4-FFF2-40B4-BE49-F238E27FC236}">
-              <a16:creationId xmlns:a16="http://schemas.microsoft.com/office/drawing/2014/main" id="{E69FDD86-2554-20C0-3BD8-48C3D0CE3EE9}"/>
-            </a:ext>
-          </a:extLst>
-        </p:cNvPr>
-        <p:cNvGrpSpPr/>
-        <p:nvPr/>
-      </p:nvGrpSpPr>
-      <p:grpSpPr>
-        <a:xfrm>
-          <a:off x="0" y="0"/>
-          <a:ext cx="0" cy="0"/>
-          <a:chOff x="0" y="0"/>
-          <a:chExt cx="0" cy="0"/>
-        </a:xfrm>
-      </p:grpSpPr>
-      <p:sp>
-        <p:nvSpPr>
-          <p:cNvPr id="2" name="TextBox 1">
-            <a:extLst>
-              <a:ext uri="{FF2B5EF4-FFF2-40B4-BE49-F238E27FC236}">
-                <a16:creationId xmlns:a16="http://schemas.microsoft.com/office/drawing/2014/main" id="{3C5E1B44-3531-38D8-BE32-5BD8B7E04216}"/>
-              </a:ext>
-            </a:extLst>
-          </p:cNvPr>
-          <p:cNvSpPr txBox="1"/>
-          <p:nvPr/>
-        </p:nvSpPr>
-        <p:spPr>
-          <a:xfrm>
-            <a:off x="457200" y="1657350"/>
-            <a:ext cx="5905078" cy="646331"/>
-          </a:xfrm>
-          <a:prstGeom prst="rect">
-            <a:avLst/>
-          </a:prstGeom>
-          <a:noFill/>
-        </p:spPr>
-        <p:txBody>
-          <a:bodyPr wrap="none" rtlCol="0">
-            <a:spAutoFit/>
-          </a:bodyPr>
-          <a:lstStyle/>
-          <a:p>
-            <a:r>
-              <a:rPr lang="en-US"/>
-              <a:t>Quá trình sinh phản hồi</a:t>
-            </a:r>
-          </a:p>
-          <a:p>
-            <a:r>
-              <a:rPr lang="en-US"/>
-              <a:t>Đề cập đến data được embedding và retrieval như thế nào</a:t>
-            </a:r>
-          </a:p>
-        </p:txBody>
-      </p:sp>
-    </p:spTree>
-    <p:extLst>
-      <p:ext uri="{BB962C8B-B14F-4D97-AF65-F5344CB8AC3E}">
-        <p14:creationId xmlns:p14="http://schemas.microsoft.com/office/powerpoint/2010/main" val="755535105"/>
       </p:ext>
     </p:extLst>
   </p:cSld>
@@ -5116,6 +5432,277 @@
 </file>
 
 <file path=ppt/slides/slide20.xml><?xml version="1.0" encoding="utf-8"?>
+<p:sld xmlns:a="http://schemas.openxmlformats.org/drawingml/2006/main" xmlns:r="http://schemas.openxmlformats.org/officeDocument/2006/relationships" xmlns:p="http://schemas.openxmlformats.org/presentationml/2006/main">
+  <p:cSld>
+    <p:spTree>
+      <p:nvGrpSpPr>
+        <p:cNvPr id="1" name="">
+          <a:extLst>
+            <a:ext uri="{FF2B5EF4-FFF2-40B4-BE49-F238E27FC236}">
+              <a16:creationId xmlns:a16="http://schemas.microsoft.com/office/drawing/2014/main" id="{CE9B43E1-6279-1E12-7C4D-079661226798}"/>
+            </a:ext>
+          </a:extLst>
+        </p:cNvPr>
+        <p:cNvGrpSpPr/>
+        <p:nvPr/>
+      </p:nvGrpSpPr>
+      <p:grpSpPr>
+        <a:xfrm>
+          <a:off x="0" y="0"/>
+          <a:ext cx="0" cy="0"/>
+          <a:chOff x="0" y="0"/>
+          <a:chExt cx="0" cy="0"/>
+        </a:xfrm>
+      </p:grpSpPr>
+      <p:sp>
+        <p:nvSpPr>
+          <p:cNvPr id="2" name="TextBox 1">
+            <a:extLst>
+              <a:ext uri="{FF2B5EF4-FFF2-40B4-BE49-F238E27FC236}">
+                <a16:creationId xmlns:a16="http://schemas.microsoft.com/office/drawing/2014/main" id="{AA4A9EF1-8662-93B5-1E75-CA2964560939}"/>
+              </a:ext>
+            </a:extLst>
+          </p:cNvPr>
+          <p:cNvSpPr txBox="1"/>
+          <p:nvPr/>
+        </p:nvSpPr>
+        <p:spPr>
+          <a:xfrm>
+            <a:off x="2571750" y="2667000"/>
+            <a:ext cx="2916568" cy="369332"/>
+          </a:xfrm>
+          <a:prstGeom prst="rect">
+            <a:avLst/>
+          </a:prstGeom>
+          <a:noFill/>
+        </p:spPr>
+        <p:txBody>
+          <a:bodyPr wrap="none" rtlCol="0">
+            <a:spAutoFit/>
+          </a:bodyPr>
+          <a:lstStyle/>
+          <a:p>
+            <a:r>
+              <a:rPr lang="en-US"/>
+              <a:t>Chức năng chatbot văn bản</a:t>
+            </a:r>
+          </a:p>
+        </p:txBody>
+      </p:sp>
+    </p:spTree>
+    <p:extLst>
+      <p:ext uri="{BB962C8B-B14F-4D97-AF65-F5344CB8AC3E}">
+        <p14:creationId xmlns:p14="http://schemas.microsoft.com/office/powerpoint/2010/main" val="540094921"/>
+      </p:ext>
+    </p:extLst>
+  </p:cSld>
+  <p:clrMapOvr>
+    <a:masterClrMapping/>
+  </p:clrMapOvr>
+</p:sld>
+</file>
+
+<file path=ppt/slides/slide21.xml><?xml version="1.0" encoding="utf-8"?>
+<p:sld xmlns:a="http://schemas.openxmlformats.org/drawingml/2006/main" xmlns:r="http://schemas.openxmlformats.org/officeDocument/2006/relationships" xmlns:p="http://schemas.openxmlformats.org/presentationml/2006/main">
+  <p:cSld>
+    <p:spTree>
+      <p:nvGrpSpPr>
+        <p:cNvPr id="1" name="">
+          <a:extLst>
+            <a:ext uri="{FF2B5EF4-FFF2-40B4-BE49-F238E27FC236}">
+              <a16:creationId xmlns:a16="http://schemas.microsoft.com/office/drawing/2014/main" id="{D730F8F1-2303-4AC4-E099-3DF21445E9D9}"/>
+            </a:ext>
+          </a:extLst>
+        </p:cNvPr>
+        <p:cNvGrpSpPr/>
+        <p:nvPr/>
+      </p:nvGrpSpPr>
+      <p:grpSpPr>
+        <a:xfrm>
+          <a:off x="0" y="0"/>
+          <a:ext cx="0" cy="0"/>
+          <a:chOff x="0" y="0"/>
+          <a:chExt cx="0" cy="0"/>
+        </a:xfrm>
+      </p:grpSpPr>
+      <p:sp>
+        <p:nvSpPr>
+          <p:cNvPr id="2" name="TextBox 1">
+            <a:extLst>
+              <a:ext uri="{FF2B5EF4-FFF2-40B4-BE49-F238E27FC236}">
+                <a16:creationId xmlns:a16="http://schemas.microsoft.com/office/drawing/2014/main" id="{DC579DB5-FB17-6D49-7A4D-2B764E003DC2}"/>
+              </a:ext>
+            </a:extLst>
+          </p:cNvPr>
+          <p:cNvSpPr txBox="1"/>
+          <p:nvPr/>
+        </p:nvSpPr>
+        <p:spPr>
+          <a:xfrm>
+            <a:off x="457200" y="1657350"/>
+            <a:ext cx="10203242" cy="2031325"/>
+          </a:xfrm>
+          <a:prstGeom prst="rect">
+            <a:avLst/>
+          </a:prstGeom>
+          <a:noFill/>
+        </p:spPr>
+        <p:txBody>
+          <a:bodyPr wrap="none" rtlCol="0">
+            <a:spAutoFit/>
+          </a:bodyPr>
+          <a:lstStyle/>
+          <a:p>
+            <a:r>
+              <a:rPr lang="en-US"/>
+              <a:t>Chức năng trò chuyện thời gian thực</a:t>
+            </a:r>
+          </a:p>
+          <a:p>
+            <a:r>
+              <a:rPr lang="en-US"/>
+              <a:t>Giới thiệu về công nghệ TTS-STT</a:t>
+            </a:r>
+          </a:p>
+          <a:p>
+            <a:pPr marL="285750" indent="-285750">
+              <a:buFontTx/>
+              <a:buChar char="-"/>
+            </a:pPr>
+            <a:r>
+              <a:rPr lang="en-US"/>
+              <a:t>giới thiệu</a:t>
+            </a:r>
+          </a:p>
+          <a:p>
+            <a:pPr marL="285750" indent="-285750">
+              <a:buFontTx/>
+              <a:buChar char="-"/>
+            </a:pPr>
+            <a:r>
+              <a:rPr lang="en-US"/>
+              <a:t>Lợi tích</a:t>
+            </a:r>
+          </a:p>
+          <a:p>
+            <a:pPr marL="285750" indent="-285750">
+              <a:buFontTx/>
+              <a:buChar char="-"/>
+            </a:pPr>
+            <a:r>
+              <a:rPr lang="en-US"/>
+              <a:t>Lợi tích khi Ứng dụng công nghệ này vào hệ thống chatbot</a:t>
+            </a:r>
+          </a:p>
+          <a:p>
+            <a:pPr marL="285750" indent="-285750">
+              <a:buFontTx/>
+              <a:buChar char="-"/>
+            </a:pPr>
+            <a:r>
+              <a:rPr lang="en-US"/>
+              <a:t>Phương pháp triển khai hệ thống (miêu tả hệ thống  hoạt động như thế nào? Cách mà văn bản được</a:t>
+            </a:r>
+          </a:p>
+          <a:p>
+            <a:r>
+              <a:rPr lang="en-US"/>
+              <a:t>Chuyển thành âm thanh và ngược lại. (chi tiết các phần và luồng hoạt động để sau)</a:t>
+            </a:r>
+          </a:p>
+        </p:txBody>
+      </p:sp>
+    </p:spTree>
+    <p:extLst>
+      <p:ext uri="{BB962C8B-B14F-4D97-AF65-F5344CB8AC3E}">
+        <p14:creationId xmlns:p14="http://schemas.microsoft.com/office/powerpoint/2010/main" val="3712810268"/>
+      </p:ext>
+    </p:extLst>
+  </p:cSld>
+  <p:clrMapOvr>
+    <a:masterClrMapping/>
+  </p:clrMapOvr>
+</p:sld>
+</file>
+
+<file path=ppt/slides/slide22.xml><?xml version="1.0" encoding="utf-8"?>
+<p:sld xmlns:a="http://schemas.openxmlformats.org/drawingml/2006/main" xmlns:r="http://schemas.openxmlformats.org/officeDocument/2006/relationships" xmlns:p="http://schemas.openxmlformats.org/presentationml/2006/main">
+  <p:cSld>
+    <p:spTree>
+      <p:nvGrpSpPr>
+        <p:cNvPr id="1" name="">
+          <a:extLst>
+            <a:ext uri="{FF2B5EF4-FFF2-40B4-BE49-F238E27FC236}">
+              <a16:creationId xmlns:a16="http://schemas.microsoft.com/office/drawing/2014/main" id="{E69FDD86-2554-20C0-3BD8-48C3D0CE3EE9}"/>
+            </a:ext>
+          </a:extLst>
+        </p:cNvPr>
+        <p:cNvGrpSpPr/>
+        <p:nvPr/>
+      </p:nvGrpSpPr>
+      <p:grpSpPr>
+        <a:xfrm>
+          <a:off x="0" y="0"/>
+          <a:ext cx="0" cy="0"/>
+          <a:chOff x="0" y="0"/>
+          <a:chExt cx="0" cy="0"/>
+        </a:xfrm>
+      </p:grpSpPr>
+      <p:sp>
+        <p:nvSpPr>
+          <p:cNvPr id="2" name="TextBox 1">
+            <a:extLst>
+              <a:ext uri="{FF2B5EF4-FFF2-40B4-BE49-F238E27FC236}">
+                <a16:creationId xmlns:a16="http://schemas.microsoft.com/office/drawing/2014/main" id="{3C5E1B44-3531-38D8-BE32-5BD8B7E04216}"/>
+              </a:ext>
+            </a:extLst>
+          </p:cNvPr>
+          <p:cNvSpPr txBox="1"/>
+          <p:nvPr/>
+        </p:nvSpPr>
+        <p:spPr>
+          <a:xfrm>
+            <a:off x="457200" y="1657350"/>
+            <a:ext cx="5905078" cy="646331"/>
+          </a:xfrm>
+          <a:prstGeom prst="rect">
+            <a:avLst/>
+          </a:prstGeom>
+          <a:noFill/>
+        </p:spPr>
+        <p:txBody>
+          <a:bodyPr wrap="none" rtlCol="0">
+            <a:spAutoFit/>
+          </a:bodyPr>
+          <a:lstStyle/>
+          <a:p>
+            <a:r>
+              <a:rPr lang="en-US"/>
+              <a:t>Quá trình sinh phản hồi</a:t>
+            </a:r>
+          </a:p>
+          <a:p>
+            <a:r>
+              <a:rPr lang="en-US"/>
+              <a:t>Đề cập đến data được embedding và retrieval như thế nào</a:t>
+            </a:r>
+          </a:p>
+        </p:txBody>
+      </p:sp>
+    </p:spTree>
+    <p:extLst>
+      <p:ext uri="{BB962C8B-B14F-4D97-AF65-F5344CB8AC3E}">
+        <p14:creationId xmlns:p14="http://schemas.microsoft.com/office/powerpoint/2010/main" val="755535105"/>
+      </p:ext>
+    </p:extLst>
+  </p:cSld>
+  <p:clrMapOvr>
+    <a:masterClrMapping/>
+  </p:clrMapOvr>
+</p:sld>
+</file>
+
+<file path=ppt/slides/slide23.xml><?xml version="1.0" encoding="utf-8"?>
 <p:sld xmlns:a="http://schemas.openxmlformats.org/drawingml/2006/main" xmlns:r="http://schemas.openxmlformats.org/officeDocument/2006/relationships" xmlns:p="http://schemas.openxmlformats.org/presentationml/2006/main">
   <p:cSld>
     <p:spTree>
@@ -5170,1245 +5757,6 @@
       </p:grpSpPr>
       <p:sp>
         <p:nvSpPr>
-          <p:cNvPr id="2" name="Arrow: Right 1">
-            <a:extLst>
-              <a:ext uri="{FF2B5EF4-FFF2-40B4-BE49-F238E27FC236}">
-                <a16:creationId xmlns:a16="http://schemas.microsoft.com/office/drawing/2014/main" id="{3880489C-52F7-148C-C3B0-FD58332F9695}"/>
-              </a:ext>
-            </a:extLst>
-          </p:cNvPr>
-          <p:cNvSpPr/>
-          <p:nvPr/>
-        </p:nvSpPr>
-        <p:spPr>
-          <a:xfrm>
-            <a:off x="639097" y="3274142"/>
-            <a:ext cx="10913806" cy="309716"/>
-          </a:xfrm>
-          <a:prstGeom prst="rightArrow">
-            <a:avLst/>
-          </a:prstGeom>
-        </p:spPr>
-        <p:style>
-          <a:lnRef idx="1">
-            <a:schemeClr val="accent2"/>
-          </a:lnRef>
-          <a:fillRef idx="2">
-            <a:schemeClr val="accent2"/>
-          </a:fillRef>
-          <a:effectRef idx="1">
-            <a:schemeClr val="accent2"/>
-          </a:effectRef>
-          <a:fontRef idx="minor">
-            <a:schemeClr val="dk1"/>
-          </a:fontRef>
-        </p:style>
-        <p:txBody>
-          <a:bodyPr rtlCol="0" anchor="ctr"/>
-          <a:lstStyle/>
-          <a:p>
-            <a:pPr algn="ctr"/>
-            <a:endParaRPr lang="en-US"/>
-          </a:p>
-        </p:txBody>
-      </p:sp>
-      <p:sp>
-        <p:nvSpPr>
-          <p:cNvPr id="6" name="Oval 5">
-            <a:extLst>
-              <a:ext uri="{FF2B5EF4-FFF2-40B4-BE49-F238E27FC236}">
-                <a16:creationId xmlns:a16="http://schemas.microsoft.com/office/drawing/2014/main" id="{5AF77646-F02A-1A12-74F6-1F582274C5BE}"/>
-              </a:ext>
-            </a:extLst>
-          </p:cNvPr>
-          <p:cNvSpPr/>
-          <p:nvPr/>
-        </p:nvSpPr>
-        <p:spPr>
-          <a:xfrm>
-            <a:off x="1275987" y="3270045"/>
-            <a:ext cx="309716" cy="309716"/>
-          </a:xfrm>
-          <a:prstGeom prst="ellipse">
-            <a:avLst/>
-          </a:prstGeom>
-        </p:spPr>
-        <p:style>
-          <a:lnRef idx="2">
-            <a:schemeClr val="dk1">
-              <a:shade val="15000"/>
-            </a:schemeClr>
-          </a:lnRef>
-          <a:fillRef idx="1">
-            <a:schemeClr val="dk1"/>
-          </a:fillRef>
-          <a:effectRef idx="0">
-            <a:schemeClr val="dk1"/>
-          </a:effectRef>
-          <a:fontRef idx="minor">
-            <a:schemeClr val="lt1"/>
-          </a:fontRef>
-        </p:style>
-        <p:txBody>
-          <a:bodyPr rtlCol="0" anchor="ctr"/>
-          <a:lstStyle/>
-          <a:p>
-            <a:pPr algn="ctr"/>
-            <a:endParaRPr lang="en-US"/>
-          </a:p>
-        </p:txBody>
-      </p:sp>
-      <p:cxnSp>
-        <p:nvCxnSpPr>
-          <p:cNvPr id="8" name="Straight Connector 7">
-            <a:extLst>
-              <a:ext uri="{FF2B5EF4-FFF2-40B4-BE49-F238E27FC236}">
-                <a16:creationId xmlns:a16="http://schemas.microsoft.com/office/drawing/2014/main" id="{F027B7A9-9009-E676-2765-D30EEB891E4C}"/>
-              </a:ext>
-            </a:extLst>
-          </p:cNvPr>
-          <p:cNvCxnSpPr>
-            <a:cxnSpLocks/>
-            <a:stCxn id="6" idx="4"/>
-          </p:cNvCxnSpPr>
-          <p:nvPr/>
-        </p:nvCxnSpPr>
-        <p:spPr>
-          <a:xfrm flipH="1">
-            <a:off x="1425666" y="3579761"/>
-            <a:ext cx="5179" cy="861142"/>
-          </a:xfrm>
-          <a:prstGeom prst="line">
-            <a:avLst/>
-          </a:prstGeom>
-        </p:spPr>
-        <p:style>
-          <a:lnRef idx="2">
-            <a:schemeClr val="dk1"/>
-          </a:lnRef>
-          <a:fillRef idx="0">
-            <a:schemeClr val="dk1"/>
-          </a:fillRef>
-          <a:effectRef idx="1">
-            <a:schemeClr val="dk1"/>
-          </a:effectRef>
-          <a:fontRef idx="minor">
-            <a:schemeClr val="tx1"/>
-          </a:fontRef>
-        </p:style>
-      </p:cxnSp>
-      <p:sp>
-        <p:nvSpPr>
-          <p:cNvPr id="9" name="TextBox 8">
-            <a:extLst>
-              <a:ext uri="{FF2B5EF4-FFF2-40B4-BE49-F238E27FC236}">
-                <a16:creationId xmlns:a16="http://schemas.microsoft.com/office/drawing/2014/main" id="{305363A5-FAF7-3FE3-B3FC-191E041CB1DC}"/>
-              </a:ext>
-            </a:extLst>
-          </p:cNvPr>
-          <p:cNvSpPr txBox="1"/>
-          <p:nvPr/>
-        </p:nvSpPr>
-        <p:spPr>
-          <a:xfrm>
-            <a:off x="723687" y="4445000"/>
-            <a:ext cx="1232325" cy="646331"/>
-          </a:xfrm>
-          <a:prstGeom prst="rect">
-            <a:avLst/>
-          </a:prstGeom>
-          <a:noFill/>
-        </p:spPr>
-        <p:txBody>
-          <a:bodyPr wrap="none" rtlCol="0">
-            <a:spAutoFit/>
-          </a:bodyPr>
-          <a:lstStyle/>
-          <a:p>
-            <a:pPr algn="ctr"/>
-            <a:r>
-              <a:rPr lang="en-US" b="1"/>
-              <a:t>1950</a:t>
-            </a:r>
-          </a:p>
-          <a:p>
-            <a:pPr algn="ctr"/>
-            <a:r>
-              <a:rPr lang="en-US"/>
-              <a:t>Turing Test</a:t>
-            </a:r>
-          </a:p>
-        </p:txBody>
-      </p:sp>
-      <p:sp>
-        <p:nvSpPr>
-          <p:cNvPr id="10" name="Oval 9">
-            <a:extLst>
-              <a:ext uri="{FF2B5EF4-FFF2-40B4-BE49-F238E27FC236}">
-                <a16:creationId xmlns:a16="http://schemas.microsoft.com/office/drawing/2014/main" id="{BBFE5CDE-9343-52BE-D424-8C1279266566}"/>
-              </a:ext>
-            </a:extLst>
-          </p:cNvPr>
-          <p:cNvSpPr/>
-          <p:nvPr/>
-        </p:nvSpPr>
-        <p:spPr>
-          <a:xfrm>
-            <a:off x="2428371" y="3270045"/>
-            <a:ext cx="309716" cy="309716"/>
-          </a:xfrm>
-          <a:prstGeom prst="ellipse">
-            <a:avLst/>
-          </a:prstGeom>
-        </p:spPr>
-        <p:style>
-          <a:lnRef idx="2">
-            <a:schemeClr val="dk1">
-              <a:shade val="15000"/>
-            </a:schemeClr>
-          </a:lnRef>
-          <a:fillRef idx="1">
-            <a:schemeClr val="dk1"/>
-          </a:fillRef>
-          <a:effectRef idx="0">
-            <a:schemeClr val="dk1"/>
-          </a:effectRef>
-          <a:fontRef idx="minor">
-            <a:schemeClr val="lt1"/>
-          </a:fontRef>
-        </p:style>
-        <p:txBody>
-          <a:bodyPr rtlCol="0" anchor="ctr"/>
-          <a:lstStyle/>
-          <a:p>
-            <a:pPr algn="ctr"/>
-            <a:endParaRPr lang="en-US"/>
-          </a:p>
-        </p:txBody>
-      </p:sp>
-      <p:cxnSp>
-        <p:nvCxnSpPr>
-          <p:cNvPr id="13" name="Straight Connector 12">
-            <a:extLst>
-              <a:ext uri="{FF2B5EF4-FFF2-40B4-BE49-F238E27FC236}">
-                <a16:creationId xmlns:a16="http://schemas.microsoft.com/office/drawing/2014/main" id="{B79FF55B-AA15-DDF8-CCE0-5ACFAAA908C5}"/>
-              </a:ext>
-            </a:extLst>
-          </p:cNvPr>
-          <p:cNvCxnSpPr>
-            <a:cxnSpLocks/>
-          </p:cNvCxnSpPr>
-          <p:nvPr/>
-        </p:nvCxnSpPr>
-        <p:spPr>
-          <a:xfrm>
-            <a:off x="2583229" y="2359742"/>
-            <a:ext cx="0" cy="914400"/>
-          </a:xfrm>
-          <a:prstGeom prst="line">
-            <a:avLst/>
-          </a:prstGeom>
-        </p:spPr>
-        <p:style>
-          <a:lnRef idx="2">
-            <a:schemeClr val="dk1"/>
-          </a:lnRef>
-          <a:fillRef idx="0">
-            <a:schemeClr val="dk1"/>
-          </a:fillRef>
-          <a:effectRef idx="1">
-            <a:schemeClr val="dk1"/>
-          </a:effectRef>
-          <a:fontRef idx="minor">
-            <a:schemeClr val="tx1"/>
-          </a:fontRef>
-        </p:style>
-      </p:cxnSp>
-      <p:sp>
-        <p:nvSpPr>
-          <p:cNvPr id="28" name="Oval 27">
-            <a:extLst>
-              <a:ext uri="{FF2B5EF4-FFF2-40B4-BE49-F238E27FC236}">
-                <a16:creationId xmlns:a16="http://schemas.microsoft.com/office/drawing/2014/main" id="{5D2D362F-FB80-B527-3FE3-4198CEA5A225}"/>
-              </a:ext>
-            </a:extLst>
-          </p:cNvPr>
-          <p:cNvSpPr/>
-          <p:nvPr/>
-        </p:nvSpPr>
-        <p:spPr>
-          <a:xfrm>
-            <a:off x="3575576" y="3270045"/>
-            <a:ext cx="309716" cy="309716"/>
-          </a:xfrm>
-          <a:prstGeom prst="ellipse">
-            <a:avLst/>
-          </a:prstGeom>
-        </p:spPr>
-        <p:style>
-          <a:lnRef idx="2">
-            <a:schemeClr val="dk1">
-              <a:shade val="15000"/>
-            </a:schemeClr>
-          </a:lnRef>
-          <a:fillRef idx="1">
-            <a:schemeClr val="dk1"/>
-          </a:fillRef>
-          <a:effectRef idx="0">
-            <a:schemeClr val="dk1"/>
-          </a:effectRef>
-          <a:fontRef idx="minor">
-            <a:schemeClr val="lt1"/>
-          </a:fontRef>
-        </p:style>
-        <p:txBody>
-          <a:bodyPr rtlCol="0" anchor="ctr"/>
-          <a:lstStyle/>
-          <a:p>
-            <a:pPr algn="ctr"/>
-            <a:endParaRPr lang="en-US"/>
-          </a:p>
-        </p:txBody>
-      </p:sp>
-      <p:cxnSp>
-        <p:nvCxnSpPr>
-          <p:cNvPr id="29" name="Straight Connector 28">
-            <a:extLst>
-              <a:ext uri="{FF2B5EF4-FFF2-40B4-BE49-F238E27FC236}">
-                <a16:creationId xmlns:a16="http://schemas.microsoft.com/office/drawing/2014/main" id="{3E1A0A8A-5CB6-A6E1-D4C7-C5E5952AA478}"/>
-              </a:ext>
-            </a:extLst>
-          </p:cNvPr>
-          <p:cNvCxnSpPr>
-            <a:cxnSpLocks/>
-            <a:stCxn id="28" idx="4"/>
-          </p:cNvCxnSpPr>
-          <p:nvPr/>
-        </p:nvCxnSpPr>
-        <p:spPr>
-          <a:xfrm flipH="1">
-            <a:off x="3725255" y="3579761"/>
-            <a:ext cx="5179" cy="861142"/>
-          </a:xfrm>
-          <a:prstGeom prst="line">
-            <a:avLst/>
-          </a:prstGeom>
-        </p:spPr>
-        <p:style>
-          <a:lnRef idx="2">
-            <a:schemeClr val="dk1"/>
-          </a:lnRef>
-          <a:fillRef idx="0">
-            <a:schemeClr val="dk1"/>
-          </a:fillRef>
-          <a:effectRef idx="1">
-            <a:schemeClr val="dk1"/>
-          </a:effectRef>
-          <a:fontRef idx="minor">
-            <a:schemeClr val="tx1"/>
-          </a:fontRef>
-        </p:style>
-      </p:cxnSp>
-      <p:sp>
-        <p:nvSpPr>
-          <p:cNvPr id="30" name="Oval 29">
-            <a:extLst>
-              <a:ext uri="{FF2B5EF4-FFF2-40B4-BE49-F238E27FC236}">
-                <a16:creationId xmlns:a16="http://schemas.microsoft.com/office/drawing/2014/main" id="{7524CCD3-960C-76C1-3CDA-4615BD8DCCCE}"/>
-              </a:ext>
-            </a:extLst>
-          </p:cNvPr>
-          <p:cNvSpPr/>
-          <p:nvPr/>
-        </p:nvSpPr>
-        <p:spPr>
-          <a:xfrm>
-            <a:off x="4727960" y="3270045"/>
-            <a:ext cx="309716" cy="309716"/>
-          </a:xfrm>
-          <a:prstGeom prst="ellipse">
-            <a:avLst/>
-          </a:prstGeom>
-        </p:spPr>
-        <p:style>
-          <a:lnRef idx="2">
-            <a:schemeClr val="dk1">
-              <a:shade val="15000"/>
-            </a:schemeClr>
-          </a:lnRef>
-          <a:fillRef idx="1">
-            <a:schemeClr val="dk1"/>
-          </a:fillRef>
-          <a:effectRef idx="0">
-            <a:schemeClr val="dk1"/>
-          </a:effectRef>
-          <a:fontRef idx="minor">
-            <a:schemeClr val="lt1"/>
-          </a:fontRef>
-        </p:style>
-        <p:txBody>
-          <a:bodyPr rtlCol="0" anchor="ctr"/>
-          <a:lstStyle/>
-          <a:p>
-            <a:pPr algn="ctr"/>
-            <a:endParaRPr lang="en-US"/>
-          </a:p>
-        </p:txBody>
-      </p:sp>
-      <p:cxnSp>
-        <p:nvCxnSpPr>
-          <p:cNvPr id="31" name="Straight Connector 30">
-            <a:extLst>
-              <a:ext uri="{FF2B5EF4-FFF2-40B4-BE49-F238E27FC236}">
-                <a16:creationId xmlns:a16="http://schemas.microsoft.com/office/drawing/2014/main" id="{CE31BDC7-F229-9D78-58AB-F50D95100BED}"/>
-              </a:ext>
-            </a:extLst>
-          </p:cNvPr>
-          <p:cNvCxnSpPr>
-            <a:cxnSpLocks/>
-          </p:cNvCxnSpPr>
-          <p:nvPr/>
-        </p:nvCxnSpPr>
-        <p:spPr>
-          <a:xfrm flipH="1">
-            <a:off x="4882819" y="2353597"/>
-            <a:ext cx="5179" cy="914400"/>
-          </a:xfrm>
-          <a:prstGeom prst="line">
-            <a:avLst/>
-          </a:prstGeom>
-        </p:spPr>
-        <p:style>
-          <a:lnRef idx="2">
-            <a:schemeClr val="dk1"/>
-          </a:lnRef>
-          <a:fillRef idx="0">
-            <a:schemeClr val="dk1"/>
-          </a:fillRef>
-          <a:effectRef idx="1">
-            <a:schemeClr val="dk1"/>
-          </a:effectRef>
-          <a:fontRef idx="minor">
-            <a:schemeClr val="tx1"/>
-          </a:fontRef>
-        </p:style>
-      </p:cxnSp>
-      <p:sp>
-        <p:nvSpPr>
-          <p:cNvPr id="32" name="Oval 31">
-            <a:extLst>
-              <a:ext uri="{FF2B5EF4-FFF2-40B4-BE49-F238E27FC236}">
-                <a16:creationId xmlns:a16="http://schemas.microsoft.com/office/drawing/2014/main" id="{4CB1A46B-81F4-273A-2223-EC5BB878D149}"/>
-              </a:ext>
-            </a:extLst>
-          </p:cNvPr>
-          <p:cNvSpPr/>
-          <p:nvPr/>
-        </p:nvSpPr>
-        <p:spPr>
-          <a:xfrm>
-            <a:off x="5875165" y="3270045"/>
-            <a:ext cx="309716" cy="309716"/>
-          </a:xfrm>
-          <a:prstGeom prst="ellipse">
-            <a:avLst/>
-          </a:prstGeom>
-        </p:spPr>
-        <p:style>
-          <a:lnRef idx="2">
-            <a:schemeClr val="dk1">
-              <a:shade val="15000"/>
-            </a:schemeClr>
-          </a:lnRef>
-          <a:fillRef idx="1">
-            <a:schemeClr val="dk1"/>
-          </a:fillRef>
-          <a:effectRef idx="0">
-            <a:schemeClr val="dk1"/>
-          </a:effectRef>
-          <a:fontRef idx="minor">
-            <a:schemeClr val="lt1"/>
-          </a:fontRef>
-        </p:style>
-        <p:txBody>
-          <a:bodyPr rtlCol="0" anchor="ctr"/>
-          <a:lstStyle/>
-          <a:p>
-            <a:pPr algn="ctr"/>
-            <a:endParaRPr lang="en-US"/>
-          </a:p>
-        </p:txBody>
-      </p:sp>
-      <p:cxnSp>
-        <p:nvCxnSpPr>
-          <p:cNvPr id="33" name="Straight Connector 32">
-            <a:extLst>
-              <a:ext uri="{FF2B5EF4-FFF2-40B4-BE49-F238E27FC236}">
-                <a16:creationId xmlns:a16="http://schemas.microsoft.com/office/drawing/2014/main" id="{98477674-BE41-4CAB-0E97-8E4A09BF8CEA}"/>
-              </a:ext>
-            </a:extLst>
-          </p:cNvPr>
-          <p:cNvCxnSpPr>
-            <a:cxnSpLocks/>
-            <a:stCxn id="32" idx="4"/>
-          </p:cNvCxnSpPr>
-          <p:nvPr/>
-        </p:nvCxnSpPr>
-        <p:spPr>
-          <a:xfrm flipH="1">
-            <a:off x="6024844" y="3579761"/>
-            <a:ext cx="5179" cy="861142"/>
-          </a:xfrm>
-          <a:prstGeom prst="line">
-            <a:avLst/>
-          </a:prstGeom>
-        </p:spPr>
-        <p:style>
-          <a:lnRef idx="2">
-            <a:schemeClr val="dk1"/>
-          </a:lnRef>
-          <a:fillRef idx="0">
-            <a:schemeClr val="dk1"/>
-          </a:fillRef>
-          <a:effectRef idx="1">
-            <a:schemeClr val="dk1"/>
-          </a:effectRef>
-          <a:fontRef idx="minor">
-            <a:schemeClr val="tx1"/>
-          </a:fontRef>
-        </p:style>
-      </p:cxnSp>
-      <p:sp>
-        <p:nvSpPr>
-          <p:cNvPr id="34" name="Oval 33">
-            <a:extLst>
-              <a:ext uri="{FF2B5EF4-FFF2-40B4-BE49-F238E27FC236}">
-                <a16:creationId xmlns:a16="http://schemas.microsoft.com/office/drawing/2014/main" id="{EA85BE0C-961E-EA3B-37AE-A47090A97B55}"/>
-              </a:ext>
-            </a:extLst>
-          </p:cNvPr>
-          <p:cNvSpPr/>
-          <p:nvPr/>
-        </p:nvSpPr>
-        <p:spPr>
-          <a:xfrm>
-            <a:off x="7027549" y="3270045"/>
-            <a:ext cx="309716" cy="309716"/>
-          </a:xfrm>
-          <a:prstGeom prst="ellipse">
-            <a:avLst/>
-          </a:prstGeom>
-        </p:spPr>
-        <p:style>
-          <a:lnRef idx="2">
-            <a:schemeClr val="dk1">
-              <a:shade val="15000"/>
-            </a:schemeClr>
-          </a:lnRef>
-          <a:fillRef idx="1">
-            <a:schemeClr val="dk1"/>
-          </a:fillRef>
-          <a:effectRef idx="0">
-            <a:schemeClr val="dk1"/>
-          </a:effectRef>
-          <a:fontRef idx="minor">
-            <a:schemeClr val="lt1"/>
-          </a:fontRef>
-        </p:style>
-        <p:txBody>
-          <a:bodyPr rtlCol="0" anchor="ctr"/>
-          <a:lstStyle/>
-          <a:p>
-            <a:pPr algn="ctr"/>
-            <a:endParaRPr lang="en-US"/>
-          </a:p>
-        </p:txBody>
-      </p:sp>
-      <p:cxnSp>
-        <p:nvCxnSpPr>
-          <p:cNvPr id="35" name="Straight Connector 34">
-            <a:extLst>
-              <a:ext uri="{FF2B5EF4-FFF2-40B4-BE49-F238E27FC236}">
-                <a16:creationId xmlns:a16="http://schemas.microsoft.com/office/drawing/2014/main" id="{07D26A5C-221C-5952-A7CC-DAF0CC1F5314}"/>
-              </a:ext>
-            </a:extLst>
-          </p:cNvPr>
-          <p:cNvCxnSpPr>
-            <a:cxnSpLocks/>
-          </p:cNvCxnSpPr>
-          <p:nvPr/>
-        </p:nvCxnSpPr>
-        <p:spPr>
-          <a:xfrm>
-            <a:off x="7182407" y="2351548"/>
-            <a:ext cx="0" cy="914400"/>
-          </a:xfrm>
-          <a:prstGeom prst="line">
-            <a:avLst/>
-          </a:prstGeom>
-        </p:spPr>
-        <p:style>
-          <a:lnRef idx="2">
-            <a:schemeClr val="dk1"/>
-          </a:lnRef>
-          <a:fillRef idx="0">
-            <a:schemeClr val="dk1"/>
-          </a:fillRef>
-          <a:effectRef idx="1">
-            <a:schemeClr val="dk1"/>
-          </a:effectRef>
-          <a:fontRef idx="minor">
-            <a:schemeClr val="tx1"/>
-          </a:fontRef>
-        </p:style>
-      </p:cxnSp>
-      <p:sp>
-        <p:nvSpPr>
-          <p:cNvPr id="36" name="Oval 35">
-            <a:extLst>
-              <a:ext uri="{FF2B5EF4-FFF2-40B4-BE49-F238E27FC236}">
-                <a16:creationId xmlns:a16="http://schemas.microsoft.com/office/drawing/2014/main" id="{331FBDF8-BF17-2FF1-E2DB-C246080EC5D0}"/>
-              </a:ext>
-            </a:extLst>
-          </p:cNvPr>
-          <p:cNvSpPr/>
-          <p:nvPr/>
-        </p:nvSpPr>
-        <p:spPr>
-          <a:xfrm>
-            <a:off x="8174754" y="3270045"/>
-            <a:ext cx="309716" cy="309716"/>
-          </a:xfrm>
-          <a:prstGeom prst="ellipse">
-            <a:avLst/>
-          </a:prstGeom>
-        </p:spPr>
-        <p:style>
-          <a:lnRef idx="2">
-            <a:schemeClr val="dk1">
-              <a:shade val="15000"/>
-            </a:schemeClr>
-          </a:lnRef>
-          <a:fillRef idx="1">
-            <a:schemeClr val="dk1"/>
-          </a:fillRef>
-          <a:effectRef idx="0">
-            <a:schemeClr val="dk1"/>
-          </a:effectRef>
-          <a:fontRef idx="minor">
-            <a:schemeClr val="lt1"/>
-          </a:fontRef>
-        </p:style>
-        <p:txBody>
-          <a:bodyPr rtlCol="0" anchor="ctr"/>
-          <a:lstStyle/>
-          <a:p>
-            <a:pPr algn="ctr"/>
-            <a:endParaRPr lang="en-US"/>
-          </a:p>
-        </p:txBody>
-      </p:sp>
-      <p:cxnSp>
-        <p:nvCxnSpPr>
-          <p:cNvPr id="37" name="Straight Connector 36">
-            <a:extLst>
-              <a:ext uri="{FF2B5EF4-FFF2-40B4-BE49-F238E27FC236}">
-                <a16:creationId xmlns:a16="http://schemas.microsoft.com/office/drawing/2014/main" id="{7D86C0EB-7756-32AD-5C1D-20EBDBF64562}"/>
-              </a:ext>
-            </a:extLst>
-          </p:cNvPr>
-          <p:cNvCxnSpPr>
-            <a:cxnSpLocks/>
-            <a:stCxn id="36" idx="4"/>
-          </p:cNvCxnSpPr>
-          <p:nvPr/>
-        </p:nvCxnSpPr>
-        <p:spPr>
-          <a:xfrm flipH="1">
-            <a:off x="8324433" y="3579761"/>
-            <a:ext cx="5179" cy="861142"/>
-          </a:xfrm>
-          <a:prstGeom prst="line">
-            <a:avLst/>
-          </a:prstGeom>
-        </p:spPr>
-        <p:style>
-          <a:lnRef idx="2">
-            <a:schemeClr val="dk1"/>
-          </a:lnRef>
-          <a:fillRef idx="0">
-            <a:schemeClr val="dk1"/>
-          </a:fillRef>
-          <a:effectRef idx="1">
-            <a:schemeClr val="dk1"/>
-          </a:effectRef>
-          <a:fontRef idx="minor">
-            <a:schemeClr val="tx1"/>
-          </a:fontRef>
-        </p:style>
-      </p:cxnSp>
-      <p:sp>
-        <p:nvSpPr>
-          <p:cNvPr id="38" name="Oval 37">
-            <a:extLst>
-              <a:ext uri="{FF2B5EF4-FFF2-40B4-BE49-F238E27FC236}">
-                <a16:creationId xmlns:a16="http://schemas.microsoft.com/office/drawing/2014/main" id="{104435A5-BDA0-9A4D-1E9E-A33E12FA5ED6}"/>
-              </a:ext>
-            </a:extLst>
-          </p:cNvPr>
-          <p:cNvSpPr/>
-          <p:nvPr/>
-        </p:nvSpPr>
-        <p:spPr>
-          <a:xfrm>
-            <a:off x="9327138" y="3270045"/>
-            <a:ext cx="309716" cy="309716"/>
-          </a:xfrm>
-          <a:prstGeom prst="ellipse">
-            <a:avLst/>
-          </a:prstGeom>
-        </p:spPr>
-        <p:style>
-          <a:lnRef idx="2">
-            <a:schemeClr val="dk1">
-              <a:shade val="15000"/>
-            </a:schemeClr>
-          </a:lnRef>
-          <a:fillRef idx="1">
-            <a:schemeClr val="dk1"/>
-          </a:fillRef>
-          <a:effectRef idx="0">
-            <a:schemeClr val="dk1"/>
-          </a:effectRef>
-          <a:fontRef idx="minor">
-            <a:schemeClr val="lt1"/>
-          </a:fontRef>
-        </p:style>
-        <p:txBody>
-          <a:bodyPr rtlCol="0" anchor="ctr"/>
-          <a:lstStyle/>
-          <a:p>
-            <a:pPr algn="ctr"/>
-            <a:endParaRPr lang="en-US"/>
-          </a:p>
-        </p:txBody>
-      </p:sp>
-      <p:cxnSp>
-        <p:nvCxnSpPr>
-          <p:cNvPr id="39" name="Straight Connector 38">
-            <a:extLst>
-              <a:ext uri="{FF2B5EF4-FFF2-40B4-BE49-F238E27FC236}">
-                <a16:creationId xmlns:a16="http://schemas.microsoft.com/office/drawing/2014/main" id="{34211C5F-D4E1-BFA8-ED38-8CBE6370B4FD}"/>
-              </a:ext>
-            </a:extLst>
-          </p:cNvPr>
-          <p:cNvCxnSpPr>
-            <a:cxnSpLocks/>
-          </p:cNvCxnSpPr>
-          <p:nvPr/>
-        </p:nvCxnSpPr>
-        <p:spPr>
-          <a:xfrm flipH="1">
-            <a:off x="9481996" y="2351548"/>
-            <a:ext cx="0" cy="914400"/>
-          </a:xfrm>
-          <a:prstGeom prst="line">
-            <a:avLst/>
-          </a:prstGeom>
-        </p:spPr>
-        <p:style>
-          <a:lnRef idx="2">
-            <a:schemeClr val="dk1"/>
-          </a:lnRef>
-          <a:fillRef idx="0">
-            <a:schemeClr val="dk1"/>
-          </a:fillRef>
-          <a:effectRef idx="1">
-            <a:schemeClr val="dk1"/>
-          </a:effectRef>
-          <a:fontRef idx="minor">
-            <a:schemeClr val="tx1"/>
-          </a:fontRef>
-        </p:style>
-      </p:cxnSp>
-      <p:sp>
-        <p:nvSpPr>
-          <p:cNvPr id="48" name="TextBox 47">
-            <a:extLst>
-              <a:ext uri="{FF2B5EF4-FFF2-40B4-BE49-F238E27FC236}">
-                <a16:creationId xmlns:a16="http://schemas.microsoft.com/office/drawing/2014/main" id="{F6CDB75E-4479-1C83-7C10-731CF8ECF3B0}"/>
-              </a:ext>
-            </a:extLst>
-          </p:cNvPr>
-          <p:cNvSpPr txBox="1"/>
-          <p:nvPr/>
-        </p:nvSpPr>
-        <p:spPr>
-          <a:xfrm>
-            <a:off x="1812024" y="1151219"/>
-            <a:ext cx="1542409" cy="1200329"/>
-          </a:xfrm>
-          <a:prstGeom prst="rect">
-            <a:avLst/>
-          </a:prstGeom>
-          <a:noFill/>
-        </p:spPr>
-        <p:txBody>
-          <a:bodyPr wrap="none" rtlCol="0">
-            <a:spAutoFit/>
-          </a:bodyPr>
-          <a:lstStyle/>
-          <a:p>
-            <a:pPr algn="ctr"/>
-            <a:r>
-              <a:rPr lang="en-US" b="1"/>
-              <a:t>1954</a:t>
-            </a:r>
-          </a:p>
-          <a:p>
-            <a:pPr algn="ctr"/>
-            <a:r>
-              <a:rPr lang="en-US"/>
-              <a:t>Hệ thống NLP</a:t>
-            </a:r>
-          </a:p>
-          <a:p>
-            <a:pPr algn="ctr"/>
-            <a:r>
-              <a:rPr lang="en-US"/>
-              <a:t>sử dụng AI</a:t>
-            </a:r>
-          </a:p>
-          <a:p>
-            <a:pPr algn="ctr"/>
-            <a:r>
-              <a:rPr lang="en-US"/>
-              <a:t>đầu tiên</a:t>
-            </a:r>
-          </a:p>
-        </p:txBody>
-      </p:sp>
-      <p:sp>
-        <p:nvSpPr>
-          <p:cNvPr id="49" name="TextBox 48">
-            <a:extLst>
-              <a:ext uri="{FF2B5EF4-FFF2-40B4-BE49-F238E27FC236}">
-                <a16:creationId xmlns:a16="http://schemas.microsoft.com/office/drawing/2014/main" id="{C42AA5A2-807B-7A5F-4975-F3D1D774F07F}"/>
-              </a:ext>
-            </a:extLst>
-          </p:cNvPr>
-          <p:cNvSpPr txBox="1"/>
-          <p:nvPr/>
-        </p:nvSpPr>
-        <p:spPr>
-          <a:xfrm>
-            <a:off x="2842828" y="4440903"/>
-            <a:ext cx="1770035" cy="923330"/>
-          </a:xfrm>
-          <a:prstGeom prst="rect">
-            <a:avLst/>
-          </a:prstGeom>
-          <a:noFill/>
-        </p:spPr>
-        <p:txBody>
-          <a:bodyPr wrap="none" rtlCol="0">
-            <a:spAutoFit/>
-          </a:bodyPr>
-          <a:lstStyle/>
-          <a:p>
-            <a:pPr algn="ctr"/>
-            <a:r>
-              <a:rPr lang="en-US" b="1"/>
-              <a:t>1990</a:t>
-            </a:r>
-          </a:p>
-          <a:p>
-            <a:pPr algn="ctr"/>
-            <a:r>
-              <a:rPr lang="en-US"/>
-              <a:t>Sự khởi đầu của</a:t>
-            </a:r>
-          </a:p>
-          <a:p>
-            <a:pPr algn="ctr"/>
-            <a:r>
-              <a:rPr lang="en-US"/>
-              <a:t>NLP với ML</a:t>
-            </a:r>
-          </a:p>
-        </p:txBody>
-      </p:sp>
-      <p:sp>
-        <p:nvSpPr>
-          <p:cNvPr id="50" name="TextBox 49">
-            <a:extLst>
-              <a:ext uri="{FF2B5EF4-FFF2-40B4-BE49-F238E27FC236}">
-                <a16:creationId xmlns:a16="http://schemas.microsoft.com/office/drawing/2014/main" id="{55D0DC0D-61E9-0C5B-6C24-32B161B0597B}"/>
-              </a:ext>
-            </a:extLst>
-          </p:cNvPr>
-          <p:cNvSpPr txBox="1"/>
-          <p:nvPr/>
-        </p:nvSpPr>
-        <p:spPr>
-          <a:xfrm>
-            <a:off x="4258512" y="1696845"/>
-            <a:ext cx="1248612" cy="646331"/>
-          </a:xfrm>
-          <a:prstGeom prst="rect">
-            <a:avLst/>
-          </a:prstGeom>
-          <a:noFill/>
-        </p:spPr>
-        <p:txBody>
-          <a:bodyPr wrap="none" rtlCol="0">
-            <a:spAutoFit/>
-          </a:bodyPr>
-          <a:lstStyle/>
-          <a:p>
-            <a:pPr algn="ctr"/>
-            <a:r>
-              <a:rPr lang="en-US" b="1"/>
-              <a:t>1990s</a:t>
-            </a:r>
-          </a:p>
-          <a:p>
-            <a:pPr algn="ctr"/>
-            <a:r>
-              <a:rPr lang="en-US"/>
-              <a:t>ANN ra đời</a:t>
-            </a:r>
-          </a:p>
-        </p:txBody>
-      </p:sp>
-      <p:sp>
-        <p:nvSpPr>
-          <p:cNvPr id="51" name="TextBox 50">
-            <a:extLst>
-              <a:ext uri="{FF2B5EF4-FFF2-40B4-BE49-F238E27FC236}">
-                <a16:creationId xmlns:a16="http://schemas.microsoft.com/office/drawing/2014/main" id="{C3F0034D-3EEB-1282-EC4E-BBE91016FEC0}"/>
-              </a:ext>
-            </a:extLst>
-          </p:cNvPr>
-          <p:cNvSpPr txBox="1"/>
-          <p:nvPr/>
-        </p:nvSpPr>
-        <p:spPr>
-          <a:xfrm>
-            <a:off x="4941055" y="4440903"/>
-            <a:ext cx="2167581" cy="646331"/>
-          </a:xfrm>
-          <a:prstGeom prst="rect">
-            <a:avLst/>
-          </a:prstGeom>
-          <a:noFill/>
-        </p:spPr>
-        <p:txBody>
-          <a:bodyPr wrap="none" rtlCol="0">
-            <a:spAutoFit/>
-          </a:bodyPr>
-          <a:lstStyle/>
-          <a:p>
-            <a:pPr algn="ctr"/>
-            <a:r>
-              <a:rPr lang="en-US" b="1"/>
-              <a:t>1990s</a:t>
-            </a:r>
-          </a:p>
-          <a:p>
-            <a:pPr algn="ctr"/>
-            <a:r>
-              <a:rPr lang="en-US"/>
-              <a:t>RNN được giới thiệu</a:t>
-            </a:r>
-          </a:p>
-        </p:txBody>
-      </p:sp>
-      <p:sp>
-        <p:nvSpPr>
-          <p:cNvPr id="52" name="TextBox 51">
-            <a:extLst>
-              <a:ext uri="{FF2B5EF4-FFF2-40B4-BE49-F238E27FC236}">
-                <a16:creationId xmlns:a16="http://schemas.microsoft.com/office/drawing/2014/main" id="{21A896BF-99A1-C230-0A35-B24A78C51167}"/>
-              </a:ext>
-            </a:extLst>
-          </p:cNvPr>
-          <p:cNvSpPr txBox="1"/>
-          <p:nvPr/>
-        </p:nvSpPr>
-        <p:spPr>
-          <a:xfrm>
-            <a:off x="7579139" y="4440903"/>
-            <a:ext cx="1500732" cy="923330"/>
-          </a:xfrm>
-          <a:prstGeom prst="rect">
-            <a:avLst/>
-          </a:prstGeom>
-          <a:noFill/>
-        </p:spPr>
-        <p:txBody>
-          <a:bodyPr wrap="none" rtlCol="0">
-            <a:spAutoFit/>
-          </a:bodyPr>
-          <a:lstStyle/>
-          <a:p>
-            <a:pPr algn="ctr"/>
-            <a:r>
-              <a:rPr lang="en-US" b="1">
-                <a:solidFill>
-                  <a:srgbClr val="FF0000"/>
-                </a:solidFill>
-              </a:rPr>
-              <a:t>2013</a:t>
-            </a:r>
-          </a:p>
-          <a:p>
-            <a:pPr algn="ctr"/>
-            <a:r>
-              <a:rPr lang="en-US">
-                <a:solidFill>
-                  <a:srgbClr val="FF0000"/>
-                </a:solidFill>
-              </a:rPr>
-              <a:t>Bước tiến lớn</a:t>
-            </a:r>
-          </a:p>
-          <a:p>
-            <a:pPr algn="ctr"/>
-            <a:r>
-              <a:rPr lang="en-US">
-                <a:solidFill>
-                  <a:srgbClr val="FF0000"/>
-                </a:solidFill>
-              </a:rPr>
-              <a:t>với DL</a:t>
-            </a:r>
-          </a:p>
-        </p:txBody>
-      </p:sp>
-      <p:sp>
-        <p:nvSpPr>
-          <p:cNvPr id="53" name="TextBox 52">
-            <a:extLst>
-              <a:ext uri="{FF2B5EF4-FFF2-40B4-BE49-F238E27FC236}">
-                <a16:creationId xmlns:a16="http://schemas.microsoft.com/office/drawing/2014/main" id="{8FD8DEF4-C432-0133-FD3E-1E210A590AC8}"/>
-              </a:ext>
-            </a:extLst>
-          </p:cNvPr>
-          <p:cNvSpPr txBox="1"/>
-          <p:nvPr/>
-        </p:nvSpPr>
-        <p:spPr>
-          <a:xfrm>
-            <a:off x="6347563" y="1696846"/>
-            <a:ext cx="1669688" cy="646331"/>
-          </a:xfrm>
-          <a:prstGeom prst="rect">
-            <a:avLst/>
-          </a:prstGeom>
-          <a:noFill/>
-        </p:spPr>
-        <p:txBody>
-          <a:bodyPr wrap="none" rtlCol="0">
-            <a:spAutoFit/>
-          </a:bodyPr>
-          <a:lstStyle/>
-          <a:p>
-            <a:pPr algn="ctr"/>
-            <a:r>
-              <a:rPr lang="en-US" b="1"/>
-              <a:t>1997</a:t>
-            </a:r>
-          </a:p>
-          <a:p>
-            <a:pPr algn="ctr"/>
-            <a:r>
-              <a:rPr lang="en-US"/>
-              <a:t>LSTM xuất hiện</a:t>
-            </a:r>
-          </a:p>
-        </p:txBody>
-      </p:sp>
-      <p:sp>
-        <p:nvSpPr>
-          <p:cNvPr id="54" name="TextBox 53">
-            <a:extLst>
-              <a:ext uri="{FF2B5EF4-FFF2-40B4-BE49-F238E27FC236}">
-                <a16:creationId xmlns:a16="http://schemas.microsoft.com/office/drawing/2014/main" id="{961525B6-43AB-2488-D415-7DBCC162E2B5}"/>
-              </a:ext>
-            </a:extLst>
-          </p:cNvPr>
-          <p:cNvSpPr txBox="1"/>
-          <p:nvPr/>
-        </p:nvSpPr>
-        <p:spPr>
-          <a:xfrm>
-            <a:off x="8767377" y="1696844"/>
-            <a:ext cx="1429238" cy="646331"/>
-          </a:xfrm>
-          <a:prstGeom prst="rect">
-            <a:avLst/>
-          </a:prstGeom>
-          <a:noFill/>
-        </p:spPr>
-        <p:txBody>
-          <a:bodyPr wrap="none" rtlCol="0">
-            <a:spAutoFit/>
-          </a:bodyPr>
-          <a:lstStyle/>
-          <a:p>
-            <a:pPr algn="ctr"/>
-            <a:r>
-              <a:rPr lang="en-US" b="1"/>
-              <a:t>2017</a:t>
-            </a:r>
-          </a:p>
-          <a:p>
-            <a:pPr algn="ctr"/>
-            <a:r>
-              <a:rPr lang="en-US"/>
-              <a:t>Transformer</a:t>
-            </a:r>
-          </a:p>
-        </p:txBody>
-      </p:sp>
-      <p:sp>
-        <p:nvSpPr>
-          <p:cNvPr id="55" name="Oval 54">
-            <a:extLst>
-              <a:ext uri="{FF2B5EF4-FFF2-40B4-BE49-F238E27FC236}">
-                <a16:creationId xmlns:a16="http://schemas.microsoft.com/office/drawing/2014/main" id="{3B8F907F-9F48-7850-75D9-9E3E25598592}"/>
-              </a:ext>
-            </a:extLst>
-          </p:cNvPr>
-          <p:cNvSpPr/>
-          <p:nvPr/>
-        </p:nvSpPr>
-        <p:spPr>
-          <a:xfrm>
-            <a:off x="10563196" y="3270045"/>
-            <a:ext cx="309716" cy="309716"/>
-          </a:xfrm>
-          <a:prstGeom prst="ellipse">
-            <a:avLst/>
-          </a:prstGeom>
-        </p:spPr>
-        <p:style>
-          <a:lnRef idx="2">
-            <a:schemeClr val="dk1">
-              <a:shade val="15000"/>
-            </a:schemeClr>
-          </a:lnRef>
-          <a:fillRef idx="1">
-            <a:schemeClr val="dk1"/>
-          </a:fillRef>
-          <a:effectRef idx="0">
-            <a:schemeClr val="dk1"/>
-          </a:effectRef>
-          <a:fontRef idx="minor">
-            <a:schemeClr val="lt1"/>
-          </a:fontRef>
-        </p:style>
-        <p:txBody>
-          <a:bodyPr rtlCol="0" anchor="ctr"/>
-          <a:lstStyle/>
-          <a:p>
-            <a:pPr algn="ctr"/>
-            <a:endParaRPr lang="en-US"/>
-          </a:p>
-        </p:txBody>
-      </p:sp>
-      <p:cxnSp>
-        <p:nvCxnSpPr>
-          <p:cNvPr id="56" name="Straight Connector 55">
-            <a:extLst>
-              <a:ext uri="{FF2B5EF4-FFF2-40B4-BE49-F238E27FC236}">
-                <a16:creationId xmlns:a16="http://schemas.microsoft.com/office/drawing/2014/main" id="{0241080D-C8F7-6C8A-A441-2DD97BAE0E3B}"/>
-              </a:ext>
-            </a:extLst>
-          </p:cNvPr>
-          <p:cNvCxnSpPr>
-            <a:cxnSpLocks/>
-            <a:stCxn id="55" idx="4"/>
-          </p:cNvCxnSpPr>
-          <p:nvPr/>
-        </p:nvCxnSpPr>
-        <p:spPr>
-          <a:xfrm flipH="1">
-            <a:off x="10712875" y="3579761"/>
-            <a:ext cx="5179" cy="861142"/>
-          </a:xfrm>
-          <a:prstGeom prst="line">
-            <a:avLst/>
-          </a:prstGeom>
-        </p:spPr>
-        <p:style>
-          <a:lnRef idx="2">
-            <a:schemeClr val="dk1"/>
-          </a:lnRef>
-          <a:fillRef idx="0">
-            <a:schemeClr val="dk1"/>
-          </a:fillRef>
-          <a:effectRef idx="1">
-            <a:schemeClr val="dk1"/>
-          </a:effectRef>
-          <a:fontRef idx="minor">
-            <a:schemeClr val="tx1"/>
-          </a:fontRef>
-        </p:style>
-      </p:cxnSp>
-      <p:sp>
-        <p:nvSpPr>
-          <p:cNvPr id="57" name="TextBox 56">
-            <a:extLst>
-              <a:ext uri="{FF2B5EF4-FFF2-40B4-BE49-F238E27FC236}">
-                <a16:creationId xmlns:a16="http://schemas.microsoft.com/office/drawing/2014/main" id="{3C3234DD-9F4A-6546-003F-833B4D225C8C}"/>
-              </a:ext>
-            </a:extLst>
-          </p:cNvPr>
-          <p:cNvSpPr txBox="1"/>
-          <p:nvPr/>
-        </p:nvSpPr>
-        <p:spPr>
-          <a:xfrm>
-            <a:off x="10070175" y="4440903"/>
-            <a:ext cx="1295546" cy="923330"/>
-          </a:xfrm>
-          <a:prstGeom prst="rect">
-            <a:avLst/>
-          </a:prstGeom>
-          <a:noFill/>
-        </p:spPr>
-        <p:txBody>
-          <a:bodyPr wrap="none" rtlCol="0">
-            <a:spAutoFit/>
-          </a:bodyPr>
-          <a:lstStyle/>
-          <a:p>
-            <a:pPr algn="ctr"/>
-            <a:r>
-              <a:rPr lang="en-US" b="1"/>
-              <a:t>2018</a:t>
-            </a:r>
-          </a:p>
-          <a:p>
-            <a:pPr algn="ctr"/>
-            <a:r>
-              <a:rPr lang="en-US"/>
-              <a:t>Sự bùng nổ</a:t>
-            </a:r>
-          </a:p>
-          <a:p>
-            <a:pPr algn="ctr"/>
-            <a:r>
-              <a:rPr lang="en-US"/>
-              <a:t>của LLM</a:t>
-            </a:r>
-          </a:p>
-        </p:txBody>
-      </p:sp>
-      <p:sp>
-        <p:nvSpPr>
           <p:cNvPr id="58" name="TextBox 57">
             <a:extLst>
               <a:ext uri="{FF2B5EF4-FFF2-40B4-BE49-F238E27FC236}">
@@ -6477,6 +5825,42 @@
           </a:p>
         </p:txBody>
       </p:sp>
+      <p:pic>
+        <p:nvPicPr>
+          <p:cNvPr id="7" name="Picture 6" descr="A line of colorful circles&#10;&#10;AI-generated content may be incorrect.">
+            <a:extLst>
+              <a:ext uri="{FF2B5EF4-FFF2-40B4-BE49-F238E27FC236}">
+                <a16:creationId xmlns:a16="http://schemas.microsoft.com/office/drawing/2014/main" id="{A670133F-4560-3710-C873-80B0D2A347DC}"/>
+              </a:ext>
+            </a:extLst>
+          </p:cNvPr>
+          <p:cNvPicPr>
+            <a:picLocks noChangeAspect="1"/>
+          </p:cNvPicPr>
+          <p:nvPr/>
+        </p:nvPicPr>
+        <p:blipFill>
+          <a:blip r:embed="rId3">
+            <a:extLst>
+              <a:ext uri="{28A0092B-C50C-407E-A947-70E740481C1C}">
+                <a14:useLocalDpi xmlns:a14="http://schemas.microsoft.com/office/drawing/2010/main" val="0"/>
+              </a:ext>
+            </a:extLst>
+          </a:blip>
+          <a:stretch>
+            <a:fillRect/>
+          </a:stretch>
+        </p:blipFill>
+        <p:spPr>
+          <a:xfrm>
+            <a:off x="932329" y="1710087"/>
+            <a:ext cx="10327341" cy="3437825"/>
+          </a:xfrm>
+          <a:prstGeom prst="rect">
+            <a:avLst/>
+          </a:prstGeom>
+        </p:spPr>
+      </p:pic>
     </p:spTree>
     <p:extLst>
       <p:ext uri="{BB962C8B-B14F-4D97-AF65-F5344CB8AC3E}">
@@ -6507,130 +5891,42 @@
           <a:chExt cx="0" cy="0"/>
         </a:xfrm>
       </p:grpSpPr>
-      <p:sp>
-        <p:nvSpPr>
-          <p:cNvPr id="3" name="TextBox 2">
-            <a:extLst>
-              <a:ext uri="{FF2B5EF4-FFF2-40B4-BE49-F238E27FC236}">
-                <a16:creationId xmlns:a16="http://schemas.microsoft.com/office/drawing/2014/main" id="{4E5978E3-F900-CA23-529B-59D726ADBC9B}"/>
-              </a:ext>
-            </a:extLst>
-          </p:cNvPr>
-          <p:cNvSpPr txBox="1"/>
+      <p:pic>
+        <p:nvPicPr>
+          <p:cNvPr id="7" name="Picture 6" descr="A screenshot of a computer&#10;&#10;AI-generated content may be incorrect.">
+            <a:extLst>
+              <a:ext uri="{FF2B5EF4-FFF2-40B4-BE49-F238E27FC236}">
+                <a16:creationId xmlns:a16="http://schemas.microsoft.com/office/drawing/2014/main" id="{7913FD91-B87F-D541-223A-6032EB708B15}"/>
+              </a:ext>
+            </a:extLst>
+          </p:cNvPr>
+          <p:cNvPicPr>
+            <a:picLocks noChangeAspect="1"/>
+          </p:cNvPicPr>
           <p:nvPr/>
-        </p:nvSpPr>
+        </p:nvPicPr>
+        <p:blipFill>
+          <a:blip r:embed="rId3">
+            <a:extLst>
+              <a:ext uri="{28A0092B-C50C-407E-A947-70E740481C1C}">
+                <a14:useLocalDpi xmlns:a14="http://schemas.microsoft.com/office/drawing/2010/main" val="0"/>
+              </a:ext>
+            </a:extLst>
+          </a:blip>
+          <a:stretch>
+            <a:fillRect/>
+          </a:stretch>
+        </p:blipFill>
         <p:spPr>
           <a:xfrm>
-            <a:off x="9886950" y="1485900"/>
-            <a:ext cx="1151277" cy="369332"/>
+            <a:off x="-12886" y="-239911"/>
+            <a:ext cx="12217771" cy="7337822"/>
           </a:xfrm>
           <a:prstGeom prst="rect">
             <a:avLst/>
           </a:prstGeom>
-          <a:noFill/>
         </p:spPr>
-        <p:txBody>
-          <a:bodyPr wrap="none" rtlCol="0">
-            <a:spAutoFit/>
-          </a:bodyPr>
-          <a:lstStyle/>
-          <a:p>
-            <a:r>
-              <a:rPr lang="en-US"/>
-              <a:t>Chú thích</a:t>
-            </a:r>
-          </a:p>
-        </p:txBody>
-      </p:sp>
-      <p:sp>
-        <p:nvSpPr>
-          <p:cNvPr id="4" name="TextBox 3">
-            <a:extLst>
-              <a:ext uri="{FF2B5EF4-FFF2-40B4-BE49-F238E27FC236}">
-                <a16:creationId xmlns:a16="http://schemas.microsoft.com/office/drawing/2014/main" id="{8B84A2BE-AB3E-3655-E630-8375B72F27EC}"/>
-              </a:ext>
-            </a:extLst>
-          </p:cNvPr>
-          <p:cNvSpPr txBox="1"/>
-          <p:nvPr/>
-        </p:nvSpPr>
-        <p:spPr>
-          <a:xfrm>
-            <a:off x="666750" y="1855232"/>
-            <a:ext cx="10834569" cy="1754326"/>
-          </a:xfrm>
-          <a:prstGeom prst="rect">
-            <a:avLst/>
-          </a:prstGeom>
-          <a:noFill/>
-        </p:spPr>
-        <p:txBody>
-          <a:bodyPr wrap="none" rtlCol="0">
-            <a:spAutoFit/>
-          </a:bodyPr>
-          <a:lstStyle/>
-          <a:p>
-            <a:pPr marL="285750" indent="-285750">
-              <a:buFontTx/>
-              <a:buChar char="-"/>
-            </a:pPr>
-            <a:r>
-              <a:rPr lang="en-US"/>
-              <a:t>LLM là gì?</a:t>
-            </a:r>
-          </a:p>
-          <a:p>
-            <a:pPr marL="285750" indent="-285750">
-              <a:buFontTx/>
-              <a:buChar char="-"/>
-            </a:pPr>
-            <a:r>
-              <a:rPr lang="en-US"/>
-              <a:t>Tại sao lại gọi là LLM</a:t>
-            </a:r>
-          </a:p>
-          <a:p>
-            <a:pPr marL="285750" indent="-285750">
-              <a:buFontTx/>
-              <a:buChar char="-"/>
-            </a:pPr>
-            <a:r>
-              <a:rPr lang="en-US"/>
-              <a:t>Dựa trên nguyên lý? (xây dựng dựa trên transformer làm mô hình cơ sở, tuy nhiên thì có chút biến đổi)</a:t>
-            </a:r>
-          </a:p>
-          <a:p>
-            <a:pPr marL="285750" indent="-285750">
-              <a:buFontTx/>
-              <a:buChar char="-"/>
-            </a:pPr>
-            <a:r>
-              <a:rPr lang="en-US"/>
-              <a:t>Nó có thể làm gì? (sinh văn bản, xử lý âm thanh, video…)</a:t>
-            </a:r>
-          </a:p>
-          <a:p>
-            <a:pPr marL="285750" indent="-285750">
-              <a:buFontTx/>
-              <a:buChar char="-"/>
-            </a:pPr>
-            <a:r>
-              <a:rPr lang="en-US"/>
-              <a:t>Kể ra một vài thông số (LLM có thể lên tới hang tỉ tham số, chi phí huấn luyện khổng lồ, kiến trúc phức tạp)</a:t>
-            </a:r>
-          </a:p>
-          <a:p>
-            <a:pPr marL="285750" indent="-285750">
-              <a:buFontTx/>
-              <a:buChar char="-"/>
-            </a:pPr>
-            <a:r>
-              <a:rPr lang="en-US"/>
-              <a:t>chèn hình LLM</a:t>
-            </a:r>
-          </a:p>
-        </p:txBody>
-      </p:sp>
+      </p:pic>
     </p:spTree>
     <p:extLst>
       <p:ext uri="{BB962C8B-B14F-4D97-AF65-F5344CB8AC3E}">
@@ -6661,85 +5957,42 @@
           <a:chExt cx="0" cy="0"/>
         </a:xfrm>
       </p:grpSpPr>
-      <p:sp>
-        <p:nvSpPr>
-          <p:cNvPr id="2" name="TextBox 1">
-            <a:extLst>
-              <a:ext uri="{FF2B5EF4-FFF2-40B4-BE49-F238E27FC236}">
-                <a16:creationId xmlns:a16="http://schemas.microsoft.com/office/drawing/2014/main" id="{5194C927-510B-47DE-D634-D22B44D4AA2E}"/>
-              </a:ext>
-            </a:extLst>
-          </p:cNvPr>
-          <p:cNvSpPr txBox="1"/>
+      <p:pic>
+        <p:nvPicPr>
+          <p:cNvPr id="4" name="Picture 3" descr="A diagram of a software model&#10;&#10;AI-generated content may be incorrect.">
+            <a:extLst>
+              <a:ext uri="{FF2B5EF4-FFF2-40B4-BE49-F238E27FC236}">
+                <a16:creationId xmlns:a16="http://schemas.microsoft.com/office/drawing/2014/main" id="{025959DD-CF58-9169-6EB0-EDEB8CE88814}"/>
+              </a:ext>
+            </a:extLst>
+          </p:cNvPr>
+          <p:cNvPicPr>
+            <a:picLocks noChangeAspect="1"/>
+          </p:cNvPicPr>
           <p:nvPr/>
-        </p:nvSpPr>
+        </p:nvPicPr>
+        <p:blipFill>
+          <a:blip r:embed="rId3">
+            <a:extLst>
+              <a:ext uri="{28A0092B-C50C-407E-A947-70E740481C1C}">
+                <a14:useLocalDpi xmlns:a14="http://schemas.microsoft.com/office/drawing/2010/main" val="0"/>
+              </a:ext>
+            </a:extLst>
+          </a:blip>
+          <a:stretch>
+            <a:fillRect/>
+          </a:stretch>
+        </p:blipFill>
         <p:spPr>
           <a:xfrm>
-            <a:off x="823338" y="1951672"/>
-            <a:ext cx="10545323" cy="1477328"/>
+            <a:off x="774601" y="723293"/>
+            <a:ext cx="10642797" cy="5411413"/>
           </a:xfrm>
           <a:prstGeom prst="rect">
             <a:avLst/>
           </a:prstGeom>
-          <a:noFill/>
         </p:spPr>
-        <p:txBody>
-          <a:bodyPr wrap="none" rtlCol="0">
-            <a:spAutoFit/>
-          </a:bodyPr>
-          <a:lstStyle/>
-          <a:p>
-            <a:pPr marL="285750" indent="-285750">
-              <a:buFontTx/>
-              <a:buChar char="-"/>
-            </a:pPr>
-            <a:r>
-              <a:rPr lang="en-US"/>
-              <a:t>Hệ thống RAG là gì?</a:t>
-            </a:r>
-          </a:p>
-          <a:p>
-            <a:pPr marL="285750" indent="-285750">
-              <a:buFontTx/>
-              <a:buChar char="-"/>
-            </a:pPr>
-            <a:r>
-              <a:rPr lang="en-US"/>
-              <a:t>Tác dụng?</a:t>
-            </a:r>
-          </a:p>
-          <a:p>
-            <a:pPr marL="285750" indent="-285750">
-              <a:buFontTx/>
-              <a:buChar char="-"/>
-            </a:pPr>
-            <a:r>
-              <a:rPr lang="en-US"/>
-              <a:t>LLM được sử dụng trong hệ thống rag như thế nào?</a:t>
-            </a:r>
-          </a:p>
-          <a:p>
-            <a:pPr marL="285750" indent="-285750">
-              <a:buFontTx/>
-              <a:buChar char="-"/>
-            </a:pPr>
-            <a:r>
-              <a:rPr lang="en-US"/>
-              <a:t>Sử dụng LLM và hệ thống rag để xây dựng chatbot hõ trợ học lịch sử việt nam</a:t>
-            </a:r>
-          </a:p>
-          <a:p>
-            <a:pPr marL="285750" indent="-285750">
-              <a:buFontTx/>
-              <a:buChar char="-"/>
-            </a:pPr>
-            <a:r>
-              <a:rPr lang="en-US"/>
-              <a:t> (tại sao 2 cái đó lại có thể sử dụng để xây dung chatbot? Lợi tích so với các phương pháp truyền thống)</a:t>
-            </a:r>
-          </a:p>
-        </p:txBody>
-      </p:sp>
+      </p:pic>
     </p:spTree>
     <p:extLst>
       <p:ext uri="{BB962C8B-B14F-4D97-AF65-F5344CB8AC3E}">
@@ -6970,62 +6223,42 @@
           <a:chExt cx="0" cy="0"/>
         </a:xfrm>
       </p:grpSpPr>
-      <p:sp>
-        <p:nvSpPr>
-          <p:cNvPr id="2" name="TextBox 1">
-            <a:extLst>
-              <a:ext uri="{FF2B5EF4-FFF2-40B4-BE49-F238E27FC236}">
-                <a16:creationId xmlns:a16="http://schemas.microsoft.com/office/drawing/2014/main" id="{3E28C3E0-7451-F051-7635-94E578292DF8}"/>
-              </a:ext>
-            </a:extLst>
-          </p:cNvPr>
-          <p:cNvSpPr txBox="1"/>
+      <p:pic>
+        <p:nvPicPr>
+          <p:cNvPr id="4" name="Picture 3" descr="A black background with white text&#10;&#10;AI-generated content may be incorrect.">
+            <a:extLst>
+              <a:ext uri="{FF2B5EF4-FFF2-40B4-BE49-F238E27FC236}">
+                <a16:creationId xmlns:a16="http://schemas.microsoft.com/office/drawing/2014/main" id="{639464A9-8ACE-E2AB-1F57-892582DE6A6A}"/>
+              </a:ext>
+            </a:extLst>
+          </p:cNvPr>
+          <p:cNvPicPr>
+            <a:picLocks noChangeAspect="1"/>
+          </p:cNvPicPr>
           <p:nvPr/>
-        </p:nvSpPr>
+        </p:nvPicPr>
+        <p:blipFill>
+          <a:blip r:embed="rId3">
+            <a:extLst>
+              <a:ext uri="{28A0092B-C50C-407E-A947-70E740481C1C}">
+                <a14:useLocalDpi xmlns:a14="http://schemas.microsoft.com/office/drawing/2010/main" val="0"/>
+              </a:ext>
+            </a:extLst>
+          </a:blip>
+          <a:stretch>
+            <a:fillRect/>
+          </a:stretch>
+        </p:blipFill>
         <p:spPr>
           <a:xfrm>
-            <a:off x="2571750" y="2667000"/>
-            <a:ext cx="5210337" cy="923330"/>
+            <a:off x="806500" y="183112"/>
+            <a:ext cx="10578999" cy="6491776"/>
           </a:xfrm>
           <a:prstGeom prst="rect">
             <a:avLst/>
           </a:prstGeom>
-          <a:noFill/>
         </p:spPr>
-        <p:txBody>
-          <a:bodyPr wrap="none" rtlCol="0">
-            <a:spAutoFit/>
-          </a:bodyPr>
-          <a:lstStyle/>
-          <a:p>
-            <a:pPr marL="285750" indent="-285750">
-              <a:buFontTx/>
-              <a:buChar char="-"/>
-            </a:pPr>
-            <a:r>
-              <a:rPr lang="en-US"/>
-              <a:t>Phương pháp đề xuất</a:t>
-            </a:r>
-          </a:p>
-          <a:p>
-            <a:pPr marL="285750" indent="-285750">
-              <a:buFontTx/>
-              <a:buChar char="-"/>
-            </a:pPr>
-            <a:r>
-              <a:rPr lang="en-US"/>
-              <a:t>Chèn hình, miêu tả chi tiết phương pháp đề xuất</a:t>
-            </a:r>
-          </a:p>
-          <a:p>
-            <a:pPr marL="285750" indent="-285750">
-              <a:buFontTx/>
-              <a:buChar char="-"/>
-            </a:pPr>
-            <a:endParaRPr lang="en-US"/>
-          </a:p>
-        </p:txBody>
-      </p:sp>
+      </p:pic>
     </p:spTree>
     <p:extLst>
       <p:ext uri="{BB962C8B-B14F-4D97-AF65-F5344CB8AC3E}">
@@ -7062,45 +6295,42 @@
           <a:chExt cx="0" cy="0"/>
         </a:xfrm>
       </p:grpSpPr>
-      <p:sp>
-        <p:nvSpPr>
-          <p:cNvPr id="2" name="TextBox 1">
-            <a:extLst>
-              <a:ext uri="{FF2B5EF4-FFF2-40B4-BE49-F238E27FC236}">
-                <a16:creationId xmlns:a16="http://schemas.microsoft.com/office/drawing/2014/main" id="{8AE17E17-E980-B51F-713B-33484F322492}"/>
-              </a:ext>
-            </a:extLst>
-          </p:cNvPr>
-          <p:cNvSpPr txBox="1"/>
+      <p:pic>
+        <p:nvPicPr>
+          <p:cNvPr id="4" name="Picture 3" descr="A screenshot of a computer screen&#10;&#10;AI-generated content may be incorrect.">
+            <a:extLst>
+              <a:ext uri="{FF2B5EF4-FFF2-40B4-BE49-F238E27FC236}">
+                <a16:creationId xmlns:a16="http://schemas.microsoft.com/office/drawing/2014/main" id="{B2EA4F12-5E6C-115B-1FC5-640B3BC0BFE9}"/>
+              </a:ext>
+            </a:extLst>
+          </p:cNvPr>
+          <p:cNvPicPr>
+            <a:picLocks noChangeAspect="1"/>
+          </p:cNvPicPr>
           <p:nvPr/>
-        </p:nvSpPr>
+        </p:nvPicPr>
+        <p:blipFill>
+          <a:blip r:embed="rId3">
+            <a:extLst>
+              <a:ext uri="{28A0092B-C50C-407E-A947-70E740481C1C}">
+                <a14:useLocalDpi xmlns:a14="http://schemas.microsoft.com/office/drawing/2010/main" val="0"/>
+              </a:ext>
+            </a:extLst>
+          </a:blip>
+          <a:stretch>
+            <a:fillRect/>
+          </a:stretch>
+        </p:blipFill>
         <p:spPr>
           <a:xfrm>
-            <a:off x="2571750" y="2667000"/>
-            <a:ext cx="2497607" cy="369332"/>
+            <a:off x="857066" y="165538"/>
+            <a:ext cx="10477868" cy="6526924"/>
           </a:xfrm>
           <a:prstGeom prst="rect">
             <a:avLst/>
           </a:prstGeom>
-          <a:noFill/>
         </p:spPr>
-        <p:txBody>
-          <a:bodyPr wrap="none" rtlCol="0">
-            <a:spAutoFit/>
-          </a:bodyPr>
-          <a:lstStyle/>
-          <a:p>
-            <a:pPr marL="285750" indent="-285750">
-              <a:buFontTx/>
-              <a:buChar char="-"/>
-            </a:pPr>
-            <a:r>
-              <a:rPr lang="en-US"/>
-              <a:t>Hệ thống rag đề xuất</a:t>
-            </a:r>
-          </a:p>
-        </p:txBody>
-      </p:sp>
+      </p:pic>
     </p:spTree>
     <p:extLst>
       <p:ext uri="{BB962C8B-B14F-4D97-AF65-F5344CB8AC3E}">

--- a/documents/slide bao cao.pptx
+++ b/documents/slide bao cao.pptx
@@ -5,7 +5,7 @@
     <p:sldMasterId id="2147483648" r:id="rId1"/>
   </p:sldMasterIdLst>
   <p:notesMasterIdLst>
-    <p:notesMasterId r:id="rId27"/>
+    <p:notesMasterId r:id="rId28"/>
   </p:notesMasterIdLst>
   <p:sldIdLst>
     <p:sldId id="256" r:id="rId2"/>
@@ -19,20 +19,21 @@
     <p:sldId id="267" r:id="rId10"/>
     <p:sldId id="276" r:id="rId11"/>
     <p:sldId id="264" r:id="rId12"/>
-    <p:sldId id="265" r:id="rId13"/>
-    <p:sldId id="278" r:id="rId14"/>
-    <p:sldId id="277" r:id="rId15"/>
-    <p:sldId id="279" r:id="rId16"/>
-    <p:sldId id="266" r:id="rId17"/>
-    <p:sldId id="260" r:id="rId18"/>
-    <p:sldId id="268" r:id="rId19"/>
-    <p:sldId id="280" r:id="rId20"/>
-    <p:sldId id="281" r:id="rId21"/>
+    <p:sldId id="285" r:id="rId13"/>
+    <p:sldId id="284" r:id="rId14"/>
+    <p:sldId id="260" r:id="rId15"/>
+    <p:sldId id="278" r:id="rId16"/>
+    <p:sldId id="277" r:id="rId17"/>
+    <p:sldId id="279" r:id="rId18"/>
+    <p:sldId id="280" r:id="rId19"/>
+    <p:sldId id="281" r:id="rId20"/>
+    <p:sldId id="286" r:id="rId21"/>
     <p:sldId id="269" r:id="rId22"/>
     <p:sldId id="270" r:id="rId23"/>
     <p:sldId id="271" r:id="rId24"/>
-    <p:sldId id="272" r:id="rId25"/>
-    <p:sldId id="273" r:id="rId26"/>
+    <p:sldId id="282" r:id="rId25"/>
+    <p:sldId id="272" r:id="rId26"/>
+    <p:sldId id="273" r:id="rId27"/>
   </p:sldIdLst>
   <p:sldSz cx="12192000" cy="6858000"/>
   <p:notesSz cx="6858000" cy="9144000"/>
@@ -621,7 +622,7 @@
           <a:p>
             <a:r>
               <a:rPr lang="en-US"/>
-              <a:t>Word embedding</a:t>
+              <a:t>Đánh giá hiệu quả embedding của các mô hình embedding</a:t>
             </a:r>
           </a:p>
         </p:txBody>
@@ -652,7 +653,7 @@
     </p:spTree>
     <p:extLst>
       <p:ext uri="{BB962C8B-B14F-4D97-AF65-F5344CB8AC3E}">
-        <p14:creationId xmlns:p14="http://schemas.microsoft.com/office/powerpoint/2010/main" val="1673060355"/>
+        <p14:creationId xmlns:p14="http://schemas.microsoft.com/office/powerpoint/2010/main" val="3585398163"/>
       </p:ext>
     </p:extLst>
   </p:cSld>
@@ -730,7 +731,7 @@
           <a:p>
             <a:fld id="{864AE1F8-3712-49A6-BC7C-273E12ADCFAB}" type="slidenum">
               <a:rPr lang="en-US" smtClean="0"/>
-              <a:t>19</a:t>
+              <a:t>18</a:t>
             </a:fld>
             <a:endParaRPr lang="en-US"/>
           </a:p>
@@ -817,7 +818,7 @@
           <a:p>
             <a:fld id="{864AE1F8-3712-49A6-BC7C-273E12ADCFAB}" type="slidenum">
               <a:rPr lang="en-US" smtClean="0"/>
-              <a:t>20</a:t>
+              <a:t>19</a:t>
             </a:fld>
             <a:endParaRPr lang="en-US"/>
           </a:p>
@@ -827,6 +828,409 @@
     <p:extLst>
       <p:ext uri="{BB962C8B-B14F-4D97-AF65-F5344CB8AC3E}">
         <p14:creationId xmlns:p14="http://schemas.microsoft.com/office/powerpoint/2010/main" val="2076859014"/>
+      </p:ext>
+    </p:extLst>
+  </p:cSld>
+  <p:clrMapOvr>
+    <a:masterClrMapping/>
+  </p:clrMapOvr>
+</p:notes>
+</file>
+
+<file path=ppt/notesSlides/notesSlide13.xml><?xml version="1.0" encoding="utf-8"?>
+<p:notes xmlns:a="http://schemas.openxmlformats.org/drawingml/2006/main" xmlns:r="http://schemas.openxmlformats.org/officeDocument/2006/relationships" xmlns:p="http://schemas.openxmlformats.org/presentationml/2006/main">
+  <p:cSld>
+    <p:spTree>
+      <p:nvGrpSpPr>
+        <p:cNvPr id="1" name=""/>
+        <p:cNvGrpSpPr/>
+        <p:nvPr/>
+      </p:nvGrpSpPr>
+      <p:grpSpPr>
+        <a:xfrm>
+          <a:off x="0" y="0"/>
+          <a:ext cx="0" cy="0"/>
+          <a:chOff x="0" y="0"/>
+          <a:chExt cx="0" cy="0"/>
+        </a:xfrm>
+      </p:grpSpPr>
+      <p:sp>
+        <p:nvSpPr>
+          <p:cNvPr id="2" name="Slide Image Placeholder 1"/>
+          <p:cNvSpPr>
+            <a:spLocks noGrp="1" noRot="1" noChangeAspect="1"/>
+          </p:cNvSpPr>
+          <p:nvPr>
+            <p:ph type="sldImg"/>
+          </p:nvPr>
+        </p:nvSpPr>
+        <p:spPr/>
+      </p:sp>
+      <p:sp>
+        <p:nvSpPr>
+          <p:cNvPr id="3" name="Notes Placeholder 2"/>
+          <p:cNvSpPr>
+            <a:spLocks noGrp="1"/>
+          </p:cNvSpPr>
+          <p:nvPr>
+            <p:ph type="body" idx="1"/>
+          </p:nvPr>
+        </p:nvSpPr>
+        <p:spPr/>
+        <p:txBody>
+          <a:bodyPr/>
+          <a:lstStyle/>
+          <a:p>
+            <a:r>
+              <a:rPr lang="en-US"/>
+              <a:t>Các chức năng của hệ thống:</a:t>
+            </a:r>
+          </a:p>
+          <a:p>
+            <a:r>
+              <a:rPr lang="en-US"/>
+              <a:t>- Các chức năng đưuọc triển khai cho hệ thống (text chat, voice realtime.., exam…)</a:t>
+            </a:r>
+          </a:p>
+          <a:p>
+            <a:endParaRPr lang="en-US"/>
+          </a:p>
+        </p:txBody>
+      </p:sp>
+      <p:sp>
+        <p:nvSpPr>
+          <p:cNvPr id="4" name="Slide Number Placeholder 3"/>
+          <p:cNvSpPr>
+            <a:spLocks noGrp="1"/>
+          </p:cNvSpPr>
+          <p:nvPr>
+            <p:ph type="sldNum" sz="quarter" idx="5"/>
+          </p:nvPr>
+        </p:nvSpPr>
+        <p:spPr/>
+        <p:txBody>
+          <a:bodyPr/>
+          <a:lstStyle/>
+          <a:p>
+            <a:fld id="{864AE1F8-3712-49A6-BC7C-273E12ADCFAB}" type="slidenum">
+              <a:rPr lang="en-US" smtClean="0"/>
+              <a:t>21</a:t>
+            </a:fld>
+            <a:endParaRPr lang="en-US"/>
+          </a:p>
+        </p:txBody>
+      </p:sp>
+    </p:spTree>
+    <p:extLst>
+      <p:ext uri="{BB962C8B-B14F-4D97-AF65-F5344CB8AC3E}">
+        <p14:creationId xmlns:p14="http://schemas.microsoft.com/office/powerpoint/2010/main" val="3027899732"/>
+      </p:ext>
+    </p:extLst>
+  </p:cSld>
+  <p:clrMapOvr>
+    <a:masterClrMapping/>
+  </p:clrMapOvr>
+</p:notes>
+</file>
+
+<file path=ppt/notesSlides/notesSlide14.xml><?xml version="1.0" encoding="utf-8"?>
+<p:notes xmlns:a="http://schemas.openxmlformats.org/drawingml/2006/main" xmlns:r="http://schemas.openxmlformats.org/officeDocument/2006/relationships" xmlns:p="http://schemas.openxmlformats.org/presentationml/2006/main">
+  <p:cSld>
+    <p:spTree>
+      <p:nvGrpSpPr>
+        <p:cNvPr id="1" name=""/>
+        <p:cNvGrpSpPr/>
+        <p:nvPr/>
+      </p:nvGrpSpPr>
+      <p:grpSpPr>
+        <a:xfrm>
+          <a:off x="0" y="0"/>
+          <a:ext cx="0" cy="0"/>
+          <a:chOff x="0" y="0"/>
+          <a:chExt cx="0" cy="0"/>
+        </a:xfrm>
+      </p:grpSpPr>
+      <p:sp>
+        <p:nvSpPr>
+          <p:cNvPr id="2" name="Slide Image Placeholder 1"/>
+          <p:cNvSpPr>
+            <a:spLocks noGrp="1" noRot="1" noChangeAspect="1"/>
+          </p:cNvSpPr>
+          <p:nvPr>
+            <p:ph type="sldImg"/>
+          </p:nvPr>
+        </p:nvSpPr>
+        <p:spPr/>
+      </p:sp>
+      <p:sp>
+        <p:nvSpPr>
+          <p:cNvPr id="3" name="Notes Placeholder 2"/>
+          <p:cNvSpPr>
+            <a:spLocks noGrp="1"/>
+          </p:cNvSpPr>
+          <p:nvPr>
+            <p:ph type="body" idx="1"/>
+          </p:nvPr>
+        </p:nvSpPr>
+        <p:spPr/>
+        <p:txBody>
+          <a:bodyPr/>
+          <a:lstStyle/>
+          <a:p>
+            <a:pPr marL="0" marR="0" lvl="0" indent="0" algn="l" defTabSz="914400" rtl="0" eaLnBrk="1" fontAlgn="auto" latinLnBrk="0" hangingPunct="1">
+              <a:lnSpc>
+                <a:spcPct val="100000"/>
+              </a:lnSpc>
+              <a:spcBef>
+                <a:spcPts val="0"/>
+              </a:spcBef>
+              <a:spcAft>
+                <a:spcPts val="0"/>
+              </a:spcAft>
+              <a:buClrTx/>
+              <a:buSzTx/>
+              <a:buFontTx/>
+              <a:buNone/>
+              <a:tabLst/>
+              <a:defRPr/>
+            </a:pPr>
+            <a:r>
+              <a:rPr lang="en-US"/>
+              <a:t>Các công nghệ STT + TTS</a:t>
+            </a:r>
+          </a:p>
+          <a:p>
+            <a:endParaRPr lang="en-US"/>
+          </a:p>
+        </p:txBody>
+      </p:sp>
+      <p:sp>
+        <p:nvSpPr>
+          <p:cNvPr id="4" name="Slide Number Placeholder 3"/>
+          <p:cNvSpPr>
+            <a:spLocks noGrp="1"/>
+          </p:cNvSpPr>
+          <p:nvPr>
+            <p:ph type="sldNum" sz="quarter" idx="5"/>
+          </p:nvPr>
+        </p:nvSpPr>
+        <p:spPr/>
+        <p:txBody>
+          <a:bodyPr/>
+          <a:lstStyle/>
+          <a:p>
+            <a:fld id="{864AE1F8-3712-49A6-BC7C-273E12ADCFAB}" type="slidenum">
+              <a:rPr lang="en-US" smtClean="0"/>
+              <a:t>23</a:t>
+            </a:fld>
+            <a:endParaRPr lang="en-US"/>
+          </a:p>
+        </p:txBody>
+      </p:sp>
+    </p:spTree>
+    <p:extLst>
+      <p:ext uri="{BB962C8B-B14F-4D97-AF65-F5344CB8AC3E}">
+        <p14:creationId xmlns:p14="http://schemas.microsoft.com/office/powerpoint/2010/main" val="1416246105"/>
+      </p:ext>
+    </p:extLst>
+  </p:cSld>
+  <p:clrMapOvr>
+    <a:masterClrMapping/>
+  </p:clrMapOvr>
+</p:notes>
+</file>
+
+<file path=ppt/notesSlides/notesSlide15.xml><?xml version="1.0" encoding="utf-8"?>
+<p:notes xmlns:a="http://schemas.openxmlformats.org/drawingml/2006/main" xmlns:r="http://schemas.openxmlformats.org/officeDocument/2006/relationships" xmlns:p="http://schemas.openxmlformats.org/presentationml/2006/main">
+  <p:cSld>
+    <p:spTree>
+      <p:nvGrpSpPr>
+        <p:cNvPr id="1" name=""/>
+        <p:cNvGrpSpPr/>
+        <p:nvPr/>
+      </p:nvGrpSpPr>
+      <p:grpSpPr>
+        <a:xfrm>
+          <a:off x="0" y="0"/>
+          <a:ext cx="0" cy="0"/>
+          <a:chOff x="0" y="0"/>
+          <a:chExt cx="0" cy="0"/>
+        </a:xfrm>
+      </p:grpSpPr>
+      <p:sp>
+        <p:nvSpPr>
+          <p:cNvPr id="2" name="Slide Image Placeholder 1"/>
+          <p:cNvSpPr>
+            <a:spLocks noGrp="1" noRot="1" noChangeAspect="1"/>
+          </p:cNvSpPr>
+          <p:nvPr>
+            <p:ph type="sldImg"/>
+          </p:nvPr>
+        </p:nvSpPr>
+        <p:spPr/>
+      </p:sp>
+      <p:sp>
+        <p:nvSpPr>
+          <p:cNvPr id="3" name="Notes Placeholder 2"/>
+          <p:cNvSpPr>
+            <a:spLocks noGrp="1"/>
+          </p:cNvSpPr>
+          <p:nvPr>
+            <p:ph type="body" idx="1"/>
+          </p:nvPr>
+        </p:nvSpPr>
+        <p:spPr/>
+        <p:txBody>
+          <a:bodyPr/>
+          <a:lstStyle/>
+          <a:p>
+            <a:pPr marL="0" marR="0" lvl="0" indent="0" algn="l" defTabSz="914400" rtl="0" eaLnBrk="1" fontAlgn="auto" latinLnBrk="0" hangingPunct="1">
+              <a:lnSpc>
+                <a:spcPct val="100000"/>
+              </a:lnSpc>
+              <a:spcBef>
+                <a:spcPts val="0"/>
+              </a:spcBef>
+              <a:spcAft>
+                <a:spcPts val="0"/>
+              </a:spcAft>
+              <a:buClrTx/>
+              <a:buSzTx/>
+              <a:buFontTx/>
+              <a:buNone/>
+              <a:tabLst/>
+              <a:defRPr/>
+            </a:pPr>
+            <a:r>
+              <a:rPr lang="en-US"/>
+              <a:t>Phương pháp triển khai hệ thống của chức năng trò chuyện realtime</a:t>
+            </a:r>
+          </a:p>
+          <a:p>
+            <a:endParaRPr lang="en-US"/>
+          </a:p>
+        </p:txBody>
+      </p:sp>
+      <p:sp>
+        <p:nvSpPr>
+          <p:cNvPr id="4" name="Slide Number Placeholder 3"/>
+          <p:cNvSpPr>
+            <a:spLocks noGrp="1"/>
+          </p:cNvSpPr>
+          <p:nvPr>
+            <p:ph type="sldNum" sz="quarter" idx="5"/>
+          </p:nvPr>
+        </p:nvSpPr>
+        <p:spPr/>
+        <p:txBody>
+          <a:bodyPr/>
+          <a:lstStyle/>
+          <a:p>
+            <a:fld id="{864AE1F8-3712-49A6-BC7C-273E12ADCFAB}" type="slidenum">
+              <a:rPr lang="en-US" smtClean="0"/>
+              <a:t>24</a:t>
+            </a:fld>
+            <a:endParaRPr lang="en-US"/>
+          </a:p>
+        </p:txBody>
+      </p:sp>
+    </p:spTree>
+    <p:extLst>
+      <p:ext uri="{BB962C8B-B14F-4D97-AF65-F5344CB8AC3E}">
+        <p14:creationId xmlns:p14="http://schemas.microsoft.com/office/powerpoint/2010/main" val="1300917271"/>
+      </p:ext>
+    </p:extLst>
+  </p:cSld>
+  <p:clrMapOvr>
+    <a:masterClrMapping/>
+  </p:clrMapOvr>
+</p:notes>
+</file>
+
+<file path=ppt/notesSlides/notesSlide16.xml><?xml version="1.0" encoding="utf-8"?>
+<p:notes xmlns:a="http://schemas.openxmlformats.org/drawingml/2006/main" xmlns:r="http://schemas.openxmlformats.org/officeDocument/2006/relationships" xmlns:p="http://schemas.openxmlformats.org/presentationml/2006/main">
+  <p:cSld>
+    <p:spTree>
+      <p:nvGrpSpPr>
+        <p:cNvPr id="1" name=""/>
+        <p:cNvGrpSpPr/>
+        <p:nvPr/>
+      </p:nvGrpSpPr>
+      <p:grpSpPr>
+        <a:xfrm>
+          <a:off x="0" y="0"/>
+          <a:ext cx="0" cy="0"/>
+          <a:chOff x="0" y="0"/>
+          <a:chExt cx="0" cy="0"/>
+        </a:xfrm>
+      </p:grpSpPr>
+      <p:sp>
+        <p:nvSpPr>
+          <p:cNvPr id="2" name="Slide Image Placeholder 1"/>
+          <p:cNvSpPr>
+            <a:spLocks noGrp="1" noRot="1" noChangeAspect="1"/>
+          </p:cNvSpPr>
+          <p:nvPr>
+            <p:ph type="sldImg"/>
+          </p:nvPr>
+        </p:nvSpPr>
+        <p:spPr/>
+      </p:sp>
+      <p:sp>
+        <p:nvSpPr>
+          <p:cNvPr id="3" name="Notes Placeholder 2"/>
+          <p:cNvSpPr>
+            <a:spLocks noGrp="1"/>
+          </p:cNvSpPr>
+          <p:nvPr>
+            <p:ph type="body" idx="1"/>
+          </p:nvPr>
+        </p:nvSpPr>
+        <p:spPr/>
+        <p:txBody>
+          <a:bodyPr/>
+          <a:lstStyle/>
+          <a:p>
+            <a:r>
+              <a:rPr lang="en-US"/>
+              <a:t>Quá trình sinh phản hồi</a:t>
+            </a:r>
+          </a:p>
+          <a:p>
+            <a:r>
+              <a:rPr lang="en-US"/>
+              <a:t>Đề cập đến data được embedding và retrieval như thế nào</a:t>
+            </a:r>
+          </a:p>
+        </p:txBody>
+      </p:sp>
+      <p:sp>
+        <p:nvSpPr>
+          <p:cNvPr id="4" name="Slide Number Placeholder 3"/>
+          <p:cNvSpPr>
+            <a:spLocks noGrp="1"/>
+          </p:cNvSpPr>
+          <p:nvPr>
+            <p:ph type="sldNum" sz="quarter" idx="5"/>
+          </p:nvPr>
+        </p:nvSpPr>
+        <p:spPr/>
+        <p:txBody>
+          <a:bodyPr/>
+          <a:lstStyle/>
+          <a:p>
+            <a:fld id="{864AE1F8-3712-49A6-BC7C-273E12ADCFAB}" type="slidenum">
+              <a:rPr lang="en-US" smtClean="0"/>
+              <a:t>25</a:t>
+            </a:fld>
+            <a:endParaRPr lang="en-US"/>
+          </a:p>
+        </p:txBody>
+      </p:sp>
+    </p:spTree>
+    <p:extLst>
+      <p:ext uri="{BB962C8B-B14F-4D97-AF65-F5344CB8AC3E}">
+        <p14:creationId xmlns:p14="http://schemas.microsoft.com/office/powerpoint/2010/main" val="1742359746"/>
       </p:ext>
     </p:extLst>
   </p:cSld>
@@ -1473,8 +1877,35 @@
           <a:p>
             <a:r>
               <a:rPr lang="en-US"/>
-              <a:t>Thông số của các mô hình embedding</a:t>
+              <a:t>Word embedding</a:t>
             </a:r>
+          </a:p>
+          <a:p>
+            <a:r>
+              <a:rPr lang="en-US"/>
+              <a:t>We là gì? Ánh xạ từ word sang vector</a:t>
+            </a:r>
+          </a:p>
+          <a:p>
+            <a:r>
+              <a:rPr lang="en-US"/>
+              <a:t>Trong đó mỗi chiều là 1 thuộc tính…</a:t>
+            </a:r>
+          </a:p>
+          <a:p>
+            <a:r>
+              <a:rPr lang="en-US"/>
+              <a:t>Ví dụ như trong hình…</a:t>
+            </a:r>
+          </a:p>
+          <a:p>
+            <a:r>
+              <a:rPr lang="en-US"/>
+              <a:t>Như vậy,… “tóm tắt kết quả”</a:t>
+            </a:r>
+          </a:p>
+          <a:p>
+            <a:endParaRPr lang="en-US"/>
           </a:p>
         </p:txBody>
       </p:sp>
@@ -1495,7 +1926,7 @@
           <a:p>
             <a:fld id="{864AE1F8-3712-49A6-BC7C-273E12ADCFAB}" type="slidenum">
               <a:rPr lang="en-US" smtClean="0"/>
-              <a:t>13</a:t>
+              <a:t>14</a:t>
             </a:fld>
             <a:endParaRPr lang="en-US"/>
           </a:p>
@@ -1504,7 +1935,7 @@
     </p:spTree>
     <p:extLst>
       <p:ext uri="{BB962C8B-B14F-4D97-AF65-F5344CB8AC3E}">
-        <p14:creationId xmlns:p14="http://schemas.microsoft.com/office/powerpoint/2010/main" val="109299988"/>
+        <p14:creationId xmlns:p14="http://schemas.microsoft.com/office/powerpoint/2010/main" val="1673060355"/>
       </p:ext>
     </p:extLst>
   </p:cSld>
@@ -1560,7 +1991,7 @@
           <a:p>
             <a:r>
               <a:rPr lang="en-US"/>
-              <a:t>Đánh giá hiệu quả tokenization của các mô hình embedding</a:t>
+              <a:t>Thông số của các mô hình embedding</a:t>
             </a:r>
           </a:p>
         </p:txBody>
@@ -1582,7 +2013,7 @@
           <a:p>
             <a:fld id="{864AE1F8-3712-49A6-BC7C-273E12ADCFAB}" type="slidenum">
               <a:rPr lang="en-US" smtClean="0"/>
-              <a:t>14</a:t>
+              <a:t>15</a:t>
             </a:fld>
             <a:endParaRPr lang="en-US"/>
           </a:p>
@@ -1591,7 +2022,7 @@
     </p:spTree>
     <p:extLst>
       <p:ext uri="{BB962C8B-B14F-4D97-AF65-F5344CB8AC3E}">
-        <p14:creationId xmlns:p14="http://schemas.microsoft.com/office/powerpoint/2010/main" val="2011407383"/>
+        <p14:creationId xmlns:p14="http://schemas.microsoft.com/office/powerpoint/2010/main" val="109299988"/>
       </p:ext>
     </p:extLst>
   </p:cSld>
@@ -1647,7 +2078,7 @@
           <a:p>
             <a:r>
               <a:rPr lang="en-US"/>
-              <a:t>Đánh giá hiệu quả embedding của các mô hình embedding</a:t>
+              <a:t>Đánh giá hiệu quả tokenization của các mô hình embedding</a:t>
             </a:r>
           </a:p>
         </p:txBody>
@@ -1669,7 +2100,7 @@
           <a:p>
             <a:fld id="{864AE1F8-3712-49A6-BC7C-273E12ADCFAB}" type="slidenum">
               <a:rPr lang="en-US" smtClean="0"/>
-              <a:t>15</a:t>
+              <a:t>16</a:t>
             </a:fld>
             <a:endParaRPr lang="en-US"/>
           </a:p>
@@ -1678,7 +2109,7 @@
     </p:spTree>
     <p:extLst>
       <p:ext uri="{BB962C8B-B14F-4D97-AF65-F5344CB8AC3E}">
-        <p14:creationId xmlns:p14="http://schemas.microsoft.com/office/powerpoint/2010/main" val="3585398163"/>
+        <p14:creationId xmlns:p14="http://schemas.microsoft.com/office/powerpoint/2010/main" val="2011407383"/>
       </p:ext>
     </p:extLst>
   </p:cSld>
@@ -5085,146 +5516,9 @@
           <a:chExt cx="0" cy="0"/>
         </a:xfrm>
       </p:grpSpPr>
-      <p:sp>
-        <p:nvSpPr>
-          <p:cNvPr id="9" name="Rectangle 8">
-            <a:extLst>
-              <a:ext uri="{FF2B5EF4-FFF2-40B4-BE49-F238E27FC236}">
-                <a16:creationId xmlns:a16="http://schemas.microsoft.com/office/drawing/2014/main" id="{A9F529C3-C941-49FD-8C67-82F134F64BDB}"/>
-              </a:ext>
-              <a:ext uri="{C183D7F6-B498-43B3-948B-1728B52AA6E4}">
-                <adec:decorative xmlns:adec="http://schemas.microsoft.com/office/drawing/2017/decorative" val="1"/>
-              </a:ext>
-            </a:extLst>
-          </p:cNvPr>
-          <p:cNvSpPr>
-            <a:spLocks noGrp="1" noRot="1" noChangeAspect="1" noMove="1" noResize="1" noEditPoints="1" noAdjustHandles="1" noChangeArrowheads="1" noChangeShapeType="1" noTextEdit="1"/>
-          </p:cNvSpPr>
-          <p:nvPr>
-            <p:extLst>
-              <p:ext uri="{386F3935-93C4-4BCD-93E2-E3B085C9AB24}">
-                <p16:designElem xmlns:p16="http://schemas.microsoft.com/office/powerpoint/2015/main" val="1"/>
-              </p:ext>
-            </p:extLst>
-          </p:nvPr>
-        </p:nvSpPr>
-        <p:spPr>
-          <a:xfrm>
-            <a:off x="0" y="0"/>
-            <a:ext cx="12192000" cy="6858000"/>
-          </a:xfrm>
-          <a:prstGeom prst="rect">
-            <a:avLst/>
-          </a:prstGeom>
-          <a:solidFill>
-            <a:schemeClr val="tx1">
-              <a:lumMod val="50000"/>
-              <a:lumOff val="50000"/>
-              <a:alpha val="30000"/>
-            </a:schemeClr>
-          </a:solidFill>
-          <a:ln>
-            <a:noFill/>
-          </a:ln>
-        </p:spPr>
-        <p:style>
-          <a:lnRef idx="2">
-            <a:schemeClr val="accent1">
-              <a:shade val="50000"/>
-            </a:schemeClr>
-          </a:lnRef>
-          <a:fillRef idx="1">
-            <a:schemeClr val="accent1"/>
-          </a:fillRef>
-          <a:effectRef idx="0">
-            <a:schemeClr val="accent1"/>
-          </a:effectRef>
-          <a:fontRef idx="minor">
-            <a:schemeClr val="lt1"/>
-          </a:fontRef>
-        </p:style>
-        <p:txBody>
-          <a:bodyPr rtlCol="0" anchor="ctr"/>
-          <a:lstStyle/>
-          <a:p>
-            <a:pPr algn="ctr"/>
-            <a:endParaRPr lang="en-US"/>
-          </a:p>
-        </p:txBody>
-      </p:sp>
-      <p:sp>
-        <p:nvSpPr>
-          <p:cNvPr id="11" name="Rectangle 10">
-            <a:extLst>
-              <a:ext uri="{FF2B5EF4-FFF2-40B4-BE49-F238E27FC236}">
-                <a16:creationId xmlns:a16="http://schemas.microsoft.com/office/drawing/2014/main" id="{20586029-32A0-47E5-9AEC-AE3ABA6B94D0}"/>
-              </a:ext>
-              <a:ext uri="{C183D7F6-B498-43B3-948B-1728B52AA6E4}">
-                <adec:decorative xmlns:adec="http://schemas.microsoft.com/office/drawing/2017/decorative" val="1"/>
-              </a:ext>
-            </a:extLst>
-          </p:cNvPr>
-          <p:cNvSpPr>
-            <a:spLocks noGrp="1" noRot="1" noChangeAspect="1" noMove="1" noResize="1" noEditPoints="1" noAdjustHandles="1" noChangeArrowheads="1" noChangeShapeType="1" noTextEdit="1"/>
-          </p:cNvSpPr>
-          <p:nvPr>
-            <p:extLst>
-              <p:ext uri="{386F3935-93C4-4BCD-93E2-E3B085C9AB24}">
-                <p16:designElem xmlns:p16="http://schemas.microsoft.com/office/powerpoint/2015/main" val="1"/>
-              </p:ext>
-            </p:extLst>
-          </p:nvPr>
-        </p:nvSpPr>
-        <p:spPr>
-          <a:xfrm>
-            <a:off x="477012" y="480060"/>
-            <a:ext cx="11237976" cy="5897880"/>
-          </a:xfrm>
-          <a:prstGeom prst="rect">
-            <a:avLst/>
-          </a:prstGeom>
-          <a:solidFill>
-            <a:srgbClr val="FFFFFF"/>
-          </a:solidFill>
-          <a:ln w="9525">
-            <a:noFill/>
-          </a:ln>
-          <a:effectLst>
-            <a:outerShdw blurRad="63500" dist="17780" dir="5400000" algn="t" rotWithShape="0">
-              <a:prstClr val="black">
-                <a:alpha val="43000"/>
-              </a:prstClr>
-            </a:outerShdw>
-          </a:effectLst>
-        </p:spPr>
-        <p:style>
-          <a:lnRef idx="2">
-            <a:schemeClr val="accent1">
-              <a:shade val="50000"/>
-            </a:schemeClr>
-          </a:lnRef>
-          <a:fillRef idx="1">
-            <a:schemeClr val="accent1"/>
-          </a:fillRef>
-          <a:effectRef idx="0">
-            <a:schemeClr val="accent1"/>
-          </a:effectRef>
-          <a:fontRef idx="minor">
-            <a:schemeClr val="lt1"/>
-          </a:fontRef>
-        </p:style>
-        <p:txBody>
-          <a:bodyPr rtlCol="0" anchor="ctr"/>
-          <a:lstStyle/>
-          <a:p>
-            <a:pPr algn="ctr"/>
-            <a:endParaRPr lang="en-US"/>
-          </a:p>
-        </p:txBody>
-      </p:sp>
       <p:pic>
         <p:nvPicPr>
-          <p:cNvPr id="4" name="Picture 3" descr="A black background with red lines&#10;&#10;AI-generated content may be incorrect.">
+          <p:cNvPr id="2" name="Picture 1" descr="A black background with red lines&#10;&#10;AI-generated content may be incorrect.">
             <a:extLst>
               <a:ext uri="{FF2B5EF4-FFF2-40B4-BE49-F238E27FC236}">
                 <a16:creationId xmlns:a16="http://schemas.microsoft.com/office/drawing/2014/main" id="{3633D7FF-B793-8A53-A482-E4D42B1F0408}"/>
@@ -5250,102 +5544,46 @@
         </p:blipFill>
         <p:spPr>
           <a:xfrm>
-            <a:off x="643467" y="2383292"/>
-            <a:ext cx="5294716" cy="2091414"/>
+            <a:off x="643467" y="1842806"/>
+            <a:ext cx="10905066" cy="4307503"/>
           </a:xfrm>
           <a:prstGeom prst="rect">
             <a:avLst/>
           </a:prstGeom>
         </p:spPr>
       </p:pic>
-      <p:cxnSp>
-        <p:nvCxnSpPr>
-          <p:cNvPr id="13" name="Straight Connector 12">
+      <p:sp>
+        <p:nvSpPr>
+          <p:cNvPr id="7" name="Title 6">
             <a:extLst>
               <a:ext uri="{FF2B5EF4-FFF2-40B4-BE49-F238E27FC236}">
-                <a16:creationId xmlns:a16="http://schemas.microsoft.com/office/drawing/2014/main" id="{8C730EAB-A532-4295-A302-FB4B90DB9F5E}"/>
-              </a:ext>
-              <a:ext uri="{C183D7F6-B498-43B3-948B-1728B52AA6E4}">
-                <adec:decorative xmlns:adec="http://schemas.microsoft.com/office/drawing/2017/decorative" val="1"/>
+                <a16:creationId xmlns:a16="http://schemas.microsoft.com/office/drawing/2014/main" id="{9EC24352-318E-4678-A72F-9A7539F16AA5}"/>
               </a:ext>
             </a:extLst>
           </p:cNvPr>
-          <p:cNvCxnSpPr>
-            <a:cxnSpLocks noGrp="1" noRot="1" noChangeAspect="1" noMove="1" noResize="1" noEditPoints="1" noAdjustHandles="1" noChangeArrowheads="1" noChangeShapeType="1"/>
-          </p:cNvCxnSpPr>
+          <p:cNvSpPr>
+            <a:spLocks noGrp="1"/>
+          </p:cNvSpPr>
           <p:nvPr>
-            <p:extLst>
-              <p:ext uri="{386F3935-93C4-4BCD-93E2-E3B085C9AB24}">
-                <p16:designElem xmlns:p16="http://schemas.microsoft.com/office/powerpoint/2015/main" val="1"/>
-              </p:ext>
-            </p:extLst>
+            <p:ph type="title"/>
           </p:nvPr>
-        </p:nvCxnSpPr>
-        <p:spPr>
-          <a:xfrm>
-            <a:off x="6079958" y="1143000"/>
-            <a:ext cx="0" cy="4572000"/>
-          </a:xfrm>
-          <a:prstGeom prst="line">
-            <a:avLst/>
-          </a:prstGeom>
-          <a:ln>
-            <a:solidFill>
-              <a:srgbClr val="4E4E4E"/>
-            </a:solidFill>
-          </a:ln>
-        </p:spPr>
-        <p:style>
-          <a:lnRef idx="1">
-            <a:schemeClr val="accent1"/>
-          </a:lnRef>
-          <a:fillRef idx="0">
-            <a:schemeClr val="accent1"/>
-          </a:fillRef>
-          <a:effectRef idx="0">
-            <a:schemeClr val="accent1"/>
-          </a:effectRef>
-          <a:fontRef idx="minor">
-            <a:schemeClr val="tx1"/>
-          </a:fontRef>
-        </p:style>
-      </p:cxnSp>
-      <p:pic>
-        <p:nvPicPr>
-          <p:cNvPr id="3" name="Picture 2" descr="A diagram of a diagram&#10;&#10;AI-generated content may be incorrect.">
-            <a:extLst>
-              <a:ext uri="{FF2B5EF4-FFF2-40B4-BE49-F238E27FC236}">
-                <a16:creationId xmlns:a16="http://schemas.microsoft.com/office/drawing/2014/main" id="{7DCC1BA7-523D-D22F-7167-44D8A3CA837F}"/>
-              </a:ext>
-            </a:extLst>
-          </p:cNvPr>
-          <p:cNvPicPr>
-            <a:picLocks noChangeAspect="1"/>
-          </p:cNvPicPr>
-          <p:nvPr/>
-        </p:nvPicPr>
-        <p:blipFill>
-          <a:blip r:embed="rId4">
-            <a:extLst>
-              <a:ext uri="{28A0092B-C50C-407E-A947-70E740481C1C}">
-                <a14:useLocalDpi xmlns:a14="http://schemas.microsoft.com/office/drawing/2010/main" val="0"/>
-              </a:ext>
-            </a:extLst>
-          </a:blip>
-          <a:stretch>
-            <a:fillRect/>
-          </a:stretch>
-        </p:blipFill>
-        <p:spPr>
-          <a:xfrm>
-            <a:off x="6253817" y="1939861"/>
-            <a:ext cx="5294715" cy="2978277"/>
-          </a:xfrm>
-          <a:prstGeom prst="rect">
-            <a:avLst/>
-          </a:prstGeom>
-        </p:spPr>
-      </p:pic>
+        </p:nvSpPr>
+        <p:spPr/>
+        <p:txBody>
+          <a:bodyPr/>
+          <a:lstStyle/>
+          <a:p>
+            <a:pPr algn="ctr"/>
+            <a:r>
+              <a:rPr lang="en-US">
+                <a:latin typeface="Times New Roman" panose="02020603050405020304" pitchFamily="18" charset="0"/>
+                <a:cs typeface="Times New Roman" panose="02020603050405020304" pitchFamily="18" charset="0"/>
+              </a:rPr>
+              <a:t>Quy trình thu thập dữ liệu</a:t>
+            </a:r>
+          </a:p>
+        </p:txBody>
+      </p:sp>
     </p:spTree>
     <p:extLst>
       <p:ext uri="{BB962C8B-B14F-4D97-AF65-F5344CB8AC3E}">
@@ -5364,13 +5602,7 @@
   <p:cSld>
     <p:spTree>
       <p:nvGrpSpPr>
-        <p:cNvPr id="1" name="">
-          <a:extLst>
-            <a:ext uri="{FF2B5EF4-FFF2-40B4-BE49-F238E27FC236}">
-              <a16:creationId xmlns:a16="http://schemas.microsoft.com/office/drawing/2014/main" id="{C09480E0-20A5-CDB9-3B05-52665562AC0D}"/>
-            </a:ext>
-          </a:extLst>
-        </p:cNvPr>
+        <p:cNvPr id="1" name=""/>
         <p:cNvGrpSpPr/>
         <p:nvPr/>
       </p:nvGrpSpPr>
@@ -5382,12 +5614,240 @@
           <a:chExt cx="0" cy="0"/>
         </a:xfrm>
       </p:grpSpPr>
+      <p:pic>
+        <p:nvPicPr>
+          <p:cNvPr id="3" name="Picture 2">
+            <a:extLst>
+              <a:ext uri="{FF2B5EF4-FFF2-40B4-BE49-F238E27FC236}">
+                <a16:creationId xmlns:a16="http://schemas.microsoft.com/office/drawing/2014/main" id="{BCE99FB4-3AC3-CCAE-14DE-7193EDCA7227}"/>
+              </a:ext>
+            </a:extLst>
+          </p:cNvPr>
+          <p:cNvPicPr>
+            <a:picLocks noChangeAspect="1"/>
+          </p:cNvPicPr>
+          <p:nvPr/>
+        </p:nvPicPr>
+        <p:blipFill>
+          <a:blip r:embed="rId2"/>
+          <a:stretch>
+            <a:fillRect/>
+          </a:stretch>
+        </p:blipFill>
+        <p:spPr>
+          <a:xfrm>
+            <a:off x="1385887" y="1690688"/>
+            <a:ext cx="9420225" cy="4667250"/>
+          </a:xfrm>
+          <a:prstGeom prst="rect">
+            <a:avLst/>
+          </a:prstGeom>
+        </p:spPr>
+      </p:pic>
       <p:sp>
         <p:nvSpPr>
-          <p:cNvPr id="2" name="TextBox 1">
+          <p:cNvPr id="6" name="Title 5">
             <a:extLst>
               <a:ext uri="{FF2B5EF4-FFF2-40B4-BE49-F238E27FC236}">
-                <a16:creationId xmlns:a16="http://schemas.microsoft.com/office/drawing/2014/main" id="{2AF25F04-C544-BBE6-D80B-1BFD95A86C57}"/>
+                <a16:creationId xmlns:a16="http://schemas.microsoft.com/office/drawing/2014/main" id="{774E8E9B-2986-2B75-F05E-024AE48AEFA8}"/>
+              </a:ext>
+            </a:extLst>
+          </p:cNvPr>
+          <p:cNvSpPr>
+            <a:spLocks noGrp="1"/>
+          </p:cNvSpPr>
+          <p:nvPr>
+            <p:ph type="title"/>
+          </p:nvPr>
+        </p:nvSpPr>
+        <p:spPr/>
+        <p:txBody>
+          <a:bodyPr/>
+          <a:lstStyle/>
+          <a:p>
+            <a:pPr algn="ctr"/>
+            <a:r>
+              <a:rPr lang="en-US">
+                <a:latin typeface="Times New Roman" panose="02020603050405020304" pitchFamily="18" charset="0"/>
+                <a:cs typeface="Times New Roman" panose="02020603050405020304" pitchFamily="18" charset="0"/>
+              </a:rPr>
+              <a:t>Số liệu về độ dài của tài liệu (đơn vị từ)</a:t>
+            </a:r>
+          </a:p>
+        </p:txBody>
+      </p:sp>
+    </p:spTree>
+    <p:extLst>
+      <p:ext uri="{BB962C8B-B14F-4D97-AF65-F5344CB8AC3E}">
+        <p14:creationId xmlns:p14="http://schemas.microsoft.com/office/powerpoint/2010/main" val="1003074330"/>
+      </p:ext>
+    </p:extLst>
+  </p:cSld>
+  <p:clrMapOvr>
+    <a:masterClrMapping/>
+  </p:clrMapOvr>
+</p:sld>
+</file>
+
+<file path=ppt/slides/slide13.xml><?xml version="1.0" encoding="utf-8"?>
+<p:sld xmlns:a="http://schemas.openxmlformats.org/drawingml/2006/main" xmlns:r="http://schemas.openxmlformats.org/officeDocument/2006/relationships" xmlns:p="http://schemas.openxmlformats.org/presentationml/2006/main">
+  <p:cSld>
+    <p:spTree>
+      <p:nvGrpSpPr>
+        <p:cNvPr id="1" name=""/>
+        <p:cNvGrpSpPr/>
+        <p:nvPr/>
+      </p:nvGrpSpPr>
+      <p:grpSpPr>
+        <a:xfrm>
+          <a:off x="0" y="0"/>
+          <a:ext cx="0" cy="0"/>
+          <a:chOff x="0" y="0"/>
+          <a:chExt cx="0" cy="0"/>
+        </a:xfrm>
+      </p:grpSpPr>
+      <p:pic>
+        <p:nvPicPr>
+          <p:cNvPr id="3" name="Picture 2" descr="A diagram of a diagram&#10;&#10;AI-generated content may be incorrect.">
+            <a:extLst>
+              <a:ext uri="{FF2B5EF4-FFF2-40B4-BE49-F238E27FC236}">
+                <a16:creationId xmlns:a16="http://schemas.microsoft.com/office/drawing/2014/main" id="{7DCC1BA7-523D-D22F-7167-44D8A3CA837F}"/>
+              </a:ext>
+            </a:extLst>
+          </p:cNvPr>
+          <p:cNvPicPr>
+            <a:picLocks noChangeAspect="1"/>
+          </p:cNvPicPr>
+          <p:nvPr/>
+        </p:nvPicPr>
+        <p:blipFill>
+          <a:blip r:embed="rId2">
+            <a:extLst>
+              <a:ext uri="{28A0092B-C50C-407E-A947-70E740481C1C}">
+                <a14:useLocalDpi xmlns:a14="http://schemas.microsoft.com/office/drawing/2010/main" val="0"/>
+              </a:ext>
+            </a:extLst>
+          </a:blip>
+          <a:srcRect b="21561"/>
+          <a:stretch>
+            <a:fillRect/>
+          </a:stretch>
+        </p:blipFill>
+        <p:spPr>
+          <a:xfrm>
+            <a:off x="798785" y="2183524"/>
+            <a:ext cx="10594430" cy="4674476"/>
+          </a:xfrm>
+          <a:prstGeom prst="rect">
+            <a:avLst/>
+          </a:prstGeom>
+        </p:spPr>
+      </p:pic>
+      <p:sp>
+        <p:nvSpPr>
+          <p:cNvPr id="5" name="Title 4">
+            <a:extLst>
+              <a:ext uri="{FF2B5EF4-FFF2-40B4-BE49-F238E27FC236}">
+                <a16:creationId xmlns:a16="http://schemas.microsoft.com/office/drawing/2014/main" id="{ED95F80E-D65B-D141-A6C5-C3FF41DC9EC2}"/>
+              </a:ext>
+            </a:extLst>
+          </p:cNvPr>
+          <p:cNvSpPr>
+            <a:spLocks noGrp="1"/>
+          </p:cNvSpPr>
+          <p:nvPr>
+            <p:ph type="title"/>
+          </p:nvPr>
+        </p:nvSpPr>
+        <p:spPr/>
+        <p:txBody>
+          <a:bodyPr/>
+          <a:lstStyle/>
+          <a:p>
+            <a:pPr algn="ctr"/>
+            <a:r>
+              <a:rPr lang="en-US">
+                <a:latin typeface="Times New Roman" panose="02020603050405020304" pitchFamily="18" charset="0"/>
+                <a:cs typeface="Times New Roman" panose="02020603050405020304" pitchFamily="18" charset="0"/>
+              </a:rPr>
+              <a:t>Quy trình tiền xử lý dữ liệu</a:t>
+            </a:r>
+          </a:p>
+        </p:txBody>
+      </p:sp>
+    </p:spTree>
+    <p:extLst>
+      <p:ext uri="{BB962C8B-B14F-4D97-AF65-F5344CB8AC3E}">
+        <p14:creationId xmlns:p14="http://schemas.microsoft.com/office/powerpoint/2010/main" val="2626857249"/>
+      </p:ext>
+    </p:extLst>
+  </p:cSld>
+  <p:clrMapOvr>
+    <a:masterClrMapping/>
+  </p:clrMapOvr>
+</p:sld>
+</file>
+
+<file path=ppt/slides/slide14.xml><?xml version="1.0" encoding="utf-8"?>
+<p:sld xmlns:a="http://schemas.openxmlformats.org/drawingml/2006/main" xmlns:r="http://schemas.openxmlformats.org/officeDocument/2006/relationships" xmlns:p="http://schemas.openxmlformats.org/presentationml/2006/main">
+  <p:cSld>
+    <p:spTree>
+      <p:nvGrpSpPr>
+        <p:cNvPr id="1" name=""/>
+        <p:cNvGrpSpPr/>
+        <p:nvPr/>
+      </p:nvGrpSpPr>
+      <p:grpSpPr>
+        <a:xfrm>
+          <a:off x="0" y="0"/>
+          <a:ext cx="0" cy="0"/>
+          <a:chOff x="0" y="0"/>
+          <a:chExt cx="0" cy="0"/>
+        </a:xfrm>
+      </p:grpSpPr>
+      <p:pic>
+        <p:nvPicPr>
+          <p:cNvPr id="3" name="Picture 2" descr="A diagram of words and numbers&#10;&#10;AI-generated content may be incorrect.">
+            <a:extLst>
+              <a:ext uri="{FF2B5EF4-FFF2-40B4-BE49-F238E27FC236}">
+                <a16:creationId xmlns:a16="http://schemas.microsoft.com/office/drawing/2014/main" id="{7D5E91D7-3243-CAC9-5D2F-3343213CA058}"/>
+              </a:ext>
+            </a:extLst>
+          </p:cNvPr>
+          <p:cNvPicPr>
+            <a:picLocks noChangeAspect="1"/>
+          </p:cNvPicPr>
+          <p:nvPr/>
+        </p:nvPicPr>
+        <p:blipFill>
+          <a:blip r:embed="rId3">
+            <a:extLst>
+              <a:ext uri="{28A0092B-C50C-407E-A947-70E740481C1C}">
+                <a14:useLocalDpi xmlns:a14="http://schemas.microsoft.com/office/drawing/2010/main" val="0"/>
+              </a:ext>
+            </a:extLst>
+          </a:blip>
+          <a:srcRect r="41562"/>
+          <a:stretch>
+            <a:fillRect/>
+          </a:stretch>
+        </p:blipFill>
+        <p:spPr>
+          <a:xfrm>
+            <a:off x="0" y="1240255"/>
+            <a:ext cx="5849007" cy="5598557"/>
+          </a:xfrm>
+          <a:prstGeom prst="rect">
+            <a:avLst/>
+          </a:prstGeom>
+        </p:spPr>
+      </p:pic>
+      <p:sp>
+        <p:nvSpPr>
+          <p:cNvPr id="4" name="TextBox 3">
+            <a:extLst>
+              <a:ext uri="{FF2B5EF4-FFF2-40B4-BE49-F238E27FC236}">
+                <a16:creationId xmlns:a16="http://schemas.microsoft.com/office/drawing/2014/main" id="{73314DB7-69A9-F154-A588-F0AE61A9D761}"/>
               </a:ext>
             </a:extLst>
           </p:cNvPr>
@@ -5396,8 +5856,8 @@
         </p:nvSpPr>
         <p:spPr>
           <a:xfrm>
-            <a:off x="2571750" y="2667000"/>
-            <a:ext cx="5783699" cy="2308324"/>
+            <a:off x="7862395" y="1690688"/>
+            <a:ext cx="1110240" cy="369332"/>
           </a:xfrm>
           <a:prstGeom prst="rect">
             <a:avLst/>
@@ -5412,70 +5872,39 @@
           <a:p>
             <a:r>
               <a:rPr lang="en-US"/>
-              <a:t>embedding data:</a:t>
+              <a:t>We là gì? </a:t>
             </a:r>
           </a:p>
-          <a:p>
-            <a:pPr marL="285750" indent="-285750">
-              <a:buFontTx/>
-              <a:buChar char="-"/>
-            </a:pPr>
+        </p:txBody>
+      </p:sp>
+      <p:sp>
+        <p:nvSpPr>
+          <p:cNvPr id="2" name="Title 1">
+            <a:extLst>
+              <a:ext uri="{FF2B5EF4-FFF2-40B4-BE49-F238E27FC236}">
+                <a16:creationId xmlns:a16="http://schemas.microsoft.com/office/drawing/2014/main" id="{47CF4BB7-356C-F5AE-49B0-E29650593846}"/>
+              </a:ext>
+            </a:extLst>
+          </p:cNvPr>
+          <p:cNvSpPr>
+            <a:spLocks noGrp="1"/>
+          </p:cNvSpPr>
+          <p:nvPr>
+            <p:ph type="title"/>
+          </p:nvPr>
+        </p:nvSpPr>
+        <p:spPr/>
+        <p:txBody>
+          <a:bodyPr/>
+          <a:lstStyle/>
+          <a:p>
+            <a:pPr algn="ctr"/>
             <a:r>
-              <a:rPr lang="en-US"/>
-              <a:t>giới thiệu word embedding là gì?</a:t>
-            </a:r>
-          </a:p>
-          <a:p>
-            <a:pPr marL="285750" indent="-285750">
-              <a:buFontTx/>
-              <a:buChar char="-"/>
-            </a:pPr>
-            <a:r>
-              <a:rPr lang="en-US"/>
-              <a:t>Tại sao, Lợi tích</a:t>
-            </a:r>
-          </a:p>
-          <a:p>
-            <a:pPr marL="285750" indent="-285750">
-              <a:buFontTx/>
-              <a:buChar char="-"/>
-            </a:pPr>
-            <a:endParaRPr lang="en-US"/>
-          </a:p>
-          <a:p>
-            <a:r>
-              <a:rPr lang="en-US"/>
-              <a:t>các mô hình embedding đề xuất:</a:t>
-            </a:r>
-          </a:p>
-          <a:p>
-            <a:pPr marL="285750" indent="-285750">
-              <a:buFontTx/>
-              <a:buChar char="-"/>
-            </a:pPr>
-            <a:r>
-              <a:rPr lang="en-US"/>
-              <a:t>liệt kê các mô hình + kèm thông số</a:t>
-            </a:r>
-          </a:p>
-          <a:p>
-            <a:pPr marL="285750" indent="-285750">
-              <a:buFontTx/>
-              <a:buChar char="-"/>
-            </a:pPr>
-            <a:r>
-              <a:rPr lang="en-US"/>
-              <a:t>Đánh giá hiệu quả tokenization của model embedding</a:t>
-            </a:r>
-          </a:p>
-          <a:p>
-            <a:pPr marL="285750" indent="-285750">
-              <a:buFontTx/>
-              <a:buChar char="-"/>
-            </a:pPr>
-            <a:r>
-              <a:rPr lang="en-US"/>
-              <a:t>Đánh giá hiệu quả embedding data</a:t>
+              <a:rPr lang="en-US">
+                <a:latin typeface="Times New Roman" panose="02020603050405020304" pitchFamily="18" charset="0"/>
+                <a:cs typeface="Times New Roman" panose="02020603050405020304" pitchFamily="18" charset="0"/>
+              </a:rPr>
+              <a:t>Word Embedding</a:t>
             </a:r>
           </a:p>
         </p:txBody>
@@ -5483,7 +5912,7 @@
     </p:spTree>
     <p:extLst>
       <p:ext uri="{BB962C8B-B14F-4D97-AF65-F5344CB8AC3E}">
-        <p14:creationId xmlns:p14="http://schemas.microsoft.com/office/powerpoint/2010/main" val="2125420383"/>
+        <p14:creationId xmlns:p14="http://schemas.microsoft.com/office/powerpoint/2010/main" val="2222217345"/>
       </p:ext>
     </p:extLst>
   </p:cSld>
@@ -5493,7 +5922,7 @@
 </p:sld>
 </file>
 
-<file path=ppt/slides/slide13.xml><?xml version="1.0" encoding="utf-8"?>
+<file path=ppt/slides/slide15.xml><?xml version="1.0" encoding="utf-8"?>
 <p:sld xmlns:a="http://schemas.openxmlformats.org/drawingml/2006/main" xmlns:r="http://schemas.openxmlformats.org/officeDocument/2006/relationships" xmlns:p="http://schemas.openxmlformats.org/presentationml/2006/main">
   <p:cSld>
     <p:spTree>
@@ -5525,14 +5954,14 @@
           <p:nvPr>
             <p:extLst>
               <p:ext uri="{D42A27DB-BD31-4B8C-83A1-F6EECF244321}">
-                <p14:modId xmlns:p14="http://schemas.microsoft.com/office/powerpoint/2010/main" val="1415485842"/>
+                <p14:modId xmlns:p14="http://schemas.microsoft.com/office/powerpoint/2010/main" val="3062148275"/>
               </p:ext>
             </p:extLst>
           </p:nvPr>
         </p:nvGraphicFramePr>
         <p:xfrm>
-          <a:off x="0" y="360354"/>
-          <a:ext cx="12192003" cy="6137292"/>
+          <a:off x="168165" y="993863"/>
+          <a:ext cx="11855669" cy="5577840"/>
         </p:xfrm>
         <a:graphic>
           <a:graphicData uri="http://schemas.openxmlformats.org/drawingml/2006/table">
@@ -5541,63 +5970,63 @@
                 <a:tableStyleId>{3B4B98B0-60AC-42C2-AFA5-B58CD77FA1E5}</a:tableStyleId>
               </a:tblPr>
               <a:tblGrid>
-                <a:gridCol w="1686913">
+                <a:gridCol w="1640377">
                   <a:extLst>
                     <a:ext uri="{9D8B030D-6E8A-4147-A177-3AD203B41FA5}">
                       <a16:colId xmlns:a16="http://schemas.microsoft.com/office/drawing/2014/main" val="21212387"/>
                     </a:ext>
                   </a:extLst>
                 </a:gridCol>
-                <a:gridCol w="1182414">
+                <a:gridCol w="1108079">
                   <a:extLst>
                     <a:ext uri="{9D8B030D-6E8A-4147-A177-3AD203B41FA5}">
                       <a16:colId xmlns:a16="http://schemas.microsoft.com/office/drawing/2014/main" val="3098293506"/>
                     </a:ext>
                   </a:extLst>
                 </a:gridCol>
-                <a:gridCol w="1308538">
+                <a:gridCol w="1314156">
                   <a:extLst>
                     <a:ext uri="{9D8B030D-6E8A-4147-A177-3AD203B41FA5}">
                       <a16:colId xmlns:a16="http://schemas.microsoft.com/office/drawing/2014/main" val="1314405756"/>
                     </a:ext>
                   </a:extLst>
                 </a:gridCol>
-                <a:gridCol w="1355835">
+                <a:gridCol w="1318432">
                   <a:extLst>
                     <a:ext uri="{9D8B030D-6E8A-4147-A177-3AD203B41FA5}">
                       <a16:colId xmlns:a16="http://schemas.microsoft.com/office/drawing/2014/main" val="3674700715"/>
                     </a:ext>
                   </a:extLst>
                 </a:gridCol>
-                <a:gridCol w="1513489">
+                <a:gridCol w="1471737">
                   <a:extLst>
                     <a:ext uri="{9D8B030D-6E8A-4147-A177-3AD203B41FA5}">
                       <a16:colId xmlns:a16="http://schemas.microsoft.com/office/drawing/2014/main" val="3069290537"/>
                     </a:ext>
                   </a:extLst>
                 </a:gridCol>
-                <a:gridCol w="1080813">
+                <a:gridCol w="1203398">
                   <a:extLst>
                     <a:ext uri="{9D8B030D-6E8A-4147-A177-3AD203B41FA5}">
                       <a16:colId xmlns:a16="http://schemas.microsoft.com/office/drawing/2014/main" val="1466628104"/>
                     </a:ext>
                   </a:extLst>
                 </a:gridCol>
-                <a:gridCol w="1354667">
+                <a:gridCol w="1371600">
                   <a:extLst>
                     <a:ext uri="{9D8B030D-6E8A-4147-A177-3AD203B41FA5}">
                       <a16:colId xmlns:a16="http://schemas.microsoft.com/office/drawing/2014/main" val="3198331372"/>
                     </a:ext>
                   </a:extLst>
                 </a:gridCol>
-                <a:gridCol w="1354667">
+                <a:gridCol w="1103587">
                   <a:extLst>
                     <a:ext uri="{9D8B030D-6E8A-4147-A177-3AD203B41FA5}">
                       <a16:colId xmlns:a16="http://schemas.microsoft.com/office/drawing/2014/main" val="3783402126"/>
                     </a:ext>
                   </a:extLst>
                 </a:gridCol>
-                <a:gridCol w="1354667">
+                <a:gridCol w="1324303">
                   <a:extLst>
                     <a:ext uri="{9D8B030D-6E8A-4147-A177-3AD203B41FA5}">
                       <a16:colId xmlns:a16="http://schemas.microsoft.com/office/drawing/2014/main" val="1732880498"/>
@@ -5605,7 +6034,7 @@
                   </a:extLst>
                 </a:gridCol>
               </a:tblGrid>
-              <a:tr h="826564">
+              <a:tr h="870568">
                 <a:tc>
                   <a:txBody>
                     <a:bodyPr/>
@@ -5989,7 +6418,17 @@
                           <a:latin typeface="Times New Roman" panose="02020603050405020304" pitchFamily="18" charset="0"/>
                           <a:cs typeface="Times New Roman" panose="02020603050405020304" pitchFamily="18" charset="0"/>
                         </a:rPr>
-                        <a:t>Kích thước lớp ẩn</a:t>
+                        <a:t>Kích thước </a:t>
+                      </a:r>
+                    </a:p>
+                    <a:p>
+                      <a:pPr algn="ctr"/>
+                      <a:r>
+                        <a:rPr lang="en-US">
+                          <a:latin typeface="Times New Roman" panose="02020603050405020304" pitchFamily="18" charset="0"/>
+                          <a:cs typeface="Times New Roman" panose="02020603050405020304" pitchFamily="18" charset="0"/>
+                        </a:rPr>
+                        <a:t>lớp ẩn</a:t>
                       </a:r>
                     </a:p>
                   </a:txBody>
@@ -6170,7 +6609,7 @@
                   </a:ext>
                 </a:extLst>
               </a:tr>
-              <a:tr h="826564">
+              <a:tr h="609397">
                 <a:tc>
                   <a:txBody>
                     <a:bodyPr/>
@@ -6735,7 +7174,7 @@
                   </a:ext>
                 </a:extLst>
               </a:tr>
-              <a:tr h="826564">
+              <a:tr h="870568">
                 <a:tc>
                   <a:txBody>
                     <a:bodyPr/>
@@ -7300,7 +7739,7 @@
                   </a:ext>
                 </a:extLst>
               </a:tr>
-              <a:tr h="826564">
+              <a:tr h="870568">
                 <a:tc>
                   <a:txBody>
                     <a:bodyPr/>
@@ -7865,7 +8304,7 @@
                   </a:ext>
                 </a:extLst>
               </a:tr>
-              <a:tr h="826564">
+              <a:tr h="609397">
                 <a:tc>
                   <a:txBody>
                     <a:bodyPr/>
@@ -8430,7 +8869,7 @@
                   </a:ext>
                 </a:extLst>
               </a:tr>
-              <a:tr h="826564">
+              <a:tr h="870568">
                 <a:tc>
                   <a:txBody>
                     <a:bodyPr/>
@@ -8995,7 +9434,7 @@
                   </a:ext>
                 </a:extLst>
               </a:tr>
-              <a:tr h="826564">
+              <a:tr h="609397">
                 <a:tc>
                   <a:txBody>
                     <a:bodyPr/>
@@ -9564,6 +10003,45 @@
           </a:graphicData>
         </a:graphic>
       </p:graphicFrame>
+      <p:sp>
+        <p:nvSpPr>
+          <p:cNvPr id="3" name="Title 2">
+            <a:extLst>
+              <a:ext uri="{FF2B5EF4-FFF2-40B4-BE49-F238E27FC236}">
+                <a16:creationId xmlns:a16="http://schemas.microsoft.com/office/drawing/2014/main" id="{9B177B27-E32D-3C64-AA0B-31E5128D4E73}"/>
+              </a:ext>
+            </a:extLst>
+          </p:cNvPr>
+          <p:cNvSpPr>
+            <a:spLocks noGrp="1"/>
+          </p:cNvSpPr>
+          <p:nvPr>
+            <p:ph type="title"/>
+          </p:nvPr>
+        </p:nvSpPr>
+        <p:spPr>
+          <a:xfrm>
+            <a:off x="838200" y="191704"/>
+            <a:ext cx="10515600" cy="817289"/>
+          </a:xfrm>
+        </p:spPr>
+        <p:txBody>
+          <a:bodyPr>
+            <a:normAutofit/>
+          </a:bodyPr>
+          <a:lstStyle/>
+          <a:p>
+            <a:pPr algn="ctr"/>
+            <a:r>
+              <a:rPr lang="en-US" sz="3600">
+                <a:latin typeface="Times New Roman" panose="02020603050405020304" pitchFamily="18" charset="0"/>
+                <a:cs typeface="Times New Roman" panose="02020603050405020304" pitchFamily="18" charset="0"/>
+              </a:rPr>
+              <a:t>Thông số của các mô hình embedding đề xuất</a:t>
+            </a:r>
+          </a:p>
+        </p:txBody>
+      </p:sp>
     </p:spTree>
     <p:extLst>
       <p:ext uri="{BB962C8B-B14F-4D97-AF65-F5344CB8AC3E}">
@@ -9577,7 +10055,7 @@
 </p:sld>
 </file>
 
-<file path=ppt/slides/slide14.xml><?xml version="1.0" encoding="utf-8"?>
+<file path=ppt/slides/slide16.xml><?xml version="1.0" encoding="utf-8"?>
 <p:sld xmlns:a="http://schemas.openxmlformats.org/drawingml/2006/main" xmlns:r="http://schemas.openxmlformats.org/officeDocument/2006/relationships" xmlns:p="http://schemas.openxmlformats.org/presentationml/2006/main">
   <p:cSld>
     <p:spTree>
@@ -9594,6 +10072,45 @@
           <a:chExt cx="0" cy="0"/>
         </a:xfrm>
       </p:grpSpPr>
+      <p:sp>
+        <p:nvSpPr>
+          <p:cNvPr id="2" name="Title 1">
+            <a:extLst>
+              <a:ext uri="{FF2B5EF4-FFF2-40B4-BE49-F238E27FC236}">
+                <a16:creationId xmlns:a16="http://schemas.microsoft.com/office/drawing/2014/main" id="{2869EB1C-7BB8-3DDD-C228-8251C982B0FC}"/>
+              </a:ext>
+            </a:extLst>
+          </p:cNvPr>
+          <p:cNvSpPr>
+            <a:spLocks noGrp="1"/>
+          </p:cNvSpPr>
+          <p:nvPr>
+            <p:ph type="title"/>
+          </p:nvPr>
+        </p:nvSpPr>
+        <p:spPr>
+          <a:xfrm>
+            <a:off x="838200" y="365126"/>
+            <a:ext cx="10515600" cy="896116"/>
+          </a:xfrm>
+        </p:spPr>
+        <p:txBody>
+          <a:bodyPr>
+            <a:normAutofit/>
+          </a:bodyPr>
+          <a:lstStyle/>
+          <a:p>
+            <a:pPr algn="ctr"/>
+            <a:r>
+              <a:rPr lang="en-US" sz="3200">
+                <a:latin typeface="Times New Roman" panose="02020603050405020304" pitchFamily="18" charset="0"/>
+                <a:cs typeface="Times New Roman" panose="02020603050405020304" pitchFamily="18" charset="0"/>
+              </a:rPr>
+              <a:t>Hiệu quả tokenization của các mô hình embedding đề xuất</a:t>
+            </a:r>
+          </a:p>
+        </p:txBody>
+      </p:sp>
     </p:spTree>
     <p:extLst>
       <p:ext uri="{BB962C8B-B14F-4D97-AF65-F5344CB8AC3E}">
@@ -9607,7 +10124,7 @@
 </p:sld>
 </file>
 
-<file path=ppt/slides/slide15.xml><?xml version="1.0" encoding="utf-8"?>
+<file path=ppt/slides/slide17.xml><?xml version="1.0" encoding="utf-8"?>
 <p:sld xmlns:a="http://schemas.openxmlformats.org/drawingml/2006/main" xmlns:r="http://schemas.openxmlformats.org/officeDocument/2006/relationships" xmlns:p="http://schemas.openxmlformats.org/presentationml/2006/main">
   <p:cSld>
     <p:spTree>
@@ -9639,13 +10156,13 @@
           <p:nvPr>
             <p:extLst>
               <p:ext uri="{D42A27DB-BD31-4B8C-83A1-F6EECF244321}">
-                <p14:modId xmlns:p14="http://schemas.microsoft.com/office/powerpoint/2010/main" val="2899161847"/>
+                <p14:modId xmlns:p14="http://schemas.microsoft.com/office/powerpoint/2010/main" val="3646445861"/>
               </p:ext>
             </p:extLst>
           </p:nvPr>
         </p:nvGraphicFramePr>
         <p:xfrm>
-          <a:off x="0" y="718457"/>
+          <a:off x="0" y="1166648"/>
           <a:ext cx="12192000" cy="5421085"/>
         </p:xfrm>
         <a:graphic>
@@ -10037,16 +10554,12 @@
                     <a:p>
                       <a:pPr algn="ctr"/>
                       <a:r>
-                        <a:rPr lang="en-US">
+                        <a:rPr lang="en-US" i="1">
                           <a:latin typeface="Times New Roman" panose="02020603050405020304" pitchFamily="18" charset="0"/>
                           <a:cs typeface="Times New Roman" panose="02020603050405020304" pitchFamily="18" charset="0"/>
                         </a:rPr>
                         <a:t>all-MiniLM-L6-v2</a:t>
                       </a:r>
-                      <a:endParaRPr lang="en-US" i="1">
-                        <a:latin typeface="Times New Roman" panose="02020603050405020304" pitchFamily="18" charset="0"/>
-                        <a:cs typeface="Times New Roman" panose="02020603050405020304" pitchFamily="18" charset="0"/>
-                      </a:endParaRPr>
                     </a:p>
                   </a:txBody>
                   <a:tcPr anchor="ctr">
@@ -10372,16 +10885,12 @@
                     <a:p>
                       <a:pPr algn="ctr"/>
                       <a:r>
-                        <a:rPr lang="en-US">
+                        <a:rPr lang="en-US" i="1">
                           <a:latin typeface="Times New Roman" panose="02020603050405020304" pitchFamily="18" charset="0"/>
                           <a:cs typeface="Times New Roman" panose="02020603050405020304" pitchFamily="18" charset="0"/>
                         </a:rPr>
                         <a:t>bert-base-vietnamese-uncased</a:t>
                       </a:r>
-                      <a:endParaRPr lang="en-US" i="1">
-                        <a:latin typeface="Times New Roman" panose="02020603050405020304" pitchFamily="18" charset="0"/>
-                        <a:cs typeface="Times New Roman" panose="02020603050405020304" pitchFamily="18" charset="0"/>
-                      </a:endParaRPr>
                     </a:p>
                   </a:txBody>
                   <a:tcPr anchor="ctr">
@@ -10707,16 +11216,12 @@
                     <a:p>
                       <a:pPr algn="ctr"/>
                       <a:r>
-                        <a:rPr lang="en-US">
+                        <a:rPr lang="en-US" i="1">
                           <a:latin typeface="Times New Roman" panose="02020603050405020304" pitchFamily="18" charset="0"/>
                           <a:cs typeface="Times New Roman" panose="02020603050405020304" pitchFamily="18" charset="0"/>
                         </a:rPr>
                         <a:t>distiluse-base-multilingual-cased-v2</a:t>
                       </a:r>
-                      <a:endParaRPr lang="en-US" i="1">
-                        <a:latin typeface="Times New Roman" panose="02020603050405020304" pitchFamily="18" charset="0"/>
-                        <a:cs typeface="Times New Roman" panose="02020603050405020304" pitchFamily="18" charset="0"/>
-                      </a:endParaRPr>
                     </a:p>
                   </a:txBody>
                   <a:tcPr anchor="ctr">
@@ -11042,16 +11547,12 @@
                     <a:p>
                       <a:pPr algn="ctr"/>
                       <a:r>
-                        <a:rPr lang="en-US">
+                        <a:rPr lang="en-US" i="1">
                           <a:latin typeface="Times New Roman" panose="02020603050405020304" pitchFamily="18" charset="0"/>
                           <a:cs typeface="Times New Roman" panose="02020603050405020304" pitchFamily="18" charset="0"/>
                         </a:rPr>
                         <a:t>multilingual-e5-small</a:t>
                       </a:r>
-                      <a:endParaRPr lang="en-US" i="1">
-                        <a:latin typeface="Times New Roman" panose="02020603050405020304" pitchFamily="18" charset="0"/>
-                        <a:cs typeface="Times New Roman" panose="02020603050405020304" pitchFamily="18" charset="0"/>
-                      </a:endParaRPr>
                     </a:p>
                   </a:txBody>
                   <a:tcPr anchor="ctr">
@@ -11377,16 +11878,12 @@
                     <a:p>
                       <a:pPr algn="ctr"/>
                       <a:r>
-                        <a:rPr lang="en-US">
+                        <a:rPr lang="en-US" i="1">
                           <a:latin typeface="Times New Roman" panose="02020603050405020304" pitchFamily="18" charset="0"/>
                           <a:cs typeface="Times New Roman" panose="02020603050405020304" pitchFamily="18" charset="0"/>
                         </a:rPr>
                         <a:t>sup-SimSCE-VietNamese-phobert-base</a:t>
                       </a:r>
-                      <a:endParaRPr lang="en-US" i="1">
-                        <a:latin typeface="Times New Roman" panose="02020603050405020304" pitchFamily="18" charset="0"/>
-                        <a:cs typeface="Times New Roman" panose="02020603050405020304" pitchFamily="18" charset="0"/>
-                      </a:endParaRPr>
                     </a:p>
                   </a:txBody>
                   <a:tcPr anchor="ctr">
@@ -11712,16 +12209,12 @@
                     <a:p>
                       <a:pPr algn="ctr"/>
                       <a:r>
-                        <a:rPr lang="en-US">
+                        <a:rPr lang="en-US" i="1">
                           <a:latin typeface="Times New Roman" panose="02020603050405020304" pitchFamily="18" charset="0"/>
                           <a:cs typeface="Times New Roman" panose="02020603050405020304" pitchFamily="18" charset="0"/>
                         </a:rPr>
                         <a:t>vietnamese-bi-encoder</a:t>
                       </a:r>
-                      <a:endParaRPr lang="en-US" i="1">
-                        <a:latin typeface="Times New Roman" panose="02020603050405020304" pitchFamily="18" charset="0"/>
-                        <a:cs typeface="Times New Roman" panose="02020603050405020304" pitchFamily="18" charset="0"/>
-                      </a:endParaRPr>
                     </a:p>
                   </a:txBody>
                   <a:tcPr anchor="ctr">
@@ -12043,6 +12536,45 @@
           </a:graphicData>
         </a:graphic>
       </p:graphicFrame>
+      <p:sp>
+        <p:nvSpPr>
+          <p:cNvPr id="3" name="Title 2">
+            <a:extLst>
+              <a:ext uri="{FF2B5EF4-FFF2-40B4-BE49-F238E27FC236}">
+                <a16:creationId xmlns:a16="http://schemas.microsoft.com/office/drawing/2014/main" id="{14270C03-FC08-E22C-5FA5-381AF4156922}"/>
+              </a:ext>
+            </a:extLst>
+          </p:cNvPr>
+          <p:cNvSpPr>
+            <a:spLocks noGrp="1"/>
+          </p:cNvSpPr>
+          <p:nvPr>
+            <p:ph type="title"/>
+          </p:nvPr>
+        </p:nvSpPr>
+        <p:spPr>
+          <a:xfrm>
+            <a:off x="838200" y="365125"/>
+            <a:ext cx="10515600" cy="801523"/>
+          </a:xfrm>
+        </p:spPr>
+        <p:txBody>
+          <a:bodyPr>
+            <a:normAutofit/>
+          </a:bodyPr>
+          <a:lstStyle/>
+          <a:p>
+            <a:pPr algn="ctr"/>
+            <a:r>
+              <a:rPr lang="en-US" sz="3200">
+                <a:latin typeface="Times New Roman" panose="02020603050405020304" pitchFamily="18" charset="0"/>
+                <a:cs typeface="Times New Roman" panose="02020603050405020304" pitchFamily="18" charset="0"/>
+              </a:rPr>
+              <a:t>Hiệu quả embedding của các mô hình embedding đề xuất</a:t>
+            </a:r>
+          </a:p>
+        </p:txBody>
+      </p:sp>
     </p:spTree>
     <p:extLst>
       <p:ext uri="{BB962C8B-B14F-4D97-AF65-F5344CB8AC3E}">
@@ -12056,359 +12588,7 @@
 </p:sld>
 </file>
 
-<file path=ppt/slides/slide16.xml><?xml version="1.0" encoding="utf-8"?>
-<p:sld xmlns:a="http://schemas.openxmlformats.org/drawingml/2006/main" xmlns:r="http://schemas.openxmlformats.org/officeDocument/2006/relationships" xmlns:p="http://schemas.openxmlformats.org/presentationml/2006/main">
-  <p:cSld>
-    <p:spTree>
-      <p:nvGrpSpPr>
-        <p:cNvPr id="1" name="">
-          <a:extLst>
-            <a:ext uri="{FF2B5EF4-FFF2-40B4-BE49-F238E27FC236}">
-              <a16:creationId xmlns:a16="http://schemas.microsoft.com/office/drawing/2014/main" id="{3C3204C1-5F08-5680-957D-395D6D1D7918}"/>
-            </a:ext>
-          </a:extLst>
-        </p:cNvPr>
-        <p:cNvGrpSpPr/>
-        <p:nvPr/>
-      </p:nvGrpSpPr>
-      <p:grpSpPr>
-        <a:xfrm>
-          <a:off x="0" y="0"/>
-          <a:ext cx="0" cy="0"/>
-          <a:chOff x="0" y="0"/>
-          <a:chExt cx="0" cy="0"/>
-        </a:xfrm>
-      </p:grpSpPr>
-      <p:sp>
-        <p:nvSpPr>
-          <p:cNvPr id="2" name="TextBox 1">
-            <a:extLst>
-              <a:ext uri="{FF2B5EF4-FFF2-40B4-BE49-F238E27FC236}">
-                <a16:creationId xmlns:a16="http://schemas.microsoft.com/office/drawing/2014/main" id="{764BCB41-73FC-CD7C-9D26-CEE00D05CB5B}"/>
-              </a:ext>
-            </a:extLst>
-          </p:cNvPr>
-          <p:cNvSpPr txBox="1"/>
-          <p:nvPr/>
-        </p:nvSpPr>
-        <p:spPr>
-          <a:xfrm>
-            <a:off x="2571750" y="2667000"/>
-            <a:ext cx="5783699" cy="2308324"/>
-          </a:xfrm>
-          <a:prstGeom prst="rect">
-            <a:avLst/>
-          </a:prstGeom>
-          <a:noFill/>
-        </p:spPr>
-        <p:txBody>
-          <a:bodyPr wrap="none" rtlCol="0">
-            <a:spAutoFit/>
-          </a:bodyPr>
-          <a:lstStyle/>
-          <a:p>
-            <a:r>
-              <a:rPr lang="en-US"/>
-              <a:t>embedding data:</a:t>
-            </a:r>
-          </a:p>
-          <a:p>
-            <a:pPr marL="285750" indent="-285750">
-              <a:buFontTx/>
-              <a:buChar char="-"/>
-            </a:pPr>
-            <a:r>
-              <a:rPr lang="en-US"/>
-              <a:t>giới thiệu word embedding là gì?</a:t>
-            </a:r>
-          </a:p>
-          <a:p>
-            <a:pPr marL="285750" indent="-285750">
-              <a:buFontTx/>
-              <a:buChar char="-"/>
-            </a:pPr>
-            <a:r>
-              <a:rPr lang="en-US"/>
-              <a:t>Tại sao, Lợi tích</a:t>
-            </a:r>
-          </a:p>
-          <a:p>
-            <a:pPr marL="285750" indent="-285750">
-              <a:buFontTx/>
-              <a:buChar char="-"/>
-            </a:pPr>
-            <a:endParaRPr lang="en-US"/>
-          </a:p>
-          <a:p>
-            <a:r>
-              <a:rPr lang="en-US"/>
-              <a:t>các mô hình embedding đề xuất:</a:t>
-            </a:r>
-          </a:p>
-          <a:p>
-            <a:pPr marL="285750" indent="-285750">
-              <a:buFontTx/>
-              <a:buChar char="-"/>
-            </a:pPr>
-            <a:r>
-              <a:rPr lang="en-US"/>
-              <a:t>liệt kê các mô hình + kèm thông số</a:t>
-            </a:r>
-          </a:p>
-          <a:p>
-            <a:pPr marL="285750" indent="-285750">
-              <a:buFontTx/>
-              <a:buChar char="-"/>
-            </a:pPr>
-            <a:r>
-              <a:rPr lang="en-US"/>
-              <a:t>Đánh giá hiệu quả tokenization của model embedding</a:t>
-            </a:r>
-          </a:p>
-          <a:p>
-            <a:pPr marL="285750" indent="-285750">
-              <a:buFontTx/>
-              <a:buChar char="-"/>
-            </a:pPr>
-            <a:r>
-              <a:rPr lang="en-US"/>
-              <a:t>Đánh giá hiệu quả embedding data</a:t>
-            </a:r>
-          </a:p>
-        </p:txBody>
-      </p:sp>
-    </p:spTree>
-    <p:extLst>
-      <p:ext uri="{BB962C8B-B14F-4D97-AF65-F5344CB8AC3E}">
-        <p14:creationId xmlns:p14="http://schemas.microsoft.com/office/powerpoint/2010/main" val="661741629"/>
-      </p:ext>
-    </p:extLst>
-  </p:cSld>
-  <p:clrMapOvr>
-    <a:masterClrMapping/>
-  </p:clrMapOvr>
-</p:sld>
-</file>
-
-<file path=ppt/slides/slide17.xml><?xml version="1.0" encoding="utf-8"?>
-<p:sld xmlns:a="http://schemas.openxmlformats.org/drawingml/2006/main" xmlns:r="http://schemas.openxmlformats.org/officeDocument/2006/relationships" xmlns:p="http://schemas.openxmlformats.org/presentationml/2006/main">
-  <p:cSld>
-    <p:spTree>
-      <p:nvGrpSpPr>
-        <p:cNvPr id="1" name=""/>
-        <p:cNvGrpSpPr/>
-        <p:nvPr/>
-      </p:nvGrpSpPr>
-      <p:grpSpPr>
-        <a:xfrm>
-          <a:off x="0" y="0"/>
-          <a:ext cx="0" cy="0"/>
-          <a:chOff x="0" y="0"/>
-          <a:chExt cx="0" cy="0"/>
-        </a:xfrm>
-      </p:grpSpPr>
-      <p:pic>
-        <p:nvPicPr>
-          <p:cNvPr id="3" name="Picture 2" descr="A diagram of words and numbers&#10;&#10;AI-generated content may be incorrect.">
-            <a:extLst>
-              <a:ext uri="{FF2B5EF4-FFF2-40B4-BE49-F238E27FC236}">
-                <a16:creationId xmlns:a16="http://schemas.microsoft.com/office/drawing/2014/main" id="{7D5E91D7-3243-CAC9-5D2F-3343213CA058}"/>
-              </a:ext>
-            </a:extLst>
-          </p:cNvPr>
-          <p:cNvPicPr>
-            <a:picLocks noChangeAspect="1"/>
-          </p:cNvPicPr>
-          <p:nvPr/>
-        </p:nvPicPr>
-        <p:blipFill>
-          <a:blip r:embed="rId3">
-            <a:extLst>
-              <a:ext uri="{28A0092B-C50C-407E-A947-70E740481C1C}">
-                <a14:useLocalDpi xmlns:a14="http://schemas.microsoft.com/office/drawing/2010/main" val="0"/>
-              </a:ext>
-            </a:extLst>
-          </a:blip>
-          <a:srcRect r="41562"/>
-          <a:stretch>
-            <a:fillRect/>
-          </a:stretch>
-        </p:blipFill>
-        <p:spPr>
-          <a:xfrm>
-            <a:off x="0" y="19187"/>
-            <a:ext cx="7124700" cy="6819626"/>
-          </a:xfrm>
-          <a:prstGeom prst="rect">
-            <a:avLst/>
-          </a:prstGeom>
-        </p:spPr>
-      </p:pic>
-      <p:sp>
-        <p:nvSpPr>
-          <p:cNvPr id="4" name="TextBox 3">
-            <a:extLst>
-              <a:ext uri="{FF2B5EF4-FFF2-40B4-BE49-F238E27FC236}">
-                <a16:creationId xmlns:a16="http://schemas.microsoft.com/office/drawing/2014/main" id="{73314DB7-69A9-F154-A588-F0AE61A9D761}"/>
-              </a:ext>
-            </a:extLst>
-          </p:cNvPr>
-          <p:cNvSpPr txBox="1"/>
-          <p:nvPr/>
-        </p:nvSpPr>
-        <p:spPr>
-          <a:xfrm>
-            <a:off x="8020050" y="1200150"/>
-            <a:ext cx="3764044" cy="1200329"/>
-          </a:xfrm>
-          <a:prstGeom prst="rect">
-            <a:avLst/>
-          </a:prstGeom>
-          <a:noFill/>
-        </p:spPr>
-        <p:txBody>
-          <a:bodyPr wrap="none" rtlCol="0">
-            <a:spAutoFit/>
-          </a:bodyPr>
-          <a:lstStyle/>
-          <a:p>
-            <a:r>
-              <a:rPr lang="en-US"/>
-              <a:t>We là gì? Ánh xạ từ word sang vector</a:t>
-            </a:r>
-          </a:p>
-          <a:p>
-            <a:r>
-              <a:rPr lang="en-US"/>
-              <a:t>Trong đó mỗi chiều là 1 thuộc tính…</a:t>
-            </a:r>
-          </a:p>
-          <a:p>
-            <a:r>
-              <a:rPr lang="en-US"/>
-              <a:t>Ví dụ như trong hình…</a:t>
-            </a:r>
-          </a:p>
-          <a:p>
-            <a:r>
-              <a:rPr lang="en-US"/>
-              <a:t>Như vậy,… “tóm tắt kết quả”</a:t>
-            </a:r>
-          </a:p>
-        </p:txBody>
-      </p:sp>
-    </p:spTree>
-    <p:extLst>
-      <p:ext uri="{BB962C8B-B14F-4D97-AF65-F5344CB8AC3E}">
-        <p14:creationId xmlns:p14="http://schemas.microsoft.com/office/powerpoint/2010/main" val="2222217345"/>
-      </p:ext>
-    </p:extLst>
-  </p:cSld>
-  <p:clrMapOvr>
-    <a:masterClrMapping/>
-  </p:clrMapOvr>
-</p:sld>
-</file>
-
 <file path=ppt/slides/slide18.xml><?xml version="1.0" encoding="utf-8"?>
-<p:sld xmlns:a="http://schemas.openxmlformats.org/drawingml/2006/main" xmlns:r="http://schemas.openxmlformats.org/officeDocument/2006/relationships" xmlns:p="http://schemas.openxmlformats.org/presentationml/2006/main">
-  <p:cSld>
-    <p:spTree>
-      <p:nvGrpSpPr>
-        <p:cNvPr id="1" name="">
-          <a:extLst>
-            <a:ext uri="{FF2B5EF4-FFF2-40B4-BE49-F238E27FC236}">
-              <a16:creationId xmlns:a16="http://schemas.microsoft.com/office/drawing/2014/main" id="{2FA90A43-521D-EBF1-DB42-58A8155E194F}"/>
-            </a:ext>
-          </a:extLst>
-        </p:cNvPr>
-        <p:cNvGrpSpPr/>
-        <p:nvPr/>
-      </p:nvGrpSpPr>
-      <p:grpSpPr>
-        <a:xfrm>
-          <a:off x="0" y="0"/>
-          <a:ext cx="0" cy="0"/>
-          <a:chOff x="0" y="0"/>
-          <a:chExt cx="0" cy="0"/>
-        </a:xfrm>
-      </p:grpSpPr>
-      <p:sp>
-        <p:nvSpPr>
-          <p:cNvPr id="2" name="TextBox 1">
-            <a:extLst>
-              <a:ext uri="{FF2B5EF4-FFF2-40B4-BE49-F238E27FC236}">
-                <a16:creationId xmlns:a16="http://schemas.microsoft.com/office/drawing/2014/main" id="{0474895E-D091-B258-553B-368712CF210F}"/>
-              </a:ext>
-            </a:extLst>
-          </p:cNvPr>
-          <p:cNvSpPr txBox="1"/>
-          <p:nvPr/>
-        </p:nvSpPr>
-        <p:spPr>
-          <a:xfrm>
-            <a:off x="2571750" y="2667000"/>
-            <a:ext cx="4948791" cy="1200329"/>
-          </a:xfrm>
-          <a:prstGeom prst="rect">
-            <a:avLst/>
-          </a:prstGeom>
-          <a:noFill/>
-        </p:spPr>
-        <p:txBody>
-          <a:bodyPr wrap="none" rtlCol="0">
-            <a:spAutoFit/>
-          </a:bodyPr>
-          <a:lstStyle/>
-          <a:p>
-            <a:r>
-              <a:rPr lang="en-US"/>
-              <a:t>Các LLM để xuất</a:t>
-            </a:r>
-          </a:p>
-          <a:p>
-            <a:pPr marL="285750" indent="-285750">
-              <a:buFontTx/>
-              <a:buChar char="-"/>
-            </a:pPr>
-            <a:r>
-              <a:rPr lang="en-US"/>
-              <a:t>Các thông số LLM + kèm giải thích + giới thiệu</a:t>
-            </a:r>
-          </a:p>
-          <a:p>
-            <a:pPr marL="285750" indent="-285750">
-              <a:buFontTx/>
-              <a:buChar char="-"/>
-            </a:pPr>
-            <a:r>
-              <a:rPr lang="en-US"/>
-              <a:t>Benmark của các model embedding</a:t>
-            </a:r>
-          </a:p>
-          <a:p>
-            <a:pPr marL="285750" indent="-285750">
-              <a:buFontTx/>
-              <a:buChar char="-"/>
-            </a:pPr>
-            <a:endParaRPr lang="en-US"/>
-          </a:p>
-        </p:txBody>
-      </p:sp>
-    </p:spTree>
-    <p:extLst>
-      <p:ext uri="{BB962C8B-B14F-4D97-AF65-F5344CB8AC3E}">
-        <p14:creationId xmlns:p14="http://schemas.microsoft.com/office/powerpoint/2010/main" val="209335274"/>
-      </p:ext>
-    </p:extLst>
-  </p:cSld>
-  <p:clrMapOvr>
-    <a:masterClrMapping/>
-  </p:clrMapOvr>
-</p:sld>
-</file>
-
-<file path=ppt/slides/slide19.xml><?xml version="1.0" encoding="utf-8"?>
 <p:sld xmlns:a="http://schemas.openxmlformats.org/drawingml/2006/main" xmlns:r="http://schemas.openxmlformats.org/officeDocument/2006/relationships" xmlns:p="http://schemas.openxmlformats.org/presentationml/2006/main">
   <p:cSld>
     <p:spTree>
@@ -13891,6 +14071,43 @@
           </a:graphicData>
         </a:graphic>
       </p:graphicFrame>
+      <p:sp>
+        <p:nvSpPr>
+          <p:cNvPr id="3" name="Title 2">
+            <a:extLst>
+              <a:ext uri="{FF2B5EF4-FFF2-40B4-BE49-F238E27FC236}">
+                <a16:creationId xmlns:a16="http://schemas.microsoft.com/office/drawing/2014/main" id="{91608CAD-BC1D-1ECA-750D-9425A708FD7C}"/>
+              </a:ext>
+            </a:extLst>
+          </p:cNvPr>
+          <p:cNvSpPr>
+            <a:spLocks noGrp="1"/>
+          </p:cNvSpPr>
+          <p:nvPr>
+            <p:ph type="title"/>
+          </p:nvPr>
+        </p:nvSpPr>
+        <p:spPr>
+          <a:xfrm>
+            <a:off x="838200" y="365125"/>
+            <a:ext cx="10515600" cy="998119"/>
+          </a:xfrm>
+        </p:spPr>
+        <p:txBody>
+          <a:bodyPr/>
+          <a:lstStyle/>
+          <a:p>
+            <a:pPr algn="ctr"/>
+            <a:r>
+              <a:rPr lang="en-US">
+                <a:latin typeface="Times New Roman" panose="02020603050405020304" pitchFamily="18" charset="0"/>
+                <a:cs typeface="Times New Roman" panose="02020603050405020304" pitchFamily="18" charset="0"/>
+              </a:rPr>
+              <a:t>Thông số của các mô hình LLM đề xuất</a:t>
+            </a:r>
+          </a:p>
+        </p:txBody>
+      </p:sp>
     </p:spTree>
     <p:extLst>
       <p:ext uri="{BB962C8B-B14F-4D97-AF65-F5344CB8AC3E}">
@@ -13904,96 +14121,7 @@
 </p:sld>
 </file>
 
-<file path=ppt/slides/slide2.xml><?xml version="1.0" encoding="utf-8"?>
-<p:sld xmlns:a="http://schemas.openxmlformats.org/drawingml/2006/main" xmlns:r="http://schemas.openxmlformats.org/officeDocument/2006/relationships" xmlns:p="http://schemas.openxmlformats.org/presentationml/2006/main">
-  <p:cSld>
-    <p:spTree>
-      <p:nvGrpSpPr>
-        <p:cNvPr id="1" name="">
-          <a:extLst>
-            <a:ext uri="{FF2B5EF4-FFF2-40B4-BE49-F238E27FC236}">
-              <a16:creationId xmlns:a16="http://schemas.microsoft.com/office/drawing/2014/main" id="{3FC6112A-65E9-4562-42DC-CB4F7F3EAFBF}"/>
-            </a:ext>
-          </a:extLst>
-        </p:cNvPr>
-        <p:cNvGrpSpPr/>
-        <p:nvPr/>
-      </p:nvGrpSpPr>
-      <p:grpSpPr>
-        <a:xfrm>
-          <a:off x="0" y="0"/>
-          <a:ext cx="0" cy="0"/>
-          <a:chOff x="0" y="0"/>
-          <a:chExt cx="0" cy="0"/>
-        </a:xfrm>
-      </p:grpSpPr>
-      <p:sp>
-        <p:nvSpPr>
-          <p:cNvPr id="2" name="Title 1">
-            <a:extLst>
-              <a:ext uri="{FF2B5EF4-FFF2-40B4-BE49-F238E27FC236}">
-                <a16:creationId xmlns:a16="http://schemas.microsoft.com/office/drawing/2014/main" id="{8F5F6B3A-30D3-C8DC-D08E-C389923C8618}"/>
-              </a:ext>
-            </a:extLst>
-          </p:cNvPr>
-          <p:cNvSpPr>
-            <a:spLocks noGrp="1"/>
-          </p:cNvSpPr>
-          <p:nvPr>
-            <p:ph type="ctrTitle"/>
-          </p:nvPr>
-        </p:nvSpPr>
-        <p:spPr/>
-        <p:txBody>
-          <a:bodyPr/>
-          <a:lstStyle/>
-          <a:p>
-            <a:r>
-              <a:rPr lang="en-US"/>
-              <a:t>Cơ sở lý thuyết</a:t>
-            </a:r>
-          </a:p>
-        </p:txBody>
-      </p:sp>
-      <p:sp>
-        <p:nvSpPr>
-          <p:cNvPr id="3" name="Subtitle 2">
-            <a:extLst>
-              <a:ext uri="{FF2B5EF4-FFF2-40B4-BE49-F238E27FC236}">
-                <a16:creationId xmlns:a16="http://schemas.microsoft.com/office/drawing/2014/main" id="{51B1E782-08A6-0CE5-9172-45FBA2F3EDDB}"/>
-              </a:ext>
-            </a:extLst>
-          </p:cNvPr>
-          <p:cNvSpPr>
-            <a:spLocks noGrp="1"/>
-          </p:cNvSpPr>
-          <p:nvPr>
-            <p:ph type="subTitle" idx="1"/>
-          </p:nvPr>
-        </p:nvSpPr>
-        <p:spPr/>
-        <p:txBody>
-          <a:bodyPr/>
-          <a:lstStyle/>
-          <a:p>
-            <a:endParaRPr lang="en-US"/>
-          </a:p>
-        </p:txBody>
-      </p:sp>
-    </p:spTree>
-    <p:extLst>
-      <p:ext uri="{BB962C8B-B14F-4D97-AF65-F5344CB8AC3E}">
-        <p14:creationId xmlns:p14="http://schemas.microsoft.com/office/powerpoint/2010/main" val="1156857403"/>
-      </p:ext>
-    </p:extLst>
-  </p:cSld>
-  <p:clrMapOvr>
-    <a:masterClrMapping/>
-  </p:clrMapOvr>
-</p:sld>
-</file>
-
-<file path=ppt/slides/slide20.xml><?xml version="1.0" encoding="utf-8"?>
+<file path=ppt/slides/slide19.xml><?xml version="1.0" encoding="utf-8"?>
 <p:sld xmlns:a="http://schemas.openxmlformats.org/drawingml/2006/main" xmlns:r="http://schemas.openxmlformats.org/officeDocument/2006/relationships" xmlns:p="http://schemas.openxmlformats.org/presentationml/2006/main">
   <p:cSld>
     <p:spTree>
@@ -14025,13 +14153,13 @@
           <p:nvPr>
             <p:extLst>
               <p:ext uri="{D42A27DB-BD31-4B8C-83A1-F6EECF244321}">
-                <p14:modId xmlns:p14="http://schemas.microsoft.com/office/powerpoint/2010/main" val="1325650060"/>
+                <p14:modId xmlns:p14="http://schemas.microsoft.com/office/powerpoint/2010/main" val="3248006663"/>
               </p:ext>
             </p:extLst>
           </p:nvPr>
         </p:nvGraphicFramePr>
         <p:xfrm>
-          <a:off x="0" y="1061397"/>
+          <a:off x="0" y="1597425"/>
           <a:ext cx="12192000" cy="4735206"/>
         </p:xfrm>
         <a:graphic>
@@ -16574,10 +16702,226 @@
           </a:graphicData>
         </a:graphic>
       </p:graphicFrame>
+      <p:sp>
+        <p:nvSpPr>
+          <p:cNvPr id="2" name="Title 1">
+            <a:extLst>
+              <a:ext uri="{FF2B5EF4-FFF2-40B4-BE49-F238E27FC236}">
+                <a16:creationId xmlns:a16="http://schemas.microsoft.com/office/drawing/2014/main" id="{9B22FCA9-DF8F-7B64-1F5A-8326287E67C8}"/>
+              </a:ext>
+            </a:extLst>
+          </p:cNvPr>
+          <p:cNvSpPr>
+            <a:spLocks noGrp="1"/>
+          </p:cNvSpPr>
+          <p:nvPr>
+            <p:ph type="title"/>
+          </p:nvPr>
+        </p:nvSpPr>
+        <p:spPr>
+          <a:xfrm>
+            <a:off x="838200" y="365126"/>
+            <a:ext cx="10515600" cy="1232300"/>
+          </a:xfrm>
+        </p:spPr>
+        <p:txBody>
+          <a:bodyPr/>
+          <a:lstStyle/>
+          <a:p>
+            <a:pPr algn="ctr"/>
+            <a:r>
+              <a:rPr lang="en-US">
+                <a:latin typeface="Times New Roman" panose="02020603050405020304" pitchFamily="18" charset="0"/>
+                <a:cs typeface="Times New Roman" panose="02020603050405020304" pitchFamily="18" charset="0"/>
+              </a:rPr>
+              <a:t>Kết quả benchmark của các LLM đề xuất</a:t>
+            </a:r>
+          </a:p>
+        </p:txBody>
+      </p:sp>
     </p:spTree>
     <p:extLst>
       <p:ext uri="{BB962C8B-B14F-4D97-AF65-F5344CB8AC3E}">
         <p14:creationId xmlns:p14="http://schemas.microsoft.com/office/powerpoint/2010/main" val="851644939"/>
+      </p:ext>
+    </p:extLst>
+  </p:cSld>
+  <p:clrMapOvr>
+    <a:masterClrMapping/>
+  </p:clrMapOvr>
+</p:sld>
+</file>
+
+<file path=ppt/slides/slide2.xml><?xml version="1.0" encoding="utf-8"?>
+<p:sld xmlns:a="http://schemas.openxmlformats.org/drawingml/2006/main" xmlns:r="http://schemas.openxmlformats.org/officeDocument/2006/relationships" xmlns:p="http://schemas.openxmlformats.org/presentationml/2006/main">
+  <p:cSld>
+    <p:spTree>
+      <p:nvGrpSpPr>
+        <p:cNvPr id="1" name="">
+          <a:extLst>
+            <a:ext uri="{FF2B5EF4-FFF2-40B4-BE49-F238E27FC236}">
+              <a16:creationId xmlns:a16="http://schemas.microsoft.com/office/drawing/2014/main" id="{3FC6112A-65E9-4562-42DC-CB4F7F3EAFBF}"/>
+            </a:ext>
+          </a:extLst>
+        </p:cNvPr>
+        <p:cNvGrpSpPr/>
+        <p:nvPr/>
+      </p:nvGrpSpPr>
+      <p:grpSpPr>
+        <a:xfrm>
+          <a:off x="0" y="0"/>
+          <a:ext cx="0" cy="0"/>
+          <a:chOff x="0" y="0"/>
+          <a:chExt cx="0" cy="0"/>
+        </a:xfrm>
+      </p:grpSpPr>
+      <p:sp>
+        <p:nvSpPr>
+          <p:cNvPr id="2" name="Title 1">
+            <a:extLst>
+              <a:ext uri="{FF2B5EF4-FFF2-40B4-BE49-F238E27FC236}">
+                <a16:creationId xmlns:a16="http://schemas.microsoft.com/office/drawing/2014/main" id="{8F5F6B3A-30D3-C8DC-D08E-C389923C8618}"/>
+              </a:ext>
+            </a:extLst>
+          </p:cNvPr>
+          <p:cNvSpPr>
+            <a:spLocks noGrp="1"/>
+          </p:cNvSpPr>
+          <p:nvPr>
+            <p:ph type="ctrTitle"/>
+          </p:nvPr>
+        </p:nvSpPr>
+        <p:spPr/>
+        <p:txBody>
+          <a:bodyPr/>
+          <a:lstStyle/>
+          <a:p>
+            <a:r>
+              <a:rPr lang="en-US"/>
+              <a:t>Cơ sở lý thuyết</a:t>
+            </a:r>
+          </a:p>
+        </p:txBody>
+      </p:sp>
+      <p:sp>
+        <p:nvSpPr>
+          <p:cNvPr id="3" name="Subtitle 2">
+            <a:extLst>
+              <a:ext uri="{FF2B5EF4-FFF2-40B4-BE49-F238E27FC236}">
+                <a16:creationId xmlns:a16="http://schemas.microsoft.com/office/drawing/2014/main" id="{51B1E782-08A6-0CE5-9172-45FBA2F3EDDB}"/>
+              </a:ext>
+            </a:extLst>
+          </p:cNvPr>
+          <p:cNvSpPr>
+            <a:spLocks noGrp="1"/>
+          </p:cNvSpPr>
+          <p:nvPr>
+            <p:ph type="subTitle" idx="1"/>
+          </p:nvPr>
+        </p:nvSpPr>
+        <p:spPr/>
+        <p:txBody>
+          <a:bodyPr/>
+          <a:lstStyle/>
+          <a:p>
+            <a:endParaRPr lang="en-US"/>
+          </a:p>
+        </p:txBody>
+      </p:sp>
+    </p:spTree>
+    <p:extLst>
+      <p:ext uri="{BB962C8B-B14F-4D97-AF65-F5344CB8AC3E}">
+        <p14:creationId xmlns:p14="http://schemas.microsoft.com/office/powerpoint/2010/main" val="1156857403"/>
+      </p:ext>
+    </p:extLst>
+  </p:cSld>
+  <p:clrMapOvr>
+    <a:masterClrMapping/>
+  </p:clrMapOvr>
+</p:sld>
+</file>
+
+<file path=ppt/slides/slide20.xml><?xml version="1.0" encoding="utf-8"?>
+<p:sld xmlns:a="http://schemas.openxmlformats.org/drawingml/2006/main" xmlns:r="http://schemas.openxmlformats.org/officeDocument/2006/relationships" xmlns:p="http://schemas.openxmlformats.org/presentationml/2006/main">
+  <p:cSld>
+    <p:spTree>
+      <p:nvGrpSpPr>
+        <p:cNvPr id="1" name=""/>
+        <p:cNvGrpSpPr/>
+        <p:nvPr/>
+      </p:nvGrpSpPr>
+      <p:grpSpPr>
+        <a:xfrm>
+          <a:off x="0" y="0"/>
+          <a:ext cx="0" cy="0"/>
+          <a:chOff x="0" y="0"/>
+          <a:chExt cx="0" cy="0"/>
+        </a:xfrm>
+      </p:grpSpPr>
+      <p:sp>
+        <p:nvSpPr>
+          <p:cNvPr id="2" name="Title 1">
+            <a:extLst>
+              <a:ext uri="{FF2B5EF4-FFF2-40B4-BE49-F238E27FC236}">
+                <a16:creationId xmlns:a16="http://schemas.microsoft.com/office/drawing/2014/main" id="{A5AE1F14-854D-0979-EB9D-62FE3FBCFD1A}"/>
+              </a:ext>
+            </a:extLst>
+          </p:cNvPr>
+          <p:cNvSpPr>
+            <a:spLocks noGrp="1"/>
+          </p:cNvSpPr>
+          <p:nvPr>
+            <p:ph type="ctrTitle"/>
+          </p:nvPr>
+        </p:nvSpPr>
+        <p:spPr/>
+        <p:txBody>
+          <a:bodyPr/>
+          <a:lstStyle/>
+          <a:p>
+            <a:r>
+              <a:rPr lang="en-US"/>
+              <a:t>Triển khai các chức năng</a:t>
+            </a:r>
+            <a:br>
+              <a:rPr lang="en-US"/>
+            </a:br>
+            <a:r>
+              <a:rPr lang="en-US"/>
+              <a:t>hệ thống</a:t>
+            </a:r>
+          </a:p>
+        </p:txBody>
+      </p:sp>
+      <p:sp>
+        <p:nvSpPr>
+          <p:cNvPr id="3" name="Subtitle 2">
+            <a:extLst>
+              <a:ext uri="{FF2B5EF4-FFF2-40B4-BE49-F238E27FC236}">
+                <a16:creationId xmlns:a16="http://schemas.microsoft.com/office/drawing/2014/main" id="{189B5BC8-5DC3-87AB-CC14-B5539F643D3E}"/>
+              </a:ext>
+            </a:extLst>
+          </p:cNvPr>
+          <p:cNvSpPr>
+            <a:spLocks noGrp="1"/>
+          </p:cNvSpPr>
+          <p:nvPr>
+            <p:ph type="subTitle" idx="1"/>
+          </p:nvPr>
+        </p:nvSpPr>
+        <p:spPr/>
+        <p:txBody>
+          <a:bodyPr/>
+          <a:lstStyle/>
+          <a:p>
+            <a:endParaRPr lang="en-US"/>
+          </a:p>
+        </p:txBody>
+      </p:sp>
+    </p:spTree>
+    <p:extLst>
+      <p:ext uri="{BB962C8B-B14F-4D97-AF65-F5344CB8AC3E}">
+        <p14:creationId xmlns:p14="http://schemas.microsoft.com/office/powerpoint/2010/main" val="3724894969"/>
       </p:ext>
     </p:extLst>
   </p:cSld>
@@ -16612,41 +16956,28 @@
       </p:grpSpPr>
       <p:sp>
         <p:nvSpPr>
-          <p:cNvPr id="2" name="TextBox 1">
+          <p:cNvPr id="3" name="Title 2">
             <a:extLst>
               <a:ext uri="{FF2B5EF4-FFF2-40B4-BE49-F238E27FC236}">
-                <a16:creationId xmlns:a16="http://schemas.microsoft.com/office/drawing/2014/main" id="{E66937F4-5ACE-ED20-FBFD-987EFC21E860}"/>
+                <a16:creationId xmlns:a16="http://schemas.microsoft.com/office/drawing/2014/main" id="{5CDF1506-A9B8-E72A-C967-A11CD70E3365}"/>
               </a:ext>
             </a:extLst>
           </p:cNvPr>
-          <p:cNvSpPr txBox="1"/>
-          <p:nvPr/>
+          <p:cNvSpPr>
+            <a:spLocks noGrp="1"/>
+          </p:cNvSpPr>
+          <p:nvPr>
+            <p:ph type="title"/>
+          </p:nvPr>
         </p:nvSpPr>
-        <p:spPr>
-          <a:xfrm>
-            <a:off x="2571750" y="2667000"/>
-            <a:ext cx="8255978" cy="646331"/>
-          </a:xfrm>
-          <a:prstGeom prst="rect">
-            <a:avLst/>
-          </a:prstGeom>
-          <a:noFill/>
-        </p:spPr>
+        <p:spPr/>
         <p:txBody>
-          <a:bodyPr wrap="none" rtlCol="0">
-            <a:spAutoFit/>
-          </a:bodyPr>
+          <a:bodyPr/>
           <a:lstStyle/>
           <a:p>
             <a:r>
               <a:rPr lang="en-US"/>
-              <a:t>Các chức năng của hệ thống:</a:t>
-            </a:r>
-          </a:p>
-          <a:p>
-            <a:r>
-              <a:rPr lang="en-US"/>
-              <a:t>- Các chức năng đưuọc triển khai cho hệ thống (text chat, voice realtime.., exam…)</a:t>
+              <a:t>Các chức năng của hệ thống</a:t>
             </a:r>
           </a:p>
         </p:txBody>
@@ -16722,6 +17053,43 @@
           </a:p>
         </p:txBody>
       </p:sp>
+      <p:sp>
+        <p:nvSpPr>
+          <p:cNvPr id="3" name="Title 2">
+            <a:extLst>
+              <a:ext uri="{FF2B5EF4-FFF2-40B4-BE49-F238E27FC236}">
+                <a16:creationId xmlns:a16="http://schemas.microsoft.com/office/drawing/2014/main" id="{DE087CA8-E14A-1356-A4B6-5F8ED9D87620}"/>
+              </a:ext>
+            </a:extLst>
+          </p:cNvPr>
+          <p:cNvSpPr>
+            <a:spLocks noGrp="1"/>
+          </p:cNvSpPr>
+          <p:nvPr>
+            <p:ph type="title"/>
+          </p:nvPr>
+        </p:nvSpPr>
+        <p:spPr>
+          <a:xfrm>
+            <a:off x="838200" y="365126"/>
+            <a:ext cx="10515600" cy="769992"/>
+          </a:xfrm>
+        </p:spPr>
+        <p:txBody>
+          <a:bodyPr/>
+          <a:lstStyle/>
+          <a:p>
+            <a:pPr algn="ctr"/>
+            <a:r>
+              <a:rPr lang="en-US">
+                <a:latin typeface="Times New Roman" panose="02020603050405020304" pitchFamily="18" charset="0"/>
+                <a:cs typeface="Times New Roman" panose="02020603050405020304" pitchFamily="18" charset="0"/>
+              </a:rPr>
+              <a:t>Chức năng chat text</a:t>
+            </a:r>
+          </a:p>
+        </p:txBody>
+      </p:sp>
     </p:spTree>
     <p:extLst>
       <p:ext uri="{BB962C8B-B14F-4D97-AF65-F5344CB8AC3E}">
@@ -16845,6 +17213,43 @@
           </a:p>
         </p:txBody>
       </p:sp>
+      <p:sp>
+        <p:nvSpPr>
+          <p:cNvPr id="3" name="Title 2">
+            <a:extLst>
+              <a:ext uri="{FF2B5EF4-FFF2-40B4-BE49-F238E27FC236}">
+                <a16:creationId xmlns:a16="http://schemas.microsoft.com/office/drawing/2014/main" id="{164C92F1-4C2D-E55D-B904-EA2F2A5C2980}"/>
+              </a:ext>
+            </a:extLst>
+          </p:cNvPr>
+          <p:cNvSpPr>
+            <a:spLocks noGrp="1"/>
+          </p:cNvSpPr>
+          <p:nvPr>
+            <p:ph type="title"/>
+          </p:nvPr>
+        </p:nvSpPr>
+        <p:spPr>
+          <a:xfrm>
+            <a:off x="838200" y="365126"/>
+            <a:ext cx="10515600" cy="833054"/>
+          </a:xfrm>
+        </p:spPr>
+        <p:txBody>
+          <a:bodyPr/>
+          <a:lstStyle/>
+          <a:p>
+            <a:pPr algn="ctr"/>
+            <a:r>
+              <a:rPr lang="en-US">
+                <a:latin typeface="Times New Roman" panose="02020603050405020304" pitchFamily="18" charset="0"/>
+                <a:cs typeface="Times New Roman" panose="02020603050405020304" pitchFamily="18" charset="0"/>
+              </a:rPr>
+              <a:t>Chức năng chat realtime</a:t>
+            </a:r>
+          </a:p>
+        </p:txBody>
+      </p:sp>
     </p:spTree>
     <p:extLst>
       <p:ext uri="{BB962C8B-B14F-4D97-AF65-F5344CB8AC3E}">
@@ -16859,6 +17264,92 @@
 </file>
 
 <file path=ppt/slides/slide24.xml><?xml version="1.0" encoding="utf-8"?>
+<p:sld xmlns:a="http://schemas.openxmlformats.org/drawingml/2006/main" xmlns:r="http://schemas.openxmlformats.org/officeDocument/2006/relationships" xmlns:p="http://schemas.openxmlformats.org/presentationml/2006/main">
+  <p:cSld>
+    <p:spTree>
+      <p:nvGrpSpPr>
+        <p:cNvPr id="1" name=""/>
+        <p:cNvGrpSpPr/>
+        <p:nvPr/>
+      </p:nvGrpSpPr>
+      <p:grpSpPr>
+        <a:xfrm>
+          <a:off x="0" y="0"/>
+          <a:ext cx="0" cy="0"/>
+          <a:chOff x="0" y="0"/>
+          <a:chExt cx="0" cy="0"/>
+        </a:xfrm>
+      </p:grpSpPr>
+      <p:sp>
+        <p:nvSpPr>
+          <p:cNvPr id="2" name="Title 2">
+            <a:extLst>
+              <a:ext uri="{FF2B5EF4-FFF2-40B4-BE49-F238E27FC236}">
+                <a16:creationId xmlns:a16="http://schemas.microsoft.com/office/drawing/2014/main" id="{E855080E-8192-0E55-3FCE-1C7B8C781730}"/>
+              </a:ext>
+            </a:extLst>
+          </p:cNvPr>
+          <p:cNvSpPr txBox="1">
+            <a:spLocks/>
+          </p:cNvSpPr>
+          <p:nvPr/>
+        </p:nvSpPr>
+        <p:spPr>
+          <a:xfrm>
+            <a:off x="838200" y="365126"/>
+            <a:ext cx="10515600" cy="896116"/>
+          </a:xfrm>
+          <a:prstGeom prst="rect">
+            <a:avLst/>
+          </a:prstGeom>
+        </p:spPr>
+        <p:txBody>
+          <a:bodyPr/>
+          <a:lstStyle>
+            <a:lvl1pPr algn="l" defTabSz="914400" rtl="0" eaLnBrk="1" latinLnBrk="0" hangingPunct="1">
+              <a:lnSpc>
+                <a:spcPct val="90000"/>
+              </a:lnSpc>
+              <a:spcBef>
+                <a:spcPct val="0"/>
+              </a:spcBef>
+              <a:buNone/>
+              <a:defRPr sz="4400" kern="1200">
+                <a:solidFill>
+                  <a:schemeClr val="tx1"/>
+                </a:solidFill>
+                <a:latin typeface="+mj-lt"/>
+                <a:ea typeface="+mj-ea"/>
+                <a:cs typeface="+mj-cs"/>
+              </a:defRPr>
+            </a:lvl1pPr>
+          </a:lstStyle>
+          <a:p>
+            <a:pPr algn="ctr"/>
+            <a:r>
+              <a:rPr lang="en-US">
+                <a:latin typeface="Times New Roman" panose="02020603050405020304" pitchFamily="18" charset="0"/>
+                <a:cs typeface="Times New Roman" panose="02020603050405020304" pitchFamily="18" charset="0"/>
+              </a:rPr>
+              <a:t>Chức năng chat realtime</a:t>
+            </a:r>
+          </a:p>
+        </p:txBody>
+      </p:sp>
+    </p:spTree>
+    <p:extLst>
+      <p:ext uri="{BB962C8B-B14F-4D97-AF65-F5344CB8AC3E}">
+        <p14:creationId xmlns:p14="http://schemas.microsoft.com/office/powerpoint/2010/main" val="1594222191"/>
+      </p:ext>
+    </p:extLst>
+  </p:cSld>
+  <p:clrMapOvr>
+    <a:masterClrMapping/>
+  </p:clrMapOvr>
+</p:sld>
+</file>
+
+<file path=ppt/slides/slide25.xml><?xml version="1.0" encoding="utf-8"?>
 <p:sld xmlns:a="http://schemas.openxmlformats.org/drawingml/2006/main" xmlns:r="http://schemas.openxmlformats.org/officeDocument/2006/relationships" xmlns:p="http://schemas.openxmlformats.org/presentationml/2006/main">
   <p:cSld>
     <p:spTree>
@@ -16883,41 +17374,28 @@
       </p:grpSpPr>
       <p:sp>
         <p:nvSpPr>
-          <p:cNvPr id="2" name="TextBox 1">
+          <p:cNvPr id="5" name="Title 4">
             <a:extLst>
               <a:ext uri="{FF2B5EF4-FFF2-40B4-BE49-F238E27FC236}">
-                <a16:creationId xmlns:a16="http://schemas.microsoft.com/office/drawing/2014/main" id="{3C5E1B44-3531-38D8-BE32-5BD8B7E04216}"/>
+                <a16:creationId xmlns:a16="http://schemas.microsoft.com/office/drawing/2014/main" id="{A286B778-7B01-6C20-DF80-D15E93F8E11A}"/>
               </a:ext>
             </a:extLst>
           </p:cNvPr>
-          <p:cNvSpPr txBox="1"/>
-          <p:nvPr/>
+          <p:cNvSpPr>
+            <a:spLocks noGrp="1"/>
+          </p:cNvSpPr>
+          <p:nvPr>
+            <p:ph type="title"/>
+          </p:nvPr>
         </p:nvSpPr>
-        <p:spPr>
-          <a:xfrm>
-            <a:off x="457200" y="1657350"/>
-            <a:ext cx="5905078" cy="646331"/>
-          </a:xfrm>
-          <a:prstGeom prst="rect">
-            <a:avLst/>
-          </a:prstGeom>
-          <a:noFill/>
-        </p:spPr>
+        <p:spPr/>
         <p:txBody>
-          <a:bodyPr wrap="none" rtlCol="0">
-            <a:spAutoFit/>
-          </a:bodyPr>
+          <a:bodyPr/>
           <a:lstStyle/>
           <a:p>
             <a:r>
               <a:rPr lang="en-US"/>
               <a:t>Quá trình sinh phản hồi</a:t>
-            </a:r>
-          </a:p>
-          <a:p>
-            <a:r>
-              <a:rPr lang="en-US"/>
-              <a:t>Đề cập đến data được embedding và retrieval như thế nào</a:t>
             </a:r>
           </a:p>
         </p:txBody>
@@ -16935,7 +17413,7 @@
 </p:sld>
 </file>
 
-<file path=ppt/slides/slide25.xml><?xml version="1.0" encoding="utf-8"?>
+<file path=ppt/slides/slide26.xml><?xml version="1.0" encoding="utf-8"?>
 <p:sld xmlns:a="http://schemas.openxmlformats.org/drawingml/2006/main" xmlns:r="http://schemas.openxmlformats.org/officeDocument/2006/relationships" xmlns:p="http://schemas.openxmlformats.org/presentationml/2006/main">
   <p:cSld>
     <p:spTree>
@@ -16958,6 +17436,59 @@
           <a:chExt cx="0" cy="0"/>
         </a:xfrm>
       </p:grpSpPr>
+      <p:sp>
+        <p:nvSpPr>
+          <p:cNvPr id="2" name="Title 1">
+            <a:extLst>
+              <a:ext uri="{FF2B5EF4-FFF2-40B4-BE49-F238E27FC236}">
+                <a16:creationId xmlns:a16="http://schemas.microsoft.com/office/drawing/2014/main" id="{AA359780-E419-4614-7EE7-4F5A8344D932}"/>
+              </a:ext>
+            </a:extLst>
+          </p:cNvPr>
+          <p:cNvSpPr>
+            <a:spLocks noGrp="1"/>
+          </p:cNvSpPr>
+          <p:nvPr>
+            <p:ph type="ctrTitle"/>
+          </p:nvPr>
+        </p:nvSpPr>
+        <p:spPr/>
+        <p:txBody>
+          <a:bodyPr/>
+          <a:lstStyle/>
+          <a:p>
+            <a:r>
+              <a:rPr lang="en-US"/>
+              <a:t>Kết quả triển khai</a:t>
+            </a:r>
+          </a:p>
+        </p:txBody>
+      </p:sp>
+      <p:sp>
+        <p:nvSpPr>
+          <p:cNvPr id="3" name="Subtitle 2">
+            <a:extLst>
+              <a:ext uri="{FF2B5EF4-FFF2-40B4-BE49-F238E27FC236}">
+                <a16:creationId xmlns:a16="http://schemas.microsoft.com/office/drawing/2014/main" id="{9E241CE4-71E2-40A1-0E9C-AC2C8BB81764}"/>
+              </a:ext>
+            </a:extLst>
+          </p:cNvPr>
+          <p:cNvSpPr>
+            <a:spLocks noGrp="1"/>
+          </p:cNvSpPr>
+          <p:nvPr>
+            <p:ph type="subTitle" idx="1"/>
+          </p:nvPr>
+        </p:nvSpPr>
+        <p:spPr/>
+        <p:txBody>
+          <a:bodyPr/>
+          <a:lstStyle/>
+          <a:p>
+            <a:endParaRPr lang="en-US"/>
+          </a:p>
+        </p:txBody>
+      </p:sp>
     </p:spTree>
     <p:extLst>
       <p:ext uri="{BB962C8B-B14F-4D97-AF65-F5344CB8AC3E}">
@@ -16990,41 +17521,6 @@
       </p:grpSpPr>
       <p:sp>
         <p:nvSpPr>
-          <p:cNvPr id="58" name="TextBox 57">
-            <a:extLst>
-              <a:ext uri="{FF2B5EF4-FFF2-40B4-BE49-F238E27FC236}">
-                <a16:creationId xmlns:a16="http://schemas.microsoft.com/office/drawing/2014/main" id="{86780209-95F1-556A-DA0B-1CC10C2F1ABB}"/>
-              </a:ext>
-            </a:extLst>
-          </p:cNvPr>
-          <p:cNvSpPr txBox="1"/>
-          <p:nvPr/>
-        </p:nvSpPr>
-        <p:spPr>
-          <a:xfrm>
-            <a:off x="639097" y="323850"/>
-            <a:ext cx="898003" cy="369332"/>
-          </a:xfrm>
-          <a:prstGeom prst="rect">
-            <a:avLst/>
-          </a:prstGeom>
-          <a:noFill/>
-        </p:spPr>
-        <p:txBody>
-          <a:bodyPr wrap="none" rtlCol="0">
-            <a:spAutoFit/>
-          </a:bodyPr>
-          <a:lstStyle/>
-          <a:p>
-            <a:r>
-              <a:rPr lang="en-US"/>
-              <a:t>Tiêu đề</a:t>
-            </a:r>
-          </a:p>
-        </p:txBody>
-      </p:sp>
-      <p:sp>
-        <p:nvSpPr>
           <p:cNvPr id="59" name="TextBox 58">
             <a:extLst>
               <a:ext uri="{FF2B5EF4-FFF2-40B4-BE49-F238E27FC236}">
@@ -17086,7 +17582,7 @@
         </p:blipFill>
         <p:spPr>
           <a:xfrm>
-            <a:off x="932329" y="1710087"/>
+            <a:off x="1026459" y="1710087"/>
             <a:ext cx="10327341" cy="3437825"/>
           </a:xfrm>
           <a:prstGeom prst="rect">
@@ -17094,6 +17590,43 @@
           </a:prstGeom>
         </p:spPr>
       </p:pic>
+      <p:sp>
+        <p:nvSpPr>
+          <p:cNvPr id="2" name="Title 1">
+            <a:extLst>
+              <a:ext uri="{FF2B5EF4-FFF2-40B4-BE49-F238E27FC236}">
+                <a16:creationId xmlns:a16="http://schemas.microsoft.com/office/drawing/2014/main" id="{EDB22E11-386E-4205-349B-2F114E613483}"/>
+              </a:ext>
+            </a:extLst>
+          </p:cNvPr>
+          <p:cNvSpPr>
+            <a:spLocks noGrp="1"/>
+          </p:cNvSpPr>
+          <p:nvPr>
+            <p:ph type="title"/>
+          </p:nvPr>
+        </p:nvSpPr>
+        <p:spPr>
+          <a:xfrm>
+            <a:off x="838200" y="365126"/>
+            <a:ext cx="10515600" cy="1218994"/>
+          </a:xfrm>
+        </p:spPr>
+        <p:txBody>
+          <a:bodyPr/>
+          <a:lstStyle/>
+          <a:p>
+            <a:pPr algn="ctr"/>
+            <a:r>
+              <a:rPr lang="en-US">
+                <a:latin typeface="Times New Roman" panose="02020603050405020304" pitchFamily="18" charset="0"/>
+                <a:cs typeface="Times New Roman" panose="02020603050405020304" pitchFamily="18" charset="0"/>
+              </a:rPr>
+              <a:t>Lược sử sự phát triển của NLP cho đến nay</a:t>
+            </a:r>
+          </a:p>
+        </p:txBody>
+      </p:sp>
     </p:spTree>
     <p:extLst>
       <p:ext uri="{BB962C8B-B14F-4D97-AF65-F5344CB8AC3E}">
@@ -17218,14 +17751,51 @@
         </p:blipFill>
         <p:spPr>
           <a:xfrm>
-            <a:off x="774601" y="723293"/>
-            <a:ext cx="10642797" cy="5411413"/>
+            <a:off x="1083611" y="1321309"/>
+            <a:ext cx="10024778" cy="5097176"/>
           </a:xfrm>
           <a:prstGeom prst="rect">
             <a:avLst/>
           </a:prstGeom>
         </p:spPr>
       </p:pic>
+      <p:sp>
+        <p:nvSpPr>
+          <p:cNvPr id="2" name="Title 1">
+            <a:extLst>
+              <a:ext uri="{FF2B5EF4-FFF2-40B4-BE49-F238E27FC236}">
+                <a16:creationId xmlns:a16="http://schemas.microsoft.com/office/drawing/2014/main" id="{F2238EEB-82D7-5E21-2DF3-74DA601367C1}"/>
+              </a:ext>
+            </a:extLst>
+          </p:cNvPr>
+          <p:cNvSpPr>
+            <a:spLocks noGrp="1"/>
+          </p:cNvSpPr>
+          <p:nvPr>
+            <p:ph type="title"/>
+          </p:nvPr>
+        </p:nvSpPr>
+        <p:spPr>
+          <a:xfrm>
+            <a:off x="838200" y="365126"/>
+            <a:ext cx="10515600" cy="956184"/>
+          </a:xfrm>
+        </p:spPr>
+        <p:txBody>
+          <a:bodyPr/>
+          <a:lstStyle/>
+          <a:p>
+            <a:pPr algn="ctr"/>
+            <a:r>
+              <a:rPr lang="en-US">
+                <a:latin typeface="Times New Roman" panose="02020603050405020304" pitchFamily="18" charset="0"/>
+                <a:cs typeface="Times New Roman" panose="02020603050405020304" pitchFamily="18" charset="0"/>
+              </a:rPr>
+              <a:t>Hệ thống RAG</a:t>
+            </a:r>
+          </a:p>
+        </p:txBody>
+      </p:sp>
     </p:spTree>
     <p:extLst>
       <p:ext uri="{BB962C8B-B14F-4D97-AF65-F5344CB8AC3E}">
@@ -17416,6 +17986,34 @@
             <a:r>
               <a:rPr lang="en-US"/>
               <a:t>Phân tích bài toán</a:t>
+            </a:r>
+          </a:p>
+        </p:txBody>
+      </p:sp>
+      <p:sp>
+        <p:nvSpPr>
+          <p:cNvPr id="3" name="Title 2">
+            <a:extLst>
+              <a:ext uri="{FF2B5EF4-FFF2-40B4-BE49-F238E27FC236}">
+                <a16:creationId xmlns:a16="http://schemas.microsoft.com/office/drawing/2014/main" id="{DB0949BD-FE15-2034-9E1F-C68CAFB203E2}"/>
+              </a:ext>
+            </a:extLst>
+          </p:cNvPr>
+          <p:cNvSpPr>
+            <a:spLocks noGrp="1"/>
+          </p:cNvSpPr>
+          <p:nvPr>
+            <p:ph type="title"/>
+          </p:nvPr>
+        </p:nvSpPr>
+        <p:spPr/>
+        <p:txBody>
+          <a:bodyPr/>
+          <a:lstStyle/>
+          <a:p>
+            <a:r>
+              <a:rPr lang="en-US"/>
+              <a:t>Phát biểu và phân tích bài toán</a:t>
             </a:r>
           </a:p>
         </p:txBody>
@@ -17484,14 +18082,53 @@
         </p:blipFill>
         <p:spPr>
           <a:xfrm>
-            <a:off x="806500" y="183112"/>
-            <a:ext cx="10578999" cy="6491776"/>
+            <a:off x="1427393" y="930167"/>
+            <a:ext cx="9337212" cy="5729757"/>
           </a:xfrm>
           <a:prstGeom prst="rect">
             <a:avLst/>
           </a:prstGeom>
         </p:spPr>
       </p:pic>
+      <p:sp>
+        <p:nvSpPr>
+          <p:cNvPr id="2" name="Title 1">
+            <a:extLst>
+              <a:ext uri="{FF2B5EF4-FFF2-40B4-BE49-F238E27FC236}">
+                <a16:creationId xmlns:a16="http://schemas.microsoft.com/office/drawing/2014/main" id="{EF80899A-87A4-B069-E6D5-150CD2AC8058}"/>
+              </a:ext>
+            </a:extLst>
+          </p:cNvPr>
+          <p:cNvSpPr>
+            <a:spLocks noGrp="1"/>
+          </p:cNvSpPr>
+          <p:nvPr>
+            <p:ph type="title"/>
+          </p:nvPr>
+        </p:nvSpPr>
+        <p:spPr>
+          <a:xfrm>
+            <a:off x="838199" y="128643"/>
+            <a:ext cx="10515600" cy="801524"/>
+          </a:xfrm>
+        </p:spPr>
+        <p:txBody>
+          <a:bodyPr>
+            <a:normAutofit/>
+          </a:bodyPr>
+          <a:lstStyle/>
+          <a:p>
+            <a:pPr algn="ctr"/>
+            <a:r>
+              <a:rPr lang="en-US" sz="3600">
+                <a:latin typeface="Times New Roman" panose="02020603050405020304" pitchFamily="18" charset="0"/>
+                <a:cs typeface="Times New Roman" panose="02020603050405020304" pitchFamily="18" charset="0"/>
+              </a:rPr>
+              <a:t>Phương pháp đề xuất triển khai hệ thống</a:t>
+            </a:r>
+          </a:p>
+        </p:txBody>
+      </p:sp>
     </p:spTree>
     <p:extLst>
       <p:ext uri="{BB962C8B-B14F-4D97-AF65-F5344CB8AC3E}">
@@ -17556,14 +18193,53 @@
         </p:blipFill>
         <p:spPr>
           <a:xfrm>
-            <a:off x="857066" y="165538"/>
-            <a:ext cx="10477868" cy="6526924"/>
+            <a:off x="1723933" y="1135165"/>
+            <a:ext cx="8744134" cy="5446938"/>
           </a:xfrm>
           <a:prstGeom prst="rect">
             <a:avLst/>
           </a:prstGeom>
         </p:spPr>
       </p:pic>
+      <p:sp>
+        <p:nvSpPr>
+          <p:cNvPr id="2" name="Title 1">
+            <a:extLst>
+              <a:ext uri="{FF2B5EF4-FFF2-40B4-BE49-F238E27FC236}">
+                <a16:creationId xmlns:a16="http://schemas.microsoft.com/office/drawing/2014/main" id="{7C0A7913-3FD0-8173-8106-223ADF6654F0}"/>
+              </a:ext>
+            </a:extLst>
+          </p:cNvPr>
+          <p:cNvSpPr>
+            <a:spLocks noGrp="1"/>
+          </p:cNvSpPr>
+          <p:nvPr>
+            <p:ph type="title"/>
+          </p:nvPr>
+        </p:nvSpPr>
+        <p:spPr>
+          <a:xfrm>
+            <a:off x="838200" y="239002"/>
+            <a:ext cx="10515600" cy="896163"/>
+          </a:xfrm>
+        </p:spPr>
+        <p:txBody>
+          <a:bodyPr>
+            <a:normAutofit/>
+          </a:bodyPr>
+          <a:lstStyle/>
+          <a:p>
+            <a:pPr algn="ctr"/>
+            <a:r>
+              <a:rPr lang="en-US" sz="3600">
+                <a:latin typeface="Times New Roman" panose="02020603050405020304" pitchFamily="18" charset="0"/>
+                <a:cs typeface="Times New Roman" panose="02020603050405020304" pitchFamily="18" charset="0"/>
+              </a:rPr>
+              <a:t>Hệ thống RAG đề xuất</a:t>
+            </a:r>
+          </a:p>
+        </p:txBody>
+      </p:sp>
     </p:spTree>
     <p:extLst>
       <p:ext uri="{BB962C8B-B14F-4D97-AF65-F5344CB8AC3E}">

--- a/documents/slide bao cao.pptx
+++ b/documents/slide bao cao.pptx
@@ -5,7 +5,7 @@
     <p:sldMasterId id="2147483648" r:id="rId1"/>
   </p:sldMasterIdLst>
   <p:notesMasterIdLst>
-    <p:notesMasterId r:id="rId28"/>
+    <p:notesMasterId r:id="rId48"/>
   </p:notesMasterIdLst>
   <p:sldIdLst>
     <p:sldId id="256" r:id="rId2"/>
@@ -32,8 +32,28 @@
     <p:sldId id="270" r:id="rId23"/>
     <p:sldId id="271" r:id="rId24"/>
     <p:sldId id="282" r:id="rId25"/>
-    <p:sldId id="272" r:id="rId26"/>
-    <p:sldId id="273" r:id="rId27"/>
+    <p:sldId id="307" r:id="rId26"/>
+    <p:sldId id="308" r:id="rId27"/>
+    <p:sldId id="309" r:id="rId28"/>
+    <p:sldId id="310" r:id="rId29"/>
+    <p:sldId id="311" r:id="rId30"/>
+    <p:sldId id="312" r:id="rId31"/>
+    <p:sldId id="273" r:id="rId32"/>
+    <p:sldId id="287" r:id="rId33"/>
+    <p:sldId id="293" r:id="rId34"/>
+    <p:sldId id="294" r:id="rId35"/>
+    <p:sldId id="295" r:id="rId36"/>
+    <p:sldId id="296" r:id="rId37"/>
+    <p:sldId id="297" r:id="rId38"/>
+    <p:sldId id="298" r:id="rId39"/>
+    <p:sldId id="301" r:id="rId40"/>
+    <p:sldId id="302" r:id="rId41"/>
+    <p:sldId id="303" r:id="rId42"/>
+    <p:sldId id="299" r:id="rId43"/>
+    <p:sldId id="300" r:id="rId44"/>
+    <p:sldId id="304" r:id="rId45"/>
+    <p:sldId id="305" r:id="rId46"/>
+    <p:sldId id="306" r:id="rId47"/>
   </p:sldIdLst>
   <p:sldSz cx="12192000" cy="6858000"/>
   <p:notesSz cx="6858000" cy="9144000"/>
@@ -622,7 +642,7 @@
           <a:p>
             <a:r>
               <a:rPr lang="en-US"/>
-              <a:t>Đánh giá hiệu quả embedding của các mô hình embedding</a:t>
+              <a:t>Thông số của các mô hình embedding</a:t>
             </a:r>
           </a:p>
         </p:txBody>
@@ -644,7 +664,7 @@
           <a:p>
             <a:fld id="{864AE1F8-3712-49A6-BC7C-273E12ADCFAB}" type="slidenum">
               <a:rPr lang="en-US" smtClean="0"/>
-              <a:t>17</a:t>
+              <a:t>15</a:t>
             </a:fld>
             <a:endParaRPr lang="en-US"/>
           </a:p>
@@ -653,7 +673,7 @@
     </p:spTree>
     <p:extLst>
       <p:ext uri="{BB962C8B-B14F-4D97-AF65-F5344CB8AC3E}">
-        <p14:creationId xmlns:p14="http://schemas.microsoft.com/office/powerpoint/2010/main" val="3585398163"/>
+        <p14:creationId xmlns:p14="http://schemas.microsoft.com/office/powerpoint/2010/main" val="109299988"/>
       </p:ext>
     </p:extLst>
   </p:cSld>
@@ -709,7 +729,7 @@
           <a:p>
             <a:r>
               <a:rPr lang="en-US"/>
-              <a:t>Thông số các LLM</a:t>
+              <a:t>Đánh giá hiệu quả tokenization của các mô hình embedding</a:t>
             </a:r>
           </a:p>
         </p:txBody>
@@ -731,7 +751,7 @@
           <a:p>
             <a:fld id="{864AE1F8-3712-49A6-BC7C-273E12ADCFAB}" type="slidenum">
               <a:rPr lang="en-US" smtClean="0"/>
-              <a:t>18</a:t>
+              <a:t>16</a:t>
             </a:fld>
             <a:endParaRPr lang="en-US"/>
           </a:p>
@@ -740,7 +760,7 @@
     </p:spTree>
     <p:extLst>
       <p:ext uri="{BB962C8B-B14F-4D97-AF65-F5344CB8AC3E}">
-        <p14:creationId xmlns:p14="http://schemas.microsoft.com/office/powerpoint/2010/main" val="2603408485"/>
+        <p14:creationId xmlns:p14="http://schemas.microsoft.com/office/powerpoint/2010/main" val="2011407383"/>
       </p:ext>
     </p:extLst>
   </p:cSld>
@@ -796,7 +816,7 @@
           <a:p>
             <a:r>
               <a:rPr lang="en-US"/>
-              <a:t>Chỉ số benchmark các LLM</a:t>
+              <a:t>Đánh giá hiệu quả embedding của các mô hình embedding</a:t>
             </a:r>
           </a:p>
         </p:txBody>
@@ -818,7 +838,7 @@
           <a:p>
             <a:fld id="{864AE1F8-3712-49A6-BC7C-273E12ADCFAB}" type="slidenum">
               <a:rPr lang="en-US" smtClean="0"/>
-              <a:t>19</a:t>
+              <a:t>17</a:t>
             </a:fld>
             <a:endParaRPr lang="en-US"/>
           </a:p>
@@ -827,7 +847,7 @@
     </p:spTree>
     <p:extLst>
       <p:ext uri="{BB962C8B-B14F-4D97-AF65-F5344CB8AC3E}">
-        <p14:creationId xmlns:p14="http://schemas.microsoft.com/office/powerpoint/2010/main" val="2076859014"/>
+        <p14:creationId xmlns:p14="http://schemas.microsoft.com/office/powerpoint/2010/main" val="3585398163"/>
       </p:ext>
     </p:extLst>
   </p:cSld>
@@ -883,17 +903,8 @@
           <a:p>
             <a:r>
               <a:rPr lang="en-US"/>
-              <a:t>Các chức năng của hệ thống:</a:t>
+              <a:t>Thông số các LLM</a:t>
             </a:r>
-          </a:p>
-          <a:p>
-            <a:r>
-              <a:rPr lang="en-US"/>
-              <a:t>- Các chức năng đưuọc triển khai cho hệ thống (text chat, voice realtime.., exam…)</a:t>
-            </a:r>
-          </a:p>
-          <a:p>
-            <a:endParaRPr lang="en-US"/>
           </a:p>
         </p:txBody>
       </p:sp>
@@ -914,7 +925,7 @@
           <a:p>
             <a:fld id="{864AE1F8-3712-49A6-BC7C-273E12ADCFAB}" type="slidenum">
               <a:rPr lang="en-US" smtClean="0"/>
-              <a:t>21</a:t>
+              <a:t>18</a:t>
             </a:fld>
             <a:endParaRPr lang="en-US"/>
           </a:p>
@@ -923,7 +934,7 @@
     </p:spTree>
     <p:extLst>
       <p:ext uri="{BB962C8B-B14F-4D97-AF65-F5344CB8AC3E}">
-        <p14:creationId xmlns:p14="http://schemas.microsoft.com/office/powerpoint/2010/main" val="3027899732"/>
+        <p14:creationId xmlns:p14="http://schemas.microsoft.com/office/powerpoint/2010/main" val="2603408485"/>
       </p:ext>
     </p:extLst>
   </p:cSld>
@@ -977,30 +988,10 @@
           <a:bodyPr/>
           <a:lstStyle/>
           <a:p>
-            <a:pPr marL="0" marR="0" lvl="0" indent="0" algn="l" defTabSz="914400" rtl="0" eaLnBrk="1" fontAlgn="auto" latinLnBrk="0" hangingPunct="1">
-              <a:lnSpc>
-                <a:spcPct val="100000"/>
-              </a:lnSpc>
-              <a:spcBef>
-                <a:spcPts val="0"/>
-              </a:spcBef>
-              <a:spcAft>
-                <a:spcPts val="0"/>
-              </a:spcAft>
-              <a:buClrTx/>
-              <a:buSzTx/>
-              <a:buFontTx/>
-              <a:buNone/>
-              <a:tabLst/>
-              <a:defRPr/>
-            </a:pPr>
             <a:r>
               <a:rPr lang="en-US"/>
-              <a:t>Các công nghệ STT + TTS</a:t>
+              <a:t>Chỉ số benchmark các LLM</a:t>
             </a:r>
-          </a:p>
-          <a:p>
-            <a:endParaRPr lang="en-US"/>
           </a:p>
         </p:txBody>
       </p:sp>
@@ -1021,7 +1012,7 @@
           <a:p>
             <a:fld id="{864AE1F8-3712-49A6-BC7C-273E12ADCFAB}" type="slidenum">
               <a:rPr lang="en-US" smtClean="0"/>
-              <a:t>23</a:t>
+              <a:t>19</a:t>
             </a:fld>
             <a:endParaRPr lang="en-US"/>
           </a:p>
@@ -1030,7 +1021,7 @@
     </p:spTree>
     <p:extLst>
       <p:ext uri="{BB962C8B-B14F-4D97-AF65-F5344CB8AC3E}">
-        <p14:creationId xmlns:p14="http://schemas.microsoft.com/office/powerpoint/2010/main" val="1416246105"/>
+        <p14:creationId xmlns:p14="http://schemas.microsoft.com/office/powerpoint/2010/main" val="2076859014"/>
       </p:ext>
     </p:extLst>
   </p:cSld>
@@ -1084,26 +1075,15 @@
           <a:bodyPr/>
           <a:lstStyle/>
           <a:p>
-            <a:pPr marL="0" marR="0" lvl="0" indent="0" algn="l" defTabSz="914400" rtl="0" eaLnBrk="1" fontAlgn="auto" latinLnBrk="0" hangingPunct="1">
-              <a:lnSpc>
-                <a:spcPct val="100000"/>
-              </a:lnSpc>
-              <a:spcBef>
-                <a:spcPts val="0"/>
-              </a:spcBef>
-              <a:spcAft>
-                <a:spcPts val="0"/>
-              </a:spcAft>
-              <a:buClrTx/>
-              <a:buSzTx/>
-              <a:buFontTx/>
-              <a:buNone/>
-              <a:tabLst/>
-              <a:defRPr/>
-            </a:pPr>
             <a:r>
               <a:rPr lang="en-US"/>
-              <a:t>Phương pháp triển khai hệ thống của chức năng trò chuyện realtime</a:t>
+              <a:t>Các chức năng của hệ thống:</a:t>
+            </a:r>
+          </a:p>
+          <a:p>
+            <a:r>
+              <a:rPr lang="en-US"/>
+              <a:t>- Các chức năng đưuọc triển khai cho hệ thống (text chat, voice realtime.., exam…)</a:t>
             </a:r>
           </a:p>
           <a:p>
@@ -1128,7 +1108,7 @@
           <a:p>
             <a:fld id="{864AE1F8-3712-49A6-BC7C-273E12ADCFAB}" type="slidenum">
               <a:rPr lang="en-US" smtClean="0"/>
-              <a:t>24</a:t>
+              <a:t>21</a:t>
             </a:fld>
             <a:endParaRPr lang="en-US"/>
           </a:p>
@@ -1137,7 +1117,7 @@
     </p:spTree>
     <p:extLst>
       <p:ext uri="{BB962C8B-B14F-4D97-AF65-F5344CB8AC3E}">
-        <p14:creationId xmlns:p14="http://schemas.microsoft.com/office/powerpoint/2010/main" val="1300917271"/>
+        <p14:creationId xmlns:p14="http://schemas.microsoft.com/office/powerpoint/2010/main" val="3027899732"/>
       </p:ext>
     </p:extLst>
   </p:cSld>
@@ -1191,16 +1171,30 @@
           <a:bodyPr/>
           <a:lstStyle/>
           <a:p>
+            <a:pPr marL="0" marR="0" lvl="0" indent="0" algn="l" defTabSz="914400" rtl="0" eaLnBrk="1" fontAlgn="auto" latinLnBrk="0" hangingPunct="1">
+              <a:lnSpc>
+                <a:spcPct val="100000"/>
+              </a:lnSpc>
+              <a:spcBef>
+                <a:spcPts val="0"/>
+              </a:spcBef>
+              <a:spcAft>
+                <a:spcPts val="0"/>
+              </a:spcAft>
+              <a:buClrTx/>
+              <a:buSzTx/>
+              <a:buFontTx/>
+              <a:buNone/>
+              <a:tabLst/>
+              <a:defRPr/>
+            </a:pPr>
             <a:r>
               <a:rPr lang="en-US"/>
-              <a:t>Quá trình sinh phản hồi</a:t>
+              <a:t>Chức năng chatbot văn bản</a:t>
             </a:r>
           </a:p>
           <a:p>
-            <a:r>
-              <a:rPr lang="en-US"/>
-              <a:t>Đề cập đến data được embedding và retrieval như thế nào</a:t>
-            </a:r>
+            <a:endParaRPr lang="en-US"/>
           </a:p>
         </p:txBody>
       </p:sp>
@@ -1221,7 +1215,7 @@
           <a:p>
             <a:fld id="{864AE1F8-3712-49A6-BC7C-273E12ADCFAB}" type="slidenum">
               <a:rPr lang="en-US" smtClean="0"/>
-              <a:t>25</a:t>
+              <a:t>22</a:t>
             </a:fld>
             <a:endParaRPr lang="en-US"/>
           </a:p>
@@ -1230,7 +1224,413 @@
     </p:spTree>
     <p:extLst>
       <p:ext uri="{BB962C8B-B14F-4D97-AF65-F5344CB8AC3E}">
-        <p14:creationId xmlns:p14="http://schemas.microsoft.com/office/powerpoint/2010/main" val="1742359746"/>
+        <p14:creationId xmlns:p14="http://schemas.microsoft.com/office/powerpoint/2010/main" val="814609939"/>
+      </p:ext>
+    </p:extLst>
+  </p:cSld>
+  <p:clrMapOvr>
+    <a:masterClrMapping/>
+  </p:clrMapOvr>
+</p:notes>
+</file>
+
+<file path=ppt/notesSlides/notesSlide17.xml><?xml version="1.0" encoding="utf-8"?>
+<p:notes xmlns:a="http://schemas.openxmlformats.org/drawingml/2006/main" xmlns:r="http://schemas.openxmlformats.org/officeDocument/2006/relationships" xmlns:p="http://schemas.openxmlformats.org/presentationml/2006/main">
+  <p:cSld>
+    <p:spTree>
+      <p:nvGrpSpPr>
+        <p:cNvPr id="1" name=""/>
+        <p:cNvGrpSpPr/>
+        <p:nvPr/>
+      </p:nvGrpSpPr>
+      <p:grpSpPr>
+        <a:xfrm>
+          <a:off x="0" y="0"/>
+          <a:ext cx="0" cy="0"/>
+          <a:chOff x="0" y="0"/>
+          <a:chExt cx="0" cy="0"/>
+        </a:xfrm>
+      </p:grpSpPr>
+      <p:sp>
+        <p:nvSpPr>
+          <p:cNvPr id="2" name="Slide Image Placeholder 1"/>
+          <p:cNvSpPr>
+            <a:spLocks noGrp="1" noRot="1" noChangeAspect="1"/>
+          </p:cNvSpPr>
+          <p:nvPr>
+            <p:ph type="sldImg"/>
+          </p:nvPr>
+        </p:nvSpPr>
+        <p:spPr/>
+      </p:sp>
+      <p:sp>
+        <p:nvSpPr>
+          <p:cNvPr id="3" name="Notes Placeholder 2"/>
+          <p:cNvSpPr>
+            <a:spLocks noGrp="1"/>
+          </p:cNvSpPr>
+          <p:nvPr>
+            <p:ph type="body" idx="1"/>
+          </p:nvPr>
+        </p:nvSpPr>
+        <p:spPr/>
+        <p:txBody>
+          <a:bodyPr/>
+          <a:lstStyle/>
+          <a:p>
+            <a:pPr marL="0" marR="0" lvl="0" indent="0" algn="l" defTabSz="914400" rtl="0" eaLnBrk="1" fontAlgn="auto" latinLnBrk="0" hangingPunct="1">
+              <a:lnSpc>
+                <a:spcPct val="100000"/>
+              </a:lnSpc>
+              <a:spcBef>
+                <a:spcPts val="0"/>
+              </a:spcBef>
+              <a:spcAft>
+                <a:spcPts val="0"/>
+              </a:spcAft>
+              <a:buClrTx/>
+              <a:buSzTx/>
+              <a:buFontTx/>
+              <a:buNone/>
+              <a:tabLst/>
+              <a:defRPr/>
+            </a:pPr>
+            <a:r>
+              <a:rPr lang="en-US"/>
+              <a:t>Các công nghệ STT + TTS</a:t>
+            </a:r>
+          </a:p>
+          <a:p>
+            <a:endParaRPr lang="en-US"/>
+          </a:p>
+          <a:p>
+            <a:r>
+              <a:rPr lang="en-US"/>
+              <a:t>Chức năng trò chuyện thời gian thực</a:t>
+            </a:r>
+          </a:p>
+          <a:p>
+            <a:r>
+              <a:rPr lang="en-US"/>
+              <a:t>Giới thiệu về công nghệ TTS-STT</a:t>
+            </a:r>
+          </a:p>
+          <a:p>
+            <a:pPr marL="285750" indent="-285750">
+              <a:buFontTx/>
+              <a:buChar char="-"/>
+            </a:pPr>
+            <a:r>
+              <a:rPr lang="en-US"/>
+              <a:t>giới thiệu</a:t>
+            </a:r>
+          </a:p>
+          <a:p>
+            <a:pPr marL="285750" indent="-285750">
+              <a:buFontTx/>
+              <a:buChar char="-"/>
+            </a:pPr>
+            <a:r>
+              <a:rPr lang="en-US"/>
+              <a:t>Lợi tích</a:t>
+            </a:r>
+          </a:p>
+          <a:p>
+            <a:pPr marL="285750" indent="-285750">
+              <a:buFontTx/>
+              <a:buChar char="-"/>
+            </a:pPr>
+            <a:r>
+              <a:rPr lang="en-US"/>
+              <a:t>Lợi tích khi Ứng dụng công nghệ này vào hệ thống chatbot</a:t>
+            </a:r>
+          </a:p>
+          <a:p>
+            <a:pPr marL="285750" indent="-285750">
+              <a:buFontTx/>
+              <a:buChar char="-"/>
+            </a:pPr>
+            <a:r>
+              <a:rPr lang="en-US"/>
+              <a:t>Phương pháp triển khai hệ thống (miêu tả hệ thống  hoạt động như thế nào? Cách mà văn bản được</a:t>
+            </a:r>
+          </a:p>
+          <a:p>
+            <a:r>
+              <a:rPr lang="en-US"/>
+              <a:t>Chuyển thành âm thanh và ngược lại. (chi tiết các phần và luồng hoạt động để sau)</a:t>
+            </a:r>
+          </a:p>
+          <a:p>
+            <a:endParaRPr lang="en-US"/>
+          </a:p>
+        </p:txBody>
+      </p:sp>
+      <p:sp>
+        <p:nvSpPr>
+          <p:cNvPr id="4" name="Slide Number Placeholder 3"/>
+          <p:cNvSpPr>
+            <a:spLocks noGrp="1"/>
+          </p:cNvSpPr>
+          <p:nvPr>
+            <p:ph type="sldNum" sz="quarter" idx="5"/>
+          </p:nvPr>
+        </p:nvSpPr>
+        <p:spPr/>
+        <p:txBody>
+          <a:bodyPr/>
+          <a:lstStyle/>
+          <a:p>
+            <a:fld id="{864AE1F8-3712-49A6-BC7C-273E12ADCFAB}" type="slidenum">
+              <a:rPr lang="en-US" smtClean="0"/>
+              <a:t>23</a:t>
+            </a:fld>
+            <a:endParaRPr lang="en-US"/>
+          </a:p>
+        </p:txBody>
+      </p:sp>
+    </p:spTree>
+    <p:extLst>
+      <p:ext uri="{BB962C8B-B14F-4D97-AF65-F5344CB8AC3E}">
+        <p14:creationId xmlns:p14="http://schemas.microsoft.com/office/powerpoint/2010/main" val="1416246105"/>
+      </p:ext>
+    </p:extLst>
+  </p:cSld>
+  <p:clrMapOvr>
+    <a:masterClrMapping/>
+  </p:clrMapOvr>
+</p:notes>
+</file>
+
+<file path=ppt/notesSlides/notesSlide18.xml><?xml version="1.0" encoding="utf-8"?>
+<p:notes xmlns:a="http://schemas.openxmlformats.org/drawingml/2006/main" xmlns:r="http://schemas.openxmlformats.org/officeDocument/2006/relationships" xmlns:p="http://schemas.openxmlformats.org/presentationml/2006/main">
+  <p:cSld>
+    <p:spTree>
+      <p:nvGrpSpPr>
+        <p:cNvPr id="1" name=""/>
+        <p:cNvGrpSpPr/>
+        <p:nvPr/>
+      </p:nvGrpSpPr>
+      <p:grpSpPr>
+        <a:xfrm>
+          <a:off x="0" y="0"/>
+          <a:ext cx="0" cy="0"/>
+          <a:chOff x="0" y="0"/>
+          <a:chExt cx="0" cy="0"/>
+        </a:xfrm>
+      </p:grpSpPr>
+      <p:sp>
+        <p:nvSpPr>
+          <p:cNvPr id="2" name="Slide Image Placeholder 1"/>
+          <p:cNvSpPr>
+            <a:spLocks noGrp="1" noRot="1" noChangeAspect="1"/>
+          </p:cNvSpPr>
+          <p:nvPr>
+            <p:ph type="sldImg"/>
+          </p:nvPr>
+        </p:nvSpPr>
+        <p:spPr/>
+      </p:sp>
+      <p:sp>
+        <p:nvSpPr>
+          <p:cNvPr id="3" name="Notes Placeholder 2"/>
+          <p:cNvSpPr>
+            <a:spLocks noGrp="1"/>
+          </p:cNvSpPr>
+          <p:nvPr>
+            <p:ph type="body" idx="1"/>
+          </p:nvPr>
+        </p:nvSpPr>
+        <p:spPr/>
+        <p:txBody>
+          <a:bodyPr/>
+          <a:lstStyle/>
+          <a:p>
+            <a:pPr marL="0" marR="0" lvl="0" indent="0" algn="l" defTabSz="914400" rtl="0" eaLnBrk="1" fontAlgn="auto" latinLnBrk="0" hangingPunct="1">
+              <a:lnSpc>
+                <a:spcPct val="100000"/>
+              </a:lnSpc>
+              <a:spcBef>
+                <a:spcPts val="0"/>
+              </a:spcBef>
+              <a:spcAft>
+                <a:spcPts val="0"/>
+              </a:spcAft>
+              <a:buClrTx/>
+              <a:buSzTx/>
+              <a:buFontTx/>
+              <a:buNone/>
+              <a:tabLst/>
+              <a:defRPr/>
+            </a:pPr>
+            <a:r>
+              <a:rPr lang="en-US"/>
+              <a:t>Phương pháp triển khai hệ thống của chức năng trò chuyện realtime</a:t>
+            </a:r>
+          </a:p>
+          <a:p>
+            <a:endParaRPr lang="en-US"/>
+          </a:p>
+        </p:txBody>
+      </p:sp>
+      <p:sp>
+        <p:nvSpPr>
+          <p:cNvPr id="4" name="Slide Number Placeholder 3"/>
+          <p:cNvSpPr>
+            <a:spLocks noGrp="1"/>
+          </p:cNvSpPr>
+          <p:nvPr>
+            <p:ph type="sldNum" sz="quarter" idx="5"/>
+          </p:nvPr>
+        </p:nvSpPr>
+        <p:spPr/>
+        <p:txBody>
+          <a:bodyPr/>
+          <a:lstStyle/>
+          <a:p>
+            <a:fld id="{864AE1F8-3712-49A6-BC7C-273E12ADCFAB}" type="slidenum">
+              <a:rPr lang="en-US" smtClean="0"/>
+              <a:t>24</a:t>
+            </a:fld>
+            <a:endParaRPr lang="en-US"/>
+          </a:p>
+        </p:txBody>
+      </p:sp>
+    </p:spTree>
+    <p:extLst>
+      <p:ext uri="{BB962C8B-B14F-4D97-AF65-F5344CB8AC3E}">
+        <p14:creationId xmlns:p14="http://schemas.microsoft.com/office/powerpoint/2010/main" val="1300917271"/>
+      </p:ext>
+    </p:extLst>
+  </p:cSld>
+  <p:clrMapOvr>
+    <a:masterClrMapping/>
+  </p:clrMapOvr>
+</p:notes>
+</file>
+
+<file path=ppt/notesSlides/notesSlide19.xml><?xml version="1.0" encoding="utf-8"?>
+<p:notes xmlns:a="http://schemas.openxmlformats.org/drawingml/2006/main" xmlns:r="http://schemas.openxmlformats.org/officeDocument/2006/relationships" xmlns:p="http://schemas.openxmlformats.org/presentationml/2006/main">
+  <p:cSld>
+    <p:spTree>
+      <p:nvGrpSpPr>
+        <p:cNvPr id="1" name="">
+          <a:extLst>
+            <a:ext uri="{FF2B5EF4-FFF2-40B4-BE49-F238E27FC236}">
+              <a16:creationId xmlns:a16="http://schemas.microsoft.com/office/drawing/2014/main" id="{B762E6F8-08DB-4B4B-33C5-2FE228C13EF4}"/>
+            </a:ext>
+          </a:extLst>
+        </p:cNvPr>
+        <p:cNvGrpSpPr/>
+        <p:nvPr/>
+      </p:nvGrpSpPr>
+      <p:grpSpPr>
+        <a:xfrm>
+          <a:off x="0" y="0"/>
+          <a:ext cx="0" cy="0"/>
+          <a:chOff x="0" y="0"/>
+          <a:chExt cx="0" cy="0"/>
+        </a:xfrm>
+      </p:grpSpPr>
+      <p:sp>
+        <p:nvSpPr>
+          <p:cNvPr id="2" name="Slide Image Placeholder 1">
+            <a:extLst>
+              <a:ext uri="{FF2B5EF4-FFF2-40B4-BE49-F238E27FC236}">
+                <a16:creationId xmlns:a16="http://schemas.microsoft.com/office/drawing/2014/main" id="{DC1112E2-1E5C-9B21-6641-7B14837AF92D}"/>
+              </a:ext>
+            </a:extLst>
+          </p:cNvPr>
+          <p:cNvSpPr>
+            <a:spLocks noGrp="1" noRot="1" noChangeAspect="1"/>
+          </p:cNvSpPr>
+          <p:nvPr>
+            <p:ph type="sldImg"/>
+          </p:nvPr>
+        </p:nvSpPr>
+        <p:spPr/>
+      </p:sp>
+      <p:sp>
+        <p:nvSpPr>
+          <p:cNvPr id="3" name="Notes Placeholder 2">
+            <a:extLst>
+              <a:ext uri="{FF2B5EF4-FFF2-40B4-BE49-F238E27FC236}">
+                <a16:creationId xmlns:a16="http://schemas.microsoft.com/office/drawing/2014/main" id="{A99C3DF2-8A15-66A2-8AC4-5A15B001F824}"/>
+              </a:ext>
+            </a:extLst>
+          </p:cNvPr>
+          <p:cNvSpPr>
+            <a:spLocks noGrp="1"/>
+          </p:cNvSpPr>
+          <p:nvPr>
+            <p:ph type="body" idx="1"/>
+          </p:nvPr>
+        </p:nvSpPr>
+        <p:spPr/>
+        <p:txBody>
+          <a:bodyPr/>
+          <a:lstStyle/>
+          <a:p>
+            <a:pPr marL="0" marR="0" lvl="0" indent="0" algn="l" defTabSz="914400" rtl="0" eaLnBrk="1" fontAlgn="auto" latinLnBrk="0" hangingPunct="1">
+              <a:lnSpc>
+                <a:spcPct val="100000"/>
+              </a:lnSpc>
+              <a:spcBef>
+                <a:spcPts val="0"/>
+              </a:spcBef>
+              <a:spcAft>
+                <a:spcPts val="0"/>
+              </a:spcAft>
+              <a:buClrTx/>
+              <a:buSzTx/>
+              <a:buFontTx/>
+              <a:buNone/>
+              <a:tabLst/>
+              <a:defRPr/>
+            </a:pPr>
+            <a:r>
+              <a:rPr lang="en-US"/>
+              <a:t>Phương pháp triển khai hệ thống của chức năng trò chuyện realtime</a:t>
+            </a:r>
+          </a:p>
+          <a:p>
+            <a:endParaRPr lang="en-US"/>
+          </a:p>
+        </p:txBody>
+      </p:sp>
+      <p:sp>
+        <p:nvSpPr>
+          <p:cNvPr id="4" name="Slide Number Placeholder 3">
+            <a:extLst>
+              <a:ext uri="{FF2B5EF4-FFF2-40B4-BE49-F238E27FC236}">
+                <a16:creationId xmlns:a16="http://schemas.microsoft.com/office/drawing/2014/main" id="{CEC321A1-8260-116C-41AE-3354722561A0}"/>
+              </a:ext>
+            </a:extLst>
+          </p:cNvPr>
+          <p:cNvSpPr>
+            <a:spLocks noGrp="1"/>
+          </p:cNvSpPr>
+          <p:nvPr>
+            <p:ph type="sldNum" sz="quarter" idx="5"/>
+          </p:nvPr>
+        </p:nvSpPr>
+        <p:spPr/>
+        <p:txBody>
+          <a:bodyPr/>
+          <a:lstStyle/>
+          <a:p>
+            <a:fld id="{864AE1F8-3712-49A6-BC7C-273E12ADCFAB}" type="slidenum">
+              <a:rPr lang="en-US" smtClean="0"/>
+              <a:t>25</a:t>
+            </a:fld>
+            <a:endParaRPr lang="en-US"/>
+          </a:p>
+        </p:txBody>
+      </p:sp>
+    </p:spTree>
+    <p:extLst>
+      <p:ext uri="{BB962C8B-B14F-4D97-AF65-F5344CB8AC3E}">
+        <p14:creationId xmlns:p14="http://schemas.microsoft.com/office/powerpoint/2010/main" val="3630558271"/>
       </p:ext>
     </p:extLst>
   </p:cSld>
@@ -1372,6 +1772,661 @@
     <p:extLst>
       <p:ext uri="{BB962C8B-B14F-4D97-AF65-F5344CB8AC3E}">
         <p14:creationId xmlns:p14="http://schemas.microsoft.com/office/powerpoint/2010/main" val="3754022819"/>
+      </p:ext>
+    </p:extLst>
+  </p:cSld>
+  <p:clrMapOvr>
+    <a:masterClrMapping/>
+  </p:clrMapOvr>
+</p:notes>
+</file>
+
+<file path=ppt/notesSlides/notesSlide20.xml><?xml version="1.0" encoding="utf-8"?>
+<p:notes xmlns:a="http://schemas.openxmlformats.org/drawingml/2006/main" xmlns:r="http://schemas.openxmlformats.org/officeDocument/2006/relationships" xmlns:p="http://schemas.openxmlformats.org/presentationml/2006/main">
+  <p:cSld>
+    <p:spTree>
+      <p:nvGrpSpPr>
+        <p:cNvPr id="1" name="">
+          <a:extLst>
+            <a:ext uri="{FF2B5EF4-FFF2-40B4-BE49-F238E27FC236}">
+              <a16:creationId xmlns:a16="http://schemas.microsoft.com/office/drawing/2014/main" id="{7F25978C-7178-194D-15DF-517B9915E475}"/>
+            </a:ext>
+          </a:extLst>
+        </p:cNvPr>
+        <p:cNvGrpSpPr/>
+        <p:nvPr/>
+      </p:nvGrpSpPr>
+      <p:grpSpPr>
+        <a:xfrm>
+          <a:off x="0" y="0"/>
+          <a:ext cx="0" cy="0"/>
+          <a:chOff x="0" y="0"/>
+          <a:chExt cx="0" cy="0"/>
+        </a:xfrm>
+      </p:grpSpPr>
+      <p:sp>
+        <p:nvSpPr>
+          <p:cNvPr id="2" name="Slide Image Placeholder 1">
+            <a:extLst>
+              <a:ext uri="{FF2B5EF4-FFF2-40B4-BE49-F238E27FC236}">
+                <a16:creationId xmlns:a16="http://schemas.microsoft.com/office/drawing/2014/main" id="{87B2E24E-C5C2-A682-89E5-1BF9378470BF}"/>
+              </a:ext>
+            </a:extLst>
+          </p:cNvPr>
+          <p:cNvSpPr>
+            <a:spLocks noGrp="1" noRot="1" noChangeAspect="1"/>
+          </p:cNvSpPr>
+          <p:nvPr>
+            <p:ph type="sldImg"/>
+          </p:nvPr>
+        </p:nvSpPr>
+        <p:spPr/>
+      </p:sp>
+      <p:sp>
+        <p:nvSpPr>
+          <p:cNvPr id="3" name="Notes Placeholder 2">
+            <a:extLst>
+              <a:ext uri="{FF2B5EF4-FFF2-40B4-BE49-F238E27FC236}">
+                <a16:creationId xmlns:a16="http://schemas.microsoft.com/office/drawing/2014/main" id="{A55CBB4D-A133-9F3F-EDAD-F02E4BF1FAF5}"/>
+              </a:ext>
+            </a:extLst>
+          </p:cNvPr>
+          <p:cNvSpPr>
+            <a:spLocks noGrp="1"/>
+          </p:cNvSpPr>
+          <p:nvPr>
+            <p:ph type="body" idx="1"/>
+          </p:nvPr>
+        </p:nvSpPr>
+        <p:spPr/>
+        <p:txBody>
+          <a:bodyPr/>
+          <a:lstStyle/>
+          <a:p>
+            <a:pPr marL="0" marR="0" lvl="0" indent="0" algn="l" defTabSz="914400" rtl="0" eaLnBrk="1" fontAlgn="auto" latinLnBrk="0" hangingPunct="1">
+              <a:lnSpc>
+                <a:spcPct val="100000"/>
+              </a:lnSpc>
+              <a:spcBef>
+                <a:spcPts val="0"/>
+              </a:spcBef>
+              <a:spcAft>
+                <a:spcPts val="0"/>
+              </a:spcAft>
+              <a:buClrTx/>
+              <a:buSzTx/>
+              <a:buFontTx/>
+              <a:buNone/>
+              <a:tabLst/>
+              <a:defRPr/>
+            </a:pPr>
+            <a:r>
+              <a:rPr lang="en-US"/>
+              <a:t>Phương pháp triển khai hệ thống của chức năng trò chuyện realtime</a:t>
+            </a:r>
+          </a:p>
+          <a:p>
+            <a:endParaRPr lang="en-US"/>
+          </a:p>
+        </p:txBody>
+      </p:sp>
+      <p:sp>
+        <p:nvSpPr>
+          <p:cNvPr id="4" name="Slide Number Placeholder 3">
+            <a:extLst>
+              <a:ext uri="{FF2B5EF4-FFF2-40B4-BE49-F238E27FC236}">
+                <a16:creationId xmlns:a16="http://schemas.microsoft.com/office/drawing/2014/main" id="{91B6B947-97F3-230A-11C0-1402D774A290}"/>
+              </a:ext>
+            </a:extLst>
+          </p:cNvPr>
+          <p:cNvSpPr>
+            <a:spLocks noGrp="1"/>
+          </p:cNvSpPr>
+          <p:nvPr>
+            <p:ph type="sldNum" sz="quarter" idx="5"/>
+          </p:nvPr>
+        </p:nvSpPr>
+        <p:spPr/>
+        <p:txBody>
+          <a:bodyPr/>
+          <a:lstStyle/>
+          <a:p>
+            <a:fld id="{864AE1F8-3712-49A6-BC7C-273E12ADCFAB}" type="slidenum">
+              <a:rPr lang="en-US" smtClean="0"/>
+              <a:t>26</a:t>
+            </a:fld>
+            <a:endParaRPr lang="en-US"/>
+          </a:p>
+        </p:txBody>
+      </p:sp>
+    </p:spTree>
+    <p:extLst>
+      <p:ext uri="{BB962C8B-B14F-4D97-AF65-F5344CB8AC3E}">
+        <p14:creationId xmlns:p14="http://schemas.microsoft.com/office/powerpoint/2010/main" val="2911529667"/>
+      </p:ext>
+    </p:extLst>
+  </p:cSld>
+  <p:clrMapOvr>
+    <a:masterClrMapping/>
+  </p:clrMapOvr>
+</p:notes>
+</file>
+
+<file path=ppt/notesSlides/notesSlide21.xml><?xml version="1.0" encoding="utf-8"?>
+<p:notes xmlns:a="http://schemas.openxmlformats.org/drawingml/2006/main" xmlns:r="http://schemas.openxmlformats.org/officeDocument/2006/relationships" xmlns:p="http://schemas.openxmlformats.org/presentationml/2006/main">
+  <p:cSld>
+    <p:spTree>
+      <p:nvGrpSpPr>
+        <p:cNvPr id="1" name="">
+          <a:extLst>
+            <a:ext uri="{FF2B5EF4-FFF2-40B4-BE49-F238E27FC236}">
+              <a16:creationId xmlns:a16="http://schemas.microsoft.com/office/drawing/2014/main" id="{DAA3DB34-6F99-E51F-AFDC-9EA021FB53A1}"/>
+            </a:ext>
+          </a:extLst>
+        </p:cNvPr>
+        <p:cNvGrpSpPr/>
+        <p:nvPr/>
+      </p:nvGrpSpPr>
+      <p:grpSpPr>
+        <a:xfrm>
+          <a:off x="0" y="0"/>
+          <a:ext cx="0" cy="0"/>
+          <a:chOff x="0" y="0"/>
+          <a:chExt cx="0" cy="0"/>
+        </a:xfrm>
+      </p:grpSpPr>
+      <p:sp>
+        <p:nvSpPr>
+          <p:cNvPr id="2" name="Slide Image Placeholder 1">
+            <a:extLst>
+              <a:ext uri="{FF2B5EF4-FFF2-40B4-BE49-F238E27FC236}">
+                <a16:creationId xmlns:a16="http://schemas.microsoft.com/office/drawing/2014/main" id="{F72DAA50-6BAE-E1C7-F44C-77CA6D867D0B}"/>
+              </a:ext>
+            </a:extLst>
+          </p:cNvPr>
+          <p:cNvSpPr>
+            <a:spLocks noGrp="1" noRot="1" noChangeAspect="1"/>
+          </p:cNvSpPr>
+          <p:nvPr>
+            <p:ph type="sldImg"/>
+          </p:nvPr>
+        </p:nvSpPr>
+        <p:spPr/>
+      </p:sp>
+      <p:sp>
+        <p:nvSpPr>
+          <p:cNvPr id="3" name="Notes Placeholder 2">
+            <a:extLst>
+              <a:ext uri="{FF2B5EF4-FFF2-40B4-BE49-F238E27FC236}">
+                <a16:creationId xmlns:a16="http://schemas.microsoft.com/office/drawing/2014/main" id="{E87D0D49-7E44-1BEE-1711-CA72EF7D4DBE}"/>
+              </a:ext>
+            </a:extLst>
+          </p:cNvPr>
+          <p:cNvSpPr>
+            <a:spLocks noGrp="1"/>
+          </p:cNvSpPr>
+          <p:nvPr>
+            <p:ph type="body" idx="1"/>
+          </p:nvPr>
+        </p:nvSpPr>
+        <p:spPr/>
+        <p:txBody>
+          <a:bodyPr/>
+          <a:lstStyle/>
+          <a:p>
+            <a:pPr marL="0" marR="0" lvl="0" indent="0" algn="l" defTabSz="914400" rtl="0" eaLnBrk="1" fontAlgn="auto" latinLnBrk="0" hangingPunct="1">
+              <a:lnSpc>
+                <a:spcPct val="100000"/>
+              </a:lnSpc>
+              <a:spcBef>
+                <a:spcPts val="0"/>
+              </a:spcBef>
+              <a:spcAft>
+                <a:spcPts val="0"/>
+              </a:spcAft>
+              <a:buClrTx/>
+              <a:buSzTx/>
+              <a:buFontTx/>
+              <a:buNone/>
+              <a:tabLst/>
+              <a:defRPr/>
+            </a:pPr>
+            <a:r>
+              <a:rPr lang="en-US"/>
+              <a:t>Phương pháp triển khai hệ thống của chức năng trò chuyện realtime</a:t>
+            </a:r>
+          </a:p>
+          <a:p>
+            <a:endParaRPr lang="en-US"/>
+          </a:p>
+        </p:txBody>
+      </p:sp>
+      <p:sp>
+        <p:nvSpPr>
+          <p:cNvPr id="4" name="Slide Number Placeholder 3">
+            <a:extLst>
+              <a:ext uri="{FF2B5EF4-FFF2-40B4-BE49-F238E27FC236}">
+                <a16:creationId xmlns:a16="http://schemas.microsoft.com/office/drawing/2014/main" id="{3DAF3D88-70DF-B6D4-E096-47476FA7E940}"/>
+              </a:ext>
+            </a:extLst>
+          </p:cNvPr>
+          <p:cNvSpPr>
+            <a:spLocks noGrp="1"/>
+          </p:cNvSpPr>
+          <p:nvPr>
+            <p:ph type="sldNum" sz="quarter" idx="5"/>
+          </p:nvPr>
+        </p:nvSpPr>
+        <p:spPr/>
+        <p:txBody>
+          <a:bodyPr/>
+          <a:lstStyle/>
+          <a:p>
+            <a:fld id="{864AE1F8-3712-49A6-BC7C-273E12ADCFAB}" type="slidenum">
+              <a:rPr lang="en-US" smtClean="0"/>
+              <a:t>27</a:t>
+            </a:fld>
+            <a:endParaRPr lang="en-US"/>
+          </a:p>
+        </p:txBody>
+      </p:sp>
+    </p:spTree>
+    <p:extLst>
+      <p:ext uri="{BB962C8B-B14F-4D97-AF65-F5344CB8AC3E}">
+        <p14:creationId xmlns:p14="http://schemas.microsoft.com/office/powerpoint/2010/main" val="2018810609"/>
+      </p:ext>
+    </p:extLst>
+  </p:cSld>
+  <p:clrMapOvr>
+    <a:masterClrMapping/>
+  </p:clrMapOvr>
+</p:notes>
+</file>
+
+<file path=ppt/notesSlides/notesSlide22.xml><?xml version="1.0" encoding="utf-8"?>
+<p:notes xmlns:a="http://schemas.openxmlformats.org/drawingml/2006/main" xmlns:r="http://schemas.openxmlformats.org/officeDocument/2006/relationships" xmlns:p="http://schemas.openxmlformats.org/presentationml/2006/main">
+  <p:cSld>
+    <p:spTree>
+      <p:nvGrpSpPr>
+        <p:cNvPr id="1" name="">
+          <a:extLst>
+            <a:ext uri="{FF2B5EF4-FFF2-40B4-BE49-F238E27FC236}">
+              <a16:creationId xmlns:a16="http://schemas.microsoft.com/office/drawing/2014/main" id="{C395788C-91B2-F526-D28A-0B215420C9BD}"/>
+            </a:ext>
+          </a:extLst>
+        </p:cNvPr>
+        <p:cNvGrpSpPr/>
+        <p:nvPr/>
+      </p:nvGrpSpPr>
+      <p:grpSpPr>
+        <a:xfrm>
+          <a:off x="0" y="0"/>
+          <a:ext cx="0" cy="0"/>
+          <a:chOff x="0" y="0"/>
+          <a:chExt cx="0" cy="0"/>
+        </a:xfrm>
+      </p:grpSpPr>
+      <p:sp>
+        <p:nvSpPr>
+          <p:cNvPr id="2" name="Slide Image Placeholder 1">
+            <a:extLst>
+              <a:ext uri="{FF2B5EF4-FFF2-40B4-BE49-F238E27FC236}">
+                <a16:creationId xmlns:a16="http://schemas.microsoft.com/office/drawing/2014/main" id="{116E1671-5AE4-1A41-368F-8BEB8BAADC5E}"/>
+              </a:ext>
+            </a:extLst>
+          </p:cNvPr>
+          <p:cNvSpPr>
+            <a:spLocks noGrp="1" noRot="1" noChangeAspect="1"/>
+          </p:cNvSpPr>
+          <p:nvPr>
+            <p:ph type="sldImg"/>
+          </p:nvPr>
+        </p:nvSpPr>
+        <p:spPr/>
+      </p:sp>
+      <p:sp>
+        <p:nvSpPr>
+          <p:cNvPr id="3" name="Notes Placeholder 2">
+            <a:extLst>
+              <a:ext uri="{FF2B5EF4-FFF2-40B4-BE49-F238E27FC236}">
+                <a16:creationId xmlns:a16="http://schemas.microsoft.com/office/drawing/2014/main" id="{5C612471-9241-BBFE-D37A-D80C93693AE3}"/>
+              </a:ext>
+            </a:extLst>
+          </p:cNvPr>
+          <p:cNvSpPr>
+            <a:spLocks noGrp="1"/>
+          </p:cNvSpPr>
+          <p:nvPr>
+            <p:ph type="body" idx="1"/>
+          </p:nvPr>
+        </p:nvSpPr>
+        <p:spPr/>
+        <p:txBody>
+          <a:bodyPr/>
+          <a:lstStyle/>
+          <a:p>
+            <a:pPr marL="0" marR="0" lvl="0" indent="0" algn="l" defTabSz="914400" rtl="0" eaLnBrk="1" fontAlgn="auto" latinLnBrk="0" hangingPunct="1">
+              <a:lnSpc>
+                <a:spcPct val="100000"/>
+              </a:lnSpc>
+              <a:spcBef>
+                <a:spcPts val="0"/>
+              </a:spcBef>
+              <a:spcAft>
+                <a:spcPts val="0"/>
+              </a:spcAft>
+              <a:buClrTx/>
+              <a:buSzTx/>
+              <a:buFontTx/>
+              <a:buNone/>
+              <a:tabLst/>
+              <a:defRPr/>
+            </a:pPr>
+            <a:r>
+              <a:rPr lang="en-US"/>
+              <a:t>Phương pháp triển khai hệ thống của chức năng trò chuyện realtime</a:t>
+            </a:r>
+          </a:p>
+          <a:p>
+            <a:endParaRPr lang="en-US"/>
+          </a:p>
+        </p:txBody>
+      </p:sp>
+      <p:sp>
+        <p:nvSpPr>
+          <p:cNvPr id="4" name="Slide Number Placeholder 3">
+            <a:extLst>
+              <a:ext uri="{FF2B5EF4-FFF2-40B4-BE49-F238E27FC236}">
+                <a16:creationId xmlns:a16="http://schemas.microsoft.com/office/drawing/2014/main" id="{8C6EB230-8C96-3CF2-B6E6-EF3AD498F871}"/>
+              </a:ext>
+            </a:extLst>
+          </p:cNvPr>
+          <p:cNvSpPr>
+            <a:spLocks noGrp="1"/>
+          </p:cNvSpPr>
+          <p:nvPr>
+            <p:ph type="sldNum" sz="quarter" idx="5"/>
+          </p:nvPr>
+        </p:nvSpPr>
+        <p:spPr/>
+        <p:txBody>
+          <a:bodyPr/>
+          <a:lstStyle/>
+          <a:p>
+            <a:fld id="{864AE1F8-3712-49A6-BC7C-273E12ADCFAB}" type="slidenum">
+              <a:rPr lang="en-US" smtClean="0"/>
+              <a:t>28</a:t>
+            </a:fld>
+            <a:endParaRPr lang="en-US"/>
+          </a:p>
+        </p:txBody>
+      </p:sp>
+    </p:spTree>
+    <p:extLst>
+      <p:ext uri="{BB962C8B-B14F-4D97-AF65-F5344CB8AC3E}">
+        <p14:creationId xmlns:p14="http://schemas.microsoft.com/office/powerpoint/2010/main" val="2854878648"/>
+      </p:ext>
+    </p:extLst>
+  </p:cSld>
+  <p:clrMapOvr>
+    <a:masterClrMapping/>
+  </p:clrMapOvr>
+</p:notes>
+</file>
+
+<file path=ppt/notesSlides/notesSlide23.xml><?xml version="1.0" encoding="utf-8"?>
+<p:notes xmlns:a="http://schemas.openxmlformats.org/drawingml/2006/main" xmlns:r="http://schemas.openxmlformats.org/officeDocument/2006/relationships" xmlns:p="http://schemas.openxmlformats.org/presentationml/2006/main">
+  <p:cSld>
+    <p:spTree>
+      <p:nvGrpSpPr>
+        <p:cNvPr id="1" name="">
+          <a:extLst>
+            <a:ext uri="{FF2B5EF4-FFF2-40B4-BE49-F238E27FC236}">
+              <a16:creationId xmlns:a16="http://schemas.microsoft.com/office/drawing/2014/main" id="{7CE5E318-6297-FC57-14D9-93A5F2A9FCC1}"/>
+            </a:ext>
+          </a:extLst>
+        </p:cNvPr>
+        <p:cNvGrpSpPr/>
+        <p:nvPr/>
+      </p:nvGrpSpPr>
+      <p:grpSpPr>
+        <a:xfrm>
+          <a:off x="0" y="0"/>
+          <a:ext cx="0" cy="0"/>
+          <a:chOff x="0" y="0"/>
+          <a:chExt cx="0" cy="0"/>
+        </a:xfrm>
+      </p:grpSpPr>
+      <p:sp>
+        <p:nvSpPr>
+          <p:cNvPr id="2" name="Slide Image Placeholder 1">
+            <a:extLst>
+              <a:ext uri="{FF2B5EF4-FFF2-40B4-BE49-F238E27FC236}">
+                <a16:creationId xmlns:a16="http://schemas.microsoft.com/office/drawing/2014/main" id="{AC230AA8-B490-0C76-E059-D5585E78970B}"/>
+              </a:ext>
+            </a:extLst>
+          </p:cNvPr>
+          <p:cNvSpPr>
+            <a:spLocks noGrp="1" noRot="1" noChangeAspect="1"/>
+          </p:cNvSpPr>
+          <p:nvPr>
+            <p:ph type="sldImg"/>
+          </p:nvPr>
+        </p:nvSpPr>
+        <p:spPr/>
+      </p:sp>
+      <p:sp>
+        <p:nvSpPr>
+          <p:cNvPr id="3" name="Notes Placeholder 2">
+            <a:extLst>
+              <a:ext uri="{FF2B5EF4-FFF2-40B4-BE49-F238E27FC236}">
+                <a16:creationId xmlns:a16="http://schemas.microsoft.com/office/drawing/2014/main" id="{69904C7C-D217-EDD2-9099-B1C6BAE909D4}"/>
+              </a:ext>
+            </a:extLst>
+          </p:cNvPr>
+          <p:cNvSpPr>
+            <a:spLocks noGrp="1"/>
+          </p:cNvSpPr>
+          <p:nvPr>
+            <p:ph type="body" idx="1"/>
+          </p:nvPr>
+        </p:nvSpPr>
+        <p:spPr/>
+        <p:txBody>
+          <a:bodyPr/>
+          <a:lstStyle/>
+          <a:p>
+            <a:pPr marL="0" marR="0" lvl="0" indent="0" algn="l" defTabSz="914400" rtl="0" eaLnBrk="1" fontAlgn="auto" latinLnBrk="0" hangingPunct="1">
+              <a:lnSpc>
+                <a:spcPct val="100000"/>
+              </a:lnSpc>
+              <a:spcBef>
+                <a:spcPts val="0"/>
+              </a:spcBef>
+              <a:spcAft>
+                <a:spcPts val="0"/>
+              </a:spcAft>
+              <a:buClrTx/>
+              <a:buSzTx/>
+              <a:buFontTx/>
+              <a:buNone/>
+              <a:tabLst/>
+              <a:defRPr/>
+            </a:pPr>
+            <a:r>
+              <a:rPr lang="en-US"/>
+              <a:t>Phương pháp triển khai hệ thống của chức năng trò chuyện realtime</a:t>
+            </a:r>
+          </a:p>
+          <a:p>
+            <a:endParaRPr lang="en-US"/>
+          </a:p>
+        </p:txBody>
+      </p:sp>
+      <p:sp>
+        <p:nvSpPr>
+          <p:cNvPr id="4" name="Slide Number Placeholder 3">
+            <a:extLst>
+              <a:ext uri="{FF2B5EF4-FFF2-40B4-BE49-F238E27FC236}">
+                <a16:creationId xmlns:a16="http://schemas.microsoft.com/office/drawing/2014/main" id="{3940993B-7D5E-15E5-E83B-BC41753E8F91}"/>
+              </a:ext>
+            </a:extLst>
+          </p:cNvPr>
+          <p:cNvSpPr>
+            <a:spLocks noGrp="1"/>
+          </p:cNvSpPr>
+          <p:nvPr>
+            <p:ph type="sldNum" sz="quarter" idx="5"/>
+          </p:nvPr>
+        </p:nvSpPr>
+        <p:spPr/>
+        <p:txBody>
+          <a:bodyPr/>
+          <a:lstStyle/>
+          <a:p>
+            <a:fld id="{864AE1F8-3712-49A6-BC7C-273E12ADCFAB}" type="slidenum">
+              <a:rPr lang="en-US" smtClean="0"/>
+              <a:t>29</a:t>
+            </a:fld>
+            <a:endParaRPr lang="en-US"/>
+          </a:p>
+        </p:txBody>
+      </p:sp>
+    </p:spTree>
+    <p:extLst>
+      <p:ext uri="{BB962C8B-B14F-4D97-AF65-F5344CB8AC3E}">
+        <p14:creationId xmlns:p14="http://schemas.microsoft.com/office/powerpoint/2010/main" val="431708428"/>
+      </p:ext>
+    </p:extLst>
+  </p:cSld>
+  <p:clrMapOvr>
+    <a:masterClrMapping/>
+  </p:clrMapOvr>
+</p:notes>
+</file>
+
+<file path=ppt/notesSlides/notesSlide24.xml><?xml version="1.0" encoding="utf-8"?>
+<p:notes xmlns:a="http://schemas.openxmlformats.org/drawingml/2006/main" xmlns:r="http://schemas.openxmlformats.org/officeDocument/2006/relationships" xmlns:p="http://schemas.openxmlformats.org/presentationml/2006/main">
+  <p:cSld>
+    <p:spTree>
+      <p:nvGrpSpPr>
+        <p:cNvPr id="1" name="">
+          <a:extLst>
+            <a:ext uri="{FF2B5EF4-FFF2-40B4-BE49-F238E27FC236}">
+              <a16:creationId xmlns:a16="http://schemas.microsoft.com/office/drawing/2014/main" id="{2FF22785-F01D-5C21-C9AA-C0E2792FAC02}"/>
+            </a:ext>
+          </a:extLst>
+        </p:cNvPr>
+        <p:cNvGrpSpPr/>
+        <p:nvPr/>
+      </p:nvGrpSpPr>
+      <p:grpSpPr>
+        <a:xfrm>
+          <a:off x="0" y="0"/>
+          <a:ext cx="0" cy="0"/>
+          <a:chOff x="0" y="0"/>
+          <a:chExt cx="0" cy="0"/>
+        </a:xfrm>
+      </p:grpSpPr>
+      <p:sp>
+        <p:nvSpPr>
+          <p:cNvPr id="2" name="Slide Image Placeholder 1">
+            <a:extLst>
+              <a:ext uri="{FF2B5EF4-FFF2-40B4-BE49-F238E27FC236}">
+                <a16:creationId xmlns:a16="http://schemas.microsoft.com/office/drawing/2014/main" id="{9C9A9226-6E29-CF2A-AD53-C9402729F2DF}"/>
+              </a:ext>
+            </a:extLst>
+          </p:cNvPr>
+          <p:cNvSpPr>
+            <a:spLocks noGrp="1" noRot="1" noChangeAspect="1"/>
+          </p:cNvSpPr>
+          <p:nvPr>
+            <p:ph type="sldImg"/>
+          </p:nvPr>
+        </p:nvSpPr>
+        <p:spPr/>
+      </p:sp>
+      <p:sp>
+        <p:nvSpPr>
+          <p:cNvPr id="3" name="Notes Placeholder 2">
+            <a:extLst>
+              <a:ext uri="{FF2B5EF4-FFF2-40B4-BE49-F238E27FC236}">
+                <a16:creationId xmlns:a16="http://schemas.microsoft.com/office/drawing/2014/main" id="{DA54D755-D8DE-4B78-8CDE-39A38616B00C}"/>
+              </a:ext>
+            </a:extLst>
+          </p:cNvPr>
+          <p:cNvSpPr>
+            <a:spLocks noGrp="1"/>
+          </p:cNvSpPr>
+          <p:nvPr>
+            <p:ph type="body" idx="1"/>
+          </p:nvPr>
+        </p:nvSpPr>
+        <p:spPr/>
+        <p:txBody>
+          <a:bodyPr/>
+          <a:lstStyle/>
+          <a:p>
+            <a:pPr marL="0" marR="0" lvl="0" indent="0" algn="l" defTabSz="914400" rtl="0" eaLnBrk="1" fontAlgn="auto" latinLnBrk="0" hangingPunct="1">
+              <a:lnSpc>
+                <a:spcPct val="100000"/>
+              </a:lnSpc>
+              <a:spcBef>
+                <a:spcPts val="0"/>
+              </a:spcBef>
+              <a:spcAft>
+                <a:spcPts val="0"/>
+              </a:spcAft>
+              <a:buClrTx/>
+              <a:buSzTx/>
+              <a:buFontTx/>
+              <a:buNone/>
+              <a:tabLst/>
+              <a:defRPr/>
+            </a:pPr>
+            <a:r>
+              <a:rPr lang="en-US"/>
+              <a:t>Phương pháp triển khai hệ thống của chức năng trò chuyện realtime</a:t>
+            </a:r>
+          </a:p>
+          <a:p>
+            <a:endParaRPr lang="en-US"/>
+          </a:p>
+        </p:txBody>
+      </p:sp>
+      <p:sp>
+        <p:nvSpPr>
+          <p:cNvPr id="4" name="Slide Number Placeholder 3">
+            <a:extLst>
+              <a:ext uri="{FF2B5EF4-FFF2-40B4-BE49-F238E27FC236}">
+                <a16:creationId xmlns:a16="http://schemas.microsoft.com/office/drawing/2014/main" id="{4DB24125-D907-C15E-D86E-1EB6C0558FAD}"/>
+              </a:ext>
+            </a:extLst>
+          </p:cNvPr>
+          <p:cNvSpPr>
+            <a:spLocks noGrp="1"/>
+          </p:cNvSpPr>
+          <p:nvPr>
+            <p:ph type="sldNum" sz="quarter" idx="5"/>
+          </p:nvPr>
+        </p:nvSpPr>
+        <p:spPr/>
+        <p:txBody>
+          <a:bodyPr/>
+          <a:lstStyle/>
+          <a:p>
+            <a:fld id="{864AE1F8-3712-49A6-BC7C-273E12ADCFAB}" type="slidenum">
+              <a:rPr lang="en-US" smtClean="0"/>
+              <a:t>30</a:t>
+            </a:fld>
+            <a:endParaRPr lang="en-US"/>
+          </a:p>
+        </p:txBody>
+      </p:sp>
+    </p:spTree>
+    <p:extLst>
+      <p:ext uri="{BB962C8B-B14F-4D97-AF65-F5344CB8AC3E}">
+        <p14:creationId xmlns:p14="http://schemas.microsoft.com/office/powerpoint/2010/main" val="2112655247"/>
       </p:ext>
     </p:extLst>
   </p:cSld>
@@ -1565,7 +2620,7 @@
             </a:pPr>
             <a:r>
               <a:rPr lang="en-US"/>
-              <a:t>Phương pháp đề xuất</a:t>
+              <a:t>Phát biểu và phân tích bài toán:</a:t>
             </a:r>
           </a:p>
           <a:p>
@@ -1575,14 +2630,30 @@
             </a:pPr>
             <a:r>
               <a:rPr lang="en-US"/>
-              <a:t>Chèn hình, miêu tả chi tiết phương pháp đề xuất</a:t>
+              <a:t>Yêu cầu của bài toán là gì?</a:t>
             </a:r>
           </a:p>
           <a:p>
-            <a:pPr marL="0" indent="0">
+            <a:pPr marL="285750" indent="-285750">
               <a:buFontTx/>
-              <a:buNone/>
+              <a:buChar char="-"/>
             </a:pPr>
+            <a:r>
+              <a:rPr lang="en-US"/>
+              <a:t>Tính cấp thiết của bài toán</a:t>
+            </a:r>
+          </a:p>
+          <a:p>
+            <a:pPr marL="285750" indent="-285750">
+              <a:buFontTx/>
+              <a:buChar char="-"/>
+            </a:pPr>
+            <a:r>
+              <a:rPr lang="en-US"/>
+              <a:t>Phân tích bài toán</a:t>
+            </a:r>
+          </a:p>
+          <a:p>
             <a:endParaRPr lang="en-US"/>
           </a:p>
         </p:txBody>
@@ -1604,7 +2675,7 @@
           <a:p>
             <a:fld id="{864AE1F8-3712-49A6-BC7C-273E12ADCFAB}" type="slidenum">
               <a:rPr lang="en-US" smtClean="0"/>
-              <a:t>8</a:t>
+              <a:t>7</a:t>
             </a:fld>
             <a:endParaRPr lang="en-US"/>
           </a:p>
@@ -1613,7 +2684,7 @@
     </p:spTree>
     <p:extLst>
       <p:ext uri="{BB962C8B-B14F-4D97-AF65-F5344CB8AC3E}">
-        <p14:creationId xmlns:p14="http://schemas.microsoft.com/office/powerpoint/2010/main" val="2168959669"/>
+        <p14:creationId xmlns:p14="http://schemas.microsoft.com/office/powerpoint/2010/main" val="1911680076"/>
       </p:ext>
     </p:extLst>
   </p:cSld>
@@ -1667,29 +2738,30 @@
           <a:bodyPr/>
           <a:lstStyle/>
           <a:p>
-            <a:pPr marL="0" marR="0" lvl="0" indent="0" algn="l" defTabSz="914400" rtl="0" eaLnBrk="1" fontAlgn="auto" latinLnBrk="0" hangingPunct="1">
-              <a:lnSpc>
-                <a:spcPct val="100000"/>
-              </a:lnSpc>
-              <a:spcBef>
-                <a:spcPts val="0"/>
-              </a:spcBef>
-              <a:spcAft>
-                <a:spcPts val="0"/>
-              </a:spcAft>
-              <a:buClrTx/>
-              <a:buSzTx/>
+            <a:pPr marL="285750" indent="-285750">
               <a:buFontTx/>
-              <a:buNone/>
-              <a:tabLst/>
-              <a:defRPr/>
+              <a:buChar char="-"/>
             </a:pPr>
             <a:r>
               <a:rPr lang="en-US"/>
-              <a:t>Hệ thống rag đề xuất</a:t>
+              <a:t>Phương pháp đề xuất</a:t>
             </a:r>
           </a:p>
           <a:p>
+            <a:pPr marL="285750" indent="-285750">
+              <a:buFontTx/>
+              <a:buChar char="-"/>
+            </a:pPr>
+            <a:r>
+              <a:rPr lang="en-US"/>
+              <a:t>Chèn hình, miêu tả chi tiết phương pháp đề xuất</a:t>
+            </a:r>
+          </a:p>
+          <a:p>
+            <a:pPr marL="0" indent="0">
+              <a:buFontTx/>
+              <a:buNone/>
+            </a:pPr>
             <a:endParaRPr lang="en-US"/>
           </a:p>
         </p:txBody>
@@ -1711,7 +2783,7 @@
           <a:p>
             <a:fld id="{864AE1F8-3712-49A6-BC7C-273E12ADCFAB}" type="slidenum">
               <a:rPr lang="en-US" smtClean="0"/>
-              <a:t>9</a:t>
+              <a:t>8</a:t>
             </a:fld>
             <a:endParaRPr lang="en-US"/>
           </a:p>
@@ -1720,7 +2792,7 @@
     </p:spTree>
     <p:extLst>
       <p:ext uri="{BB962C8B-B14F-4D97-AF65-F5344CB8AC3E}">
-        <p14:creationId xmlns:p14="http://schemas.microsoft.com/office/powerpoint/2010/main" val="2689238879"/>
+        <p14:creationId xmlns:p14="http://schemas.microsoft.com/office/powerpoint/2010/main" val="2168959669"/>
       </p:ext>
     </p:extLst>
   </p:cSld>
@@ -1774,21 +2846,27 @@
           <a:bodyPr/>
           <a:lstStyle/>
           <a:p>
-            <a:pPr marL="285750" indent="-285750">
+            <a:pPr marL="0" marR="0" lvl="0" indent="0" algn="l" defTabSz="914400" rtl="0" eaLnBrk="1" fontAlgn="auto" latinLnBrk="0" hangingPunct="1">
+              <a:lnSpc>
+                <a:spcPct val="100000"/>
+              </a:lnSpc>
+              <a:spcBef>
+                <a:spcPts val="0"/>
+              </a:spcBef>
+              <a:spcAft>
+                <a:spcPts val="0"/>
+              </a:spcAft>
+              <a:buClrTx/>
+              <a:buSzTx/>
               <a:buFontTx/>
-              <a:buChar char="-"/>
+              <a:buNone/>
+              <a:tabLst/>
+              <a:defRPr/>
             </a:pPr>
             <a:r>
               <a:rPr lang="en-US"/>
-              <a:t>Thu thập và tiền xử lý data</a:t>
+              <a:t>Hệ thống rag đề xuất</a:t>
             </a:r>
-          </a:p>
-          <a:p>
-            <a:pPr marL="285750" indent="-285750">
-              <a:buFontTx/>
-              <a:buChar char="-"/>
-            </a:pPr>
-            <a:endParaRPr lang="en-US"/>
           </a:p>
           <a:p>
             <a:endParaRPr lang="en-US"/>
@@ -1812,7 +2890,7 @@
           <a:p>
             <a:fld id="{864AE1F8-3712-49A6-BC7C-273E12ADCFAB}" type="slidenum">
               <a:rPr lang="en-US" smtClean="0"/>
-              <a:t>11</a:t>
+              <a:t>9</a:t>
             </a:fld>
             <a:endParaRPr lang="en-US"/>
           </a:p>
@@ -1821,7 +2899,7 @@
     </p:spTree>
     <p:extLst>
       <p:ext uri="{BB962C8B-B14F-4D97-AF65-F5344CB8AC3E}">
-        <p14:creationId xmlns:p14="http://schemas.microsoft.com/office/powerpoint/2010/main" val="4011839683"/>
+        <p14:creationId xmlns:p14="http://schemas.microsoft.com/office/powerpoint/2010/main" val="2689238879"/>
       </p:ext>
     </p:extLst>
   </p:cSld>
@@ -1875,34 +2953,21 @@
           <a:bodyPr/>
           <a:lstStyle/>
           <a:p>
+            <a:pPr marL="285750" indent="-285750">
+              <a:buFontTx/>
+              <a:buChar char="-"/>
+            </a:pPr>
             <a:r>
               <a:rPr lang="en-US"/>
-              <a:t>Word embedding</a:t>
+              <a:t>Thu thập và tiền xử lý data</a:t>
             </a:r>
           </a:p>
           <a:p>
-            <a:r>
-              <a:rPr lang="en-US"/>
-              <a:t>We là gì? Ánh xạ từ word sang vector</a:t>
-            </a:r>
-          </a:p>
-          <a:p>
-            <a:r>
-              <a:rPr lang="en-US"/>
-              <a:t>Trong đó mỗi chiều là 1 thuộc tính…</a:t>
-            </a:r>
-          </a:p>
-          <a:p>
-            <a:r>
-              <a:rPr lang="en-US"/>
-              <a:t>Ví dụ như trong hình…</a:t>
-            </a:r>
-          </a:p>
-          <a:p>
-            <a:r>
-              <a:rPr lang="en-US"/>
-              <a:t>Như vậy,… “tóm tắt kết quả”</a:t>
-            </a:r>
+            <a:pPr marL="285750" indent="-285750">
+              <a:buFontTx/>
+              <a:buChar char="-"/>
+            </a:pPr>
+            <a:endParaRPr lang="en-US"/>
           </a:p>
           <a:p>
             <a:endParaRPr lang="en-US"/>
@@ -1926,7 +2991,7 @@
           <a:p>
             <a:fld id="{864AE1F8-3712-49A6-BC7C-273E12ADCFAB}" type="slidenum">
               <a:rPr lang="en-US" smtClean="0"/>
-              <a:t>14</a:t>
+              <a:t>11</a:t>
             </a:fld>
             <a:endParaRPr lang="en-US"/>
           </a:p>
@@ -1935,7 +3000,7 @@
     </p:spTree>
     <p:extLst>
       <p:ext uri="{BB962C8B-B14F-4D97-AF65-F5344CB8AC3E}">
-        <p14:creationId xmlns:p14="http://schemas.microsoft.com/office/powerpoint/2010/main" val="1673060355"/>
+        <p14:creationId xmlns:p14="http://schemas.microsoft.com/office/powerpoint/2010/main" val="4011839683"/>
       </p:ext>
     </p:extLst>
   </p:cSld>
@@ -1991,7 +3056,7 @@
           <a:p>
             <a:r>
               <a:rPr lang="en-US"/>
-              <a:t>Thông số của các mô hình embedding</a:t>
+              <a:t>Mô tả phân bố của độ dài dữ liệu (đơn vị từ)</a:t>
             </a:r>
           </a:p>
         </p:txBody>
@@ -2013,7 +3078,7 @@
           <a:p>
             <a:fld id="{864AE1F8-3712-49A6-BC7C-273E12ADCFAB}" type="slidenum">
               <a:rPr lang="en-US" smtClean="0"/>
-              <a:t>15</a:t>
+              <a:t>12</a:t>
             </a:fld>
             <a:endParaRPr lang="en-US"/>
           </a:p>
@@ -2022,7 +3087,7 @@
     </p:spTree>
     <p:extLst>
       <p:ext uri="{BB962C8B-B14F-4D97-AF65-F5344CB8AC3E}">
-        <p14:creationId xmlns:p14="http://schemas.microsoft.com/office/powerpoint/2010/main" val="109299988"/>
+        <p14:creationId xmlns:p14="http://schemas.microsoft.com/office/powerpoint/2010/main" val="579147384"/>
       </p:ext>
     </p:extLst>
   </p:cSld>
@@ -2078,8 +3143,35 @@
           <a:p>
             <a:r>
               <a:rPr lang="en-US"/>
-              <a:t>Đánh giá hiệu quả tokenization của các mô hình embedding</a:t>
+              <a:t>Word embedding</a:t>
             </a:r>
+          </a:p>
+          <a:p>
+            <a:r>
+              <a:rPr lang="en-US"/>
+              <a:t>We là gì? Ánh xạ từ word sang vector</a:t>
+            </a:r>
+          </a:p>
+          <a:p>
+            <a:r>
+              <a:rPr lang="en-US"/>
+              <a:t>Trong đó mỗi chiều là 1 thuộc tính…</a:t>
+            </a:r>
+          </a:p>
+          <a:p>
+            <a:r>
+              <a:rPr lang="en-US"/>
+              <a:t>Ví dụ như trong hình…</a:t>
+            </a:r>
+          </a:p>
+          <a:p>
+            <a:r>
+              <a:rPr lang="en-US"/>
+              <a:t>Như vậy,… “tóm tắt kết quả”</a:t>
+            </a:r>
+          </a:p>
+          <a:p>
+            <a:endParaRPr lang="en-US"/>
           </a:p>
         </p:txBody>
       </p:sp>
@@ -2100,7 +3192,7 @@
           <a:p>
             <a:fld id="{864AE1F8-3712-49A6-BC7C-273E12ADCFAB}" type="slidenum">
               <a:rPr lang="en-US" smtClean="0"/>
-              <a:t>16</a:t>
+              <a:t>14</a:t>
             </a:fld>
             <a:endParaRPr lang="en-US"/>
           </a:p>
@@ -2109,7 +3201,7 @@
     </p:spTree>
     <p:extLst>
       <p:ext uri="{BB962C8B-B14F-4D97-AF65-F5344CB8AC3E}">
-        <p14:creationId xmlns:p14="http://schemas.microsoft.com/office/powerpoint/2010/main" val="2011407383"/>
+        <p14:creationId xmlns:p14="http://schemas.microsoft.com/office/powerpoint/2010/main" val="1673060355"/>
       </p:ext>
     </p:extLst>
   </p:cSld>
@@ -5629,15 +6721,15 @@
           <p:nvPr/>
         </p:nvPicPr>
         <p:blipFill>
-          <a:blip r:embed="rId2"/>
+          <a:blip r:embed="rId3"/>
           <a:stretch>
             <a:fillRect/>
           </a:stretch>
         </p:blipFill>
         <p:spPr>
           <a:xfrm>
-            <a:off x="1385887" y="1690688"/>
-            <a:ext cx="9420225" cy="4667250"/>
+            <a:off x="394138" y="1777398"/>
+            <a:ext cx="7518614" cy="3725097"/>
           </a:xfrm>
           <a:prstGeom prst="rect">
             <a:avLst/>
@@ -5735,7 +6827,7 @@
         </p:blipFill>
         <p:spPr>
           <a:xfrm>
-            <a:off x="798785" y="2183524"/>
+            <a:off x="759370" y="1690688"/>
             <a:ext cx="10594430" cy="4674476"/>
           </a:xfrm>
           <a:prstGeom prst="rect">
@@ -5844,41 +6936,6 @@
       </p:pic>
       <p:sp>
         <p:nvSpPr>
-          <p:cNvPr id="4" name="TextBox 3">
-            <a:extLst>
-              <a:ext uri="{FF2B5EF4-FFF2-40B4-BE49-F238E27FC236}">
-                <a16:creationId xmlns:a16="http://schemas.microsoft.com/office/drawing/2014/main" id="{73314DB7-69A9-F154-A588-F0AE61A9D761}"/>
-              </a:ext>
-            </a:extLst>
-          </p:cNvPr>
-          <p:cNvSpPr txBox="1"/>
-          <p:nvPr/>
-        </p:nvSpPr>
-        <p:spPr>
-          <a:xfrm>
-            <a:off x="7862395" y="1690688"/>
-            <a:ext cx="1110240" cy="369332"/>
-          </a:xfrm>
-          <a:prstGeom prst="rect">
-            <a:avLst/>
-          </a:prstGeom>
-          <a:noFill/>
-        </p:spPr>
-        <p:txBody>
-          <a:bodyPr wrap="none" rtlCol="0">
-            <a:spAutoFit/>
-          </a:bodyPr>
-          <a:lstStyle/>
-          <a:p>
-            <a:r>
-              <a:rPr lang="en-US"/>
-              <a:t>We là gì? </a:t>
-            </a:r>
-          </a:p>
-        </p:txBody>
-      </p:sp>
-      <p:sp>
-        <p:nvSpPr>
           <p:cNvPr id="2" name="Title 1">
             <a:extLst>
               <a:ext uri="{FF2B5EF4-FFF2-40B4-BE49-F238E27FC236}">
@@ -5905,6 +6962,90 @@
                 <a:cs typeface="Times New Roman" panose="02020603050405020304" pitchFamily="18" charset="0"/>
               </a:rPr>
               <a:t>Word Embedding</a:t>
+            </a:r>
+          </a:p>
+        </p:txBody>
+      </p:sp>
+      <p:sp>
+        <p:nvSpPr>
+          <p:cNvPr id="5" name="Rectangle 4">
+            <a:extLst>
+              <a:ext uri="{FF2B5EF4-FFF2-40B4-BE49-F238E27FC236}">
+                <a16:creationId xmlns:a16="http://schemas.microsoft.com/office/drawing/2014/main" id="{9B08AA7E-6712-4560-AADC-88353A12B52B}"/>
+              </a:ext>
+            </a:extLst>
+          </p:cNvPr>
+          <p:cNvSpPr/>
+          <p:nvPr/>
+        </p:nvSpPr>
+        <p:spPr>
+          <a:xfrm>
+            <a:off x="6095999" y="1534885"/>
+            <a:ext cx="5849007" cy="4957989"/>
+          </a:xfrm>
+          <a:prstGeom prst="rect">
+            <a:avLst/>
+          </a:prstGeom>
+          <a:noFill/>
+          <a:ln>
+            <a:solidFill>
+              <a:schemeClr val="bg1"/>
+            </a:solidFill>
+          </a:ln>
+        </p:spPr>
+        <p:style>
+          <a:lnRef idx="2">
+            <a:schemeClr val="accent1">
+              <a:shade val="15000"/>
+            </a:schemeClr>
+          </a:lnRef>
+          <a:fillRef idx="1">
+            <a:schemeClr val="accent1"/>
+          </a:fillRef>
+          <a:effectRef idx="0">
+            <a:schemeClr val="accent1"/>
+          </a:effectRef>
+          <a:fontRef idx="minor">
+            <a:schemeClr val="lt1"/>
+          </a:fontRef>
+        </p:style>
+        <p:txBody>
+          <a:bodyPr rtlCol="0" anchor="ctr"/>
+          <a:lstStyle/>
+          <a:p>
+            <a:pPr algn="ctr"/>
+            <a:r>
+              <a:rPr lang="en-US" sz="2400">
+                <a:solidFill>
+                  <a:schemeClr val="tx1"/>
+                </a:solidFill>
+                <a:latin typeface="Times New Roman" panose="02020603050405020304" pitchFamily="18" charset="0"/>
+                <a:cs typeface="Times New Roman" panose="02020603050405020304" pitchFamily="18" charset="0"/>
+              </a:rPr>
+              <a:t>Word Embedding là kỹ thuật ánh xạ từ sang một vector số. Mỗi chiều của vector tương ứng với một thuộc tính ngữ nghĩa.</a:t>
+            </a:r>
+          </a:p>
+          <a:p>
+            <a:pPr algn="ctr"/>
+            <a:endParaRPr lang="en-US" sz="2400">
+              <a:solidFill>
+                <a:schemeClr val="tx1"/>
+              </a:solidFill>
+              <a:latin typeface="Times New Roman" panose="02020603050405020304" pitchFamily="18" charset="0"/>
+              <a:cs typeface="Times New Roman" panose="02020603050405020304" pitchFamily="18" charset="0"/>
+            </a:endParaRPr>
+          </a:p>
+          <a:p>
+            <a:pPr algn="ctr"/>
+            <a:r>
+              <a:rPr lang="en-US" sz="2400">
+                <a:solidFill>
+                  <a:schemeClr val="tx1"/>
+                </a:solidFill>
+                <a:latin typeface="Times New Roman" panose="02020603050405020304" pitchFamily="18" charset="0"/>
+                <a:cs typeface="Times New Roman" panose="02020603050405020304" pitchFamily="18" charset="0"/>
+              </a:rPr>
+              <a:t>Word Embedding giúp máy tính hiểu được từ dưới dạng số liệu có ý nghĩa -&gt; Là bước đệm quan trọng khi thực thi các tác vụ NLP.</a:t>
             </a:r>
           </a:p>
         </p:txBody>
@@ -10091,7 +11232,7 @@
         <p:spPr>
           <a:xfrm>
             <a:off x="838200" y="365126"/>
-            <a:ext cx="10515600" cy="896116"/>
+            <a:ext cx="10515600" cy="659633"/>
           </a:xfrm>
         </p:spPr>
         <p:txBody>
@@ -10108,6 +11249,1295 @@
               </a:rPr>
               <a:t>Hiệu quả tokenization của các mô hình embedding đề xuất</a:t>
             </a:r>
+          </a:p>
+        </p:txBody>
+      </p:sp>
+      <p:graphicFrame>
+        <p:nvGraphicFramePr>
+          <p:cNvPr id="3" name="Table 2">
+            <a:extLst>
+              <a:ext uri="{FF2B5EF4-FFF2-40B4-BE49-F238E27FC236}">
+                <a16:creationId xmlns:a16="http://schemas.microsoft.com/office/drawing/2014/main" id="{B2C7826E-63F0-E204-4AFA-20B4004B3B34}"/>
+              </a:ext>
+            </a:extLst>
+          </p:cNvPr>
+          <p:cNvGraphicFramePr>
+            <a:graphicFrameLocks noGrp="1"/>
+          </p:cNvGraphicFramePr>
+          <p:nvPr>
+            <p:extLst>
+              <p:ext uri="{D42A27DB-BD31-4B8C-83A1-F6EECF244321}">
+                <p14:modId xmlns:p14="http://schemas.microsoft.com/office/powerpoint/2010/main" val="2645305573"/>
+              </p:ext>
+            </p:extLst>
+          </p:nvPr>
+        </p:nvGraphicFramePr>
+        <p:xfrm>
+          <a:off x="207579" y="1923394"/>
+          <a:ext cx="11776841" cy="4794079"/>
+        </p:xfrm>
+        <a:graphic>
+          <a:graphicData uri="http://schemas.openxmlformats.org/drawingml/2006/table">
+            <a:tbl>
+              <a:tblPr firstRow="1" firstCol="1" bandRow="1">
+                <a:tableStyleId>{3B4B98B0-60AC-42C2-AFA5-B58CD77FA1E5}</a:tableStyleId>
+              </a:tblPr>
+              <a:tblGrid>
+                <a:gridCol w="2756338">
+                  <a:extLst>
+                    <a:ext uri="{9D8B030D-6E8A-4147-A177-3AD203B41FA5}">
+                      <a16:colId xmlns:a16="http://schemas.microsoft.com/office/drawing/2014/main" val="3401729846"/>
+                    </a:ext>
+                  </a:extLst>
+                </a:gridCol>
+                <a:gridCol w="9020503">
+                  <a:extLst>
+                    <a:ext uri="{9D8B030D-6E8A-4147-A177-3AD203B41FA5}">
+                      <a16:colId xmlns:a16="http://schemas.microsoft.com/office/drawing/2014/main" val="1479469748"/>
+                    </a:ext>
+                  </a:extLst>
+                </a:gridCol>
+              </a:tblGrid>
+              <a:tr h="163987">
+                <a:tc>
+                  <a:txBody>
+                    <a:bodyPr/>
+                    <a:lstStyle/>
+                    <a:p>
+                      <a:pPr indent="0" algn="ctr">
+                        <a:lnSpc>
+                          <a:spcPct val="130000"/>
+                        </a:lnSpc>
+                        <a:spcBef>
+                          <a:spcPts val="600"/>
+                        </a:spcBef>
+                        <a:spcAft>
+                          <a:spcPts val="600"/>
+                        </a:spcAft>
+                        <a:buNone/>
+                      </a:pPr>
+                      <a:r>
+                        <a:rPr lang="en-US" sz="1600">
+                          <a:effectLst/>
+                          <a:latin typeface="Times New Roman" panose="02020603050405020304" pitchFamily="18" charset="0"/>
+                          <a:cs typeface="Times New Roman" panose="02020603050405020304" pitchFamily="18" charset="0"/>
+                        </a:rPr>
+                        <a:t>Tên mô hình</a:t>
+                      </a:r>
+                      <a:endParaRPr lang="en-US" sz="1600" b="1">
+                        <a:solidFill>
+                          <a:srgbClr val="000000"/>
+                        </a:solidFill>
+                        <a:effectLst/>
+                        <a:latin typeface="Times New Roman" panose="02020603050405020304" pitchFamily="18" charset="0"/>
+                        <a:ea typeface="Arial" panose="020B0604020202020204" pitchFamily="34" charset="0"/>
+                        <a:cs typeface="Times New Roman" panose="02020603050405020304" pitchFamily="18" charset="0"/>
+                      </a:endParaRPr>
+                    </a:p>
+                  </a:txBody>
+                  <a:tcPr marL="48509" marR="48509" marT="0" marB="0" anchor="ctr">
+                    <a:lnL w="12700" cap="flat" cmpd="sng" algn="ctr">
+                      <a:solidFill>
+                        <a:schemeClr val="tx1"/>
+                      </a:solidFill>
+                      <a:prstDash val="solid"/>
+                      <a:round/>
+                      <a:headEnd type="none" w="med" len="med"/>
+                      <a:tailEnd type="none" w="med" len="med"/>
+                    </a:lnL>
+                    <a:lnR w="12700" cap="flat" cmpd="sng" algn="ctr">
+                      <a:solidFill>
+                        <a:schemeClr val="tx1"/>
+                      </a:solidFill>
+                      <a:prstDash val="solid"/>
+                      <a:round/>
+                      <a:headEnd type="none" w="med" len="med"/>
+                      <a:tailEnd type="none" w="med" len="med"/>
+                    </a:lnR>
+                    <a:lnT w="12700" cap="flat" cmpd="sng" algn="ctr">
+                      <a:solidFill>
+                        <a:schemeClr val="tx1"/>
+                      </a:solidFill>
+                      <a:prstDash val="solid"/>
+                      <a:round/>
+                      <a:headEnd type="none" w="med" len="med"/>
+                      <a:tailEnd type="none" w="med" len="med"/>
+                    </a:lnT>
+                    <a:lnB w="12700" cap="flat" cmpd="sng" algn="ctr">
+                      <a:solidFill>
+                        <a:schemeClr val="tx1"/>
+                      </a:solidFill>
+                      <a:prstDash val="solid"/>
+                      <a:round/>
+                      <a:headEnd type="none" w="med" len="med"/>
+                      <a:tailEnd type="none" w="med" len="med"/>
+                    </a:lnB>
+                  </a:tcPr>
+                </a:tc>
+                <a:tc>
+                  <a:txBody>
+                    <a:bodyPr/>
+                    <a:lstStyle/>
+                    <a:p>
+                      <a:pPr indent="0" algn="ctr">
+                        <a:lnSpc>
+                          <a:spcPct val="130000"/>
+                        </a:lnSpc>
+                        <a:spcBef>
+                          <a:spcPts val="600"/>
+                        </a:spcBef>
+                        <a:spcAft>
+                          <a:spcPts val="600"/>
+                        </a:spcAft>
+                        <a:buNone/>
+                      </a:pPr>
+                      <a:r>
+                        <a:rPr lang="en-US" sz="1600">
+                          <a:effectLst/>
+                          <a:latin typeface="Times New Roman" panose="02020603050405020304" pitchFamily="18" charset="0"/>
+                          <a:cs typeface="Times New Roman" panose="02020603050405020304" pitchFamily="18" charset="0"/>
+                        </a:rPr>
+                        <a:t>Kết quả tokenization</a:t>
+                      </a:r>
+                      <a:endParaRPr lang="en-US" sz="1600" b="1">
+                        <a:solidFill>
+                          <a:srgbClr val="000000"/>
+                        </a:solidFill>
+                        <a:effectLst/>
+                        <a:latin typeface="Times New Roman" panose="02020603050405020304" pitchFamily="18" charset="0"/>
+                        <a:ea typeface="Arial" panose="020B0604020202020204" pitchFamily="34" charset="0"/>
+                        <a:cs typeface="Times New Roman" panose="02020603050405020304" pitchFamily="18" charset="0"/>
+                      </a:endParaRPr>
+                    </a:p>
+                  </a:txBody>
+                  <a:tcPr marL="48509" marR="48509" marT="0" marB="0" anchor="ctr">
+                    <a:lnL w="12700" cap="flat" cmpd="sng" algn="ctr">
+                      <a:solidFill>
+                        <a:schemeClr val="tx1"/>
+                      </a:solidFill>
+                      <a:prstDash val="solid"/>
+                      <a:round/>
+                      <a:headEnd type="none" w="med" len="med"/>
+                      <a:tailEnd type="none" w="med" len="med"/>
+                    </a:lnL>
+                    <a:lnR w="12700" cap="flat" cmpd="sng" algn="ctr">
+                      <a:solidFill>
+                        <a:schemeClr val="tx1"/>
+                      </a:solidFill>
+                      <a:prstDash val="solid"/>
+                      <a:round/>
+                      <a:headEnd type="none" w="med" len="med"/>
+                      <a:tailEnd type="none" w="med" len="med"/>
+                    </a:lnR>
+                    <a:lnT w="12700" cap="flat" cmpd="sng" algn="ctr">
+                      <a:solidFill>
+                        <a:schemeClr val="tx1"/>
+                      </a:solidFill>
+                      <a:prstDash val="solid"/>
+                      <a:round/>
+                      <a:headEnd type="none" w="med" len="med"/>
+                      <a:tailEnd type="none" w="med" len="med"/>
+                    </a:lnT>
+                    <a:lnB w="12700" cap="flat" cmpd="sng" algn="ctr">
+                      <a:solidFill>
+                        <a:schemeClr val="tx1"/>
+                      </a:solidFill>
+                      <a:prstDash val="solid"/>
+                      <a:round/>
+                      <a:headEnd type="none" w="med" len="med"/>
+                      <a:tailEnd type="none" w="med" len="med"/>
+                    </a:lnB>
+                  </a:tcPr>
+                </a:tc>
+                <a:extLst>
+                  <a:ext uri="{0D108BD9-81ED-4DB2-BD59-A6C34878D82A}">
+                    <a16:rowId xmlns:a16="http://schemas.microsoft.com/office/drawing/2014/main" val="3423999059"/>
+                  </a:ext>
+                </a:extLst>
+              </a:tr>
+              <a:tr h="528343">
+                <a:tc>
+                  <a:txBody>
+                    <a:bodyPr/>
+                    <a:lstStyle/>
+                    <a:p>
+                      <a:pPr indent="0" algn="ctr">
+                        <a:lnSpc>
+                          <a:spcPct val="130000"/>
+                        </a:lnSpc>
+                        <a:spcBef>
+                          <a:spcPts val="600"/>
+                        </a:spcBef>
+                        <a:spcAft>
+                          <a:spcPts val="600"/>
+                        </a:spcAft>
+                        <a:buNone/>
+                      </a:pPr>
+                      <a:r>
+                        <a:rPr lang="vi-VN" sz="1600">
+                          <a:effectLst/>
+                          <a:latin typeface="Times New Roman" panose="02020603050405020304" pitchFamily="18" charset="0"/>
+                          <a:cs typeface="Times New Roman" panose="02020603050405020304" pitchFamily="18" charset="0"/>
+                        </a:rPr>
+                        <a:t>all-MiniLM-L6-v2</a:t>
+                      </a:r>
+                      <a:endParaRPr lang="en-US" sz="1600" b="1">
+                        <a:solidFill>
+                          <a:srgbClr val="000000"/>
+                        </a:solidFill>
+                        <a:effectLst/>
+                        <a:latin typeface="Times New Roman" panose="02020603050405020304" pitchFamily="18" charset="0"/>
+                        <a:ea typeface="Arial" panose="020B0604020202020204" pitchFamily="34" charset="0"/>
+                        <a:cs typeface="Times New Roman" panose="02020603050405020304" pitchFamily="18" charset="0"/>
+                      </a:endParaRPr>
+                    </a:p>
+                  </a:txBody>
+                  <a:tcPr marL="48509" marR="48509" marT="0" marB="0" anchor="ctr">
+                    <a:lnL w="12700" cap="flat" cmpd="sng" algn="ctr">
+                      <a:solidFill>
+                        <a:schemeClr val="tx1"/>
+                      </a:solidFill>
+                      <a:prstDash val="solid"/>
+                      <a:round/>
+                      <a:headEnd type="none" w="med" len="med"/>
+                      <a:tailEnd type="none" w="med" len="med"/>
+                    </a:lnL>
+                    <a:lnR w="12700" cap="flat" cmpd="sng" algn="ctr">
+                      <a:solidFill>
+                        <a:schemeClr val="tx1"/>
+                      </a:solidFill>
+                      <a:prstDash val="solid"/>
+                      <a:round/>
+                      <a:headEnd type="none" w="med" len="med"/>
+                      <a:tailEnd type="none" w="med" len="med"/>
+                    </a:lnR>
+                    <a:lnT w="12700" cap="flat" cmpd="sng" algn="ctr">
+                      <a:solidFill>
+                        <a:schemeClr val="tx1"/>
+                      </a:solidFill>
+                      <a:prstDash val="solid"/>
+                      <a:round/>
+                      <a:headEnd type="none" w="med" len="med"/>
+                      <a:tailEnd type="none" w="med" len="med"/>
+                    </a:lnT>
+                    <a:lnB w="12700" cap="flat" cmpd="sng" algn="ctr">
+                      <a:solidFill>
+                        <a:schemeClr val="tx1"/>
+                      </a:solidFill>
+                      <a:prstDash val="solid"/>
+                      <a:round/>
+                      <a:headEnd type="none" w="med" len="med"/>
+                      <a:tailEnd type="none" w="med" len="med"/>
+                    </a:lnB>
+                  </a:tcPr>
+                </a:tc>
+                <a:tc>
+                  <a:txBody>
+                    <a:bodyPr/>
+                    <a:lstStyle/>
+                    <a:p>
+                      <a:pPr indent="0" algn="l">
+                        <a:lnSpc>
+                          <a:spcPct val="130000"/>
+                        </a:lnSpc>
+                        <a:spcBef>
+                          <a:spcPts val="600"/>
+                        </a:spcBef>
+                        <a:spcAft>
+                          <a:spcPts val="600"/>
+                        </a:spcAft>
+                        <a:buNone/>
+                      </a:pPr>
+                      <a:r>
+                        <a:rPr lang="vi-VN" sz="1600">
+                          <a:effectLst/>
+                          <a:latin typeface="Times New Roman" panose="02020603050405020304" pitchFamily="18" charset="0"/>
+                          <a:cs typeface="Times New Roman" panose="02020603050405020304" pitchFamily="18" charset="0"/>
+                        </a:rPr>
+                        <a:t>['[CLS]', 'chu', '##ong', ':', 'bu', '##oi', 'đ', '##au', 'li', '##ch', 'su', 'nu', '##oc', 'ta', '[UNK]', '[UNK]', '(', '[UNK]', ')', '[UNK]', '[UNK]', '[UNK]', '[SEP]']</a:t>
+                      </a:r>
+                      <a:endParaRPr lang="en-US" sz="1600" b="1">
+                        <a:solidFill>
+                          <a:srgbClr val="000000"/>
+                        </a:solidFill>
+                        <a:effectLst/>
+                        <a:latin typeface="Times New Roman" panose="02020603050405020304" pitchFamily="18" charset="0"/>
+                        <a:ea typeface="Arial" panose="020B0604020202020204" pitchFamily="34" charset="0"/>
+                        <a:cs typeface="Times New Roman" panose="02020603050405020304" pitchFamily="18" charset="0"/>
+                      </a:endParaRPr>
+                    </a:p>
+                  </a:txBody>
+                  <a:tcPr marL="48509" marR="48509" marT="0" marB="0" anchor="ctr">
+                    <a:lnL w="12700" cap="flat" cmpd="sng" algn="ctr">
+                      <a:solidFill>
+                        <a:schemeClr val="tx1"/>
+                      </a:solidFill>
+                      <a:prstDash val="solid"/>
+                      <a:round/>
+                      <a:headEnd type="none" w="med" len="med"/>
+                      <a:tailEnd type="none" w="med" len="med"/>
+                    </a:lnL>
+                    <a:lnR w="12700" cap="flat" cmpd="sng" algn="ctr">
+                      <a:solidFill>
+                        <a:schemeClr val="tx1"/>
+                      </a:solidFill>
+                      <a:prstDash val="solid"/>
+                      <a:round/>
+                      <a:headEnd type="none" w="med" len="med"/>
+                      <a:tailEnd type="none" w="med" len="med"/>
+                    </a:lnR>
+                    <a:lnT w="12700" cap="flat" cmpd="sng" algn="ctr">
+                      <a:solidFill>
+                        <a:schemeClr val="tx1"/>
+                      </a:solidFill>
+                      <a:prstDash val="solid"/>
+                      <a:round/>
+                      <a:headEnd type="none" w="med" len="med"/>
+                      <a:tailEnd type="none" w="med" len="med"/>
+                    </a:lnT>
+                    <a:lnB w="12700" cap="flat" cmpd="sng" algn="ctr">
+                      <a:solidFill>
+                        <a:schemeClr val="tx1"/>
+                      </a:solidFill>
+                      <a:prstDash val="solid"/>
+                      <a:round/>
+                      <a:headEnd type="none" w="med" len="med"/>
+                      <a:tailEnd type="none" w="med" len="med"/>
+                    </a:lnB>
+                  </a:tcPr>
+                </a:tc>
+                <a:extLst>
+                  <a:ext uri="{0D108BD9-81ED-4DB2-BD59-A6C34878D82A}">
+                    <a16:rowId xmlns:a16="http://schemas.microsoft.com/office/drawing/2014/main" val="298390032"/>
+                  </a:ext>
+                </a:extLst>
+              </a:tr>
+              <a:tr h="636140">
+                <a:tc>
+                  <a:txBody>
+                    <a:bodyPr/>
+                    <a:lstStyle/>
+                    <a:p>
+                      <a:pPr indent="0" algn="ctr">
+                        <a:lnSpc>
+                          <a:spcPct val="130000"/>
+                        </a:lnSpc>
+                        <a:spcBef>
+                          <a:spcPts val="600"/>
+                        </a:spcBef>
+                        <a:spcAft>
+                          <a:spcPts val="600"/>
+                        </a:spcAft>
+                        <a:buNone/>
+                      </a:pPr>
+                      <a:r>
+                        <a:rPr lang="vi-VN" sz="1600">
+                          <a:effectLst/>
+                          <a:latin typeface="Times New Roman" panose="02020603050405020304" pitchFamily="18" charset="0"/>
+                          <a:cs typeface="Times New Roman" panose="02020603050405020304" pitchFamily="18" charset="0"/>
+                        </a:rPr>
+                        <a:t>bert-base-</a:t>
+                      </a:r>
+                      <a:endParaRPr lang="en-US" sz="1600">
+                        <a:effectLst/>
+                        <a:latin typeface="Times New Roman" panose="02020603050405020304" pitchFamily="18" charset="0"/>
+                        <a:cs typeface="Times New Roman" panose="02020603050405020304" pitchFamily="18" charset="0"/>
+                      </a:endParaRPr>
+                    </a:p>
+                    <a:p>
+                      <a:pPr indent="0" algn="ctr">
+                        <a:lnSpc>
+                          <a:spcPct val="130000"/>
+                        </a:lnSpc>
+                        <a:spcBef>
+                          <a:spcPts val="600"/>
+                        </a:spcBef>
+                        <a:spcAft>
+                          <a:spcPts val="600"/>
+                        </a:spcAft>
+                        <a:buNone/>
+                      </a:pPr>
+                      <a:r>
+                        <a:rPr lang="vi-VN" sz="1600">
+                          <a:effectLst/>
+                          <a:latin typeface="Times New Roman" panose="02020603050405020304" pitchFamily="18" charset="0"/>
+                          <a:cs typeface="Times New Roman" panose="02020603050405020304" pitchFamily="18" charset="0"/>
+                        </a:rPr>
+                        <a:t>vietnamese-uncased</a:t>
+                      </a:r>
+                      <a:endParaRPr lang="en-US" sz="1600" b="1">
+                        <a:solidFill>
+                          <a:srgbClr val="000000"/>
+                        </a:solidFill>
+                        <a:effectLst/>
+                        <a:latin typeface="Times New Roman" panose="02020603050405020304" pitchFamily="18" charset="0"/>
+                        <a:ea typeface="Arial" panose="020B0604020202020204" pitchFamily="34" charset="0"/>
+                        <a:cs typeface="Times New Roman" panose="02020603050405020304" pitchFamily="18" charset="0"/>
+                      </a:endParaRPr>
+                    </a:p>
+                  </a:txBody>
+                  <a:tcPr marL="48509" marR="48509" marT="0" marB="0" anchor="ctr">
+                    <a:lnL w="12700" cap="flat" cmpd="sng" algn="ctr">
+                      <a:solidFill>
+                        <a:schemeClr val="tx1"/>
+                      </a:solidFill>
+                      <a:prstDash val="solid"/>
+                      <a:round/>
+                      <a:headEnd type="none" w="med" len="med"/>
+                      <a:tailEnd type="none" w="med" len="med"/>
+                    </a:lnL>
+                    <a:lnR w="12700" cap="flat" cmpd="sng" algn="ctr">
+                      <a:solidFill>
+                        <a:schemeClr val="tx1"/>
+                      </a:solidFill>
+                      <a:prstDash val="solid"/>
+                      <a:round/>
+                      <a:headEnd type="none" w="med" len="med"/>
+                      <a:tailEnd type="none" w="med" len="med"/>
+                    </a:lnR>
+                    <a:lnT w="12700" cap="flat" cmpd="sng" algn="ctr">
+                      <a:solidFill>
+                        <a:schemeClr val="tx1"/>
+                      </a:solidFill>
+                      <a:prstDash val="solid"/>
+                      <a:round/>
+                      <a:headEnd type="none" w="med" len="med"/>
+                      <a:tailEnd type="none" w="med" len="med"/>
+                    </a:lnT>
+                    <a:lnB w="12700" cap="flat" cmpd="sng" algn="ctr">
+                      <a:solidFill>
+                        <a:schemeClr val="tx1"/>
+                      </a:solidFill>
+                      <a:prstDash val="solid"/>
+                      <a:round/>
+                      <a:headEnd type="none" w="med" len="med"/>
+                      <a:tailEnd type="none" w="med" len="med"/>
+                    </a:lnB>
+                  </a:tcPr>
+                </a:tc>
+                <a:tc>
+                  <a:txBody>
+                    <a:bodyPr/>
+                    <a:lstStyle/>
+                    <a:p>
+                      <a:pPr indent="0" algn="l">
+                        <a:lnSpc>
+                          <a:spcPct val="130000"/>
+                        </a:lnSpc>
+                        <a:spcBef>
+                          <a:spcPts val="600"/>
+                        </a:spcBef>
+                        <a:spcAft>
+                          <a:spcPts val="600"/>
+                        </a:spcAft>
+                        <a:buNone/>
+                      </a:pPr>
+                      <a:r>
+                        <a:rPr lang="vi-VN" sz="1600">
+                          <a:effectLst/>
+                          <a:latin typeface="Times New Roman" panose="02020603050405020304" pitchFamily="18" charset="0"/>
+                          <a:cs typeface="Times New Roman" panose="02020603050405020304" pitchFamily="18" charset="0"/>
+                        </a:rPr>
+                        <a:t>['[CLS]', 'chuong', '[UNK]', 'bu', '##o', '##i', 'đau', 'lich', 'su', 'nu', '##oc', 'ta', '[UNK]', '[UNK]', '[UNK]', '[UNK]', '[UNK]', '[UNK]', '[UNK]', '[UNK]', '[SEP]']</a:t>
+                      </a:r>
+                      <a:endParaRPr lang="en-US" sz="1600" b="1">
+                        <a:solidFill>
+                          <a:srgbClr val="000000"/>
+                        </a:solidFill>
+                        <a:effectLst/>
+                        <a:latin typeface="Times New Roman" panose="02020603050405020304" pitchFamily="18" charset="0"/>
+                        <a:ea typeface="Arial" panose="020B0604020202020204" pitchFamily="34" charset="0"/>
+                        <a:cs typeface="Times New Roman" panose="02020603050405020304" pitchFamily="18" charset="0"/>
+                      </a:endParaRPr>
+                    </a:p>
+                  </a:txBody>
+                  <a:tcPr marL="48509" marR="48509" marT="0" marB="0" anchor="ctr">
+                    <a:lnL w="12700" cap="flat" cmpd="sng" algn="ctr">
+                      <a:solidFill>
+                        <a:schemeClr val="tx1"/>
+                      </a:solidFill>
+                      <a:prstDash val="solid"/>
+                      <a:round/>
+                      <a:headEnd type="none" w="med" len="med"/>
+                      <a:tailEnd type="none" w="med" len="med"/>
+                    </a:lnL>
+                    <a:lnR w="12700" cap="flat" cmpd="sng" algn="ctr">
+                      <a:solidFill>
+                        <a:schemeClr val="tx1"/>
+                      </a:solidFill>
+                      <a:prstDash val="solid"/>
+                      <a:round/>
+                      <a:headEnd type="none" w="med" len="med"/>
+                      <a:tailEnd type="none" w="med" len="med"/>
+                    </a:lnR>
+                    <a:lnT w="12700" cap="flat" cmpd="sng" algn="ctr">
+                      <a:solidFill>
+                        <a:schemeClr val="tx1"/>
+                      </a:solidFill>
+                      <a:prstDash val="solid"/>
+                      <a:round/>
+                      <a:headEnd type="none" w="med" len="med"/>
+                      <a:tailEnd type="none" w="med" len="med"/>
+                    </a:lnT>
+                    <a:lnB w="12700" cap="flat" cmpd="sng" algn="ctr">
+                      <a:solidFill>
+                        <a:schemeClr val="tx1"/>
+                      </a:solidFill>
+                      <a:prstDash val="solid"/>
+                      <a:round/>
+                      <a:headEnd type="none" w="med" len="med"/>
+                      <a:tailEnd type="none" w="med" len="med"/>
+                    </a:lnB>
+                  </a:tcPr>
+                </a:tc>
+                <a:extLst>
+                  <a:ext uri="{0D108BD9-81ED-4DB2-BD59-A6C34878D82A}">
+                    <a16:rowId xmlns:a16="http://schemas.microsoft.com/office/drawing/2014/main" val="2732113233"/>
+                  </a:ext>
+                </a:extLst>
+              </a:tr>
+              <a:tr h="526950">
+                <a:tc>
+                  <a:txBody>
+                    <a:bodyPr/>
+                    <a:lstStyle/>
+                    <a:p>
+                      <a:pPr indent="0" algn="ctr">
+                        <a:lnSpc>
+                          <a:spcPct val="130000"/>
+                        </a:lnSpc>
+                        <a:spcBef>
+                          <a:spcPts val="600"/>
+                        </a:spcBef>
+                        <a:spcAft>
+                          <a:spcPts val="600"/>
+                        </a:spcAft>
+                        <a:buNone/>
+                      </a:pPr>
+                      <a:r>
+                        <a:rPr lang="vi-VN" sz="1600">
+                          <a:effectLst/>
+                          <a:latin typeface="Times New Roman" panose="02020603050405020304" pitchFamily="18" charset="0"/>
+                          <a:cs typeface="Times New Roman" panose="02020603050405020304" pitchFamily="18" charset="0"/>
+                        </a:rPr>
+                        <a:t>distiluse-base-multilingual-cased-v2</a:t>
+                      </a:r>
+                      <a:endParaRPr lang="en-US" sz="1600" b="1">
+                        <a:solidFill>
+                          <a:srgbClr val="000000"/>
+                        </a:solidFill>
+                        <a:effectLst/>
+                        <a:latin typeface="Times New Roman" panose="02020603050405020304" pitchFamily="18" charset="0"/>
+                        <a:ea typeface="Arial" panose="020B0604020202020204" pitchFamily="34" charset="0"/>
+                        <a:cs typeface="Times New Roman" panose="02020603050405020304" pitchFamily="18" charset="0"/>
+                      </a:endParaRPr>
+                    </a:p>
+                  </a:txBody>
+                  <a:tcPr marL="48509" marR="48509" marT="0" marB="0" anchor="ctr">
+                    <a:lnL w="12700" cap="flat" cmpd="sng" algn="ctr">
+                      <a:solidFill>
+                        <a:schemeClr val="tx1"/>
+                      </a:solidFill>
+                      <a:prstDash val="solid"/>
+                      <a:round/>
+                      <a:headEnd type="none" w="med" len="med"/>
+                      <a:tailEnd type="none" w="med" len="med"/>
+                    </a:lnL>
+                    <a:lnR w="12700" cap="flat" cmpd="sng" algn="ctr">
+                      <a:solidFill>
+                        <a:schemeClr val="tx1"/>
+                      </a:solidFill>
+                      <a:prstDash val="solid"/>
+                      <a:round/>
+                      <a:headEnd type="none" w="med" len="med"/>
+                      <a:tailEnd type="none" w="med" len="med"/>
+                    </a:lnR>
+                    <a:lnT w="12700" cap="flat" cmpd="sng" algn="ctr">
+                      <a:solidFill>
+                        <a:schemeClr val="tx1"/>
+                      </a:solidFill>
+                      <a:prstDash val="solid"/>
+                      <a:round/>
+                      <a:headEnd type="none" w="med" len="med"/>
+                      <a:tailEnd type="none" w="med" len="med"/>
+                    </a:lnT>
+                    <a:lnB w="12700" cap="flat" cmpd="sng" algn="ctr">
+                      <a:solidFill>
+                        <a:schemeClr val="tx1"/>
+                      </a:solidFill>
+                      <a:prstDash val="solid"/>
+                      <a:round/>
+                      <a:headEnd type="none" w="med" len="med"/>
+                      <a:tailEnd type="none" w="med" len="med"/>
+                    </a:lnB>
+                  </a:tcPr>
+                </a:tc>
+                <a:tc>
+                  <a:txBody>
+                    <a:bodyPr/>
+                    <a:lstStyle/>
+                    <a:p>
+                      <a:pPr indent="0" algn="l">
+                        <a:lnSpc>
+                          <a:spcPct val="130000"/>
+                        </a:lnSpc>
+                        <a:spcBef>
+                          <a:spcPts val="600"/>
+                        </a:spcBef>
+                        <a:spcAft>
+                          <a:spcPts val="600"/>
+                        </a:spcAft>
+                        <a:buNone/>
+                      </a:pPr>
+                      <a:r>
+                        <a:rPr lang="vi-VN" sz="1600">
+                          <a:effectLst/>
+                          <a:latin typeface="Times New Roman" panose="02020603050405020304" pitchFamily="18" charset="0"/>
+                          <a:cs typeface="Times New Roman" panose="02020603050405020304" pitchFamily="18" charset="0"/>
+                        </a:rPr>
+                        <a:t>['[CLS]', 'Chương', ':', '[UNK]', '[UNK]', '[UNK]', '[UNK]', '[UNK]', 'TA', '[UNK]', '[UNK]', '(', '[UNK]', ')', 'ʃ', '##♪', '</a:t>
+                      </a:r>
+                      <a:r>
+                        <a:rPr lang="en-US" sz="1600">
+                          <a:effectLst/>
+                          <a:latin typeface="Times New Roman" panose="02020603050405020304" pitchFamily="18" charset="0"/>
+                          <a:cs typeface="Times New Roman" panose="02020603050405020304" pitchFamily="18" charset="0"/>
+                        </a:rPr>
+                        <a:t>卍</a:t>
+                      </a:r>
+                      <a:r>
+                        <a:rPr lang="vi-VN" sz="1600">
+                          <a:effectLst/>
+                          <a:latin typeface="Times New Roman" panose="02020603050405020304" pitchFamily="18" charset="0"/>
+                          <a:cs typeface="Times New Roman" panose="02020603050405020304" pitchFamily="18" charset="0"/>
+                        </a:rPr>
+                        <a:t>', '[UNK]', '[SEP]']</a:t>
+                      </a:r>
+                      <a:endParaRPr lang="en-US" sz="1600" b="1">
+                        <a:solidFill>
+                          <a:srgbClr val="000000"/>
+                        </a:solidFill>
+                        <a:effectLst/>
+                        <a:latin typeface="Times New Roman" panose="02020603050405020304" pitchFamily="18" charset="0"/>
+                        <a:ea typeface="Arial" panose="020B0604020202020204" pitchFamily="34" charset="0"/>
+                        <a:cs typeface="Times New Roman" panose="02020603050405020304" pitchFamily="18" charset="0"/>
+                      </a:endParaRPr>
+                    </a:p>
+                  </a:txBody>
+                  <a:tcPr marL="48509" marR="48509" marT="0" marB="0" anchor="ctr">
+                    <a:lnL w="12700" cap="flat" cmpd="sng" algn="ctr">
+                      <a:solidFill>
+                        <a:schemeClr val="tx1"/>
+                      </a:solidFill>
+                      <a:prstDash val="solid"/>
+                      <a:round/>
+                      <a:headEnd type="none" w="med" len="med"/>
+                      <a:tailEnd type="none" w="med" len="med"/>
+                    </a:lnL>
+                    <a:lnR w="12700" cap="flat" cmpd="sng" algn="ctr">
+                      <a:solidFill>
+                        <a:schemeClr val="tx1"/>
+                      </a:solidFill>
+                      <a:prstDash val="solid"/>
+                      <a:round/>
+                      <a:headEnd type="none" w="med" len="med"/>
+                      <a:tailEnd type="none" w="med" len="med"/>
+                    </a:lnR>
+                    <a:lnT w="12700" cap="flat" cmpd="sng" algn="ctr">
+                      <a:solidFill>
+                        <a:schemeClr val="tx1"/>
+                      </a:solidFill>
+                      <a:prstDash val="solid"/>
+                      <a:round/>
+                      <a:headEnd type="none" w="med" len="med"/>
+                      <a:tailEnd type="none" w="med" len="med"/>
+                    </a:lnT>
+                    <a:lnB w="12700" cap="flat" cmpd="sng" algn="ctr">
+                      <a:solidFill>
+                        <a:schemeClr val="tx1"/>
+                      </a:solidFill>
+                      <a:prstDash val="solid"/>
+                      <a:round/>
+                      <a:headEnd type="none" w="med" len="med"/>
+                      <a:tailEnd type="none" w="med" len="med"/>
+                    </a:lnB>
+                  </a:tcPr>
+                </a:tc>
+                <a:extLst>
+                  <a:ext uri="{0D108BD9-81ED-4DB2-BD59-A6C34878D82A}">
+                    <a16:rowId xmlns:a16="http://schemas.microsoft.com/office/drawing/2014/main" val="1815829504"/>
+                  </a:ext>
+                </a:extLst>
+              </a:tr>
+              <a:tr h="710521">
+                <a:tc>
+                  <a:txBody>
+                    <a:bodyPr/>
+                    <a:lstStyle/>
+                    <a:p>
+                      <a:pPr indent="0" algn="ctr">
+                        <a:lnSpc>
+                          <a:spcPct val="130000"/>
+                        </a:lnSpc>
+                        <a:spcBef>
+                          <a:spcPts val="600"/>
+                        </a:spcBef>
+                        <a:spcAft>
+                          <a:spcPts val="600"/>
+                        </a:spcAft>
+                        <a:buNone/>
+                      </a:pPr>
+                      <a:r>
+                        <a:rPr lang="vi-VN" sz="1600">
+                          <a:effectLst/>
+                          <a:latin typeface="Times New Roman" panose="02020603050405020304" pitchFamily="18" charset="0"/>
+                          <a:cs typeface="Times New Roman" panose="02020603050405020304" pitchFamily="18" charset="0"/>
+                        </a:rPr>
+                        <a:t>multilingual-e5-small</a:t>
+                      </a:r>
+                      <a:endParaRPr lang="en-US" sz="1600" b="1">
+                        <a:solidFill>
+                          <a:srgbClr val="000000"/>
+                        </a:solidFill>
+                        <a:effectLst/>
+                        <a:latin typeface="Times New Roman" panose="02020603050405020304" pitchFamily="18" charset="0"/>
+                        <a:ea typeface="Arial" panose="020B0604020202020204" pitchFamily="34" charset="0"/>
+                        <a:cs typeface="Times New Roman" panose="02020603050405020304" pitchFamily="18" charset="0"/>
+                      </a:endParaRPr>
+                    </a:p>
+                  </a:txBody>
+                  <a:tcPr marL="48509" marR="48509" marT="0" marB="0" anchor="ctr">
+                    <a:lnL w="12700" cap="flat" cmpd="sng" algn="ctr">
+                      <a:solidFill>
+                        <a:schemeClr val="tx1"/>
+                      </a:solidFill>
+                      <a:prstDash val="solid"/>
+                      <a:round/>
+                      <a:headEnd type="none" w="med" len="med"/>
+                      <a:tailEnd type="none" w="med" len="med"/>
+                    </a:lnL>
+                    <a:lnR w="12700" cap="flat" cmpd="sng" algn="ctr">
+                      <a:solidFill>
+                        <a:schemeClr val="tx1"/>
+                      </a:solidFill>
+                      <a:prstDash val="solid"/>
+                      <a:round/>
+                      <a:headEnd type="none" w="med" len="med"/>
+                      <a:tailEnd type="none" w="med" len="med"/>
+                    </a:lnR>
+                    <a:lnT w="12700" cap="flat" cmpd="sng" algn="ctr">
+                      <a:solidFill>
+                        <a:schemeClr val="tx1"/>
+                      </a:solidFill>
+                      <a:prstDash val="solid"/>
+                      <a:round/>
+                      <a:headEnd type="none" w="med" len="med"/>
+                      <a:tailEnd type="none" w="med" len="med"/>
+                    </a:lnT>
+                    <a:lnB w="12700" cap="flat" cmpd="sng" algn="ctr">
+                      <a:solidFill>
+                        <a:schemeClr val="tx1"/>
+                      </a:solidFill>
+                      <a:prstDash val="solid"/>
+                      <a:round/>
+                      <a:headEnd type="none" w="med" len="med"/>
+                      <a:tailEnd type="none" w="med" len="med"/>
+                    </a:lnB>
+                  </a:tcPr>
+                </a:tc>
+                <a:tc>
+                  <a:txBody>
+                    <a:bodyPr/>
+                    <a:lstStyle/>
+                    <a:p>
+                      <a:pPr indent="0" algn="l">
+                        <a:lnSpc>
+                          <a:spcPct val="130000"/>
+                        </a:lnSpc>
+                        <a:spcBef>
+                          <a:spcPts val="600"/>
+                        </a:spcBef>
+                        <a:spcAft>
+                          <a:spcPts val="600"/>
+                        </a:spcAft>
+                        <a:buNone/>
+                      </a:pPr>
+                      <a:r>
+                        <a:rPr lang="vi-VN" sz="1600">
+                          <a:effectLst/>
+                          <a:latin typeface="Times New Roman" panose="02020603050405020304" pitchFamily="18" charset="0"/>
+                          <a:cs typeface="Times New Roman" panose="02020603050405020304" pitchFamily="18" charset="0"/>
+                        </a:rPr>
+                        <a:t>['&lt;s&gt;', '▁Chương', ':', '▁BU', 'Ổ', 'I', '▁Đ', 'Ầ', 'U', '▁L', 'Ị', 'CH', '▁S', 'Ử', '▁N', 'ƯỚC', '▁TA', '▁', '❉', '▁', '♡', '&lt;unk&gt;', '(', 'ˆ', '◡', 'ˆ', ')', 'ʃ', '♪', '▁', '</a:t>
+                      </a:r>
+                      <a:r>
+                        <a:rPr lang="en-US" sz="1600">
+                          <a:effectLst/>
+                          <a:latin typeface="Times New Roman" panose="02020603050405020304" pitchFamily="18" charset="0"/>
+                          <a:cs typeface="Times New Roman" panose="02020603050405020304" pitchFamily="18" charset="0"/>
+                        </a:rPr>
+                        <a:t>卍</a:t>
+                      </a:r>
+                      <a:r>
+                        <a:rPr lang="vi-VN" sz="1600">
+                          <a:effectLst/>
+                          <a:latin typeface="Times New Roman" panose="02020603050405020304" pitchFamily="18" charset="0"/>
+                          <a:cs typeface="Times New Roman" panose="02020603050405020304" pitchFamily="18" charset="0"/>
+                        </a:rPr>
+                        <a:t>', '▁', '&lt;unk&gt;', '&lt;/s&gt;']</a:t>
+                      </a:r>
+                      <a:endParaRPr lang="en-US" sz="1600" b="1">
+                        <a:solidFill>
+                          <a:srgbClr val="000000"/>
+                        </a:solidFill>
+                        <a:effectLst/>
+                        <a:latin typeface="Times New Roman" panose="02020603050405020304" pitchFamily="18" charset="0"/>
+                        <a:ea typeface="Arial" panose="020B0604020202020204" pitchFamily="34" charset="0"/>
+                        <a:cs typeface="Times New Roman" panose="02020603050405020304" pitchFamily="18" charset="0"/>
+                      </a:endParaRPr>
+                    </a:p>
+                  </a:txBody>
+                  <a:tcPr marL="48509" marR="48509" marT="0" marB="0" anchor="ctr">
+                    <a:lnL w="12700" cap="flat" cmpd="sng" algn="ctr">
+                      <a:solidFill>
+                        <a:schemeClr val="tx1"/>
+                      </a:solidFill>
+                      <a:prstDash val="solid"/>
+                      <a:round/>
+                      <a:headEnd type="none" w="med" len="med"/>
+                      <a:tailEnd type="none" w="med" len="med"/>
+                    </a:lnL>
+                    <a:lnR w="12700" cap="flat" cmpd="sng" algn="ctr">
+                      <a:solidFill>
+                        <a:schemeClr val="tx1"/>
+                      </a:solidFill>
+                      <a:prstDash val="solid"/>
+                      <a:round/>
+                      <a:headEnd type="none" w="med" len="med"/>
+                      <a:tailEnd type="none" w="med" len="med"/>
+                    </a:lnR>
+                    <a:lnT w="12700" cap="flat" cmpd="sng" algn="ctr">
+                      <a:solidFill>
+                        <a:schemeClr val="tx1"/>
+                      </a:solidFill>
+                      <a:prstDash val="solid"/>
+                      <a:round/>
+                      <a:headEnd type="none" w="med" len="med"/>
+                      <a:tailEnd type="none" w="med" len="med"/>
+                    </a:lnT>
+                    <a:lnB w="12700" cap="flat" cmpd="sng" algn="ctr">
+                      <a:solidFill>
+                        <a:schemeClr val="tx1"/>
+                      </a:solidFill>
+                      <a:prstDash val="solid"/>
+                      <a:round/>
+                      <a:headEnd type="none" w="med" len="med"/>
+                      <a:tailEnd type="none" w="med" len="med"/>
+                    </a:lnB>
+                  </a:tcPr>
+                </a:tc>
+                <a:extLst>
+                  <a:ext uri="{0D108BD9-81ED-4DB2-BD59-A6C34878D82A}">
+                    <a16:rowId xmlns:a16="http://schemas.microsoft.com/office/drawing/2014/main" val="1366756113"/>
+                  </a:ext>
+                </a:extLst>
+              </a:tr>
+              <a:tr h="892698">
+                <a:tc>
+                  <a:txBody>
+                    <a:bodyPr/>
+                    <a:lstStyle/>
+                    <a:p>
+                      <a:pPr indent="0" algn="ctr">
+                        <a:lnSpc>
+                          <a:spcPct val="130000"/>
+                        </a:lnSpc>
+                        <a:spcBef>
+                          <a:spcPts val="600"/>
+                        </a:spcBef>
+                        <a:spcAft>
+                          <a:spcPts val="600"/>
+                        </a:spcAft>
+                        <a:buNone/>
+                      </a:pPr>
+                      <a:r>
+                        <a:rPr lang="vi-VN" sz="1600">
+                          <a:effectLst/>
+                          <a:latin typeface="Times New Roman" panose="02020603050405020304" pitchFamily="18" charset="0"/>
+                          <a:cs typeface="Times New Roman" panose="02020603050405020304" pitchFamily="18" charset="0"/>
+                        </a:rPr>
+                        <a:t>sup-SimCSE-VietNamese-phobert-base</a:t>
+                      </a:r>
+                      <a:endParaRPr lang="en-US" sz="1600" b="1">
+                        <a:solidFill>
+                          <a:srgbClr val="000000"/>
+                        </a:solidFill>
+                        <a:effectLst/>
+                        <a:latin typeface="Times New Roman" panose="02020603050405020304" pitchFamily="18" charset="0"/>
+                        <a:ea typeface="Arial" panose="020B0604020202020204" pitchFamily="34" charset="0"/>
+                        <a:cs typeface="Times New Roman" panose="02020603050405020304" pitchFamily="18" charset="0"/>
+                      </a:endParaRPr>
+                    </a:p>
+                  </a:txBody>
+                  <a:tcPr marL="48509" marR="48509" marT="0" marB="0" anchor="ctr">
+                    <a:lnL w="12700" cap="flat" cmpd="sng" algn="ctr">
+                      <a:solidFill>
+                        <a:schemeClr val="tx1"/>
+                      </a:solidFill>
+                      <a:prstDash val="solid"/>
+                      <a:round/>
+                      <a:headEnd type="none" w="med" len="med"/>
+                      <a:tailEnd type="none" w="med" len="med"/>
+                    </a:lnL>
+                    <a:lnR w="12700" cap="flat" cmpd="sng" algn="ctr">
+                      <a:solidFill>
+                        <a:schemeClr val="tx1"/>
+                      </a:solidFill>
+                      <a:prstDash val="solid"/>
+                      <a:round/>
+                      <a:headEnd type="none" w="med" len="med"/>
+                      <a:tailEnd type="none" w="med" len="med"/>
+                    </a:lnR>
+                    <a:lnT w="12700" cap="flat" cmpd="sng" algn="ctr">
+                      <a:solidFill>
+                        <a:schemeClr val="tx1"/>
+                      </a:solidFill>
+                      <a:prstDash val="solid"/>
+                      <a:round/>
+                      <a:headEnd type="none" w="med" len="med"/>
+                      <a:tailEnd type="none" w="med" len="med"/>
+                    </a:lnT>
+                    <a:lnB w="12700" cap="flat" cmpd="sng" algn="ctr">
+                      <a:solidFill>
+                        <a:schemeClr val="tx1"/>
+                      </a:solidFill>
+                      <a:prstDash val="solid"/>
+                      <a:round/>
+                      <a:headEnd type="none" w="med" len="med"/>
+                      <a:tailEnd type="none" w="med" len="med"/>
+                    </a:lnB>
+                  </a:tcPr>
+                </a:tc>
+                <a:tc>
+                  <a:txBody>
+                    <a:bodyPr/>
+                    <a:lstStyle/>
+                    <a:p>
+                      <a:pPr indent="0" algn="l">
+                        <a:lnSpc>
+                          <a:spcPct val="130000"/>
+                        </a:lnSpc>
+                        <a:spcBef>
+                          <a:spcPts val="600"/>
+                        </a:spcBef>
+                        <a:spcAft>
+                          <a:spcPts val="600"/>
+                        </a:spcAft>
+                        <a:buNone/>
+                      </a:pPr>
+                      <a:r>
+                        <a:rPr lang="vi-VN" sz="1600">
+                          <a:effectLst/>
+                          <a:latin typeface="Times New Roman" panose="02020603050405020304" pitchFamily="18" charset="0"/>
+                          <a:cs typeface="Times New Roman" panose="02020603050405020304" pitchFamily="18" charset="0"/>
+                        </a:rPr>
+                        <a:t>['&lt;s&gt;', 'Ch@@', 'ương@@', ':', 'B@@', 'U@@', 'ỔI', 'Đ@@', 'Ầ@@', 'U', 'L@@', 'Ị@@', 'CH', 'S@@', 'Ử', 'N@@', 'ƯỚC', 'TA', '&lt;unk&gt;', '&lt;unk&gt;', '&lt;unk&gt;', '(@@', '&lt;unk&gt;', '&lt;unk&gt;', '&lt;unk&gt;', ')@@', 'ʃ@@', '&lt;unk&gt;', '&lt;unk&gt;', '&lt;unk&gt;', '&lt;/s&gt;']</a:t>
+                      </a:r>
+                      <a:endParaRPr lang="en-US" sz="1600" b="1">
+                        <a:solidFill>
+                          <a:srgbClr val="000000"/>
+                        </a:solidFill>
+                        <a:effectLst/>
+                        <a:latin typeface="Times New Roman" panose="02020603050405020304" pitchFamily="18" charset="0"/>
+                        <a:ea typeface="Arial" panose="020B0604020202020204" pitchFamily="34" charset="0"/>
+                        <a:cs typeface="Times New Roman" panose="02020603050405020304" pitchFamily="18" charset="0"/>
+                      </a:endParaRPr>
+                    </a:p>
+                  </a:txBody>
+                  <a:tcPr marL="48509" marR="48509" marT="0" marB="0" anchor="ctr">
+                    <a:lnL w="12700" cap="flat" cmpd="sng" algn="ctr">
+                      <a:solidFill>
+                        <a:schemeClr val="tx1"/>
+                      </a:solidFill>
+                      <a:prstDash val="solid"/>
+                      <a:round/>
+                      <a:headEnd type="none" w="med" len="med"/>
+                      <a:tailEnd type="none" w="med" len="med"/>
+                    </a:lnL>
+                    <a:lnR w="12700" cap="flat" cmpd="sng" algn="ctr">
+                      <a:solidFill>
+                        <a:schemeClr val="tx1"/>
+                      </a:solidFill>
+                      <a:prstDash val="solid"/>
+                      <a:round/>
+                      <a:headEnd type="none" w="med" len="med"/>
+                      <a:tailEnd type="none" w="med" len="med"/>
+                    </a:lnR>
+                    <a:lnT w="12700" cap="flat" cmpd="sng" algn="ctr">
+                      <a:solidFill>
+                        <a:schemeClr val="tx1"/>
+                      </a:solidFill>
+                      <a:prstDash val="solid"/>
+                      <a:round/>
+                      <a:headEnd type="none" w="med" len="med"/>
+                      <a:tailEnd type="none" w="med" len="med"/>
+                    </a:lnT>
+                    <a:lnB w="12700" cap="flat" cmpd="sng" algn="ctr">
+                      <a:solidFill>
+                        <a:schemeClr val="tx1"/>
+                      </a:solidFill>
+                      <a:prstDash val="solid"/>
+                      <a:round/>
+                      <a:headEnd type="none" w="med" len="med"/>
+                      <a:tailEnd type="none" w="med" len="med"/>
+                    </a:lnB>
+                  </a:tcPr>
+                </a:tc>
+                <a:extLst>
+                  <a:ext uri="{0D108BD9-81ED-4DB2-BD59-A6C34878D82A}">
+                    <a16:rowId xmlns:a16="http://schemas.microsoft.com/office/drawing/2014/main" val="729388337"/>
+                  </a:ext>
+                </a:extLst>
+              </a:tr>
+              <a:tr h="892698">
+                <a:tc>
+                  <a:txBody>
+                    <a:bodyPr/>
+                    <a:lstStyle/>
+                    <a:p>
+                      <a:pPr indent="0" algn="ctr">
+                        <a:lnSpc>
+                          <a:spcPct val="130000"/>
+                        </a:lnSpc>
+                        <a:spcBef>
+                          <a:spcPts val="600"/>
+                        </a:spcBef>
+                        <a:spcAft>
+                          <a:spcPts val="600"/>
+                        </a:spcAft>
+                        <a:buNone/>
+                      </a:pPr>
+                      <a:r>
+                        <a:rPr lang="vi-VN" sz="1600">
+                          <a:effectLst/>
+                          <a:latin typeface="Times New Roman" panose="02020603050405020304" pitchFamily="18" charset="0"/>
+                          <a:cs typeface="Times New Roman" panose="02020603050405020304" pitchFamily="18" charset="0"/>
+                        </a:rPr>
+                        <a:t>vietnamese-bi-encoder</a:t>
+                      </a:r>
+                      <a:endParaRPr lang="en-US" sz="1600" b="1">
+                        <a:solidFill>
+                          <a:srgbClr val="000000"/>
+                        </a:solidFill>
+                        <a:effectLst/>
+                        <a:latin typeface="Times New Roman" panose="02020603050405020304" pitchFamily="18" charset="0"/>
+                        <a:ea typeface="Arial" panose="020B0604020202020204" pitchFamily="34" charset="0"/>
+                        <a:cs typeface="Times New Roman" panose="02020603050405020304" pitchFamily="18" charset="0"/>
+                      </a:endParaRPr>
+                    </a:p>
+                  </a:txBody>
+                  <a:tcPr marL="48509" marR="48509" marT="0" marB="0" anchor="ctr">
+                    <a:lnL w="12700" cap="flat" cmpd="sng" algn="ctr">
+                      <a:solidFill>
+                        <a:schemeClr val="tx1"/>
+                      </a:solidFill>
+                      <a:prstDash val="solid"/>
+                      <a:round/>
+                      <a:headEnd type="none" w="med" len="med"/>
+                      <a:tailEnd type="none" w="med" len="med"/>
+                    </a:lnL>
+                    <a:lnR w="12700" cap="flat" cmpd="sng" algn="ctr">
+                      <a:solidFill>
+                        <a:schemeClr val="tx1"/>
+                      </a:solidFill>
+                      <a:prstDash val="solid"/>
+                      <a:round/>
+                      <a:headEnd type="none" w="med" len="med"/>
+                      <a:tailEnd type="none" w="med" len="med"/>
+                    </a:lnR>
+                    <a:lnT w="12700" cap="flat" cmpd="sng" algn="ctr">
+                      <a:solidFill>
+                        <a:schemeClr val="tx1"/>
+                      </a:solidFill>
+                      <a:prstDash val="solid"/>
+                      <a:round/>
+                      <a:headEnd type="none" w="med" len="med"/>
+                      <a:tailEnd type="none" w="med" len="med"/>
+                    </a:lnT>
+                    <a:lnB w="12700" cap="flat" cmpd="sng" algn="ctr">
+                      <a:solidFill>
+                        <a:schemeClr val="tx1"/>
+                      </a:solidFill>
+                      <a:prstDash val="solid"/>
+                      <a:round/>
+                      <a:headEnd type="none" w="med" len="med"/>
+                      <a:tailEnd type="none" w="med" len="med"/>
+                    </a:lnB>
+                  </a:tcPr>
+                </a:tc>
+                <a:tc>
+                  <a:txBody>
+                    <a:bodyPr/>
+                    <a:lstStyle/>
+                    <a:p>
+                      <a:pPr indent="0" algn="l">
+                        <a:lnSpc>
+                          <a:spcPct val="130000"/>
+                        </a:lnSpc>
+                        <a:spcBef>
+                          <a:spcPts val="600"/>
+                        </a:spcBef>
+                        <a:spcAft>
+                          <a:spcPts val="600"/>
+                        </a:spcAft>
+                        <a:buNone/>
+                      </a:pPr>
+                      <a:r>
+                        <a:rPr lang="vi-VN" sz="1600">
+                          <a:effectLst/>
+                          <a:latin typeface="Times New Roman" panose="02020603050405020304" pitchFamily="18" charset="0"/>
+                          <a:cs typeface="Times New Roman" panose="02020603050405020304" pitchFamily="18" charset="0"/>
+                        </a:rPr>
+                        <a:t>['&lt;s&gt;', 'Ch@@', 'ương@@', ':', 'B@@', 'U@@', 'ỔI', 'Đ@@', 'Ầ@@', 'U', 'L@@', 'Ị@@', 'CH', 'S@@', 'Ử', 'N@@', 'ƯỚC', 'TA', '&lt;unk&gt;', '&lt;unk&gt;', '&lt;unk&gt;', '(@@', '&lt;unk&gt;', '&lt;unk&gt;', '&lt;unk&gt;', ')@@', 'ʃ@@', '&lt;unk&gt;', '&lt;unk&gt;', '&lt;unk&gt;', '&lt;/s&gt;']</a:t>
+                      </a:r>
+                      <a:endParaRPr lang="en-US" sz="1600" b="1">
+                        <a:solidFill>
+                          <a:srgbClr val="000000"/>
+                        </a:solidFill>
+                        <a:effectLst/>
+                        <a:latin typeface="Times New Roman" panose="02020603050405020304" pitchFamily="18" charset="0"/>
+                        <a:ea typeface="Arial" panose="020B0604020202020204" pitchFamily="34" charset="0"/>
+                        <a:cs typeface="Times New Roman" panose="02020603050405020304" pitchFamily="18" charset="0"/>
+                      </a:endParaRPr>
+                    </a:p>
+                  </a:txBody>
+                  <a:tcPr marL="48509" marR="48509" marT="0" marB="0" anchor="ctr">
+                    <a:lnL w="12700" cap="flat" cmpd="sng" algn="ctr">
+                      <a:solidFill>
+                        <a:schemeClr val="tx1"/>
+                      </a:solidFill>
+                      <a:prstDash val="solid"/>
+                      <a:round/>
+                      <a:headEnd type="none" w="med" len="med"/>
+                      <a:tailEnd type="none" w="med" len="med"/>
+                    </a:lnL>
+                    <a:lnR w="12700" cap="flat" cmpd="sng" algn="ctr">
+                      <a:solidFill>
+                        <a:schemeClr val="tx1"/>
+                      </a:solidFill>
+                      <a:prstDash val="solid"/>
+                      <a:round/>
+                      <a:headEnd type="none" w="med" len="med"/>
+                      <a:tailEnd type="none" w="med" len="med"/>
+                    </a:lnR>
+                    <a:lnT w="12700" cap="flat" cmpd="sng" algn="ctr">
+                      <a:solidFill>
+                        <a:schemeClr val="tx1"/>
+                      </a:solidFill>
+                      <a:prstDash val="solid"/>
+                      <a:round/>
+                      <a:headEnd type="none" w="med" len="med"/>
+                      <a:tailEnd type="none" w="med" len="med"/>
+                    </a:lnT>
+                    <a:lnB w="12700" cap="flat" cmpd="sng" algn="ctr">
+                      <a:solidFill>
+                        <a:schemeClr val="tx1"/>
+                      </a:solidFill>
+                      <a:prstDash val="solid"/>
+                      <a:round/>
+                      <a:headEnd type="none" w="med" len="med"/>
+                      <a:tailEnd type="none" w="med" len="med"/>
+                    </a:lnB>
+                  </a:tcPr>
+                </a:tc>
+                <a:extLst>
+                  <a:ext uri="{0D108BD9-81ED-4DB2-BD59-A6C34878D82A}">
+                    <a16:rowId xmlns:a16="http://schemas.microsoft.com/office/drawing/2014/main" val="2896204143"/>
+                  </a:ext>
+                </a:extLst>
+              </a:tr>
+            </a:tbl>
+          </a:graphicData>
+        </a:graphic>
+      </p:graphicFrame>
+      <p:sp>
+        <p:nvSpPr>
+          <p:cNvPr id="4" name="Title 1">
+            <a:extLst>
+              <a:ext uri="{FF2B5EF4-FFF2-40B4-BE49-F238E27FC236}">
+                <a16:creationId xmlns:a16="http://schemas.microsoft.com/office/drawing/2014/main" id="{1CED3B1D-6194-DED2-9A17-11E9603C251E}"/>
+              </a:ext>
+            </a:extLst>
+          </p:cNvPr>
+          <p:cNvSpPr txBox="1">
+            <a:spLocks/>
+          </p:cNvSpPr>
+          <p:nvPr/>
+        </p:nvSpPr>
+        <p:spPr>
+          <a:xfrm>
+            <a:off x="838199" y="1263761"/>
+            <a:ext cx="10515600" cy="659633"/>
+          </a:xfrm>
+          <a:prstGeom prst="rect">
+            <a:avLst/>
+          </a:prstGeom>
+        </p:spPr>
+        <p:txBody>
+          <a:bodyPr vert="horz" lIns="91440" tIns="45720" rIns="91440" bIns="45720" rtlCol="0" anchor="ctr">
+            <a:normAutofit fontScale="62500" lnSpcReduction="20000"/>
+          </a:bodyPr>
+          <a:lstStyle>
+            <a:lvl1pPr algn="l" defTabSz="914400" rtl="0" eaLnBrk="1" latinLnBrk="0" hangingPunct="1">
+              <a:lnSpc>
+                <a:spcPct val="90000"/>
+              </a:lnSpc>
+              <a:spcBef>
+                <a:spcPct val="0"/>
+              </a:spcBef>
+              <a:buNone/>
+              <a:defRPr sz="4400" kern="1200">
+                <a:solidFill>
+                  <a:schemeClr val="tx1"/>
+                </a:solidFill>
+                <a:latin typeface="+mj-lt"/>
+                <a:ea typeface="+mj-ea"/>
+                <a:cs typeface="+mj-cs"/>
+              </a:defRPr>
+            </a:lvl1pPr>
+          </a:lstStyle>
+          <a:p>
+            <a:pPr algn="ctr"/>
+            <a:r>
+              <a:rPr lang="en-US" sz="3200" i="1">
+                <a:latin typeface="Times New Roman" panose="02020603050405020304" pitchFamily="18" charset="0"/>
+                <a:cs typeface="Times New Roman" panose="02020603050405020304" pitchFamily="18" charset="0"/>
+              </a:rPr>
+              <a:t>Chuỗi mẫu:</a:t>
+            </a:r>
+            <a:r>
+              <a:rPr lang="en-US" sz="3200">
+                <a:latin typeface="Times New Roman" panose="02020603050405020304" pitchFamily="18" charset="0"/>
+                <a:cs typeface="Times New Roman" panose="02020603050405020304" pitchFamily="18" charset="0"/>
+              </a:rPr>
+              <a:t> </a:t>
+            </a:r>
+            <a:r>
+              <a:rPr lang="vi-VN"/>
+              <a:t>Chương: BUỔI ĐẦU LỊCH SỬ NƯỚC TA❉ ♡ƪ(ˆ◡ˆ)ʃ♪ </a:t>
+            </a:r>
+            <a:r>
+              <a:rPr lang="en-US"/>
+              <a:t>卍</a:t>
+            </a:r>
+            <a:r>
+              <a:rPr lang="vi-VN"/>
+              <a:t> ₯</a:t>
+            </a:r>
+            <a:endParaRPr lang="en-US" sz="3200">
+              <a:latin typeface="Times New Roman" panose="02020603050405020304" pitchFamily="18" charset="0"/>
+              <a:cs typeface="Times New Roman" panose="02020603050405020304" pitchFamily="18" charset="0"/>
+            </a:endParaRPr>
           </a:p>
         </p:txBody>
       </p:sp>
@@ -10156,14 +12586,14 @@
           <p:nvPr>
             <p:extLst>
               <p:ext uri="{D42A27DB-BD31-4B8C-83A1-F6EECF244321}">
-                <p14:modId xmlns:p14="http://schemas.microsoft.com/office/powerpoint/2010/main" val="3646445861"/>
+                <p14:modId xmlns:p14="http://schemas.microsoft.com/office/powerpoint/2010/main" val="1425019650"/>
               </p:ext>
             </p:extLst>
           </p:nvPr>
         </p:nvGraphicFramePr>
         <p:xfrm>
-          <a:off x="0" y="1166648"/>
-          <a:ext cx="12192000" cy="5421085"/>
+          <a:off x="350784" y="1166648"/>
+          <a:ext cx="11490432" cy="5356632"/>
         </p:xfrm>
         <a:graphic>
           <a:graphicData uri="http://schemas.openxmlformats.org/drawingml/2006/table">
@@ -10172,42 +12602,42 @@
                 <a:tableStyleId>{3B4B98B0-60AC-42C2-AFA5-B58CD77FA1E5}</a:tableStyleId>
               </a:tblPr>
               <a:tblGrid>
-                <a:gridCol w="2032000">
+                <a:gridCol w="1915072">
                   <a:extLst>
                     <a:ext uri="{9D8B030D-6E8A-4147-A177-3AD203B41FA5}">
                       <a16:colId xmlns:a16="http://schemas.microsoft.com/office/drawing/2014/main" val="166289660"/>
                     </a:ext>
                   </a:extLst>
                 </a:gridCol>
-                <a:gridCol w="2032000">
+                <a:gridCol w="1915072">
                   <a:extLst>
                     <a:ext uri="{9D8B030D-6E8A-4147-A177-3AD203B41FA5}">
                       <a16:colId xmlns:a16="http://schemas.microsoft.com/office/drawing/2014/main" val="673666756"/>
                     </a:ext>
                   </a:extLst>
                 </a:gridCol>
-                <a:gridCol w="2032000">
+                <a:gridCol w="1915072">
                   <a:extLst>
                     <a:ext uri="{9D8B030D-6E8A-4147-A177-3AD203B41FA5}">
                       <a16:colId xmlns:a16="http://schemas.microsoft.com/office/drawing/2014/main" val="4127992246"/>
                     </a:ext>
                   </a:extLst>
                 </a:gridCol>
-                <a:gridCol w="2032000">
+                <a:gridCol w="1915072">
                   <a:extLst>
                     <a:ext uri="{9D8B030D-6E8A-4147-A177-3AD203B41FA5}">
                       <a16:colId xmlns:a16="http://schemas.microsoft.com/office/drawing/2014/main" val="985171975"/>
                     </a:ext>
                   </a:extLst>
                 </a:gridCol>
-                <a:gridCol w="2032000">
+                <a:gridCol w="1915072">
                   <a:extLst>
                     <a:ext uri="{9D8B030D-6E8A-4147-A177-3AD203B41FA5}">
                       <a16:colId xmlns:a16="http://schemas.microsoft.com/office/drawing/2014/main" val="3658319788"/>
                     </a:ext>
                   </a:extLst>
                 </a:gridCol>
-                <a:gridCol w="2032000">
+                <a:gridCol w="1915072">
                   <a:extLst>
                     <a:ext uri="{9D8B030D-6E8A-4147-A177-3AD203B41FA5}">
                       <a16:colId xmlns:a16="http://schemas.microsoft.com/office/drawing/2014/main" val="1633214803"/>
@@ -10215,7 +12645,7 @@
                   </a:extLst>
                 </a:gridCol>
               </a:tblGrid>
-              <a:tr h="718457">
+              <a:tr h="653358">
                 <a:tc>
                   <a:txBody>
                     <a:bodyPr/>
@@ -10223,7 +12653,7 @@
                     <a:p>
                       <a:pPr algn="ctr"/>
                       <a:r>
-                        <a:rPr lang="en-US">
+                        <a:rPr lang="en-US" sz="1800">
                           <a:latin typeface="Times New Roman" panose="02020603050405020304" pitchFamily="18" charset="0"/>
                           <a:cs typeface="Times New Roman" panose="02020603050405020304" pitchFamily="18" charset="0"/>
                         </a:rPr>
@@ -10277,7 +12707,7 @@
                     <a:p>
                       <a:pPr algn="ctr"/>
                       <a:r>
-                        <a:rPr lang="en-US">
+                        <a:rPr lang="en-US" sz="1800">
                           <a:latin typeface="Times New Roman" panose="02020603050405020304" pitchFamily="18" charset="0"/>
                           <a:cs typeface="Times New Roman" panose="02020603050405020304" pitchFamily="18" charset="0"/>
                         </a:rPr>
@@ -10331,7 +12761,7 @@
                     <a:p>
                       <a:pPr algn="ctr"/>
                       <a:r>
-                        <a:rPr lang="en-US">
+                        <a:rPr lang="en-US" sz="1800">
                           <a:latin typeface="Times New Roman" panose="02020603050405020304" pitchFamily="18" charset="0"/>
                           <a:cs typeface="Times New Roman" panose="02020603050405020304" pitchFamily="18" charset="0"/>
                         </a:rPr>
@@ -10385,7 +12815,7 @@
                     <a:p>
                       <a:pPr algn="ctr"/>
                       <a:r>
-                        <a:rPr lang="en-US">
+                        <a:rPr lang="en-US" sz="1800">
                           <a:latin typeface="Times New Roman" panose="02020603050405020304" pitchFamily="18" charset="0"/>
                           <a:cs typeface="Times New Roman" panose="02020603050405020304" pitchFamily="18" charset="0"/>
                         </a:rPr>
@@ -10439,7 +12869,7 @@
                     <a:p>
                       <a:pPr algn="ctr"/>
                       <a:r>
-                        <a:rPr lang="en-US">
+                        <a:rPr lang="en-US" sz="1800">
                           <a:latin typeface="Times New Roman" panose="02020603050405020304" pitchFamily="18" charset="0"/>
                           <a:cs typeface="Times New Roman" panose="02020603050405020304" pitchFamily="18" charset="0"/>
                         </a:rPr>
@@ -10493,7 +12923,7 @@
                     <a:p>
                       <a:pPr algn="ctr"/>
                       <a:r>
-                        <a:rPr lang="en-US">
+                        <a:rPr lang="en-US" sz="1800">
                           <a:latin typeface="Times New Roman" panose="02020603050405020304" pitchFamily="18" charset="0"/>
                           <a:cs typeface="Times New Roman" panose="02020603050405020304" pitchFamily="18" charset="0"/>
                         </a:rPr>
@@ -10546,7 +12976,7 @@
                   </a:ext>
                 </a:extLst>
               </a:tr>
-              <a:tr h="718457">
+              <a:tr h="653358">
                 <a:tc>
                   <a:txBody>
                     <a:bodyPr/>
@@ -10554,7 +12984,7 @@
                     <a:p>
                       <a:pPr algn="ctr"/>
                       <a:r>
-                        <a:rPr lang="en-US" i="1">
+                        <a:rPr lang="en-US" sz="1800" i="1">
                           <a:latin typeface="Times New Roman" panose="02020603050405020304" pitchFamily="18" charset="0"/>
                           <a:cs typeface="Times New Roman" panose="02020603050405020304" pitchFamily="18" charset="0"/>
                         </a:rPr>
@@ -10608,7 +13038,7 @@
                     <a:p>
                       <a:pPr algn="ctr"/>
                       <a:r>
-                        <a:rPr lang="en-US">
+                        <a:rPr lang="en-US" sz="1800">
                           <a:latin typeface="Times New Roman" panose="02020603050405020304" pitchFamily="18" charset="0"/>
                           <a:cs typeface="Times New Roman" panose="02020603050405020304" pitchFamily="18" charset="0"/>
                         </a:rPr>
@@ -10662,7 +13092,7 @@
                     <a:p>
                       <a:pPr algn="ctr"/>
                       <a:r>
-                        <a:rPr lang="en-US">
+                        <a:rPr lang="en-US" sz="1800">
                           <a:latin typeface="Times New Roman" panose="02020603050405020304" pitchFamily="18" charset="0"/>
                           <a:cs typeface="Times New Roman" panose="02020603050405020304" pitchFamily="18" charset="0"/>
                         </a:rPr>
@@ -10716,7 +13146,7 @@
                     <a:p>
                       <a:pPr algn="ctr"/>
                       <a:r>
-                        <a:rPr lang="en-US">
+                        <a:rPr lang="en-US" sz="1800">
                           <a:latin typeface="Times New Roman" panose="02020603050405020304" pitchFamily="18" charset="0"/>
                           <a:cs typeface="Times New Roman" panose="02020603050405020304" pitchFamily="18" charset="0"/>
                         </a:rPr>
@@ -10770,7 +13200,7 @@
                     <a:p>
                       <a:pPr algn="ctr"/>
                       <a:r>
-                        <a:rPr lang="en-US">
+                        <a:rPr lang="en-US" sz="1800">
                           <a:latin typeface="Times New Roman" panose="02020603050405020304" pitchFamily="18" charset="0"/>
                           <a:cs typeface="Times New Roman" panose="02020603050405020304" pitchFamily="18" charset="0"/>
                         </a:rPr>
@@ -10824,7 +13254,7 @@
                     <a:p>
                       <a:pPr algn="ctr"/>
                       <a:r>
-                        <a:rPr lang="en-US">
+                        <a:rPr lang="en-US" sz="1800">
                           <a:latin typeface="Times New Roman" panose="02020603050405020304" pitchFamily="18" charset="0"/>
                           <a:cs typeface="Times New Roman" panose="02020603050405020304" pitchFamily="18" charset="0"/>
                         </a:rPr>
@@ -10877,7 +13307,7 @@
                   </a:ext>
                 </a:extLst>
               </a:tr>
-              <a:tr h="718457">
+              <a:tr h="877480">
                 <a:tc>
                   <a:txBody>
                     <a:bodyPr/>
@@ -10885,7 +13315,7 @@
                     <a:p>
                       <a:pPr algn="ctr"/>
                       <a:r>
-                        <a:rPr lang="en-US" i="1">
+                        <a:rPr lang="en-US" sz="1800" i="1">
                           <a:latin typeface="Times New Roman" panose="02020603050405020304" pitchFamily="18" charset="0"/>
                           <a:cs typeface="Times New Roman" panose="02020603050405020304" pitchFamily="18" charset="0"/>
                         </a:rPr>
@@ -10939,7 +13369,7 @@
                     <a:p>
                       <a:pPr algn="ctr"/>
                       <a:r>
-                        <a:rPr lang="en-US">
+                        <a:rPr lang="en-US" sz="1800">
                           <a:latin typeface="Times New Roman" panose="02020603050405020304" pitchFamily="18" charset="0"/>
                           <a:cs typeface="Times New Roman" panose="02020603050405020304" pitchFamily="18" charset="0"/>
                         </a:rPr>
@@ -10993,7 +13423,7 @@
                     <a:p>
                       <a:pPr algn="ctr"/>
                       <a:r>
-                        <a:rPr lang="en-US">
+                        <a:rPr lang="en-US" sz="1800">
                           <a:latin typeface="Times New Roman" panose="02020603050405020304" pitchFamily="18" charset="0"/>
                           <a:cs typeface="Times New Roman" panose="02020603050405020304" pitchFamily="18" charset="0"/>
                         </a:rPr>
@@ -11047,7 +13477,7 @@
                     <a:p>
                       <a:pPr algn="ctr"/>
                       <a:r>
-                        <a:rPr lang="en-US">
+                        <a:rPr lang="en-US" sz="1800">
                           <a:latin typeface="Times New Roman" panose="02020603050405020304" pitchFamily="18" charset="0"/>
                           <a:cs typeface="Times New Roman" panose="02020603050405020304" pitchFamily="18" charset="0"/>
                         </a:rPr>
@@ -11101,7 +13531,7 @@
                     <a:p>
                       <a:pPr algn="ctr"/>
                       <a:r>
-                        <a:rPr lang="en-US">
+                        <a:rPr lang="en-US" sz="1800">
                           <a:latin typeface="Times New Roman" panose="02020603050405020304" pitchFamily="18" charset="0"/>
                           <a:cs typeface="Times New Roman" panose="02020603050405020304" pitchFamily="18" charset="0"/>
                         </a:rPr>
@@ -11155,7 +13585,7 @@
                     <a:p>
                       <a:pPr algn="ctr"/>
                       <a:r>
-                        <a:rPr lang="en-US">
+                        <a:rPr lang="en-US" sz="1800">
                           <a:latin typeface="Times New Roman" panose="02020603050405020304" pitchFamily="18" charset="0"/>
                           <a:cs typeface="Times New Roman" panose="02020603050405020304" pitchFamily="18" charset="0"/>
                         </a:rPr>
@@ -11208,7 +13638,7 @@
                   </a:ext>
                 </a:extLst>
               </a:tr>
-              <a:tr h="718457">
+              <a:tr h="877480">
                 <a:tc>
                   <a:txBody>
                     <a:bodyPr/>
@@ -11216,7 +13646,7 @@
                     <a:p>
                       <a:pPr algn="ctr"/>
                       <a:r>
-                        <a:rPr lang="en-US" i="1">
+                        <a:rPr lang="en-US" sz="1800" i="1">
                           <a:latin typeface="Times New Roman" panose="02020603050405020304" pitchFamily="18" charset="0"/>
                           <a:cs typeface="Times New Roman" panose="02020603050405020304" pitchFamily="18" charset="0"/>
                         </a:rPr>
@@ -11270,7 +13700,7 @@
                     <a:p>
                       <a:pPr algn="ctr"/>
                       <a:r>
-                        <a:rPr lang="en-US">
+                        <a:rPr lang="en-US" sz="1800">
                           <a:latin typeface="Times New Roman" panose="02020603050405020304" pitchFamily="18" charset="0"/>
                           <a:cs typeface="Times New Roman" panose="02020603050405020304" pitchFamily="18" charset="0"/>
                         </a:rPr>
@@ -11324,7 +13754,7 @@
                     <a:p>
                       <a:pPr algn="ctr"/>
                       <a:r>
-                        <a:rPr lang="en-US">
+                        <a:rPr lang="en-US" sz="1800">
                           <a:latin typeface="Times New Roman" panose="02020603050405020304" pitchFamily="18" charset="0"/>
                           <a:cs typeface="Times New Roman" panose="02020603050405020304" pitchFamily="18" charset="0"/>
                         </a:rPr>
@@ -11378,7 +13808,7 @@
                     <a:p>
                       <a:pPr algn="ctr"/>
                       <a:r>
-                        <a:rPr lang="en-US">
+                        <a:rPr lang="en-US" sz="1800">
                           <a:latin typeface="Times New Roman" panose="02020603050405020304" pitchFamily="18" charset="0"/>
                           <a:cs typeface="Times New Roman" panose="02020603050405020304" pitchFamily="18" charset="0"/>
                         </a:rPr>
@@ -11432,7 +13862,7 @@
                     <a:p>
                       <a:pPr algn="ctr"/>
                       <a:r>
-                        <a:rPr lang="en-US">
+                        <a:rPr lang="en-US" sz="1800">
                           <a:latin typeface="Times New Roman" panose="02020603050405020304" pitchFamily="18" charset="0"/>
                           <a:cs typeface="Times New Roman" panose="02020603050405020304" pitchFamily="18" charset="0"/>
                         </a:rPr>
@@ -11486,7 +13916,7 @@
                     <a:p>
                       <a:pPr algn="ctr"/>
                       <a:r>
-                        <a:rPr lang="en-US">
+                        <a:rPr lang="en-US" sz="1800">
                           <a:latin typeface="Times New Roman" panose="02020603050405020304" pitchFamily="18" charset="0"/>
                           <a:cs typeface="Times New Roman" panose="02020603050405020304" pitchFamily="18" charset="0"/>
                         </a:rPr>
@@ -11539,7 +13969,7 @@
                   </a:ext>
                 </a:extLst>
               </a:tr>
-              <a:tr h="718457">
+              <a:tr h="653358">
                 <a:tc>
                   <a:txBody>
                     <a:bodyPr/>
@@ -11547,7 +13977,7 @@
                     <a:p>
                       <a:pPr algn="ctr"/>
                       <a:r>
-                        <a:rPr lang="en-US" i="1">
+                        <a:rPr lang="en-US" sz="1800" i="1">
                           <a:latin typeface="Times New Roman" panose="02020603050405020304" pitchFamily="18" charset="0"/>
                           <a:cs typeface="Times New Roman" panose="02020603050405020304" pitchFamily="18" charset="0"/>
                         </a:rPr>
@@ -11601,7 +14031,7 @@
                     <a:p>
                       <a:pPr algn="ctr"/>
                       <a:r>
-                        <a:rPr lang="en-US">
+                        <a:rPr lang="en-US" sz="1800">
                           <a:latin typeface="Times New Roman" panose="02020603050405020304" pitchFamily="18" charset="0"/>
                           <a:cs typeface="Times New Roman" panose="02020603050405020304" pitchFamily="18" charset="0"/>
                         </a:rPr>
@@ -11655,7 +14085,7 @@
                     <a:p>
                       <a:pPr algn="ctr"/>
                       <a:r>
-                        <a:rPr lang="en-US">
+                        <a:rPr lang="en-US" sz="1800">
                           <a:latin typeface="Times New Roman" panose="02020603050405020304" pitchFamily="18" charset="0"/>
                           <a:cs typeface="Times New Roman" panose="02020603050405020304" pitchFamily="18" charset="0"/>
                         </a:rPr>
@@ -11709,7 +14139,7 @@
                     <a:p>
                       <a:pPr algn="ctr"/>
                       <a:r>
-                        <a:rPr lang="en-US">
+                        <a:rPr lang="en-US" sz="1800">
                           <a:latin typeface="Times New Roman" panose="02020603050405020304" pitchFamily="18" charset="0"/>
                           <a:cs typeface="Times New Roman" panose="02020603050405020304" pitchFamily="18" charset="0"/>
                         </a:rPr>
@@ -11763,7 +14193,7 @@
                     <a:p>
                       <a:pPr algn="ctr"/>
                       <a:r>
-                        <a:rPr lang="en-US">
+                        <a:rPr lang="en-US" sz="1800">
                           <a:latin typeface="Times New Roman" panose="02020603050405020304" pitchFamily="18" charset="0"/>
                           <a:cs typeface="Times New Roman" panose="02020603050405020304" pitchFamily="18" charset="0"/>
                         </a:rPr>
@@ -11817,7 +14247,7 @@
                     <a:p>
                       <a:pPr algn="ctr"/>
                       <a:r>
-                        <a:rPr lang="en-US">
+                        <a:rPr lang="en-US" sz="1800">
                           <a:latin typeface="Times New Roman" panose="02020603050405020304" pitchFamily="18" charset="0"/>
                           <a:cs typeface="Times New Roman" panose="02020603050405020304" pitchFamily="18" charset="0"/>
                         </a:rPr>
@@ -11870,7 +14300,7 @@
                   </a:ext>
                 </a:extLst>
               </a:tr>
-              <a:tr h="718457">
+              <a:tr h="877480">
                 <a:tc>
                   <a:txBody>
                     <a:bodyPr/>
@@ -11878,7 +14308,7 @@
                     <a:p>
                       <a:pPr algn="ctr"/>
                       <a:r>
-                        <a:rPr lang="en-US" i="1">
+                        <a:rPr lang="en-US" sz="1800" i="1">
                           <a:latin typeface="Times New Roman" panose="02020603050405020304" pitchFamily="18" charset="0"/>
                           <a:cs typeface="Times New Roman" panose="02020603050405020304" pitchFamily="18" charset="0"/>
                         </a:rPr>
@@ -11932,7 +14362,7 @@
                     <a:p>
                       <a:pPr algn="ctr"/>
                       <a:r>
-                        <a:rPr lang="en-US">
+                        <a:rPr lang="en-US" sz="1800">
                           <a:latin typeface="Times New Roman" panose="02020603050405020304" pitchFamily="18" charset="0"/>
                           <a:cs typeface="Times New Roman" panose="02020603050405020304" pitchFamily="18" charset="0"/>
                         </a:rPr>
@@ -11986,7 +14416,7 @@
                     <a:p>
                       <a:pPr algn="ctr"/>
                       <a:r>
-                        <a:rPr lang="en-US">
+                        <a:rPr lang="en-US" sz="1800">
                           <a:latin typeface="Times New Roman" panose="02020603050405020304" pitchFamily="18" charset="0"/>
                           <a:cs typeface="Times New Roman" panose="02020603050405020304" pitchFamily="18" charset="0"/>
                         </a:rPr>
@@ -12040,7 +14470,7 @@
                     <a:p>
                       <a:pPr algn="ctr"/>
                       <a:r>
-                        <a:rPr lang="en-US">
+                        <a:rPr lang="en-US" sz="1800">
                           <a:latin typeface="Times New Roman" panose="02020603050405020304" pitchFamily="18" charset="0"/>
                           <a:cs typeface="Times New Roman" panose="02020603050405020304" pitchFamily="18" charset="0"/>
                         </a:rPr>
@@ -12094,7 +14524,7 @@
                     <a:p>
                       <a:pPr algn="ctr"/>
                       <a:r>
-                        <a:rPr lang="en-US">
+                        <a:rPr lang="en-US" sz="1800">
                           <a:latin typeface="Times New Roman" panose="02020603050405020304" pitchFamily="18" charset="0"/>
                           <a:cs typeface="Times New Roman" panose="02020603050405020304" pitchFamily="18" charset="0"/>
                         </a:rPr>
@@ -12148,7 +14578,7 @@
                     <a:p>
                       <a:pPr algn="ctr"/>
                       <a:r>
-                        <a:rPr lang="en-US">
+                        <a:rPr lang="en-US" sz="1800">
                           <a:latin typeface="Times New Roman" panose="02020603050405020304" pitchFamily="18" charset="0"/>
                           <a:cs typeface="Times New Roman" panose="02020603050405020304" pitchFamily="18" charset="0"/>
                         </a:rPr>
@@ -12201,7 +14631,7 @@
                   </a:ext>
                 </a:extLst>
               </a:tr>
-              <a:tr h="718457">
+              <a:tr h="653358">
                 <a:tc>
                   <a:txBody>
                     <a:bodyPr/>
@@ -12209,7 +14639,7 @@
                     <a:p>
                       <a:pPr algn="ctr"/>
                       <a:r>
-                        <a:rPr lang="en-US" i="1">
+                        <a:rPr lang="en-US" sz="1800" i="1">
                           <a:latin typeface="Times New Roman" panose="02020603050405020304" pitchFamily="18" charset="0"/>
                           <a:cs typeface="Times New Roman" panose="02020603050405020304" pitchFamily="18" charset="0"/>
                         </a:rPr>
@@ -12263,7 +14693,7 @@
                     <a:p>
                       <a:pPr algn="ctr"/>
                       <a:r>
-                        <a:rPr lang="en-US">
+                        <a:rPr lang="en-US" sz="1800">
                           <a:latin typeface="Times New Roman" panose="02020603050405020304" pitchFamily="18" charset="0"/>
                           <a:cs typeface="Times New Roman" panose="02020603050405020304" pitchFamily="18" charset="0"/>
                         </a:rPr>
@@ -12317,7 +14747,7 @@
                     <a:p>
                       <a:pPr algn="ctr"/>
                       <a:r>
-                        <a:rPr lang="en-US">
+                        <a:rPr lang="en-US" sz="1800">
                           <a:latin typeface="Times New Roman" panose="02020603050405020304" pitchFamily="18" charset="0"/>
                           <a:cs typeface="Times New Roman" panose="02020603050405020304" pitchFamily="18" charset="0"/>
                         </a:rPr>
@@ -12371,7 +14801,7 @@
                     <a:p>
                       <a:pPr algn="ctr"/>
                       <a:r>
-                        <a:rPr lang="en-US">
+                        <a:rPr lang="en-US" sz="1800">
                           <a:latin typeface="Times New Roman" panose="02020603050405020304" pitchFamily="18" charset="0"/>
                           <a:cs typeface="Times New Roman" panose="02020603050405020304" pitchFamily="18" charset="0"/>
                         </a:rPr>
@@ -12425,7 +14855,7 @@
                     <a:p>
                       <a:pPr algn="ctr"/>
                       <a:r>
-                        <a:rPr lang="en-US">
+                        <a:rPr lang="en-US" sz="1800">
                           <a:latin typeface="Times New Roman" panose="02020603050405020304" pitchFamily="18" charset="0"/>
                           <a:cs typeface="Times New Roman" panose="02020603050405020304" pitchFamily="18" charset="0"/>
                         </a:rPr>
@@ -12479,7 +14909,7 @@
                     <a:p>
                       <a:pPr algn="ctr"/>
                       <a:r>
-                        <a:rPr lang="en-US">
+                        <a:rPr lang="en-US" sz="1800">
                           <a:latin typeface="Times New Roman" panose="02020603050405020304" pitchFamily="18" charset="0"/>
                           <a:cs typeface="Times New Roman" panose="02020603050405020304" pitchFamily="18" charset="0"/>
                         </a:rPr>
@@ -12620,14 +15050,14 @@
           <p:nvPr>
             <p:extLst>
               <p:ext uri="{D42A27DB-BD31-4B8C-83A1-F6EECF244321}">
-                <p14:modId xmlns:p14="http://schemas.microsoft.com/office/powerpoint/2010/main" val="1151630662"/>
+                <p14:modId xmlns:p14="http://schemas.microsoft.com/office/powerpoint/2010/main" val="2614682397"/>
               </p:ext>
             </p:extLst>
           </p:nvPr>
         </p:nvGraphicFramePr>
         <p:xfrm>
-          <a:off x="0" y="1363244"/>
-          <a:ext cx="12192000" cy="4131512"/>
+          <a:off x="112985" y="1946836"/>
+          <a:ext cx="11966030" cy="3933971"/>
         </p:xfrm>
         <a:graphic>
           <a:graphicData uri="http://schemas.openxmlformats.org/drawingml/2006/table">
@@ -12636,35 +15066,35 @@
                 <a:tableStyleId>{3B4B98B0-60AC-42C2-AFA5-B58CD77FA1E5}</a:tableStyleId>
               </a:tblPr>
               <a:tblGrid>
-                <a:gridCol w="2438400">
+                <a:gridCol w="2393206">
                   <a:extLst>
                     <a:ext uri="{9D8B030D-6E8A-4147-A177-3AD203B41FA5}">
                       <a16:colId xmlns:a16="http://schemas.microsoft.com/office/drawing/2014/main" val="693161458"/>
                     </a:ext>
                   </a:extLst>
                 </a:gridCol>
-                <a:gridCol w="2438400">
+                <a:gridCol w="2393206">
                   <a:extLst>
                     <a:ext uri="{9D8B030D-6E8A-4147-A177-3AD203B41FA5}">
                       <a16:colId xmlns:a16="http://schemas.microsoft.com/office/drawing/2014/main" val="3518794994"/>
                     </a:ext>
                   </a:extLst>
                 </a:gridCol>
-                <a:gridCol w="2438400">
+                <a:gridCol w="2393206">
                   <a:extLst>
                     <a:ext uri="{9D8B030D-6E8A-4147-A177-3AD203B41FA5}">
                       <a16:colId xmlns:a16="http://schemas.microsoft.com/office/drawing/2014/main" val="1480643193"/>
                     </a:ext>
                   </a:extLst>
                 </a:gridCol>
-                <a:gridCol w="2438400">
+                <a:gridCol w="2393206">
                   <a:extLst>
                     <a:ext uri="{9D8B030D-6E8A-4147-A177-3AD203B41FA5}">
                       <a16:colId xmlns:a16="http://schemas.microsoft.com/office/drawing/2014/main" val="4262199494"/>
                     </a:ext>
                   </a:extLst>
                 </a:gridCol>
-                <a:gridCol w="2438400">
+                <a:gridCol w="2393206">
                   <a:extLst>
                     <a:ext uri="{9D8B030D-6E8A-4147-A177-3AD203B41FA5}">
                       <a16:colId xmlns:a16="http://schemas.microsoft.com/office/drawing/2014/main" val="2223393053"/>
@@ -12672,7 +15102,7 @@
                   </a:extLst>
                 </a:gridCol>
               </a:tblGrid>
-              <a:tr h="606845">
+              <a:tr h="577830">
                 <a:tc>
                   <a:txBody>
                     <a:bodyPr/>
@@ -12680,7 +15110,7 @@
                     <a:p>
                       <a:pPr algn="ctr"/>
                       <a:r>
-                        <a:rPr lang="en-US" sz="2400">
+                        <a:rPr lang="en-US" sz="2000">
                           <a:latin typeface="Times New Roman" panose="02020603050405020304" pitchFamily="18" charset="0"/>
                           <a:cs typeface="Times New Roman" panose="02020603050405020304" pitchFamily="18" charset="0"/>
                         </a:rPr>
@@ -12734,7 +15164,7 @@
                     <a:p>
                       <a:pPr algn="ctr"/>
                       <a:r>
-                        <a:rPr lang="en-US" sz="2400">
+                        <a:rPr lang="en-US" sz="2000">
                           <a:latin typeface="Times New Roman" panose="02020603050405020304" pitchFamily="18" charset="0"/>
                           <a:cs typeface="Times New Roman" panose="02020603050405020304" pitchFamily="18" charset="0"/>
                         </a:rPr>
@@ -12788,7 +15218,7 @@
                     <a:p>
                       <a:pPr algn="ctr"/>
                       <a:r>
-                        <a:rPr lang="en-US" sz="2400">
+                        <a:rPr lang="en-US" sz="2000">
                           <a:latin typeface="Times New Roman" panose="02020603050405020304" pitchFamily="18" charset="0"/>
                           <a:cs typeface="Times New Roman" panose="02020603050405020304" pitchFamily="18" charset="0"/>
                         </a:rPr>
@@ -12842,7 +15272,7 @@
                     <a:p>
                       <a:pPr algn="ctr"/>
                       <a:r>
-                        <a:rPr lang="en-US" sz="2400">
+                        <a:rPr lang="en-US" sz="2000">
                           <a:latin typeface="Times New Roman" panose="02020603050405020304" pitchFamily="18" charset="0"/>
                           <a:cs typeface="Times New Roman" panose="02020603050405020304" pitchFamily="18" charset="0"/>
                         </a:rPr>
@@ -12896,7 +15326,7 @@
                     <a:p>
                       <a:pPr algn="ctr"/>
                       <a:r>
-                        <a:rPr lang="en-US" sz="2400">
+                        <a:rPr lang="en-US" sz="2000">
                           <a:latin typeface="Times New Roman" panose="02020603050405020304" pitchFamily="18" charset="0"/>
                           <a:cs typeface="Times New Roman" panose="02020603050405020304" pitchFamily="18" charset="0"/>
                         </a:rPr>
@@ -12949,7 +15379,7 @@
                   </a:ext>
                 </a:extLst>
               </a:tr>
-              <a:tr h="606845">
+              <a:tr h="577830">
                 <a:tc>
                   <a:txBody>
                     <a:bodyPr/>
@@ -12957,7 +15387,7 @@
                     <a:p>
                       <a:pPr algn="ctr"/>
                       <a:r>
-                        <a:rPr lang="en-US" sz="2400" b="1">
+                        <a:rPr lang="en-US" sz="2000" b="1">
                           <a:latin typeface="Times New Roman" panose="02020603050405020304" pitchFamily="18" charset="0"/>
                           <a:cs typeface="Times New Roman" panose="02020603050405020304" pitchFamily="18" charset="0"/>
                         </a:rPr>
@@ -13011,7 +15441,7 @@
                     <a:p>
                       <a:pPr algn="ctr"/>
                       <a:r>
-                        <a:rPr lang="en-US" sz="2400">
+                        <a:rPr lang="en-US" sz="2000">
                           <a:latin typeface="Times New Roman" panose="02020603050405020304" pitchFamily="18" charset="0"/>
                           <a:cs typeface="Times New Roman" panose="02020603050405020304" pitchFamily="18" charset="0"/>
                         </a:rPr>
@@ -13065,7 +15495,7 @@
                     <a:p>
                       <a:pPr algn="ctr"/>
                       <a:r>
-                        <a:rPr lang="en-US" sz="2400">
+                        <a:rPr lang="en-US" sz="2000">
                           <a:latin typeface="Times New Roman" panose="02020603050405020304" pitchFamily="18" charset="0"/>
                           <a:cs typeface="Times New Roman" panose="02020603050405020304" pitchFamily="18" charset="0"/>
                         </a:rPr>
@@ -13119,7 +15549,7 @@
                     <a:p>
                       <a:pPr algn="ctr"/>
                       <a:r>
-                        <a:rPr lang="en-US" sz="2400">
+                        <a:rPr lang="en-US" sz="2000">
                           <a:latin typeface="Times New Roman" panose="02020603050405020304" pitchFamily="18" charset="0"/>
                           <a:cs typeface="Times New Roman" panose="02020603050405020304" pitchFamily="18" charset="0"/>
                         </a:rPr>
@@ -13173,7 +15603,7 @@
                     <a:p>
                       <a:pPr algn="ctr"/>
                       <a:r>
-                        <a:rPr lang="en-US" sz="2400">
+                        <a:rPr lang="en-US" sz="2000">
                           <a:latin typeface="Times New Roman" panose="02020603050405020304" pitchFamily="18" charset="0"/>
                           <a:cs typeface="Times New Roman" panose="02020603050405020304" pitchFamily="18" charset="0"/>
                         </a:rPr>
@@ -13226,7 +15656,7 @@
                   </a:ext>
                 </a:extLst>
               </a:tr>
-              <a:tr h="606845">
+              <a:tr h="783611">
                 <a:tc>
                   <a:txBody>
                     <a:bodyPr/>
@@ -13234,7 +15664,7 @@
                     <a:p>
                       <a:pPr algn="ctr"/>
                       <a:r>
-                        <a:rPr lang="en-US" sz="2400" b="1">
+                        <a:rPr lang="en-US" sz="2000" b="1">
                           <a:latin typeface="Times New Roman" panose="02020603050405020304" pitchFamily="18" charset="0"/>
                           <a:cs typeface="Times New Roman" panose="02020603050405020304" pitchFamily="18" charset="0"/>
                         </a:rPr>
@@ -13244,7 +15674,7 @@
                     <a:p>
                       <a:pPr algn="ctr"/>
                       <a:r>
-                        <a:rPr lang="en-US" sz="2400" b="1">
+                        <a:rPr lang="en-US" sz="2000" b="1">
                           <a:latin typeface="Times New Roman" panose="02020603050405020304" pitchFamily="18" charset="0"/>
                           <a:cs typeface="Times New Roman" panose="02020603050405020304" pitchFamily="18" charset="0"/>
                         </a:rPr>
@@ -13298,7 +15728,7 @@
                     <a:p>
                       <a:pPr algn="ctr"/>
                       <a:r>
-                        <a:rPr lang="en-US" sz="2400">
+                        <a:rPr lang="en-US" sz="2000">
                           <a:latin typeface="Times New Roman" panose="02020603050405020304" pitchFamily="18" charset="0"/>
                           <a:cs typeface="Times New Roman" panose="02020603050405020304" pitchFamily="18" charset="0"/>
                         </a:rPr>
@@ -13352,7 +15782,7 @@
                     <a:p>
                       <a:pPr algn="ctr"/>
                       <a:r>
-                        <a:rPr lang="en-US" sz="2400">
+                        <a:rPr lang="en-US" sz="2000">
                           <a:latin typeface="Times New Roman" panose="02020603050405020304" pitchFamily="18" charset="0"/>
                           <a:cs typeface="Times New Roman" panose="02020603050405020304" pitchFamily="18" charset="0"/>
                         </a:rPr>
@@ -13406,7 +15836,7 @@
                     <a:p>
                       <a:pPr algn="ctr"/>
                       <a:r>
-                        <a:rPr lang="en-US" sz="2400">
+                        <a:rPr lang="en-US" sz="2000">
                           <a:latin typeface="Times New Roman" panose="02020603050405020304" pitchFamily="18" charset="0"/>
                           <a:cs typeface="Times New Roman" panose="02020603050405020304" pitchFamily="18" charset="0"/>
                         </a:rPr>
@@ -13460,7 +15890,7 @@
                     <a:p>
                       <a:pPr algn="ctr"/>
                       <a:r>
-                        <a:rPr lang="en-US" sz="2400">
+                        <a:rPr lang="en-US" sz="2000">
                           <a:latin typeface="Times New Roman" panose="02020603050405020304" pitchFamily="18" charset="0"/>
                           <a:cs typeface="Times New Roman" panose="02020603050405020304" pitchFamily="18" charset="0"/>
                         </a:rPr>
@@ -13513,7 +15943,7 @@
                   </a:ext>
                 </a:extLst>
               </a:tr>
-              <a:tr h="1047431">
+              <a:tr h="997350">
                 <a:tc>
                   <a:txBody>
                     <a:bodyPr/>
@@ -13521,7 +15951,7 @@
                     <a:p>
                       <a:pPr algn="ctr"/>
                       <a:r>
-                        <a:rPr lang="en-US" sz="2400" b="1">
+                        <a:rPr lang="en-US" sz="2000" b="1">
                           <a:latin typeface="Times New Roman" panose="02020603050405020304" pitchFamily="18" charset="0"/>
                           <a:cs typeface="Times New Roman" panose="02020603050405020304" pitchFamily="18" charset="0"/>
                         </a:rPr>
@@ -13575,7 +16005,7 @@
                     <a:p>
                       <a:pPr algn="ctr"/>
                       <a:r>
-                        <a:rPr lang="en-US" sz="2400">
+                        <a:rPr lang="en-US" sz="2000">
                           <a:latin typeface="Times New Roman" panose="02020603050405020304" pitchFamily="18" charset="0"/>
                           <a:cs typeface="Times New Roman" panose="02020603050405020304" pitchFamily="18" charset="0"/>
                         </a:rPr>
@@ -13629,7 +16059,7 @@
                     <a:p>
                       <a:pPr algn="ctr"/>
                       <a:r>
-                        <a:rPr lang="en-US" sz="2400">
+                        <a:rPr lang="en-US" sz="2000">
                           <a:latin typeface="Times New Roman" panose="02020603050405020304" pitchFamily="18" charset="0"/>
                           <a:cs typeface="Times New Roman" panose="02020603050405020304" pitchFamily="18" charset="0"/>
                         </a:rPr>
@@ -13683,7 +16113,7 @@
                     <a:p>
                       <a:pPr algn="ctr"/>
                       <a:r>
-                        <a:rPr lang="en-US" sz="2400">
+                        <a:rPr lang="en-US" sz="2000">
                           <a:latin typeface="Times New Roman" panose="02020603050405020304" pitchFamily="18" charset="0"/>
                           <a:cs typeface="Times New Roman" panose="02020603050405020304" pitchFamily="18" charset="0"/>
                         </a:rPr>
@@ -13737,7 +16167,7 @@
                     <a:p>
                       <a:pPr algn="ctr"/>
                       <a:r>
-                        <a:rPr lang="en-US" sz="2400">
+                        <a:rPr lang="en-US" sz="2000">
                           <a:latin typeface="Times New Roman" panose="02020603050405020304" pitchFamily="18" charset="0"/>
                           <a:cs typeface="Times New Roman" panose="02020603050405020304" pitchFamily="18" charset="0"/>
                         </a:rPr>
@@ -13790,7 +16220,7 @@
                   </a:ext>
                 </a:extLst>
               </a:tr>
-              <a:tr h="1047431">
+              <a:tr h="997350">
                 <a:tc>
                   <a:txBody>
                     <a:bodyPr/>
@@ -13798,7 +16228,7 @@
                     <a:p>
                       <a:pPr algn="ctr"/>
                       <a:r>
-                        <a:rPr lang="en-US" sz="2400" b="1">
+                        <a:rPr lang="en-US" sz="2000" b="1">
                           <a:latin typeface="Times New Roman" panose="02020603050405020304" pitchFamily="18" charset="0"/>
                           <a:cs typeface="Times New Roman" panose="02020603050405020304" pitchFamily="18" charset="0"/>
                         </a:rPr>
@@ -13852,7 +16282,7 @@
                     <a:p>
                       <a:pPr algn="ctr"/>
                       <a:r>
-                        <a:rPr lang="en-US" sz="2400">
+                        <a:rPr lang="en-US" sz="2000">
                           <a:latin typeface="Times New Roman" panose="02020603050405020304" pitchFamily="18" charset="0"/>
                           <a:cs typeface="Times New Roman" panose="02020603050405020304" pitchFamily="18" charset="0"/>
                         </a:rPr>
@@ -13906,7 +16336,7 @@
                     <a:p>
                       <a:pPr algn="ctr"/>
                       <a:r>
-                        <a:rPr lang="en-US" sz="2400">
+                        <a:rPr lang="en-US" sz="2000">
                           <a:latin typeface="Times New Roman" panose="02020603050405020304" pitchFamily="18" charset="0"/>
                           <a:cs typeface="Times New Roman" panose="02020603050405020304" pitchFamily="18" charset="0"/>
                         </a:rPr>
@@ -13960,7 +16390,7 @@
                     <a:p>
                       <a:pPr algn="ctr"/>
                       <a:r>
-                        <a:rPr lang="en-US" sz="2400">
+                        <a:rPr lang="en-US" sz="2000">
                           <a:latin typeface="Times New Roman" panose="02020603050405020304" pitchFamily="18" charset="0"/>
                           <a:cs typeface="Times New Roman" panose="02020603050405020304" pitchFamily="18" charset="0"/>
                         </a:rPr>
@@ -14014,7 +16444,7 @@
                     <a:p>
                       <a:pPr algn="ctr"/>
                       <a:r>
-                        <a:rPr lang="en-US" sz="2400">
+                        <a:rPr lang="en-US" sz="2000">
                           <a:latin typeface="Times New Roman" panose="02020603050405020304" pitchFamily="18" charset="0"/>
                           <a:cs typeface="Times New Roman" panose="02020603050405020304" pitchFamily="18" charset="0"/>
                         </a:rPr>
@@ -14153,14 +16583,14 @@
           <p:nvPr>
             <p:extLst>
               <p:ext uri="{D42A27DB-BD31-4B8C-83A1-F6EECF244321}">
-                <p14:modId xmlns:p14="http://schemas.microsoft.com/office/powerpoint/2010/main" val="3248006663"/>
+                <p14:modId xmlns:p14="http://schemas.microsoft.com/office/powerpoint/2010/main" val="587475289"/>
               </p:ext>
             </p:extLst>
           </p:nvPr>
         </p:nvGraphicFramePr>
         <p:xfrm>
-          <a:off x="0" y="1597425"/>
-          <a:ext cx="12192000" cy="4735206"/>
+          <a:off x="128752" y="1797268"/>
+          <a:ext cx="11934495" cy="4519593"/>
         </p:xfrm>
         <a:graphic>
           <a:graphicData uri="http://schemas.openxmlformats.org/drawingml/2006/table">
@@ -14169,35 +16599,35 @@
                 <a:tableStyleId>{3B4B98B0-60AC-42C2-AFA5-B58CD77FA1E5}</a:tableStyleId>
               </a:tblPr>
               <a:tblGrid>
-                <a:gridCol w="2438400">
+                <a:gridCol w="2386899">
                   <a:extLst>
                     <a:ext uri="{9D8B030D-6E8A-4147-A177-3AD203B41FA5}">
                       <a16:colId xmlns:a16="http://schemas.microsoft.com/office/drawing/2014/main" val="295268228"/>
                     </a:ext>
                   </a:extLst>
                 </a:gridCol>
-                <a:gridCol w="2438400">
+                <a:gridCol w="2386899">
                   <a:extLst>
                     <a:ext uri="{9D8B030D-6E8A-4147-A177-3AD203B41FA5}">
                       <a16:colId xmlns:a16="http://schemas.microsoft.com/office/drawing/2014/main" val="3669753581"/>
                     </a:ext>
                   </a:extLst>
                 </a:gridCol>
-                <a:gridCol w="2438400">
+                <a:gridCol w="2386899">
                   <a:extLst>
                     <a:ext uri="{9D8B030D-6E8A-4147-A177-3AD203B41FA5}">
                       <a16:colId xmlns:a16="http://schemas.microsoft.com/office/drawing/2014/main" val="3550204363"/>
                     </a:ext>
                   </a:extLst>
                 </a:gridCol>
-                <a:gridCol w="2438400">
+                <a:gridCol w="2386899">
                   <a:extLst>
                     <a:ext uri="{9D8B030D-6E8A-4147-A177-3AD203B41FA5}">
                       <a16:colId xmlns:a16="http://schemas.microsoft.com/office/drawing/2014/main" val="3573652473"/>
                     </a:ext>
                   </a:extLst>
                 </a:gridCol>
-                <a:gridCol w="2438400">
+                <a:gridCol w="2386899">
                   <a:extLst>
                     <a:ext uri="{9D8B030D-6E8A-4147-A177-3AD203B41FA5}">
                       <a16:colId xmlns:a16="http://schemas.microsoft.com/office/drawing/2014/main" val="1885265825"/>
@@ -14205,7 +16635,7 @@
                   </a:extLst>
                 </a:gridCol>
               </a:tblGrid>
-              <a:tr h="526134">
+              <a:tr h="502177">
                 <a:tc>
                   <a:txBody>
                     <a:bodyPr/>
@@ -14482,7 +16912,7 @@
                   </a:ext>
                 </a:extLst>
               </a:tr>
-              <a:tr h="526134">
+              <a:tr h="502177">
                 <a:tc>
                   <a:txBody>
                     <a:bodyPr/>
@@ -14759,7 +17189,7 @@
                   </a:ext>
                 </a:extLst>
               </a:tr>
-              <a:tr h="526134">
+              <a:tr h="502177">
                 <a:tc>
                   <a:txBody>
                     <a:bodyPr/>
@@ -15036,7 +17466,7 @@
                   </a:ext>
                 </a:extLst>
               </a:tr>
-              <a:tr h="526134">
+              <a:tr h="502177">
                 <a:tc>
                   <a:txBody>
                     <a:bodyPr/>
@@ -15313,7 +17743,7 @@
                   </a:ext>
                 </a:extLst>
               </a:tr>
-              <a:tr h="526134">
+              <a:tr h="502177">
                 <a:tc>
                   <a:txBody>
                     <a:bodyPr/>
@@ -15590,7 +18020,7 @@
                   </a:ext>
                 </a:extLst>
               </a:tr>
-              <a:tr h="526134">
+              <a:tr h="502177">
                 <a:tc>
                   <a:txBody>
                     <a:bodyPr/>
@@ -15867,7 +18297,7 @@
                   </a:ext>
                 </a:extLst>
               </a:tr>
-              <a:tr h="526134">
+              <a:tr h="502177">
                 <a:tc>
                   <a:txBody>
                     <a:bodyPr/>
@@ -16144,7 +18574,7 @@
                   </a:ext>
                 </a:extLst>
               </a:tr>
-              <a:tr h="526134">
+              <a:tr h="502177">
                 <a:tc>
                   <a:txBody>
                     <a:bodyPr/>
@@ -16421,7 +18851,7 @@
                   </a:ext>
                 </a:extLst>
               </a:tr>
-              <a:tr h="526134">
+              <a:tr h="502177">
                 <a:tc>
                   <a:txBody>
                     <a:bodyPr/>
@@ -16934,6 +19364,14 @@
 <file path=ppt/slides/slide21.xml><?xml version="1.0" encoding="utf-8"?>
 <p:sld xmlns:a="http://schemas.openxmlformats.org/drawingml/2006/main" xmlns:r="http://schemas.openxmlformats.org/officeDocument/2006/relationships" xmlns:p="http://schemas.openxmlformats.org/presentationml/2006/main">
   <p:cSld>
+    <p:bg>
+      <p:bgPr>
+        <a:solidFill>
+          <a:schemeClr val="bg1"/>
+        </a:solidFill>
+        <a:effectLst/>
+      </p:bgPr>
+    </p:bg>
     <p:spTree>
       <p:nvGrpSpPr>
         <p:cNvPr id="1" name="">
@@ -16956,6 +19394,98 @@
       </p:grpSpPr>
       <p:sp>
         <p:nvSpPr>
+          <p:cNvPr id="10" name="Rectangle 9">
+            <a:extLst>
+              <a:ext uri="{FF2B5EF4-FFF2-40B4-BE49-F238E27FC236}">
+                <a16:creationId xmlns:a16="http://schemas.microsoft.com/office/drawing/2014/main" id="{4C608BEB-860E-4094-8511-78603564A75E}"/>
+              </a:ext>
+              <a:ext uri="{C183D7F6-B498-43B3-948B-1728B52AA6E4}">
+                <adec:decorative xmlns:adec="http://schemas.microsoft.com/office/drawing/2017/decorative" val="1"/>
+              </a:ext>
+            </a:extLst>
+          </p:cNvPr>
+          <p:cNvSpPr>
+            <a:spLocks noGrp="1" noRot="1" noChangeAspect="1" noMove="1" noResize="1" noEditPoints="1" noAdjustHandles="1" noChangeArrowheads="1" noChangeShapeType="1" noTextEdit="1"/>
+          </p:cNvSpPr>
+          <p:nvPr>
+            <p:extLst>
+              <p:ext uri="{386F3935-93C4-4BCD-93E2-E3B085C9AB24}">
+                <p16:designElem xmlns:p16="http://schemas.microsoft.com/office/powerpoint/2015/main" val="1"/>
+              </p:ext>
+            </p:extLst>
+          </p:nvPr>
+        </p:nvSpPr>
+        <p:spPr>
+          <a:xfrm>
+            <a:off x="0" y="0"/>
+            <a:ext cx="4059050" cy="6858000"/>
+          </a:xfrm>
+          <a:prstGeom prst="rect">
+            <a:avLst/>
+          </a:prstGeom>
+          <a:solidFill>
+            <a:srgbClr val="404040"/>
+          </a:solidFill>
+          <a:ln>
+            <a:noFill/>
+          </a:ln>
+        </p:spPr>
+        <p:style>
+          <a:lnRef idx="2">
+            <a:schemeClr val="accent1">
+              <a:shade val="50000"/>
+            </a:schemeClr>
+          </a:lnRef>
+          <a:fillRef idx="1">
+            <a:schemeClr val="accent1"/>
+          </a:fillRef>
+          <a:effectRef idx="0">
+            <a:schemeClr val="accent1"/>
+          </a:effectRef>
+          <a:fontRef idx="minor">
+            <a:schemeClr val="lt1"/>
+          </a:fontRef>
+        </p:style>
+        <p:txBody>
+          <a:bodyPr rtlCol="0" anchor="ctr"/>
+          <a:lstStyle/>
+          <a:p>
+            <a:pPr marL="0" marR="0" lvl="0" indent="0" algn="ctr" defTabSz="914400" rtl="0" eaLnBrk="1" fontAlgn="auto" latinLnBrk="0" hangingPunct="1">
+              <a:lnSpc>
+                <a:spcPct val="100000"/>
+              </a:lnSpc>
+              <a:spcBef>
+                <a:spcPts val="0"/>
+              </a:spcBef>
+              <a:spcAft>
+                <a:spcPts val="0"/>
+              </a:spcAft>
+              <a:buClrTx/>
+              <a:buSzTx/>
+              <a:buFontTx/>
+              <a:buNone/>
+              <a:tabLst/>
+              <a:defRPr/>
+            </a:pPr>
+            <a:endParaRPr kumimoji="0" lang="en-US" sz="1800" b="0" i="0" u="none" strike="noStrike" kern="1200" cap="none" spc="0" normalizeH="0" baseline="0" noProof="0">
+              <a:ln>
+                <a:noFill/>
+              </a:ln>
+              <a:solidFill>
+                <a:prstClr val="white"/>
+              </a:solidFill>
+              <a:effectLst/>
+              <a:uLnTx/>
+              <a:uFillTx/>
+              <a:latin typeface="Calibri" panose="020F0502020204030204"/>
+              <a:ea typeface="+mn-ea"/>
+              <a:cs typeface="+mn-cs"/>
+            </a:endParaRPr>
+          </a:p>
+        </p:txBody>
+      </p:sp>
+      <p:sp>
+        <p:nvSpPr>
           <p:cNvPr id="3" name="Title 2">
             <a:extLst>
               <a:ext uri="{FF2B5EF4-FFF2-40B4-BE49-F238E27FC236}">
@@ -16970,14 +19500,236 @@
             <p:ph type="title"/>
           </p:nvPr>
         </p:nvSpPr>
-        <p:spPr/>
+        <p:spPr>
+          <a:xfrm>
+            <a:off x="425669" y="1247078"/>
+            <a:ext cx="3311720" cy="4363844"/>
+          </a:xfrm>
+        </p:spPr>
         <p:txBody>
-          <a:bodyPr/>
+          <a:bodyPr anchor="ctr">
+            <a:normAutofit/>
+          </a:bodyPr>
           <a:lstStyle/>
           <a:p>
             <a:r>
-              <a:rPr lang="en-US"/>
+              <a:rPr lang="en-US" sz="4000">
+                <a:solidFill>
+                  <a:srgbClr val="FFFFFF"/>
+                </a:solidFill>
+                <a:latin typeface="Times New Roman" panose="02020603050405020304" pitchFamily="18" charset="0"/>
+                <a:cs typeface="Times New Roman" panose="02020603050405020304" pitchFamily="18" charset="0"/>
+              </a:rPr>
               <a:t>Các chức năng của hệ thống</a:t>
+            </a:r>
+          </a:p>
+        </p:txBody>
+      </p:sp>
+      <p:sp>
+        <p:nvSpPr>
+          <p:cNvPr id="4" name="Content Placeholder 3">
+            <a:extLst>
+              <a:ext uri="{FF2B5EF4-FFF2-40B4-BE49-F238E27FC236}">
+                <a16:creationId xmlns:a16="http://schemas.microsoft.com/office/drawing/2014/main" id="{C12AB956-248D-4469-5257-C9731AE3A1E5}"/>
+              </a:ext>
+            </a:extLst>
+          </p:cNvPr>
+          <p:cNvSpPr>
+            <a:spLocks noGrp="1"/>
+          </p:cNvSpPr>
+          <p:nvPr>
+            <p:ph sz="half" idx="1"/>
+          </p:nvPr>
+        </p:nvSpPr>
+        <p:spPr>
+          <a:xfrm>
+            <a:off x="4380855" y="1412489"/>
+            <a:ext cx="3427283" cy="4363844"/>
+          </a:xfrm>
+        </p:spPr>
+        <p:txBody>
+          <a:bodyPr anchor="t">
+            <a:normAutofit/>
+          </a:bodyPr>
+          <a:lstStyle/>
+          <a:p>
+            <a:pPr marL="0" indent="0">
+              <a:buNone/>
+            </a:pPr>
+            <a:r>
+              <a:rPr lang="en-US" sz="2400" b="1">
+                <a:latin typeface="Times New Roman" panose="02020603050405020304" pitchFamily="18" charset="0"/>
+                <a:cs typeface="Times New Roman" panose="02020603050405020304" pitchFamily="18" charset="0"/>
+              </a:rPr>
+              <a:t>Trò chuyện</a:t>
+            </a:r>
+          </a:p>
+          <a:p>
+            <a:r>
+              <a:rPr lang="en-US" sz="2000">
+                <a:latin typeface="Times New Roman" panose="02020603050405020304" pitchFamily="18" charset="0"/>
+                <a:cs typeface="Times New Roman" panose="02020603050405020304" pitchFamily="18" charset="0"/>
+              </a:rPr>
+              <a:t>Trò chuyện văn bản</a:t>
+            </a:r>
+          </a:p>
+          <a:p>
+            <a:r>
+              <a:rPr lang="en-US" sz="2000">
+                <a:latin typeface="Times New Roman" panose="02020603050405020304" pitchFamily="18" charset="0"/>
+                <a:cs typeface="Times New Roman" panose="02020603050405020304" pitchFamily="18" charset="0"/>
+              </a:rPr>
+              <a:t>Trò chuyện thời gian thực</a:t>
+            </a:r>
+          </a:p>
+          <a:p>
+            <a:r>
+              <a:rPr lang="en-US" sz="2000">
+                <a:latin typeface="Times New Roman" panose="02020603050405020304" pitchFamily="18" charset="0"/>
+                <a:cs typeface="Times New Roman" panose="02020603050405020304" pitchFamily="18" charset="0"/>
+              </a:rPr>
+              <a:t>Khởi tạo luồng trò chuyện mới</a:t>
+            </a:r>
+          </a:p>
+          <a:p>
+            <a:r>
+              <a:rPr lang="en-US" sz="2000">
+                <a:latin typeface="Times New Roman" panose="02020603050405020304" pitchFamily="18" charset="0"/>
+                <a:cs typeface="Times New Roman" panose="02020603050405020304" pitchFamily="18" charset="0"/>
+              </a:rPr>
+              <a:t>Cài đặt tùy chọn luồng trò chuyện</a:t>
+            </a:r>
+          </a:p>
+          <a:p>
+            <a:r>
+              <a:rPr lang="en-US" sz="2000">
+                <a:latin typeface="Times New Roman" panose="02020603050405020304" pitchFamily="18" charset="0"/>
+                <a:cs typeface="Times New Roman" panose="02020603050405020304" pitchFamily="18" charset="0"/>
+              </a:rPr>
+              <a:t>Đánh giá phản hồi</a:t>
+            </a:r>
+          </a:p>
+        </p:txBody>
+      </p:sp>
+      <p:cxnSp>
+        <p:nvCxnSpPr>
+          <p:cNvPr id="12" name="Straight Connector 11">
+            <a:extLst>
+              <a:ext uri="{FF2B5EF4-FFF2-40B4-BE49-F238E27FC236}">
+                <a16:creationId xmlns:a16="http://schemas.microsoft.com/office/drawing/2014/main" id="{1F16A8D4-FE87-4604-88B2-394B5D1EB437}"/>
+              </a:ext>
+              <a:ext uri="{C183D7F6-B498-43B3-948B-1728B52AA6E4}">
+                <adec:decorative xmlns:adec="http://schemas.microsoft.com/office/drawing/2017/decorative" val="1"/>
+              </a:ext>
+            </a:extLst>
+          </p:cNvPr>
+          <p:cNvCxnSpPr>
+            <a:cxnSpLocks noGrp="1" noRot="1" noChangeAspect="1" noMove="1" noResize="1" noEditPoints="1" noAdjustHandles="1" noChangeArrowheads="1" noChangeShapeType="1"/>
+          </p:cNvCxnSpPr>
+          <p:nvPr>
+            <p:extLst>
+              <p:ext uri="{386F3935-93C4-4BCD-93E2-E3B085C9AB24}">
+                <p16:designElem xmlns:p16="http://schemas.microsoft.com/office/powerpoint/2015/main" val="1"/>
+              </p:ext>
+            </p:extLst>
+          </p:nvPr>
+        </p:nvCxnSpPr>
+        <p:spPr>
+          <a:xfrm>
+            <a:off x="8129871" y="1412488"/>
+            <a:ext cx="0" cy="3657600"/>
+          </a:xfrm>
+          <a:prstGeom prst="line">
+            <a:avLst/>
+          </a:prstGeom>
+          <a:ln w="12700">
+            <a:solidFill>
+              <a:schemeClr val="tx1">
+                <a:lumMod val="50000"/>
+                <a:lumOff val="50000"/>
+              </a:schemeClr>
+            </a:solidFill>
+          </a:ln>
+        </p:spPr>
+        <p:style>
+          <a:lnRef idx="1">
+            <a:schemeClr val="accent1"/>
+          </a:lnRef>
+          <a:fillRef idx="0">
+            <a:schemeClr val="accent1"/>
+          </a:fillRef>
+          <a:effectRef idx="0">
+            <a:schemeClr val="accent1"/>
+          </a:effectRef>
+          <a:fontRef idx="minor">
+            <a:schemeClr val="tx1"/>
+          </a:fontRef>
+        </p:style>
+      </p:cxnSp>
+      <p:sp>
+        <p:nvSpPr>
+          <p:cNvPr id="5" name="Content Placeholder 4">
+            <a:extLst>
+              <a:ext uri="{FF2B5EF4-FFF2-40B4-BE49-F238E27FC236}">
+                <a16:creationId xmlns:a16="http://schemas.microsoft.com/office/drawing/2014/main" id="{55376D5B-277F-09D7-AA5E-69FEF8D50F9C}"/>
+              </a:ext>
+            </a:extLst>
+          </p:cNvPr>
+          <p:cNvSpPr>
+            <a:spLocks noGrp="1"/>
+          </p:cNvSpPr>
+          <p:nvPr>
+            <p:ph sz="half" idx="2"/>
+          </p:nvPr>
+        </p:nvSpPr>
+        <p:spPr>
+          <a:xfrm>
+            <a:off x="8451604" y="1412489"/>
+            <a:ext cx="3197701" cy="4363844"/>
+          </a:xfrm>
+        </p:spPr>
+        <p:txBody>
+          <a:bodyPr anchor="t">
+            <a:normAutofit/>
+          </a:bodyPr>
+          <a:lstStyle/>
+          <a:p>
+            <a:pPr marL="0" indent="0">
+              <a:buNone/>
+            </a:pPr>
+            <a:r>
+              <a:rPr lang="en-US" sz="2400" b="1">
+                <a:latin typeface="Times New Roman" panose="02020603050405020304" pitchFamily="18" charset="0"/>
+                <a:cs typeface="Times New Roman" panose="02020603050405020304" pitchFamily="18" charset="0"/>
+              </a:rPr>
+              <a:t>Xác thực người dùng</a:t>
+            </a:r>
+          </a:p>
+          <a:p>
+            <a:r>
+              <a:rPr lang="en-US" sz="2000">
+                <a:latin typeface="Times New Roman" panose="02020603050405020304" pitchFamily="18" charset="0"/>
+                <a:cs typeface="Times New Roman" panose="02020603050405020304" pitchFamily="18" charset="0"/>
+              </a:rPr>
+              <a:t>Đăng nhập</a:t>
+            </a:r>
+          </a:p>
+          <a:p>
+            <a:r>
+              <a:rPr lang="en-US" sz="2000">
+                <a:latin typeface="Times New Roman" panose="02020603050405020304" pitchFamily="18" charset="0"/>
+                <a:cs typeface="Times New Roman" panose="02020603050405020304" pitchFamily="18" charset="0"/>
+              </a:rPr>
+              <a:t>Đăng ký</a:t>
+            </a:r>
+          </a:p>
+          <a:p>
+            <a:r>
+              <a:rPr lang="en-US" sz="2000">
+                <a:latin typeface="Times New Roman" panose="02020603050405020304" pitchFamily="18" charset="0"/>
+                <a:cs typeface="Times New Roman" panose="02020603050405020304" pitchFamily="18" charset="0"/>
+              </a:rPr>
+              <a:t>Đăng xuất</a:t>
             </a:r>
           </a:p>
         </p:txBody>
@@ -17032,7 +19784,7 @@
         </p:nvSpPr>
         <p:spPr>
           <a:xfrm>
-            <a:off x="2571750" y="2667000"/>
+            <a:off x="2114550" y="2651234"/>
             <a:ext cx="2916568" cy="369332"/>
           </a:xfrm>
           <a:prstGeom prst="rect">
@@ -17085,7 +19837,7 @@
                 <a:latin typeface="Times New Roman" panose="02020603050405020304" pitchFamily="18" charset="0"/>
                 <a:cs typeface="Times New Roman" panose="02020603050405020304" pitchFamily="18" charset="0"/>
               </a:rPr>
-              <a:t>Chức năng chat text</a:t>
+              <a:t>Triển khai chức năng chat text</a:t>
             </a:r>
           </a:p>
         </p:txBody>
@@ -17106,6 +19858,14 @@
 <file path=ppt/slides/slide23.xml><?xml version="1.0" encoding="utf-8"?>
 <p:sld xmlns:a="http://schemas.openxmlformats.org/drawingml/2006/main" xmlns:r="http://schemas.openxmlformats.org/officeDocument/2006/relationships" xmlns:p="http://schemas.openxmlformats.org/presentationml/2006/main">
   <p:cSld>
+    <p:bg>
+      <p:bgPr>
+        <a:solidFill>
+          <a:schemeClr val="bg1"/>
+        </a:solidFill>
+        <a:effectLst/>
+      </p:bgPr>
+    </p:bg>
     <p:spTree>
       <p:nvGrpSpPr>
         <p:cNvPr id="1" name="">
@@ -17128,88 +19888,67 @@
       </p:grpSpPr>
       <p:sp>
         <p:nvSpPr>
-          <p:cNvPr id="2" name="TextBox 1">
+          <p:cNvPr id="11" name="Rectangle 10">
             <a:extLst>
               <a:ext uri="{FF2B5EF4-FFF2-40B4-BE49-F238E27FC236}">
-                <a16:creationId xmlns:a16="http://schemas.microsoft.com/office/drawing/2014/main" id="{DC579DB5-FB17-6D49-7A4D-2B764E003DC2}"/>
+                <a16:creationId xmlns:a16="http://schemas.microsoft.com/office/drawing/2014/main" id="{C3896A03-3945-419A-B66B-4EE266EDD152}"/>
+              </a:ext>
+              <a:ext uri="{C183D7F6-B498-43B3-948B-1728B52AA6E4}">
+                <adec:decorative xmlns:adec="http://schemas.microsoft.com/office/drawing/2017/decorative" val="1"/>
               </a:ext>
             </a:extLst>
           </p:cNvPr>
-          <p:cNvSpPr txBox="1"/>
-          <p:nvPr/>
+          <p:cNvSpPr>
+            <a:spLocks noGrp="1" noRot="1" noChangeAspect="1" noMove="1" noResize="1" noEditPoints="1" noAdjustHandles="1" noChangeArrowheads="1" noChangeShapeType="1" noTextEdit="1"/>
+          </p:cNvSpPr>
+          <p:nvPr>
+            <p:extLst>
+              <p:ext uri="{386F3935-93C4-4BCD-93E2-E3B085C9AB24}">
+                <p16:designElem xmlns:p16="http://schemas.microsoft.com/office/powerpoint/2015/main" val="1"/>
+              </p:ext>
+            </p:extLst>
+          </p:nvPr>
         </p:nvSpPr>
         <p:spPr>
           <a:xfrm>
-            <a:off x="457200" y="1657350"/>
-            <a:ext cx="10203242" cy="2031325"/>
+            <a:off x="11" y="0"/>
+            <a:ext cx="4654286" cy="6858001"/>
           </a:xfrm>
           <a:prstGeom prst="rect">
             <a:avLst/>
           </a:prstGeom>
-          <a:noFill/>
+          <a:solidFill>
+            <a:schemeClr val="tx1">
+              <a:lumMod val="85000"/>
+              <a:lumOff val="15000"/>
+            </a:schemeClr>
+          </a:solidFill>
+          <a:ln>
+            <a:noFill/>
+          </a:ln>
         </p:spPr>
+        <p:style>
+          <a:lnRef idx="2">
+            <a:schemeClr val="accent1">
+              <a:shade val="50000"/>
+            </a:schemeClr>
+          </a:lnRef>
+          <a:fillRef idx="1">
+            <a:schemeClr val="accent1"/>
+          </a:fillRef>
+          <a:effectRef idx="0">
+            <a:schemeClr val="accent1"/>
+          </a:effectRef>
+          <a:fontRef idx="minor">
+            <a:schemeClr val="lt1"/>
+          </a:fontRef>
+        </p:style>
         <p:txBody>
-          <a:bodyPr wrap="none" rtlCol="0">
-            <a:spAutoFit/>
-          </a:bodyPr>
+          <a:bodyPr rtlCol="0" anchor="ctr"/>
           <a:lstStyle/>
           <a:p>
-            <a:r>
-              <a:rPr lang="en-US"/>
-              <a:t>Chức năng trò chuyện thời gian thực</a:t>
-            </a:r>
-          </a:p>
-          <a:p>
-            <a:r>
-              <a:rPr lang="en-US"/>
-              <a:t>Giới thiệu về công nghệ TTS-STT</a:t>
-            </a:r>
-          </a:p>
-          <a:p>
-            <a:pPr marL="285750" indent="-285750">
-              <a:buFontTx/>
-              <a:buChar char="-"/>
-            </a:pPr>
-            <a:r>
-              <a:rPr lang="en-US"/>
-              <a:t>giới thiệu</a:t>
-            </a:r>
-          </a:p>
-          <a:p>
-            <a:pPr marL="285750" indent="-285750">
-              <a:buFontTx/>
-              <a:buChar char="-"/>
-            </a:pPr>
-            <a:r>
-              <a:rPr lang="en-US"/>
-              <a:t>Lợi tích</a:t>
-            </a:r>
-          </a:p>
-          <a:p>
-            <a:pPr marL="285750" indent="-285750">
-              <a:buFontTx/>
-              <a:buChar char="-"/>
-            </a:pPr>
-            <a:r>
-              <a:rPr lang="en-US"/>
-              <a:t>Lợi tích khi Ứng dụng công nghệ này vào hệ thống chatbot</a:t>
-            </a:r>
-          </a:p>
-          <a:p>
-            <a:pPr marL="285750" indent="-285750">
-              <a:buFontTx/>
-              <a:buChar char="-"/>
-            </a:pPr>
-            <a:r>
-              <a:rPr lang="en-US"/>
-              <a:t>Phương pháp triển khai hệ thống (miêu tả hệ thống  hoạt động như thế nào? Cách mà văn bản được</a:t>
-            </a:r>
-          </a:p>
-          <a:p>
-            <a:r>
-              <a:rPr lang="en-US"/>
-              <a:t>Chuyển thành âm thanh và ngược lại. (chi tiết các phần và luồng hoạt động để sau)</a:t>
-            </a:r>
+            <a:pPr algn="ctr"/>
+            <a:endParaRPr lang="en-US"/>
           </a:p>
         </p:txBody>
       </p:sp>
@@ -17231,25 +19970,196 @@
         </p:nvSpPr>
         <p:spPr>
           <a:xfrm>
-            <a:off x="838200" y="365126"/>
-            <a:ext cx="10515600" cy="833054"/>
+            <a:off x="877370" y="640615"/>
+            <a:ext cx="2899568" cy="5576770"/>
           </a:xfrm>
         </p:spPr>
         <p:txBody>
-          <a:bodyPr/>
+          <a:bodyPr vert="horz" lIns="91440" tIns="45720" rIns="91440" bIns="45720" rtlCol="0" anchor="ctr">
+            <a:normAutofit/>
+          </a:bodyPr>
           <a:lstStyle/>
           <a:p>
+            <a:r>
+              <a:rPr lang="en-US" sz="4800" kern="1200">
+                <a:solidFill>
+                  <a:schemeClr val="bg1"/>
+                </a:solidFill>
+                <a:latin typeface="+mj-lt"/>
+                <a:ea typeface="+mj-ea"/>
+                <a:cs typeface="+mj-cs"/>
+              </a:rPr>
+              <a:t>Triển khai</a:t>
+            </a:r>
+            <a:br>
+              <a:rPr lang="en-US" sz="4800" kern="1200">
+                <a:solidFill>
+                  <a:schemeClr val="bg1"/>
+                </a:solidFill>
+                <a:latin typeface="+mj-lt"/>
+                <a:ea typeface="+mj-ea"/>
+                <a:cs typeface="+mj-cs"/>
+              </a:rPr>
+            </a:br>
+            <a:r>
+              <a:rPr lang="en-US" sz="4800" kern="1200">
+                <a:solidFill>
+                  <a:schemeClr val="bg1"/>
+                </a:solidFill>
+                <a:latin typeface="+mj-lt"/>
+                <a:ea typeface="+mj-ea"/>
+                <a:cs typeface="+mj-cs"/>
+              </a:rPr>
+              <a:t>chức năng chat realtime</a:t>
+            </a:r>
+          </a:p>
+        </p:txBody>
+      </p:sp>
+      <p:sp>
+        <p:nvSpPr>
+          <p:cNvPr id="13" name="Rectangle 12">
+            <a:extLst>
+              <a:ext uri="{FF2B5EF4-FFF2-40B4-BE49-F238E27FC236}">
+                <a16:creationId xmlns:a16="http://schemas.microsoft.com/office/drawing/2014/main" id="{B34F5AD2-EDBD-4BBD-A55C-EAFFD0C7097A}"/>
+              </a:ext>
+              <a:ext uri="{C183D7F6-B498-43B3-948B-1728B52AA6E4}">
+                <adec:decorative xmlns:adec="http://schemas.microsoft.com/office/drawing/2017/decorative" val="1"/>
+              </a:ext>
+            </a:extLst>
+          </p:cNvPr>
+          <p:cNvSpPr>
+            <a:spLocks noGrp="1" noRot="1" noChangeAspect="1" noMove="1" noResize="1" noEditPoints="1" noAdjustHandles="1" noChangeArrowheads="1" noChangeShapeType="1" noTextEdit="1"/>
+          </p:cNvSpPr>
+          <p:nvPr>
+            <p:extLst>
+              <p:ext uri="{386F3935-93C4-4BCD-93E2-E3B085C9AB24}">
+                <p16:designElem xmlns:p16="http://schemas.microsoft.com/office/powerpoint/2015/main" val="1"/>
+              </p:ext>
+            </p:extLst>
+          </p:nvPr>
+        </p:nvSpPr>
+        <p:spPr>
+          <a:xfrm>
+            <a:off x="4652535" y="0"/>
+            <a:ext cx="7539455" cy="6858001"/>
+          </a:xfrm>
+          <a:prstGeom prst="rect">
+            <a:avLst/>
+          </a:prstGeom>
+          <a:solidFill>
+            <a:schemeClr val="bg1">
+              <a:lumMod val="95000"/>
+            </a:schemeClr>
+          </a:solidFill>
+          <a:ln>
+            <a:noFill/>
+          </a:ln>
+        </p:spPr>
+        <p:style>
+          <a:lnRef idx="2">
+            <a:schemeClr val="accent1">
+              <a:shade val="50000"/>
+            </a:schemeClr>
+          </a:lnRef>
+          <a:fillRef idx="1">
+            <a:schemeClr val="accent1"/>
+          </a:fillRef>
+          <a:effectRef idx="0">
+            <a:schemeClr val="accent1"/>
+          </a:effectRef>
+          <a:fontRef idx="minor">
+            <a:schemeClr val="lt1"/>
+          </a:fontRef>
+        </p:style>
+        <p:txBody>
+          <a:bodyPr rtlCol="0" anchor="ctr"/>
+          <a:lstStyle/>
+          <a:p>
             <a:pPr algn="ctr"/>
+            <a:endParaRPr lang="en-US"/>
+          </a:p>
+        </p:txBody>
+      </p:sp>
+      <p:sp>
+        <p:nvSpPr>
+          <p:cNvPr id="6" name="Content Placeholder 5">
+            <a:extLst>
+              <a:ext uri="{FF2B5EF4-FFF2-40B4-BE49-F238E27FC236}">
+                <a16:creationId xmlns:a16="http://schemas.microsoft.com/office/drawing/2014/main" id="{390391FD-65F4-FE74-985B-6D67B80A4DFD}"/>
+              </a:ext>
+            </a:extLst>
+          </p:cNvPr>
+          <p:cNvSpPr>
+            <a:spLocks noGrp="1"/>
+          </p:cNvSpPr>
+          <p:nvPr>
+            <p:ph idx="1"/>
+          </p:nvPr>
+        </p:nvSpPr>
+        <p:spPr>
+          <a:xfrm>
+            <a:off x="4652535" y="128953"/>
+            <a:ext cx="7539465" cy="1017617"/>
+          </a:xfrm>
+        </p:spPr>
+        <p:txBody>
+          <a:bodyPr vert="horz" lIns="91440" tIns="45720" rIns="91440" bIns="45720" rtlCol="0" anchor="ctr">
+            <a:normAutofit/>
+          </a:bodyPr>
+          <a:lstStyle/>
+          <a:p>
+            <a:pPr marL="0" indent="0" algn="ctr">
+              <a:buNone/>
+            </a:pPr>
             <a:r>
-              <a:rPr lang="en-US">
+              <a:rPr lang="en-US" kern="1200">
+                <a:solidFill>
+                  <a:schemeClr val="tx1"/>
+                </a:solidFill>
                 <a:latin typeface="Times New Roman" panose="02020603050405020304" pitchFamily="18" charset="0"/>
                 <a:cs typeface="Times New Roman" panose="02020603050405020304" pitchFamily="18" charset="0"/>
               </a:rPr>
-              <a:t>Chức năng chat realtime</a:t>
+              <a:t>Công nghệ chuyển đổi văn bản – âm thanh</a:t>
             </a:r>
           </a:p>
         </p:txBody>
       </p:sp>
+      <p:pic>
+        <p:nvPicPr>
+          <p:cNvPr id="8" name="Picture 7" descr="A black and white image of a device&#10;&#10;AI-generated content may be incorrect.">
+            <a:extLst>
+              <a:ext uri="{FF2B5EF4-FFF2-40B4-BE49-F238E27FC236}">
+                <a16:creationId xmlns:a16="http://schemas.microsoft.com/office/drawing/2014/main" id="{2BC61E11-846A-0074-2ED7-862FF6D16F3B}"/>
+              </a:ext>
+            </a:extLst>
+          </p:cNvPr>
+          <p:cNvPicPr>
+            <a:picLocks noChangeAspect="1"/>
+          </p:cNvPicPr>
+          <p:nvPr/>
+        </p:nvPicPr>
+        <p:blipFill>
+          <a:blip r:embed="rId3">
+            <a:extLst>
+              <a:ext uri="{28A0092B-C50C-407E-A947-70E740481C1C}">
+                <a14:useLocalDpi xmlns:a14="http://schemas.microsoft.com/office/drawing/2010/main" val="0"/>
+              </a:ext>
+            </a:extLst>
+          </a:blip>
+          <a:stretch>
+            <a:fillRect/>
+          </a:stretch>
+        </p:blipFill>
+        <p:spPr>
+          <a:xfrm>
+            <a:off x="5767028" y="1146570"/>
+            <a:ext cx="5312231" cy="2780621"/>
+          </a:xfrm>
+          <a:prstGeom prst="rect">
+            <a:avLst/>
+          </a:prstGeom>
+        </p:spPr>
+      </p:pic>
     </p:spTree>
     <p:extLst>
       <p:ext uri="{BB962C8B-B14F-4D97-AF65-F5344CB8AC3E}">
@@ -17296,15 +20206,15 @@
         </p:nvSpPr>
         <p:spPr>
           <a:xfrm>
-            <a:off x="838200" y="365126"/>
-            <a:ext cx="10515600" cy="896116"/>
+            <a:off x="838200" y="365125"/>
+            <a:ext cx="10515600" cy="873739"/>
           </a:xfrm>
           <a:prstGeom prst="rect">
             <a:avLst/>
           </a:prstGeom>
         </p:spPr>
         <p:txBody>
-          <a:bodyPr/>
+          <a:bodyPr anchor="ctr"/>
           <a:lstStyle>
             <a:lvl1pPr algn="l" defTabSz="914400" rtl="0" eaLnBrk="1" latinLnBrk="0" hangingPunct="1">
               <a:lnSpc>
@@ -17331,7 +20241,7 @@
                 <a:latin typeface="Times New Roman" panose="02020603050405020304" pitchFamily="18" charset="0"/>
                 <a:cs typeface="Times New Roman" panose="02020603050405020304" pitchFamily="18" charset="0"/>
               </a:rPr>
-              <a:t>Chức năng chat realtime</a:t>
+              <a:t>Triển khai chức năng chat realtime</a:t>
             </a:r>
           </a:p>
         </p:txBody>
@@ -17357,7 +20267,7 @@
         <p:cNvPr id="1" name="">
           <a:extLst>
             <a:ext uri="{FF2B5EF4-FFF2-40B4-BE49-F238E27FC236}">
-              <a16:creationId xmlns:a16="http://schemas.microsoft.com/office/drawing/2014/main" id="{E69FDD86-2554-20C0-3BD8-48C3D0CE3EE9}"/>
+              <a16:creationId xmlns:a16="http://schemas.microsoft.com/office/drawing/2014/main" id="{BD6406F2-8916-A874-A242-A44A2FFA1BE2}"/>
             </a:ext>
           </a:extLst>
         </p:cNvPr>
@@ -17374,28 +20284,56 @@
       </p:grpSpPr>
       <p:sp>
         <p:nvSpPr>
-          <p:cNvPr id="5" name="Title 4">
+          <p:cNvPr id="2" name="Title 2">
             <a:extLst>
               <a:ext uri="{FF2B5EF4-FFF2-40B4-BE49-F238E27FC236}">
-                <a16:creationId xmlns:a16="http://schemas.microsoft.com/office/drawing/2014/main" id="{A286B778-7B01-6C20-DF80-D15E93F8E11A}"/>
+                <a16:creationId xmlns:a16="http://schemas.microsoft.com/office/drawing/2014/main" id="{CDBDEA59-652C-7126-A754-D5E85C065DB2}"/>
               </a:ext>
             </a:extLst>
           </p:cNvPr>
-          <p:cNvSpPr>
-            <a:spLocks noGrp="1"/>
+          <p:cNvSpPr txBox="1">
+            <a:spLocks/>
           </p:cNvSpPr>
-          <p:nvPr>
-            <p:ph type="title"/>
-          </p:nvPr>
+          <p:nvPr/>
         </p:nvSpPr>
-        <p:spPr/>
+        <p:spPr>
+          <a:xfrm>
+            <a:off x="838200" y="365125"/>
+            <a:ext cx="10515600" cy="873739"/>
+          </a:xfrm>
+          <a:prstGeom prst="rect">
+            <a:avLst/>
+          </a:prstGeom>
+        </p:spPr>
         <p:txBody>
-          <a:bodyPr/>
-          <a:lstStyle/>
-          <a:p>
+          <a:bodyPr anchor="ctr"/>
+          <a:lstStyle>
+            <a:lvl1pPr algn="l" defTabSz="914400" rtl="0" eaLnBrk="1" latinLnBrk="0" hangingPunct="1">
+              <a:lnSpc>
+                <a:spcPct val="90000"/>
+              </a:lnSpc>
+              <a:spcBef>
+                <a:spcPct val="0"/>
+              </a:spcBef>
+              <a:buNone/>
+              <a:defRPr sz="4400" kern="1200">
+                <a:solidFill>
+                  <a:schemeClr val="tx1"/>
+                </a:solidFill>
+                <a:latin typeface="+mj-lt"/>
+                <a:ea typeface="+mj-ea"/>
+                <a:cs typeface="+mj-cs"/>
+              </a:defRPr>
+            </a:lvl1pPr>
+          </a:lstStyle>
+          <a:p>
+            <a:pPr algn="ctr"/>
             <a:r>
-              <a:rPr lang="en-US"/>
-              <a:t>Quá trình sinh phản hồi</a:t>
+              <a:rPr lang="en-US">
+                <a:latin typeface="Times New Roman" panose="02020603050405020304" pitchFamily="18" charset="0"/>
+                <a:cs typeface="Times New Roman" panose="02020603050405020304" pitchFamily="18" charset="0"/>
+              </a:rPr>
+              <a:t>Triển khai quá trình sinh phản hồi</a:t>
             </a:r>
           </a:p>
         </p:txBody>
@@ -17403,7 +20341,7 @@
     </p:spTree>
     <p:extLst>
       <p:ext uri="{BB962C8B-B14F-4D97-AF65-F5344CB8AC3E}">
-        <p14:creationId xmlns:p14="http://schemas.microsoft.com/office/powerpoint/2010/main" val="755535105"/>
+        <p14:creationId xmlns:p14="http://schemas.microsoft.com/office/powerpoint/2010/main" val="1561809781"/>
       </p:ext>
     </p:extLst>
   </p:cSld>
@@ -17421,7 +20359,7 @@
         <p:cNvPr id="1" name="">
           <a:extLst>
             <a:ext uri="{FF2B5EF4-FFF2-40B4-BE49-F238E27FC236}">
-              <a16:creationId xmlns:a16="http://schemas.microsoft.com/office/drawing/2014/main" id="{F639A16C-21A7-F245-2803-D5F851D41615}"/>
+              <a16:creationId xmlns:a16="http://schemas.microsoft.com/office/drawing/2014/main" id="{BCFFBE39-4CDE-C69F-65AB-8EFDEC7C1272}"/>
             </a:ext>
           </a:extLst>
         </p:cNvPr>
@@ -17438,61 +20376,360 @@
       </p:grpSpPr>
       <p:sp>
         <p:nvSpPr>
-          <p:cNvPr id="2" name="Title 1">
+          <p:cNvPr id="2" name="Title 2">
             <a:extLst>
               <a:ext uri="{FF2B5EF4-FFF2-40B4-BE49-F238E27FC236}">
-                <a16:creationId xmlns:a16="http://schemas.microsoft.com/office/drawing/2014/main" id="{AA359780-E419-4614-7EE7-4F5A8344D932}"/>
+                <a16:creationId xmlns:a16="http://schemas.microsoft.com/office/drawing/2014/main" id="{F5A7FBB9-92B6-9BFC-735E-11D7DA27CB9C}"/>
               </a:ext>
             </a:extLst>
           </p:cNvPr>
-          <p:cNvSpPr>
-            <a:spLocks noGrp="1"/>
+          <p:cNvSpPr txBox="1">
+            <a:spLocks/>
           </p:cNvSpPr>
-          <p:nvPr>
-            <p:ph type="ctrTitle"/>
-          </p:nvPr>
+          <p:nvPr/>
         </p:nvSpPr>
-        <p:spPr/>
+        <p:spPr>
+          <a:xfrm>
+            <a:off x="838200" y="365125"/>
+            <a:ext cx="10515600" cy="1375185"/>
+          </a:xfrm>
+          <a:prstGeom prst="rect">
+            <a:avLst/>
+          </a:prstGeom>
+        </p:spPr>
         <p:txBody>
-          <a:bodyPr/>
-          <a:lstStyle/>
-          <a:p>
+          <a:bodyPr anchor="ctr"/>
+          <a:lstStyle>
+            <a:lvl1pPr algn="l" defTabSz="914400" rtl="0" eaLnBrk="1" latinLnBrk="0" hangingPunct="1">
+              <a:lnSpc>
+                <a:spcPct val="90000"/>
+              </a:lnSpc>
+              <a:spcBef>
+                <a:spcPct val="0"/>
+              </a:spcBef>
+              <a:buNone/>
+              <a:defRPr sz="4400" kern="1200">
+                <a:solidFill>
+                  <a:schemeClr val="tx1"/>
+                </a:solidFill>
+                <a:latin typeface="+mj-lt"/>
+                <a:ea typeface="+mj-ea"/>
+                <a:cs typeface="+mj-cs"/>
+              </a:defRPr>
+            </a:lvl1pPr>
+          </a:lstStyle>
+          <a:p>
+            <a:pPr algn="ctr"/>
             <a:r>
-              <a:rPr lang="en-US"/>
-              <a:t>Kết quả triển khai</a:t>
+              <a:rPr lang="en-US">
+                <a:latin typeface="Times New Roman" panose="02020603050405020304" pitchFamily="18" charset="0"/>
+                <a:cs typeface="Times New Roman" panose="02020603050405020304" pitchFamily="18" charset="0"/>
+              </a:rPr>
+              <a:t>Triển khai chức năng</a:t>
             </a:r>
           </a:p>
-        </p:txBody>
-      </p:sp>
-      <p:sp>
-        <p:nvSpPr>
-          <p:cNvPr id="3" name="Subtitle 2">
-            <a:extLst>
-              <a:ext uri="{FF2B5EF4-FFF2-40B4-BE49-F238E27FC236}">
-                <a16:creationId xmlns:a16="http://schemas.microsoft.com/office/drawing/2014/main" id="{9E241CE4-71E2-40A1-0E9C-AC2C8BB81764}"/>
-              </a:ext>
-            </a:extLst>
-          </p:cNvPr>
-          <p:cNvSpPr>
-            <a:spLocks noGrp="1"/>
-          </p:cNvSpPr>
-          <p:nvPr>
-            <p:ph type="subTitle" idx="1"/>
-          </p:nvPr>
-        </p:nvSpPr>
-        <p:spPr/>
-        <p:txBody>
-          <a:bodyPr/>
-          <a:lstStyle/>
-          <a:p>
-            <a:endParaRPr lang="en-US"/>
+          <a:p>
+            <a:pPr algn="ctr"/>
+            <a:r>
+              <a:rPr lang="en-US">
+                <a:latin typeface="Times New Roman" panose="02020603050405020304" pitchFamily="18" charset="0"/>
+                <a:cs typeface="Times New Roman" panose="02020603050405020304" pitchFamily="18" charset="0"/>
+              </a:rPr>
+              <a:t>cài đặt tùy chọn luồng chat</a:t>
+            </a:r>
           </a:p>
         </p:txBody>
       </p:sp>
     </p:spTree>
     <p:extLst>
       <p:ext uri="{BB962C8B-B14F-4D97-AF65-F5344CB8AC3E}">
-        <p14:creationId xmlns:p14="http://schemas.microsoft.com/office/powerpoint/2010/main" val="3364825887"/>
+        <p14:creationId xmlns:p14="http://schemas.microsoft.com/office/powerpoint/2010/main" val="546260053"/>
+      </p:ext>
+    </p:extLst>
+  </p:cSld>
+  <p:clrMapOvr>
+    <a:masterClrMapping/>
+  </p:clrMapOvr>
+</p:sld>
+</file>
+
+<file path=ppt/slides/slide27.xml><?xml version="1.0" encoding="utf-8"?>
+<p:sld xmlns:a="http://schemas.openxmlformats.org/drawingml/2006/main" xmlns:r="http://schemas.openxmlformats.org/officeDocument/2006/relationships" xmlns:p="http://schemas.openxmlformats.org/presentationml/2006/main">
+  <p:cSld>
+    <p:spTree>
+      <p:nvGrpSpPr>
+        <p:cNvPr id="1" name="">
+          <a:extLst>
+            <a:ext uri="{FF2B5EF4-FFF2-40B4-BE49-F238E27FC236}">
+              <a16:creationId xmlns:a16="http://schemas.microsoft.com/office/drawing/2014/main" id="{788622FA-D218-791D-40F4-433DEF033AA6}"/>
+            </a:ext>
+          </a:extLst>
+        </p:cNvPr>
+        <p:cNvGrpSpPr/>
+        <p:nvPr/>
+      </p:nvGrpSpPr>
+      <p:grpSpPr>
+        <a:xfrm>
+          <a:off x="0" y="0"/>
+          <a:ext cx="0" cy="0"/>
+          <a:chOff x="0" y="0"/>
+          <a:chExt cx="0" cy="0"/>
+        </a:xfrm>
+      </p:grpSpPr>
+      <p:sp>
+        <p:nvSpPr>
+          <p:cNvPr id="2" name="Title 2">
+            <a:extLst>
+              <a:ext uri="{FF2B5EF4-FFF2-40B4-BE49-F238E27FC236}">
+                <a16:creationId xmlns:a16="http://schemas.microsoft.com/office/drawing/2014/main" id="{47096308-F601-9CB9-C9A1-5693E116455E}"/>
+              </a:ext>
+            </a:extLst>
+          </p:cNvPr>
+          <p:cNvSpPr txBox="1">
+            <a:spLocks/>
+          </p:cNvSpPr>
+          <p:nvPr/>
+        </p:nvSpPr>
+        <p:spPr>
+          <a:xfrm>
+            <a:off x="838200" y="365125"/>
+            <a:ext cx="10515600" cy="873739"/>
+          </a:xfrm>
+          <a:prstGeom prst="rect">
+            <a:avLst/>
+          </a:prstGeom>
+        </p:spPr>
+        <p:txBody>
+          <a:bodyPr anchor="ctr"/>
+          <a:lstStyle>
+            <a:lvl1pPr algn="l" defTabSz="914400" rtl="0" eaLnBrk="1" latinLnBrk="0" hangingPunct="1">
+              <a:lnSpc>
+                <a:spcPct val="90000"/>
+              </a:lnSpc>
+              <a:spcBef>
+                <a:spcPct val="0"/>
+              </a:spcBef>
+              <a:buNone/>
+              <a:defRPr sz="4400" kern="1200">
+                <a:solidFill>
+                  <a:schemeClr val="tx1"/>
+                </a:solidFill>
+                <a:latin typeface="+mj-lt"/>
+                <a:ea typeface="+mj-ea"/>
+                <a:cs typeface="+mj-cs"/>
+              </a:defRPr>
+            </a:lvl1pPr>
+          </a:lstStyle>
+          <a:p>
+            <a:pPr algn="ctr"/>
+            <a:r>
+              <a:rPr lang="en-US">
+                <a:latin typeface="Times New Roman" panose="02020603050405020304" pitchFamily="18" charset="0"/>
+                <a:cs typeface="Times New Roman" panose="02020603050405020304" pitchFamily="18" charset="0"/>
+              </a:rPr>
+              <a:t>Triển khai chức năng đánh giá phản hồi</a:t>
+            </a:r>
+          </a:p>
+        </p:txBody>
+      </p:sp>
+    </p:spTree>
+    <p:extLst>
+      <p:ext uri="{BB962C8B-B14F-4D97-AF65-F5344CB8AC3E}">
+        <p14:creationId xmlns:p14="http://schemas.microsoft.com/office/powerpoint/2010/main" val="2620958028"/>
+      </p:ext>
+    </p:extLst>
+  </p:cSld>
+  <p:clrMapOvr>
+    <a:masterClrMapping/>
+  </p:clrMapOvr>
+</p:sld>
+</file>
+
+<file path=ppt/slides/slide28.xml><?xml version="1.0" encoding="utf-8"?>
+<p:sld xmlns:a="http://schemas.openxmlformats.org/drawingml/2006/main" xmlns:r="http://schemas.openxmlformats.org/officeDocument/2006/relationships" xmlns:p="http://schemas.openxmlformats.org/presentationml/2006/main">
+  <p:cSld>
+    <p:spTree>
+      <p:nvGrpSpPr>
+        <p:cNvPr id="1" name="">
+          <a:extLst>
+            <a:ext uri="{FF2B5EF4-FFF2-40B4-BE49-F238E27FC236}">
+              <a16:creationId xmlns:a16="http://schemas.microsoft.com/office/drawing/2014/main" id="{FDEF9696-0C94-852F-A350-4D661CBCDF2A}"/>
+            </a:ext>
+          </a:extLst>
+        </p:cNvPr>
+        <p:cNvGrpSpPr/>
+        <p:nvPr/>
+      </p:nvGrpSpPr>
+      <p:grpSpPr>
+        <a:xfrm>
+          <a:off x="0" y="0"/>
+          <a:ext cx="0" cy="0"/>
+          <a:chOff x="0" y="0"/>
+          <a:chExt cx="0" cy="0"/>
+        </a:xfrm>
+      </p:grpSpPr>
+      <p:sp>
+        <p:nvSpPr>
+          <p:cNvPr id="2" name="Title 2">
+            <a:extLst>
+              <a:ext uri="{FF2B5EF4-FFF2-40B4-BE49-F238E27FC236}">
+                <a16:creationId xmlns:a16="http://schemas.microsoft.com/office/drawing/2014/main" id="{B6B0721C-10AC-72A7-CE74-A1BEECF9A282}"/>
+              </a:ext>
+            </a:extLst>
+          </p:cNvPr>
+          <p:cNvSpPr txBox="1">
+            <a:spLocks/>
+          </p:cNvSpPr>
+          <p:nvPr/>
+        </p:nvSpPr>
+        <p:spPr>
+          <a:xfrm>
+            <a:off x="838200" y="365125"/>
+            <a:ext cx="10515600" cy="873739"/>
+          </a:xfrm>
+          <a:prstGeom prst="rect">
+            <a:avLst/>
+          </a:prstGeom>
+        </p:spPr>
+        <p:txBody>
+          <a:bodyPr anchor="ctr"/>
+          <a:lstStyle>
+            <a:lvl1pPr algn="l" defTabSz="914400" rtl="0" eaLnBrk="1" latinLnBrk="0" hangingPunct="1">
+              <a:lnSpc>
+                <a:spcPct val="90000"/>
+              </a:lnSpc>
+              <a:spcBef>
+                <a:spcPct val="0"/>
+              </a:spcBef>
+              <a:buNone/>
+              <a:defRPr sz="4400" kern="1200">
+                <a:solidFill>
+                  <a:schemeClr val="tx1"/>
+                </a:solidFill>
+                <a:latin typeface="+mj-lt"/>
+                <a:ea typeface="+mj-ea"/>
+                <a:cs typeface="+mj-cs"/>
+              </a:defRPr>
+            </a:lvl1pPr>
+          </a:lstStyle>
+          <a:p>
+            <a:pPr algn="ctr"/>
+            <a:r>
+              <a:rPr lang="en-US">
+                <a:latin typeface="Times New Roman" panose="02020603050405020304" pitchFamily="18" charset="0"/>
+                <a:cs typeface="Times New Roman" panose="02020603050405020304" pitchFamily="18" charset="0"/>
+              </a:rPr>
+              <a:t>Triển khai chức năng khởi tạo luồng chat mới</a:t>
+            </a:r>
+          </a:p>
+        </p:txBody>
+      </p:sp>
+    </p:spTree>
+    <p:extLst>
+      <p:ext uri="{BB962C8B-B14F-4D97-AF65-F5344CB8AC3E}">
+        <p14:creationId xmlns:p14="http://schemas.microsoft.com/office/powerpoint/2010/main" val="3317779010"/>
+      </p:ext>
+    </p:extLst>
+  </p:cSld>
+  <p:clrMapOvr>
+    <a:masterClrMapping/>
+  </p:clrMapOvr>
+</p:sld>
+</file>
+
+<file path=ppt/slides/slide29.xml><?xml version="1.0" encoding="utf-8"?>
+<p:sld xmlns:a="http://schemas.openxmlformats.org/drawingml/2006/main" xmlns:r="http://schemas.openxmlformats.org/officeDocument/2006/relationships" xmlns:p="http://schemas.openxmlformats.org/presentationml/2006/main">
+  <p:cSld>
+    <p:spTree>
+      <p:nvGrpSpPr>
+        <p:cNvPr id="1" name="">
+          <a:extLst>
+            <a:ext uri="{FF2B5EF4-FFF2-40B4-BE49-F238E27FC236}">
+              <a16:creationId xmlns:a16="http://schemas.microsoft.com/office/drawing/2014/main" id="{A57A631F-AFDC-0050-11B0-29C82FE3BC92}"/>
+            </a:ext>
+          </a:extLst>
+        </p:cNvPr>
+        <p:cNvGrpSpPr/>
+        <p:nvPr/>
+      </p:nvGrpSpPr>
+      <p:grpSpPr>
+        <a:xfrm>
+          <a:off x="0" y="0"/>
+          <a:ext cx="0" cy="0"/>
+          <a:chOff x="0" y="0"/>
+          <a:chExt cx="0" cy="0"/>
+        </a:xfrm>
+      </p:grpSpPr>
+      <p:sp>
+        <p:nvSpPr>
+          <p:cNvPr id="2" name="Title 2">
+            <a:extLst>
+              <a:ext uri="{FF2B5EF4-FFF2-40B4-BE49-F238E27FC236}">
+                <a16:creationId xmlns:a16="http://schemas.microsoft.com/office/drawing/2014/main" id="{FA9BFAD6-49F2-0035-4619-3DD6ADE85D7E}"/>
+              </a:ext>
+            </a:extLst>
+          </p:cNvPr>
+          <p:cNvSpPr txBox="1">
+            <a:spLocks/>
+          </p:cNvSpPr>
+          <p:nvPr/>
+        </p:nvSpPr>
+        <p:spPr>
+          <a:xfrm>
+            <a:off x="838200" y="365125"/>
+            <a:ext cx="10515600" cy="1286694"/>
+          </a:xfrm>
+          <a:prstGeom prst="rect">
+            <a:avLst/>
+          </a:prstGeom>
+        </p:spPr>
+        <p:txBody>
+          <a:bodyPr anchor="ctr"/>
+          <a:lstStyle>
+            <a:lvl1pPr algn="l" defTabSz="914400" rtl="0" eaLnBrk="1" latinLnBrk="0" hangingPunct="1">
+              <a:lnSpc>
+                <a:spcPct val="90000"/>
+              </a:lnSpc>
+              <a:spcBef>
+                <a:spcPct val="0"/>
+              </a:spcBef>
+              <a:buNone/>
+              <a:defRPr sz="4400" kern="1200">
+                <a:solidFill>
+                  <a:schemeClr val="tx1"/>
+                </a:solidFill>
+                <a:latin typeface="+mj-lt"/>
+                <a:ea typeface="+mj-ea"/>
+                <a:cs typeface="+mj-cs"/>
+              </a:defRPr>
+            </a:lvl1pPr>
+          </a:lstStyle>
+          <a:p>
+            <a:pPr algn="ctr"/>
+            <a:r>
+              <a:rPr lang="en-US">
+                <a:latin typeface="Times New Roman" panose="02020603050405020304" pitchFamily="18" charset="0"/>
+                <a:cs typeface="Times New Roman" panose="02020603050405020304" pitchFamily="18" charset="0"/>
+              </a:rPr>
+              <a:t>Triển khai các chức năng</a:t>
+            </a:r>
+          </a:p>
+          <a:p>
+            <a:pPr algn="ctr"/>
+            <a:r>
+              <a:rPr lang="en-US">
+                <a:latin typeface="Times New Roman" panose="02020603050405020304" pitchFamily="18" charset="0"/>
+                <a:cs typeface="Times New Roman" panose="02020603050405020304" pitchFamily="18" charset="0"/>
+              </a:rPr>
+              <a:t>đăng nhập – đăng ký</a:t>
+            </a:r>
+          </a:p>
+        </p:txBody>
+      </p:sp>
+    </p:spTree>
+    <p:extLst>
+      <p:ext uri="{BB962C8B-B14F-4D97-AF65-F5344CB8AC3E}">
+        <p14:creationId xmlns:p14="http://schemas.microsoft.com/office/powerpoint/2010/main" val="1364653041"/>
       </p:ext>
     </p:extLst>
   </p:cSld>
@@ -17631,6 +20868,757 @@
     <p:extLst>
       <p:ext uri="{BB962C8B-B14F-4D97-AF65-F5344CB8AC3E}">
         <p14:creationId xmlns:p14="http://schemas.microsoft.com/office/powerpoint/2010/main" val="2062246170"/>
+      </p:ext>
+    </p:extLst>
+  </p:cSld>
+  <p:clrMapOvr>
+    <a:masterClrMapping/>
+  </p:clrMapOvr>
+</p:sld>
+</file>
+
+<file path=ppt/slides/slide30.xml><?xml version="1.0" encoding="utf-8"?>
+<p:sld xmlns:a="http://schemas.openxmlformats.org/drawingml/2006/main" xmlns:r="http://schemas.openxmlformats.org/officeDocument/2006/relationships" xmlns:p="http://schemas.openxmlformats.org/presentationml/2006/main">
+  <p:cSld>
+    <p:spTree>
+      <p:nvGrpSpPr>
+        <p:cNvPr id="1" name="">
+          <a:extLst>
+            <a:ext uri="{FF2B5EF4-FFF2-40B4-BE49-F238E27FC236}">
+              <a16:creationId xmlns:a16="http://schemas.microsoft.com/office/drawing/2014/main" id="{BE43FA4A-7851-C562-EE40-9FF528673713}"/>
+            </a:ext>
+          </a:extLst>
+        </p:cNvPr>
+        <p:cNvGrpSpPr/>
+        <p:nvPr/>
+      </p:nvGrpSpPr>
+      <p:grpSpPr>
+        <a:xfrm>
+          <a:off x="0" y="0"/>
+          <a:ext cx="0" cy="0"/>
+          <a:chOff x="0" y="0"/>
+          <a:chExt cx="0" cy="0"/>
+        </a:xfrm>
+      </p:grpSpPr>
+      <p:sp>
+        <p:nvSpPr>
+          <p:cNvPr id="2" name="Title 2">
+            <a:extLst>
+              <a:ext uri="{FF2B5EF4-FFF2-40B4-BE49-F238E27FC236}">
+                <a16:creationId xmlns:a16="http://schemas.microsoft.com/office/drawing/2014/main" id="{107BBE4B-2D2D-8E4B-619F-FA84724571D3}"/>
+              </a:ext>
+            </a:extLst>
+          </p:cNvPr>
+          <p:cNvSpPr txBox="1">
+            <a:spLocks/>
+          </p:cNvSpPr>
+          <p:nvPr/>
+        </p:nvSpPr>
+        <p:spPr>
+          <a:xfrm>
+            <a:off x="838200" y="365125"/>
+            <a:ext cx="10515600" cy="873739"/>
+          </a:xfrm>
+          <a:prstGeom prst="rect">
+            <a:avLst/>
+          </a:prstGeom>
+        </p:spPr>
+        <p:txBody>
+          <a:bodyPr anchor="ctr"/>
+          <a:lstStyle>
+            <a:lvl1pPr algn="l" defTabSz="914400" rtl="0" eaLnBrk="1" latinLnBrk="0" hangingPunct="1">
+              <a:lnSpc>
+                <a:spcPct val="90000"/>
+              </a:lnSpc>
+              <a:spcBef>
+                <a:spcPct val="0"/>
+              </a:spcBef>
+              <a:buNone/>
+              <a:defRPr sz="4400" kern="1200">
+                <a:solidFill>
+                  <a:schemeClr val="tx1"/>
+                </a:solidFill>
+                <a:latin typeface="+mj-lt"/>
+                <a:ea typeface="+mj-ea"/>
+                <a:cs typeface="+mj-cs"/>
+              </a:defRPr>
+            </a:lvl1pPr>
+          </a:lstStyle>
+          <a:p>
+            <a:pPr algn="ctr"/>
+            <a:r>
+              <a:rPr lang="en-US">
+                <a:latin typeface="Times New Roman" panose="02020603050405020304" pitchFamily="18" charset="0"/>
+                <a:cs typeface="Times New Roman" panose="02020603050405020304" pitchFamily="18" charset="0"/>
+              </a:rPr>
+              <a:t>Triển khai chức năng đăng xuất</a:t>
+            </a:r>
+          </a:p>
+        </p:txBody>
+      </p:sp>
+    </p:spTree>
+    <p:extLst>
+      <p:ext uri="{BB962C8B-B14F-4D97-AF65-F5344CB8AC3E}">
+        <p14:creationId xmlns:p14="http://schemas.microsoft.com/office/powerpoint/2010/main" val="1526168595"/>
+      </p:ext>
+    </p:extLst>
+  </p:cSld>
+  <p:clrMapOvr>
+    <a:masterClrMapping/>
+  </p:clrMapOvr>
+</p:sld>
+</file>
+
+<file path=ppt/slides/slide31.xml><?xml version="1.0" encoding="utf-8"?>
+<p:sld xmlns:a="http://schemas.openxmlformats.org/drawingml/2006/main" xmlns:r="http://schemas.openxmlformats.org/officeDocument/2006/relationships" xmlns:p="http://schemas.openxmlformats.org/presentationml/2006/main">
+  <p:cSld>
+    <p:spTree>
+      <p:nvGrpSpPr>
+        <p:cNvPr id="1" name="">
+          <a:extLst>
+            <a:ext uri="{FF2B5EF4-FFF2-40B4-BE49-F238E27FC236}">
+              <a16:creationId xmlns:a16="http://schemas.microsoft.com/office/drawing/2014/main" id="{F639A16C-21A7-F245-2803-D5F851D41615}"/>
+            </a:ext>
+          </a:extLst>
+        </p:cNvPr>
+        <p:cNvGrpSpPr/>
+        <p:nvPr/>
+      </p:nvGrpSpPr>
+      <p:grpSpPr>
+        <a:xfrm>
+          <a:off x="0" y="0"/>
+          <a:ext cx="0" cy="0"/>
+          <a:chOff x="0" y="0"/>
+          <a:chExt cx="0" cy="0"/>
+        </a:xfrm>
+      </p:grpSpPr>
+      <p:sp>
+        <p:nvSpPr>
+          <p:cNvPr id="2" name="Title 1">
+            <a:extLst>
+              <a:ext uri="{FF2B5EF4-FFF2-40B4-BE49-F238E27FC236}">
+                <a16:creationId xmlns:a16="http://schemas.microsoft.com/office/drawing/2014/main" id="{AA359780-E419-4614-7EE7-4F5A8344D932}"/>
+              </a:ext>
+            </a:extLst>
+          </p:cNvPr>
+          <p:cNvSpPr>
+            <a:spLocks noGrp="1"/>
+          </p:cNvSpPr>
+          <p:nvPr>
+            <p:ph type="ctrTitle"/>
+          </p:nvPr>
+        </p:nvSpPr>
+        <p:spPr/>
+        <p:txBody>
+          <a:bodyPr/>
+          <a:lstStyle/>
+          <a:p>
+            <a:r>
+              <a:rPr lang="en-US"/>
+              <a:t>Kết quả triển khai</a:t>
+            </a:r>
+          </a:p>
+        </p:txBody>
+      </p:sp>
+      <p:sp>
+        <p:nvSpPr>
+          <p:cNvPr id="3" name="Subtitle 2">
+            <a:extLst>
+              <a:ext uri="{FF2B5EF4-FFF2-40B4-BE49-F238E27FC236}">
+                <a16:creationId xmlns:a16="http://schemas.microsoft.com/office/drawing/2014/main" id="{9E241CE4-71E2-40A1-0E9C-AC2C8BB81764}"/>
+              </a:ext>
+            </a:extLst>
+          </p:cNvPr>
+          <p:cNvSpPr>
+            <a:spLocks noGrp="1"/>
+          </p:cNvSpPr>
+          <p:nvPr>
+            <p:ph type="subTitle" idx="1"/>
+          </p:nvPr>
+        </p:nvSpPr>
+        <p:spPr/>
+        <p:txBody>
+          <a:bodyPr/>
+          <a:lstStyle/>
+          <a:p>
+            <a:endParaRPr lang="en-US"/>
+          </a:p>
+        </p:txBody>
+      </p:sp>
+    </p:spTree>
+    <p:extLst>
+      <p:ext uri="{BB962C8B-B14F-4D97-AF65-F5344CB8AC3E}">
+        <p14:creationId xmlns:p14="http://schemas.microsoft.com/office/powerpoint/2010/main" val="3364825887"/>
+      </p:ext>
+    </p:extLst>
+  </p:cSld>
+  <p:clrMapOvr>
+    <a:masterClrMapping/>
+  </p:clrMapOvr>
+</p:sld>
+</file>
+
+<file path=ppt/slides/slide32.xml><?xml version="1.0" encoding="utf-8"?>
+<p:sld xmlns:a="http://schemas.openxmlformats.org/drawingml/2006/main" xmlns:r="http://schemas.openxmlformats.org/officeDocument/2006/relationships" xmlns:p="http://schemas.openxmlformats.org/presentationml/2006/main">
+  <p:cSld>
+    <p:spTree>
+      <p:nvGrpSpPr>
+        <p:cNvPr id="1" name=""/>
+        <p:cNvGrpSpPr/>
+        <p:nvPr/>
+      </p:nvGrpSpPr>
+      <p:grpSpPr>
+        <a:xfrm>
+          <a:off x="0" y="0"/>
+          <a:ext cx="0" cy="0"/>
+          <a:chOff x="0" y="0"/>
+          <a:chExt cx="0" cy="0"/>
+        </a:xfrm>
+      </p:grpSpPr>
+      <p:sp>
+        <p:nvSpPr>
+          <p:cNvPr id="4" name="Title 3">
+            <a:extLst>
+              <a:ext uri="{FF2B5EF4-FFF2-40B4-BE49-F238E27FC236}">
+                <a16:creationId xmlns:a16="http://schemas.microsoft.com/office/drawing/2014/main" id="{332424A8-6119-9974-88AE-0F930B8D81ED}"/>
+              </a:ext>
+            </a:extLst>
+          </p:cNvPr>
+          <p:cNvSpPr>
+            <a:spLocks noGrp="1"/>
+          </p:cNvSpPr>
+          <p:nvPr>
+            <p:ph type="title"/>
+          </p:nvPr>
+        </p:nvSpPr>
+        <p:spPr>
+          <a:xfrm>
+            <a:off x="838200" y="128643"/>
+            <a:ext cx="10515600" cy="580806"/>
+          </a:xfrm>
+        </p:spPr>
+        <p:txBody>
+          <a:bodyPr>
+            <a:normAutofit/>
+          </a:bodyPr>
+          <a:lstStyle/>
+          <a:p>
+            <a:pPr algn="ctr"/>
+            <a:r>
+              <a:rPr lang="en-US" sz="3200"/>
+              <a:t>Đăng nhập – Giao diện</a:t>
+            </a:r>
+          </a:p>
+        </p:txBody>
+      </p:sp>
+    </p:spTree>
+    <p:extLst>
+      <p:ext uri="{BB962C8B-B14F-4D97-AF65-F5344CB8AC3E}">
+        <p14:creationId xmlns:p14="http://schemas.microsoft.com/office/powerpoint/2010/main" val="2123477516"/>
+      </p:ext>
+    </p:extLst>
+  </p:cSld>
+  <p:clrMapOvr>
+    <a:masterClrMapping/>
+  </p:clrMapOvr>
+</p:sld>
+</file>
+
+<file path=ppt/slides/slide33.xml><?xml version="1.0" encoding="utf-8"?>
+<p:sld xmlns:a="http://schemas.openxmlformats.org/drawingml/2006/main" xmlns:r="http://schemas.openxmlformats.org/officeDocument/2006/relationships" xmlns:p="http://schemas.openxmlformats.org/presentationml/2006/main">
+  <p:cSld>
+    <p:spTree>
+      <p:nvGrpSpPr>
+        <p:cNvPr id="1" name="">
+          <a:extLst>
+            <a:ext uri="{FF2B5EF4-FFF2-40B4-BE49-F238E27FC236}">
+              <a16:creationId xmlns:a16="http://schemas.microsoft.com/office/drawing/2014/main" id="{EB329D17-A712-074A-2715-8C16E820844E}"/>
+            </a:ext>
+          </a:extLst>
+        </p:cNvPr>
+        <p:cNvGrpSpPr/>
+        <p:nvPr/>
+      </p:nvGrpSpPr>
+      <p:grpSpPr>
+        <a:xfrm>
+          <a:off x="0" y="0"/>
+          <a:ext cx="0" cy="0"/>
+          <a:chOff x="0" y="0"/>
+          <a:chExt cx="0" cy="0"/>
+        </a:xfrm>
+      </p:grpSpPr>
+      <p:sp>
+        <p:nvSpPr>
+          <p:cNvPr id="4" name="Title 3">
+            <a:extLst>
+              <a:ext uri="{FF2B5EF4-FFF2-40B4-BE49-F238E27FC236}">
+                <a16:creationId xmlns:a16="http://schemas.microsoft.com/office/drawing/2014/main" id="{303FDBAF-69B4-9152-E936-91F2B3373501}"/>
+              </a:ext>
+            </a:extLst>
+          </p:cNvPr>
+          <p:cNvSpPr>
+            <a:spLocks noGrp="1"/>
+          </p:cNvSpPr>
+          <p:nvPr>
+            <p:ph type="title"/>
+          </p:nvPr>
+        </p:nvSpPr>
+        <p:spPr>
+          <a:xfrm>
+            <a:off x="838200" y="128643"/>
+            <a:ext cx="10515600" cy="580806"/>
+          </a:xfrm>
+        </p:spPr>
+        <p:txBody>
+          <a:bodyPr>
+            <a:normAutofit/>
+          </a:bodyPr>
+          <a:lstStyle/>
+          <a:p>
+            <a:pPr algn="ctr"/>
+            <a:r>
+              <a:rPr lang="en-US" sz="3200"/>
+              <a:t>Giao diện người dùng khi đăng nhập thành công</a:t>
+            </a:r>
+          </a:p>
+        </p:txBody>
+      </p:sp>
+    </p:spTree>
+    <p:extLst>
+      <p:ext uri="{BB962C8B-B14F-4D97-AF65-F5344CB8AC3E}">
+        <p14:creationId xmlns:p14="http://schemas.microsoft.com/office/powerpoint/2010/main" val="2442943674"/>
+      </p:ext>
+    </p:extLst>
+  </p:cSld>
+  <p:clrMapOvr>
+    <a:masterClrMapping/>
+  </p:clrMapOvr>
+</p:sld>
+</file>
+
+<file path=ppt/slides/slide34.xml><?xml version="1.0" encoding="utf-8"?>
+<p:sld xmlns:a="http://schemas.openxmlformats.org/drawingml/2006/main" xmlns:r="http://schemas.openxmlformats.org/officeDocument/2006/relationships" xmlns:p="http://schemas.openxmlformats.org/presentationml/2006/main">
+  <p:cSld>
+    <p:spTree>
+      <p:nvGrpSpPr>
+        <p:cNvPr id="1" name="">
+          <a:extLst>
+            <a:ext uri="{FF2B5EF4-FFF2-40B4-BE49-F238E27FC236}">
+              <a16:creationId xmlns:a16="http://schemas.microsoft.com/office/drawing/2014/main" id="{596E7EDC-5A9A-9DEB-525F-840C64C98176}"/>
+            </a:ext>
+          </a:extLst>
+        </p:cNvPr>
+        <p:cNvGrpSpPr/>
+        <p:nvPr/>
+      </p:nvGrpSpPr>
+      <p:grpSpPr>
+        <a:xfrm>
+          <a:off x="0" y="0"/>
+          <a:ext cx="0" cy="0"/>
+          <a:chOff x="0" y="0"/>
+          <a:chExt cx="0" cy="0"/>
+        </a:xfrm>
+      </p:grpSpPr>
+      <p:sp>
+        <p:nvSpPr>
+          <p:cNvPr id="4" name="Title 3">
+            <a:extLst>
+              <a:ext uri="{FF2B5EF4-FFF2-40B4-BE49-F238E27FC236}">
+                <a16:creationId xmlns:a16="http://schemas.microsoft.com/office/drawing/2014/main" id="{91893A3F-F17E-E5BE-EA64-E7AADD6AF17A}"/>
+              </a:ext>
+            </a:extLst>
+          </p:cNvPr>
+          <p:cNvSpPr>
+            <a:spLocks noGrp="1"/>
+          </p:cNvSpPr>
+          <p:nvPr>
+            <p:ph type="title"/>
+          </p:nvPr>
+        </p:nvSpPr>
+        <p:spPr>
+          <a:xfrm>
+            <a:off x="838200" y="128643"/>
+            <a:ext cx="10515600" cy="580806"/>
+          </a:xfrm>
+        </p:spPr>
+        <p:txBody>
+          <a:bodyPr>
+            <a:normAutofit/>
+          </a:bodyPr>
+          <a:lstStyle/>
+          <a:p>
+            <a:pPr algn="ctr"/>
+            <a:r>
+              <a:rPr lang="en-US" sz="3200"/>
+              <a:t>Trò chuyện văn bản – Nhập câu hỏi</a:t>
+            </a:r>
+          </a:p>
+        </p:txBody>
+      </p:sp>
+    </p:spTree>
+    <p:extLst>
+      <p:ext uri="{BB962C8B-B14F-4D97-AF65-F5344CB8AC3E}">
+        <p14:creationId xmlns:p14="http://schemas.microsoft.com/office/powerpoint/2010/main" val="3944130277"/>
+      </p:ext>
+    </p:extLst>
+  </p:cSld>
+  <p:clrMapOvr>
+    <a:masterClrMapping/>
+  </p:clrMapOvr>
+</p:sld>
+</file>
+
+<file path=ppt/slides/slide35.xml><?xml version="1.0" encoding="utf-8"?>
+<p:sld xmlns:a="http://schemas.openxmlformats.org/drawingml/2006/main" xmlns:r="http://schemas.openxmlformats.org/officeDocument/2006/relationships" xmlns:p="http://schemas.openxmlformats.org/presentationml/2006/main">
+  <p:cSld>
+    <p:spTree>
+      <p:nvGrpSpPr>
+        <p:cNvPr id="1" name="">
+          <a:extLst>
+            <a:ext uri="{FF2B5EF4-FFF2-40B4-BE49-F238E27FC236}">
+              <a16:creationId xmlns:a16="http://schemas.microsoft.com/office/drawing/2014/main" id="{519A322D-F4E2-25D8-E0E7-5B3F0028CAE8}"/>
+            </a:ext>
+          </a:extLst>
+        </p:cNvPr>
+        <p:cNvGrpSpPr/>
+        <p:nvPr/>
+      </p:nvGrpSpPr>
+      <p:grpSpPr>
+        <a:xfrm>
+          <a:off x="0" y="0"/>
+          <a:ext cx="0" cy="0"/>
+          <a:chOff x="0" y="0"/>
+          <a:chExt cx="0" cy="0"/>
+        </a:xfrm>
+      </p:grpSpPr>
+      <p:sp>
+        <p:nvSpPr>
+          <p:cNvPr id="4" name="Title 3">
+            <a:extLst>
+              <a:ext uri="{FF2B5EF4-FFF2-40B4-BE49-F238E27FC236}">
+                <a16:creationId xmlns:a16="http://schemas.microsoft.com/office/drawing/2014/main" id="{71683FDD-CB84-4EA2-D654-EC9D725E023C}"/>
+              </a:ext>
+            </a:extLst>
+          </p:cNvPr>
+          <p:cNvSpPr>
+            <a:spLocks noGrp="1"/>
+          </p:cNvSpPr>
+          <p:nvPr>
+            <p:ph type="title"/>
+          </p:nvPr>
+        </p:nvSpPr>
+        <p:spPr>
+          <a:xfrm>
+            <a:off x="838200" y="128643"/>
+            <a:ext cx="10515600" cy="580806"/>
+          </a:xfrm>
+        </p:spPr>
+        <p:txBody>
+          <a:bodyPr>
+            <a:normAutofit/>
+          </a:bodyPr>
+          <a:lstStyle/>
+          <a:p>
+            <a:pPr algn="ctr"/>
+            <a:r>
+              <a:rPr lang="en-US" sz="3200"/>
+              <a:t>Trò chuyện văn bản – Hiển thị phản hồi</a:t>
+            </a:r>
+          </a:p>
+        </p:txBody>
+      </p:sp>
+    </p:spTree>
+    <p:extLst>
+      <p:ext uri="{BB962C8B-B14F-4D97-AF65-F5344CB8AC3E}">
+        <p14:creationId xmlns:p14="http://schemas.microsoft.com/office/powerpoint/2010/main" val="1859960753"/>
+      </p:ext>
+    </p:extLst>
+  </p:cSld>
+  <p:clrMapOvr>
+    <a:masterClrMapping/>
+  </p:clrMapOvr>
+</p:sld>
+</file>
+
+<file path=ppt/slides/slide36.xml><?xml version="1.0" encoding="utf-8"?>
+<p:sld xmlns:a="http://schemas.openxmlformats.org/drawingml/2006/main" xmlns:r="http://schemas.openxmlformats.org/officeDocument/2006/relationships" xmlns:p="http://schemas.openxmlformats.org/presentationml/2006/main">
+  <p:cSld>
+    <p:spTree>
+      <p:nvGrpSpPr>
+        <p:cNvPr id="1" name="">
+          <a:extLst>
+            <a:ext uri="{FF2B5EF4-FFF2-40B4-BE49-F238E27FC236}">
+              <a16:creationId xmlns:a16="http://schemas.microsoft.com/office/drawing/2014/main" id="{03933C04-03B4-E200-75AF-CCB8B3AD6D9B}"/>
+            </a:ext>
+          </a:extLst>
+        </p:cNvPr>
+        <p:cNvGrpSpPr/>
+        <p:nvPr/>
+      </p:nvGrpSpPr>
+      <p:grpSpPr>
+        <a:xfrm>
+          <a:off x="0" y="0"/>
+          <a:ext cx="0" cy="0"/>
+          <a:chOff x="0" y="0"/>
+          <a:chExt cx="0" cy="0"/>
+        </a:xfrm>
+      </p:grpSpPr>
+      <p:sp>
+        <p:nvSpPr>
+          <p:cNvPr id="4" name="Title 3">
+            <a:extLst>
+              <a:ext uri="{FF2B5EF4-FFF2-40B4-BE49-F238E27FC236}">
+                <a16:creationId xmlns:a16="http://schemas.microsoft.com/office/drawing/2014/main" id="{79CA3BF8-62D0-B0CE-DA76-DAABEA1B4DD1}"/>
+              </a:ext>
+            </a:extLst>
+          </p:cNvPr>
+          <p:cNvSpPr>
+            <a:spLocks noGrp="1"/>
+          </p:cNvSpPr>
+          <p:nvPr>
+            <p:ph type="title"/>
+          </p:nvPr>
+        </p:nvSpPr>
+        <p:spPr>
+          <a:xfrm>
+            <a:off x="838200" y="128643"/>
+            <a:ext cx="10515600" cy="580806"/>
+          </a:xfrm>
+        </p:spPr>
+        <p:txBody>
+          <a:bodyPr>
+            <a:normAutofit/>
+          </a:bodyPr>
+          <a:lstStyle/>
+          <a:p>
+            <a:pPr algn="ctr"/>
+            <a:r>
+              <a:rPr lang="en-US" sz="3200"/>
+              <a:t>Đánh giá phản hồi – Gửi hành vi đánh giá</a:t>
+            </a:r>
+          </a:p>
+        </p:txBody>
+      </p:sp>
+    </p:spTree>
+    <p:extLst>
+      <p:ext uri="{BB962C8B-B14F-4D97-AF65-F5344CB8AC3E}">
+        <p14:creationId xmlns:p14="http://schemas.microsoft.com/office/powerpoint/2010/main" val="2451042863"/>
+      </p:ext>
+    </p:extLst>
+  </p:cSld>
+  <p:clrMapOvr>
+    <a:masterClrMapping/>
+  </p:clrMapOvr>
+</p:sld>
+</file>
+
+<file path=ppt/slides/slide37.xml><?xml version="1.0" encoding="utf-8"?>
+<p:sld xmlns:a="http://schemas.openxmlformats.org/drawingml/2006/main" xmlns:r="http://schemas.openxmlformats.org/officeDocument/2006/relationships" xmlns:p="http://schemas.openxmlformats.org/presentationml/2006/main">
+  <p:cSld>
+    <p:spTree>
+      <p:nvGrpSpPr>
+        <p:cNvPr id="1" name="">
+          <a:extLst>
+            <a:ext uri="{FF2B5EF4-FFF2-40B4-BE49-F238E27FC236}">
+              <a16:creationId xmlns:a16="http://schemas.microsoft.com/office/drawing/2014/main" id="{3C7EE166-5CC0-4CA8-0110-97AC421B2BE1}"/>
+            </a:ext>
+          </a:extLst>
+        </p:cNvPr>
+        <p:cNvGrpSpPr/>
+        <p:nvPr/>
+      </p:nvGrpSpPr>
+      <p:grpSpPr>
+        <a:xfrm>
+          <a:off x="0" y="0"/>
+          <a:ext cx="0" cy="0"/>
+          <a:chOff x="0" y="0"/>
+          <a:chExt cx="0" cy="0"/>
+        </a:xfrm>
+      </p:grpSpPr>
+      <p:sp>
+        <p:nvSpPr>
+          <p:cNvPr id="4" name="Title 3">
+            <a:extLst>
+              <a:ext uri="{FF2B5EF4-FFF2-40B4-BE49-F238E27FC236}">
+                <a16:creationId xmlns:a16="http://schemas.microsoft.com/office/drawing/2014/main" id="{71D4D85C-7604-D56F-22C3-746FCDD9DAD3}"/>
+              </a:ext>
+            </a:extLst>
+          </p:cNvPr>
+          <p:cNvSpPr>
+            <a:spLocks noGrp="1"/>
+          </p:cNvSpPr>
+          <p:nvPr>
+            <p:ph type="title"/>
+          </p:nvPr>
+        </p:nvSpPr>
+        <p:spPr>
+          <a:xfrm>
+            <a:off x="838200" y="128643"/>
+            <a:ext cx="10515600" cy="580806"/>
+          </a:xfrm>
+        </p:spPr>
+        <p:txBody>
+          <a:bodyPr>
+            <a:normAutofit/>
+          </a:bodyPr>
+          <a:lstStyle/>
+          <a:p>
+            <a:pPr algn="ctr"/>
+            <a:r>
+              <a:rPr lang="en-US" sz="3200"/>
+              <a:t>Đánh giá phản hồi – Gửi mô tả cho hành vi</a:t>
+            </a:r>
+          </a:p>
+        </p:txBody>
+      </p:sp>
+    </p:spTree>
+    <p:extLst>
+      <p:ext uri="{BB962C8B-B14F-4D97-AF65-F5344CB8AC3E}">
+        <p14:creationId xmlns:p14="http://schemas.microsoft.com/office/powerpoint/2010/main" val="2369674002"/>
+      </p:ext>
+    </p:extLst>
+  </p:cSld>
+  <p:clrMapOvr>
+    <a:masterClrMapping/>
+  </p:clrMapOvr>
+</p:sld>
+</file>
+
+<file path=ppt/slides/slide38.xml><?xml version="1.0" encoding="utf-8"?>
+<p:sld xmlns:a="http://schemas.openxmlformats.org/drawingml/2006/main" xmlns:r="http://schemas.openxmlformats.org/officeDocument/2006/relationships" xmlns:p="http://schemas.openxmlformats.org/presentationml/2006/main">
+  <p:cSld>
+    <p:spTree>
+      <p:nvGrpSpPr>
+        <p:cNvPr id="1" name="">
+          <a:extLst>
+            <a:ext uri="{FF2B5EF4-FFF2-40B4-BE49-F238E27FC236}">
+              <a16:creationId xmlns:a16="http://schemas.microsoft.com/office/drawing/2014/main" id="{A4FFDCE6-5E5D-D35A-C705-F7C5E8CDD1B6}"/>
+            </a:ext>
+          </a:extLst>
+        </p:cNvPr>
+        <p:cNvGrpSpPr/>
+        <p:nvPr/>
+      </p:nvGrpSpPr>
+      <p:grpSpPr>
+        <a:xfrm>
+          <a:off x="0" y="0"/>
+          <a:ext cx="0" cy="0"/>
+          <a:chOff x="0" y="0"/>
+          <a:chExt cx="0" cy="0"/>
+        </a:xfrm>
+      </p:grpSpPr>
+      <p:sp>
+        <p:nvSpPr>
+          <p:cNvPr id="4" name="Title 3">
+            <a:extLst>
+              <a:ext uri="{FF2B5EF4-FFF2-40B4-BE49-F238E27FC236}">
+                <a16:creationId xmlns:a16="http://schemas.microsoft.com/office/drawing/2014/main" id="{8811EB74-0364-049E-3EB6-6FF49C64641A}"/>
+              </a:ext>
+            </a:extLst>
+          </p:cNvPr>
+          <p:cNvSpPr>
+            <a:spLocks noGrp="1"/>
+          </p:cNvSpPr>
+          <p:nvPr>
+            <p:ph type="title"/>
+          </p:nvPr>
+        </p:nvSpPr>
+        <p:spPr>
+          <a:xfrm>
+            <a:off x="838200" y="128643"/>
+            <a:ext cx="10515600" cy="580806"/>
+          </a:xfrm>
+        </p:spPr>
+        <p:txBody>
+          <a:bodyPr>
+            <a:normAutofit/>
+          </a:bodyPr>
+          <a:lstStyle/>
+          <a:p>
+            <a:pPr algn="ctr"/>
+            <a:r>
+              <a:rPr lang="en-US" sz="3200"/>
+              <a:t>Đánh giá phản hồi – Đánh giá được cập nhật thành công</a:t>
+            </a:r>
+          </a:p>
+        </p:txBody>
+      </p:sp>
+    </p:spTree>
+    <p:extLst>
+      <p:ext uri="{BB962C8B-B14F-4D97-AF65-F5344CB8AC3E}">
+        <p14:creationId xmlns:p14="http://schemas.microsoft.com/office/powerpoint/2010/main" val="278922367"/>
+      </p:ext>
+    </p:extLst>
+  </p:cSld>
+  <p:clrMapOvr>
+    <a:masterClrMapping/>
+  </p:clrMapOvr>
+</p:sld>
+</file>
+
+<file path=ppt/slides/slide39.xml><?xml version="1.0" encoding="utf-8"?>
+<p:sld xmlns:a="http://schemas.openxmlformats.org/drawingml/2006/main" xmlns:r="http://schemas.openxmlformats.org/officeDocument/2006/relationships" xmlns:p="http://schemas.openxmlformats.org/presentationml/2006/main">
+  <p:cSld>
+    <p:spTree>
+      <p:nvGrpSpPr>
+        <p:cNvPr id="1" name="">
+          <a:extLst>
+            <a:ext uri="{FF2B5EF4-FFF2-40B4-BE49-F238E27FC236}">
+              <a16:creationId xmlns:a16="http://schemas.microsoft.com/office/drawing/2014/main" id="{4ABC3EE7-AA88-345B-3580-ADD7EECD1C1C}"/>
+            </a:ext>
+          </a:extLst>
+        </p:cNvPr>
+        <p:cNvGrpSpPr/>
+        <p:nvPr/>
+      </p:nvGrpSpPr>
+      <p:grpSpPr>
+        <a:xfrm>
+          <a:off x="0" y="0"/>
+          <a:ext cx="0" cy="0"/>
+          <a:chOff x="0" y="0"/>
+          <a:chExt cx="0" cy="0"/>
+        </a:xfrm>
+      </p:grpSpPr>
+      <p:sp>
+        <p:nvSpPr>
+          <p:cNvPr id="4" name="Title 3">
+            <a:extLst>
+              <a:ext uri="{FF2B5EF4-FFF2-40B4-BE49-F238E27FC236}">
+                <a16:creationId xmlns:a16="http://schemas.microsoft.com/office/drawing/2014/main" id="{2E956A8B-CAA8-BDAC-8D18-40C716A7D5AB}"/>
+              </a:ext>
+            </a:extLst>
+          </p:cNvPr>
+          <p:cNvSpPr>
+            <a:spLocks noGrp="1"/>
+          </p:cNvSpPr>
+          <p:nvPr>
+            <p:ph type="title"/>
+          </p:nvPr>
+        </p:nvSpPr>
+        <p:spPr>
+          <a:xfrm>
+            <a:off x="838200" y="128643"/>
+            <a:ext cx="10515600" cy="580806"/>
+          </a:xfrm>
+        </p:spPr>
+        <p:txBody>
+          <a:bodyPr>
+            <a:normAutofit/>
+          </a:bodyPr>
+          <a:lstStyle/>
+          <a:p>
+            <a:pPr algn="ctr"/>
+            <a:r>
+              <a:rPr lang="en-US" sz="3200"/>
+              <a:t>Cài đặt tùy chọn luồng chat – Danh sách tùy chọn</a:t>
+            </a:r>
+          </a:p>
+        </p:txBody>
+      </p:sp>
+    </p:spTree>
+    <p:extLst>
+      <p:ext uri="{BB962C8B-B14F-4D97-AF65-F5344CB8AC3E}">
+        <p14:creationId xmlns:p14="http://schemas.microsoft.com/office/powerpoint/2010/main" val="1538660726"/>
       </p:ext>
     </p:extLst>
   </p:cSld>
@@ -17703,6 +21691,741 @@
   <p:clrMapOvr>
     <a:masterClrMapping/>
   </p:clrMapOvr>
+</p:sld>
+</file>
+
+<file path=ppt/slides/slide40.xml><?xml version="1.0" encoding="utf-8"?>
+<p:sld xmlns:a="http://schemas.openxmlformats.org/drawingml/2006/main" xmlns:r="http://schemas.openxmlformats.org/officeDocument/2006/relationships" xmlns:p="http://schemas.openxmlformats.org/presentationml/2006/main">
+  <p:cSld>
+    <p:spTree>
+      <p:nvGrpSpPr>
+        <p:cNvPr id="1" name="">
+          <a:extLst>
+            <a:ext uri="{FF2B5EF4-FFF2-40B4-BE49-F238E27FC236}">
+              <a16:creationId xmlns:a16="http://schemas.microsoft.com/office/drawing/2014/main" id="{B2343172-34BC-23DC-7AB7-319AAB251AC0}"/>
+            </a:ext>
+          </a:extLst>
+        </p:cNvPr>
+        <p:cNvGrpSpPr/>
+        <p:nvPr/>
+      </p:nvGrpSpPr>
+      <p:grpSpPr>
+        <a:xfrm>
+          <a:off x="0" y="0"/>
+          <a:ext cx="0" cy="0"/>
+          <a:chOff x="0" y="0"/>
+          <a:chExt cx="0" cy="0"/>
+        </a:xfrm>
+      </p:grpSpPr>
+      <p:sp>
+        <p:nvSpPr>
+          <p:cNvPr id="4" name="Title 3">
+            <a:extLst>
+              <a:ext uri="{FF2B5EF4-FFF2-40B4-BE49-F238E27FC236}">
+                <a16:creationId xmlns:a16="http://schemas.microsoft.com/office/drawing/2014/main" id="{BC87D9C7-621B-0184-164F-D615FADB73A7}"/>
+              </a:ext>
+            </a:extLst>
+          </p:cNvPr>
+          <p:cNvSpPr>
+            <a:spLocks noGrp="1"/>
+          </p:cNvSpPr>
+          <p:nvPr>
+            <p:ph type="title"/>
+          </p:nvPr>
+        </p:nvSpPr>
+        <p:spPr>
+          <a:xfrm>
+            <a:off x="838200" y="128643"/>
+            <a:ext cx="10515600" cy="580806"/>
+          </a:xfrm>
+        </p:spPr>
+        <p:txBody>
+          <a:bodyPr>
+            <a:normAutofit fontScale="90000"/>
+          </a:bodyPr>
+          <a:lstStyle/>
+          <a:p>
+            <a:pPr algn="ctr"/>
+            <a:r>
+              <a:rPr lang="en-US" sz="3200"/>
+              <a:t>Trò chuyện văn bản – Gửi câu hỏi và nhận phản hồi theo cài đặt mới</a:t>
+            </a:r>
+          </a:p>
+        </p:txBody>
+      </p:sp>
+    </p:spTree>
+    <p:extLst>
+      <p:ext uri="{BB962C8B-B14F-4D97-AF65-F5344CB8AC3E}">
+        <p14:creationId xmlns:p14="http://schemas.microsoft.com/office/powerpoint/2010/main" val="2163902717"/>
+      </p:ext>
+    </p:extLst>
+  </p:cSld>
+  <p:clrMapOvr>
+    <a:masterClrMapping/>
+  </p:clrMapOvr>
+</p:sld>
+</file>
+
+<file path=ppt/slides/slide41.xml><?xml version="1.0" encoding="utf-8"?>
+<p:sld xmlns:a="http://schemas.openxmlformats.org/drawingml/2006/main" xmlns:r="http://schemas.openxmlformats.org/officeDocument/2006/relationships" xmlns:p="http://schemas.openxmlformats.org/presentationml/2006/main">
+  <p:cSld>
+    <p:spTree>
+      <p:nvGrpSpPr>
+        <p:cNvPr id="1" name="">
+          <a:extLst>
+            <a:ext uri="{FF2B5EF4-FFF2-40B4-BE49-F238E27FC236}">
+              <a16:creationId xmlns:a16="http://schemas.microsoft.com/office/drawing/2014/main" id="{8C4273B8-D54F-C2E5-FD62-584770DBBB83}"/>
+            </a:ext>
+          </a:extLst>
+        </p:cNvPr>
+        <p:cNvGrpSpPr/>
+        <p:nvPr/>
+      </p:nvGrpSpPr>
+      <p:grpSpPr>
+        <a:xfrm>
+          <a:off x="0" y="0"/>
+          <a:ext cx="0" cy="0"/>
+          <a:chOff x="0" y="0"/>
+          <a:chExt cx="0" cy="0"/>
+        </a:xfrm>
+      </p:grpSpPr>
+      <p:sp>
+        <p:nvSpPr>
+          <p:cNvPr id="4" name="Title 3">
+            <a:extLst>
+              <a:ext uri="{FF2B5EF4-FFF2-40B4-BE49-F238E27FC236}">
+                <a16:creationId xmlns:a16="http://schemas.microsoft.com/office/drawing/2014/main" id="{949B3CF9-1635-07EF-2ED3-6E0F21D7FD27}"/>
+              </a:ext>
+            </a:extLst>
+          </p:cNvPr>
+          <p:cNvSpPr>
+            <a:spLocks noGrp="1"/>
+          </p:cNvSpPr>
+          <p:nvPr>
+            <p:ph type="title"/>
+          </p:nvPr>
+        </p:nvSpPr>
+        <p:spPr>
+          <a:xfrm>
+            <a:off x="838200" y="128643"/>
+            <a:ext cx="10515600" cy="580806"/>
+          </a:xfrm>
+        </p:spPr>
+        <p:txBody>
+          <a:bodyPr>
+            <a:normAutofit/>
+          </a:bodyPr>
+          <a:lstStyle/>
+          <a:p>
+            <a:pPr algn="ctr"/>
+            <a:r>
+              <a:rPr lang="en-US" sz="3200"/>
+              <a:t>Khởi tạo luồng chat mới</a:t>
+            </a:r>
+          </a:p>
+        </p:txBody>
+      </p:sp>
+    </p:spTree>
+    <p:extLst>
+      <p:ext uri="{BB962C8B-B14F-4D97-AF65-F5344CB8AC3E}">
+        <p14:creationId xmlns:p14="http://schemas.microsoft.com/office/powerpoint/2010/main" val="2665362210"/>
+      </p:ext>
+    </p:extLst>
+  </p:cSld>
+  <p:clrMapOvr>
+    <a:masterClrMapping/>
+  </p:clrMapOvr>
+</p:sld>
+</file>
+
+<file path=ppt/slides/slide42.xml><?xml version="1.0" encoding="utf-8"?>
+<p:sld xmlns:a="http://schemas.openxmlformats.org/drawingml/2006/main" xmlns:r="http://schemas.openxmlformats.org/officeDocument/2006/relationships" xmlns:p="http://schemas.openxmlformats.org/presentationml/2006/main">
+  <p:cSld>
+    <p:spTree>
+      <p:nvGrpSpPr>
+        <p:cNvPr id="1" name="">
+          <a:extLst>
+            <a:ext uri="{FF2B5EF4-FFF2-40B4-BE49-F238E27FC236}">
+              <a16:creationId xmlns:a16="http://schemas.microsoft.com/office/drawing/2014/main" id="{282D5787-362F-F733-2A3B-78981BD3E7D8}"/>
+            </a:ext>
+          </a:extLst>
+        </p:cNvPr>
+        <p:cNvGrpSpPr/>
+        <p:nvPr/>
+      </p:nvGrpSpPr>
+      <p:grpSpPr>
+        <a:xfrm>
+          <a:off x="0" y="0"/>
+          <a:ext cx="0" cy="0"/>
+          <a:chOff x="0" y="0"/>
+          <a:chExt cx="0" cy="0"/>
+        </a:xfrm>
+      </p:grpSpPr>
+      <p:sp>
+        <p:nvSpPr>
+          <p:cNvPr id="4" name="Title 3">
+            <a:extLst>
+              <a:ext uri="{FF2B5EF4-FFF2-40B4-BE49-F238E27FC236}">
+                <a16:creationId xmlns:a16="http://schemas.microsoft.com/office/drawing/2014/main" id="{6182D402-A58F-CC91-7E4F-29D701E7C65A}"/>
+              </a:ext>
+            </a:extLst>
+          </p:cNvPr>
+          <p:cNvSpPr>
+            <a:spLocks noGrp="1"/>
+          </p:cNvSpPr>
+          <p:nvPr>
+            <p:ph type="title"/>
+          </p:nvPr>
+        </p:nvSpPr>
+        <p:spPr>
+          <a:xfrm>
+            <a:off x="838200" y="128643"/>
+            <a:ext cx="10515600" cy="580806"/>
+          </a:xfrm>
+        </p:spPr>
+        <p:txBody>
+          <a:bodyPr>
+            <a:normAutofit/>
+          </a:bodyPr>
+          <a:lstStyle/>
+          <a:p>
+            <a:pPr algn="ctr"/>
+            <a:r>
+              <a:rPr lang="en-US" sz="3200"/>
+              <a:t>Trò chuyện thời gian thực – Gửi câu hỏi</a:t>
+            </a:r>
+          </a:p>
+        </p:txBody>
+      </p:sp>
+    </p:spTree>
+    <p:extLst>
+      <p:ext uri="{BB962C8B-B14F-4D97-AF65-F5344CB8AC3E}">
+        <p14:creationId xmlns:p14="http://schemas.microsoft.com/office/powerpoint/2010/main" val="334390302"/>
+      </p:ext>
+    </p:extLst>
+  </p:cSld>
+  <p:clrMapOvr>
+    <a:masterClrMapping/>
+  </p:clrMapOvr>
+</p:sld>
+</file>
+
+<file path=ppt/slides/slide43.xml><?xml version="1.0" encoding="utf-8"?>
+<p:sld xmlns:a="http://schemas.openxmlformats.org/drawingml/2006/main" xmlns:r="http://schemas.openxmlformats.org/officeDocument/2006/relationships" xmlns:p="http://schemas.openxmlformats.org/presentationml/2006/main">
+  <p:cSld>
+    <p:spTree>
+      <p:nvGrpSpPr>
+        <p:cNvPr id="1" name="">
+          <a:extLst>
+            <a:ext uri="{FF2B5EF4-FFF2-40B4-BE49-F238E27FC236}">
+              <a16:creationId xmlns:a16="http://schemas.microsoft.com/office/drawing/2014/main" id="{4D57AC2A-54C6-BA0C-322B-24EF9C15A56B}"/>
+            </a:ext>
+          </a:extLst>
+        </p:cNvPr>
+        <p:cNvGrpSpPr/>
+        <p:nvPr/>
+      </p:nvGrpSpPr>
+      <p:grpSpPr>
+        <a:xfrm>
+          <a:off x="0" y="0"/>
+          <a:ext cx="0" cy="0"/>
+          <a:chOff x="0" y="0"/>
+          <a:chExt cx="0" cy="0"/>
+        </a:xfrm>
+      </p:grpSpPr>
+      <p:sp>
+        <p:nvSpPr>
+          <p:cNvPr id="4" name="Title 3">
+            <a:extLst>
+              <a:ext uri="{FF2B5EF4-FFF2-40B4-BE49-F238E27FC236}">
+                <a16:creationId xmlns:a16="http://schemas.microsoft.com/office/drawing/2014/main" id="{31194981-B30B-C3EA-69B7-CD8C44D1CA5B}"/>
+              </a:ext>
+            </a:extLst>
+          </p:cNvPr>
+          <p:cNvSpPr>
+            <a:spLocks noGrp="1"/>
+          </p:cNvSpPr>
+          <p:nvPr>
+            <p:ph type="title"/>
+          </p:nvPr>
+        </p:nvSpPr>
+        <p:spPr>
+          <a:xfrm>
+            <a:off x="838200" y="128643"/>
+            <a:ext cx="10515600" cy="580806"/>
+          </a:xfrm>
+        </p:spPr>
+        <p:txBody>
+          <a:bodyPr>
+            <a:normAutofit/>
+          </a:bodyPr>
+          <a:lstStyle/>
+          <a:p>
+            <a:pPr algn="ctr"/>
+            <a:r>
+              <a:rPr lang="en-US" sz="3200"/>
+              <a:t>Trò chuyện thời gian thực – Nhận phản hồi</a:t>
+            </a:r>
+          </a:p>
+        </p:txBody>
+      </p:sp>
+    </p:spTree>
+    <p:extLst>
+      <p:ext uri="{BB962C8B-B14F-4D97-AF65-F5344CB8AC3E}">
+        <p14:creationId xmlns:p14="http://schemas.microsoft.com/office/powerpoint/2010/main" val="4251457659"/>
+      </p:ext>
+    </p:extLst>
+  </p:cSld>
+  <p:clrMapOvr>
+    <a:masterClrMapping/>
+  </p:clrMapOvr>
+</p:sld>
+</file>
+
+<file path=ppt/slides/slide44.xml><?xml version="1.0" encoding="utf-8"?>
+<p:sld xmlns:a="http://schemas.openxmlformats.org/drawingml/2006/main" xmlns:r="http://schemas.openxmlformats.org/officeDocument/2006/relationships" xmlns:p="http://schemas.openxmlformats.org/presentationml/2006/main">
+  <p:cSld>
+    <p:spTree>
+      <p:nvGrpSpPr>
+        <p:cNvPr id="1" name="">
+          <a:extLst>
+            <a:ext uri="{FF2B5EF4-FFF2-40B4-BE49-F238E27FC236}">
+              <a16:creationId xmlns:a16="http://schemas.microsoft.com/office/drawing/2014/main" id="{0F223B7C-C8A4-1833-96CF-02965D09284C}"/>
+            </a:ext>
+          </a:extLst>
+        </p:cNvPr>
+        <p:cNvGrpSpPr/>
+        <p:nvPr/>
+      </p:nvGrpSpPr>
+      <p:grpSpPr>
+        <a:xfrm>
+          <a:off x="0" y="0"/>
+          <a:ext cx="0" cy="0"/>
+          <a:chOff x="0" y="0"/>
+          <a:chExt cx="0" cy="0"/>
+        </a:xfrm>
+      </p:grpSpPr>
+      <p:sp>
+        <p:nvSpPr>
+          <p:cNvPr id="4" name="Title 3">
+            <a:extLst>
+              <a:ext uri="{FF2B5EF4-FFF2-40B4-BE49-F238E27FC236}">
+                <a16:creationId xmlns:a16="http://schemas.microsoft.com/office/drawing/2014/main" id="{8A88EF09-C815-68BB-ADD6-46732509EA13}"/>
+              </a:ext>
+            </a:extLst>
+          </p:cNvPr>
+          <p:cNvSpPr>
+            <a:spLocks noGrp="1"/>
+          </p:cNvSpPr>
+          <p:nvPr>
+            <p:ph type="title"/>
+          </p:nvPr>
+        </p:nvSpPr>
+        <p:spPr>
+          <a:xfrm>
+            <a:off x="838200" y="128643"/>
+            <a:ext cx="10515600" cy="580806"/>
+          </a:xfrm>
+        </p:spPr>
+        <p:txBody>
+          <a:bodyPr>
+            <a:normAutofit/>
+          </a:bodyPr>
+          <a:lstStyle/>
+          <a:p>
+            <a:pPr algn="ctr"/>
+            <a:r>
+              <a:rPr lang="en-US" sz="3200"/>
+              <a:t>Tạo câu hỏi trắc nghiệm (Tính năng thử nghiệm)</a:t>
+            </a:r>
+          </a:p>
+        </p:txBody>
+      </p:sp>
+    </p:spTree>
+    <p:extLst>
+      <p:ext uri="{BB962C8B-B14F-4D97-AF65-F5344CB8AC3E}">
+        <p14:creationId xmlns:p14="http://schemas.microsoft.com/office/powerpoint/2010/main" val="1447626313"/>
+      </p:ext>
+    </p:extLst>
+  </p:cSld>
+  <p:clrMapOvr>
+    <a:masterClrMapping/>
+  </p:clrMapOvr>
+</p:sld>
+</file>
+
+<file path=ppt/slides/slide45.xml><?xml version="1.0" encoding="utf-8"?>
+<p:sld xmlns:a="http://schemas.openxmlformats.org/drawingml/2006/main" xmlns:r="http://schemas.openxmlformats.org/officeDocument/2006/relationships" xmlns:p="http://schemas.openxmlformats.org/presentationml/2006/main">
+  <p:cSld>
+    <p:spTree>
+      <p:nvGrpSpPr>
+        <p:cNvPr id="1" name="">
+          <a:extLst>
+            <a:ext uri="{FF2B5EF4-FFF2-40B4-BE49-F238E27FC236}">
+              <a16:creationId xmlns:a16="http://schemas.microsoft.com/office/drawing/2014/main" id="{CCC3714A-37B5-A3C3-F695-3032CC238570}"/>
+            </a:ext>
+          </a:extLst>
+        </p:cNvPr>
+        <p:cNvGrpSpPr/>
+        <p:nvPr/>
+      </p:nvGrpSpPr>
+      <p:grpSpPr>
+        <a:xfrm>
+          <a:off x="0" y="0"/>
+          <a:ext cx="0" cy="0"/>
+          <a:chOff x="0" y="0"/>
+          <a:chExt cx="0" cy="0"/>
+        </a:xfrm>
+      </p:grpSpPr>
+      <p:sp>
+        <p:nvSpPr>
+          <p:cNvPr id="4" name="Title 3">
+            <a:extLst>
+              <a:ext uri="{FF2B5EF4-FFF2-40B4-BE49-F238E27FC236}">
+                <a16:creationId xmlns:a16="http://schemas.microsoft.com/office/drawing/2014/main" id="{CF9E6065-F807-F765-B75A-F98F0FCE0476}"/>
+              </a:ext>
+            </a:extLst>
+          </p:cNvPr>
+          <p:cNvSpPr>
+            <a:spLocks noGrp="1"/>
+          </p:cNvSpPr>
+          <p:nvPr>
+            <p:ph type="title"/>
+          </p:nvPr>
+        </p:nvSpPr>
+        <p:spPr>
+          <a:xfrm>
+            <a:off x="838200" y="128643"/>
+            <a:ext cx="10515600" cy="580806"/>
+          </a:xfrm>
+        </p:spPr>
+        <p:txBody>
+          <a:bodyPr>
+            <a:normAutofit/>
+          </a:bodyPr>
+          <a:lstStyle/>
+          <a:p>
+            <a:pPr algn="ctr"/>
+            <a:r>
+              <a:rPr lang="en-US" sz="3200"/>
+              <a:t>Đăng xuất khỏi hệ thống</a:t>
+            </a:r>
+          </a:p>
+        </p:txBody>
+      </p:sp>
+    </p:spTree>
+    <p:extLst>
+      <p:ext uri="{BB962C8B-B14F-4D97-AF65-F5344CB8AC3E}">
+        <p14:creationId xmlns:p14="http://schemas.microsoft.com/office/powerpoint/2010/main" val="3010643645"/>
+      </p:ext>
+    </p:extLst>
+  </p:cSld>
+  <p:clrMapOvr>
+    <a:masterClrMapping/>
+  </p:clrMapOvr>
+</p:sld>
+</file>
+
+<file path=ppt/slides/slide46.xml><?xml version="1.0" encoding="utf-8"?>
+<p:sld xmlns:a="http://schemas.openxmlformats.org/drawingml/2006/main" xmlns:r="http://schemas.openxmlformats.org/officeDocument/2006/relationships" xmlns:p="http://schemas.openxmlformats.org/presentationml/2006/main">
+  <p:cSld>
+    <p:bg>
+      <p:bgPr>
+        <a:solidFill>
+          <a:schemeClr val="bg1"/>
+        </a:solidFill>
+        <a:effectLst/>
+      </p:bgPr>
+    </p:bg>
+    <p:spTree>
+      <p:nvGrpSpPr>
+        <p:cNvPr id="1" name=""/>
+        <p:cNvGrpSpPr/>
+        <p:nvPr/>
+      </p:nvGrpSpPr>
+      <p:grpSpPr>
+        <a:xfrm>
+          <a:off x="0" y="0"/>
+          <a:ext cx="0" cy="0"/>
+          <a:chOff x="0" y="0"/>
+          <a:chExt cx="0" cy="0"/>
+        </a:xfrm>
+      </p:grpSpPr>
+      <p:sp>
+        <p:nvSpPr>
+          <p:cNvPr id="7" name="Rectangle 6">
+            <a:extLst>
+              <a:ext uri="{FF2B5EF4-FFF2-40B4-BE49-F238E27FC236}">
+                <a16:creationId xmlns:a16="http://schemas.microsoft.com/office/drawing/2014/main" id="{C3896A03-3945-419A-B66B-4EE266EDD152}"/>
+              </a:ext>
+              <a:ext uri="{C183D7F6-B498-43B3-948B-1728B52AA6E4}">
+                <adec:decorative xmlns:adec="http://schemas.microsoft.com/office/drawing/2017/decorative" val="1"/>
+              </a:ext>
+            </a:extLst>
+          </p:cNvPr>
+          <p:cNvSpPr>
+            <a:spLocks noGrp="1" noRot="1" noChangeAspect="1" noMove="1" noResize="1" noEditPoints="1" noAdjustHandles="1" noChangeArrowheads="1" noChangeShapeType="1" noTextEdit="1"/>
+          </p:cNvSpPr>
+          <p:nvPr>
+            <p:extLst>
+              <p:ext uri="{386F3935-93C4-4BCD-93E2-E3B085C9AB24}">
+                <p16:designElem xmlns:p16="http://schemas.microsoft.com/office/powerpoint/2015/main" val="1"/>
+              </p:ext>
+            </p:extLst>
+          </p:nvPr>
+        </p:nvSpPr>
+        <p:spPr>
+          <a:xfrm>
+            <a:off x="11" y="0"/>
+            <a:ext cx="4654286" cy="6858001"/>
+          </a:xfrm>
+          <a:prstGeom prst="rect">
+            <a:avLst/>
+          </a:prstGeom>
+          <a:solidFill>
+            <a:schemeClr val="tx1">
+              <a:lumMod val="85000"/>
+              <a:lumOff val="15000"/>
+            </a:schemeClr>
+          </a:solidFill>
+          <a:ln>
+            <a:noFill/>
+          </a:ln>
+        </p:spPr>
+        <p:style>
+          <a:lnRef idx="2">
+            <a:schemeClr val="accent1">
+              <a:shade val="50000"/>
+            </a:schemeClr>
+          </a:lnRef>
+          <a:fillRef idx="1">
+            <a:schemeClr val="accent1"/>
+          </a:fillRef>
+          <a:effectRef idx="0">
+            <a:schemeClr val="accent1"/>
+          </a:effectRef>
+          <a:fontRef idx="minor">
+            <a:schemeClr val="lt1"/>
+          </a:fontRef>
+        </p:style>
+        <p:txBody>
+          <a:bodyPr rtlCol="0" anchor="ctr"/>
+          <a:lstStyle/>
+          <a:p>
+            <a:pPr algn="ctr"/>
+            <a:endParaRPr lang="en-US"/>
+          </a:p>
+        </p:txBody>
+      </p:sp>
+      <p:sp>
+        <p:nvSpPr>
+          <p:cNvPr id="2" name="Title 1">
+            <a:extLst>
+              <a:ext uri="{FF2B5EF4-FFF2-40B4-BE49-F238E27FC236}">
+                <a16:creationId xmlns:a16="http://schemas.microsoft.com/office/drawing/2014/main" id="{0A03A2FD-3F54-6DE7-3EC3-329E05980D85}"/>
+              </a:ext>
+            </a:extLst>
+          </p:cNvPr>
+          <p:cNvSpPr>
+            <a:spLocks noGrp="1"/>
+          </p:cNvSpPr>
+          <p:nvPr>
+            <p:ph type="title"/>
+          </p:nvPr>
+        </p:nvSpPr>
+        <p:spPr>
+          <a:xfrm>
+            <a:off x="536028" y="637762"/>
+            <a:ext cx="3519099" cy="5576770"/>
+          </a:xfrm>
+        </p:spPr>
+        <p:txBody>
+          <a:bodyPr vert="horz" lIns="91440" tIns="45720" rIns="91440" bIns="45720" rtlCol="0" anchor="ctr">
+            <a:normAutofit/>
+          </a:bodyPr>
+          <a:lstStyle/>
+          <a:p>
+            <a:pPr algn="ctr"/>
+            <a:r>
+              <a:rPr lang="en-US" sz="4800" i="1" kern="1200">
+                <a:solidFill>
+                  <a:schemeClr val="bg1"/>
+                </a:solidFill>
+                <a:latin typeface="Times New Roman" panose="02020603050405020304" pitchFamily="18" charset="0"/>
+                <a:cs typeface="Times New Roman" panose="02020603050405020304" pitchFamily="18" charset="0"/>
+              </a:rPr>
+              <a:t>FIN</a:t>
+            </a:r>
+          </a:p>
+        </p:txBody>
+      </p:sp>
+      <p:sp>
+        <p:nvSpPr>
+          <p:cNvPr id="9" name="Rectangle 8">
+            <a:extLst>
+              <a:ext uri="{FF2B5EF4-FFF2-40B4-BE49-F238E27FC236}">
+                <a16:creationId xmlns:a16="http://schemas.microsoft.com/office/drawing/2014/main" id="{B34F5AD2-EDBD-4BBD-A55C-EAFFD0C7097A}"/>
+              </a:ext>
+              <a:ext uri="{C183D7F6-B498-43B3-948B-1728B52AA6E4}">
+                <adec:decorative xmlns:adec="http://schemas.microsoft.com/office/drawing/2017/decorative" val="1"/>
+              </a:ext>
+            </a:extLst>
+          </p:cNvPr>
+          <p:cNvSpPr>
+            <a:spLocks noGrp="1" noRot="1" noChangeAspect="1" noMove="1" noResize="1" noEditPoints="1" noAdjustHandles="1" noChangeArrowheads="1" noChangeShapeType="1" noTextEdit="1"/>
+          </p:cNvSpPr>
+          <p:nvPr>
+            <p:extLst>
+              <p:ext uri="{386F3935-93C4-4BCD-93E2-E3B085C9AB24}">
+                <p16:designElem xmlns:p16="http://schemas.microsoft.com/office/powerpoint/2015/main" val="1"/>
+              </p:ext>
+            </p:extLst>
+          </p:nvPr>
+        </p:nvSpPr>
+        <p:spPr>
+          <a:xfrm>
+            <a:off x="4652535" y="0"/>
+            <a:ext cx="7539455" cy="6858001"/>
+          </a:xfrm>
+          <a:prstGeom prst="rect">
+            <a:avLst/>
+          </a:prstGeom>
+          <a:solidFill>
+            <a:schemeClr val="bg1">
+              <a:lumMod val="95000"/>
+            </a:schemeClr>
+          </a:solidFill>
+          <a:ln>
+            <a:noFill/>
+          </a:ln>
+        </p:spPr>
+        <p:style>
+          <a:lnRef idx="2">
+            <a:schemeClr val="accent1">
+              <a:shade val="50000"/>
+            </a:schemeClr>
+          </a:lnRef>
+          <a:fillRef idx="1">
+            <a:schemeClr val="accent1"/>
+          </a:fillRef>
+          <a:effectRef idx="0">
+            <a:schemeClr val="accent1"/>
+          </a:effectRef>
+          <a:fontRef idx="minor">
+            <a:schemeClr val="lt1"/>
+          </a:fontRef>
+        </p:style>
+        <p:txBody>
+          <a:bodyPr rtlCol="0" anchor="ctr"/>
+          <a:lstStyle/>
+          <a:p>
+            <a:pPr algn="ctr"/>
+            <a:endParaRPr lang="en-US"/>
+          </a:p>
+        </p:txBody>
+      </p:sp>
+    </p:spTree>
+    <p:extLst>
+      <p:ext uri="{BB962C8B-B14F-4D97-AF65-F5344CB8AC3E}">
+        <p14:creationId xmlns:p14="http://schemas.microsoft.com/office/powerpoint/2010/main" val="3843152553"/>
+      </p:ext>
+    </p:extLst>
+  </p:cSld>
+  <p:clrMapOvr>
+    <a:masterClrMapping/>
+  </p:clrMapOvr>
+  <p:timing>
+    <p:tnLst>
+      <p:par>
+        <p:cTn id="1" dur="indefinite" restart="never" nodeType="tmRoot">
+          <p:childTnLst>
+            <p:seq concurrent="1" nextAc="seek">
+              <p:cTn id="2" dur="indefinite" nodeType="mainSeq">
+                <p:childTnLst>
+                  <p:par>
+                    <p:cTn id="3" fill="hold">
+                      <p:stCondLst>
+                        <p:cond delay="indefinite"/>
+                        <p:cond evt="onBegin" delay="0">
+                          <p:tn val="2"/>
+                        </p:cond>
+                      </p:stCondLst>
+                      <p:childTnLst>
+                        <p:par>
+                          <p:cTn id="4" fill="hold">
+                            <p:stCondLst>
+                              <p:cond delay="0"/>
+                            </p:stCondLst>
+                            <p:childTnLst>
+                              <p:par>
+                                <p:cTn id="5" presetID="10" presetClass="entr" presetSubtype="0" fill="hold" grpId="0" nodeType="withEffect">
+                                  <p:stCondLst>
+                                    <p:cond delay="500"/>
+                                  </p:stCondLst>
+                                  <p:iterate type="lt">
+                                    <p:tmPct val="10000"/>
+                                  </p:iterate>
+                                  <p:childTnLst>
+                                    <p:set>
+                                      <p:cBhvr>
+                                        <p:cTn id="6" dur="1" fill="hold">
+                                          <p:stCondLst>
+                                            <p:cond delay="0"/>
+                                          </p:stCondLst>
+                                        </p:cTn>
+                                        <p:tgtEl>
+                                          <p:spTgt spid="2"/>
+                                        </p:tgtEl>
+                                        <p:attrNameLst>
+                                          <p:attrName>style.visibility</p:attrName>
+                                        </p:attrNameLst>
+                                      </p:cBhvr>
+                                      <p:to>
+                                        <p:strVal val="visible"/>
+                                      </p:to>
+                                    </p:set>
+                                    <p:animEffect transition="in" filter="fade">
+                                      <p:cBhvr>
+                                        <p:cTn id="7" dur="400"/>
+                                        <p:tgtEl>
+                                          <p:spTgt spid="2"/>
+                                        </p:tgtEl>
+                                      </p:cBhvr>
+                                    </p:animEffect>
+                                  </p:childTnLst>
+                                </p:cTn>
+                              </p:par>
+                            </p:childTnLst>
+                          </p:cTn>
+                        </p:par>
+                      </p:childTnLst>
+                    </p:cTn>
+                  </p:par>
+                </p:childTnLst>
+              </p:cTn>
+              <p:prevCondLst>
+                <p:cond evt="onPrev" delay="0">
+                  <p:tgtEl>
+                    <p:sldTgt/>
+                  </p:tgtEl>
+                </p:cond>
+              </p:prevCondLst>
+              <p:nextCondLst>
+                <p:cond evt="onNext" delay="0">
+                  <p:tgtEl>
+                    <p:sldTgt/>
+                  </p:tgtEl>
+                </p:cond>
+              </p:nextCondLst>
+            </p:seq>
+          </p:childTnLst>
+        </p:cTn>
+      </p:par>
+    </p:tnLst>
+    <p:bldLst>
+      <p:bldP spid="2" grpId="0"/>
+    </p:bldLst>
+  </p:timing>
 </p:sld>
 </file>
 
